--- a/assets/investor-deck/Tecnotitan-Investor-Deck-PT.pptx
+++ b/assets/investor-deck/Tecnotitan-Investor-Deck-PT.pptx
@@ -2,24 +2,24 @@
 <file path=ppt/presentation.xml><?xml version="1.0" encoding="utf-8"?>
 <p:presentation xmlns:p="http://schemas.openxmlformats.org/presentationml/2006/main">
   <p:sldMasterIdLst>
-    <p:sldMasterId xmlns:r="http://schemas.openxmlformats.org/officeDocument/2006/relationships" id="2147483648" r:id="Ra7d746894d4d4dbb"/>
+    <p:sldMasterId xmlns:r="http://schemas.openxmlformats.org/officeDocument/2006/relationships" id="2147483648" r:id="R7f432d05a6f14b83"/>
   </p:sldMasterIdLst>
   <p:notesMasterIdLst>
-    <p:notesMasterId xmlns:r="http://schemas.openxmlformats.org/officeDocument/2006/relationships" r:id="Rfac13bf2fb28423e"/>
+    <p:notesMasterId xmlns:r="http://schemas.openxmlformats.org/officeDocument/2006/relationships" r:id="Ra11ee16271ad4d68"/>
   </p:notesMasterIdLst>
   <p:sldIdLst>
-    <p:sldId xmlns:r="http://schemas.openxmlformats.org/officeDocument/2006/relationships" id="256" r:id="R42da70a8bf0345ca"/>
-    <p:sldId xmlns:r="http://schemas.openxmlformats.org/officeDocument/2006/relationships" id="257" r:id="R5eacf96fad654081"/>
-    <p:sldId xmlns:r="http://schemas.openxmlformats.org/officeDocument/2006/relationships" id="258" r:id="R764f8a0b156c4b6b"/>
-    <p:sldId xmlns:r="http://schemas.openxmlformats.org/officeDocument/2006/relationships" id="259" r:id="Re27635d8b749473f"/>
-    <p:sldId xmlns:r="http://schemas.openxmlformats.org/officeDocument/2006/relationships" id="260" r:id="R66ddb7f9c393403a"/>
-    <p:sldId xmlns:r="http://schemas.openxmlformats.org/officeDocument/2006/relationships" id="261" r:id="R31a59d21b749494f"/>
-    <p:sldId xmlns:r="http://schemas.openxmlformats.org/officeDocument/2006/relationships" id="262" r:id="Rb2bf1b3e8c81496e"/>
-    <p:sldId xmlns:r="http://schemas.openxmlformats.org/officeDocument/2006/relationships" id="263" r:id="R745e9ad31ed544ba"/>
-    <p:sldId xmlns:r="http://schemas.openxmlformats.org/officeDocument/2006/relationships" id="264" r:id="R749aebf1a034449f"/>
-    <p:sldId xmlns:r="http://schemas.openxmlformats.org/officeDocument/2006/relationships" id="265" r:id="Ra671d69f870f4136"/>
-    <p:sldId xmlns:r="http://schemas.openxmlformats.org/officeDocument/2006/relationships" id="266" r:id="R30068f5e47c0448e"/>
-    <p:sldId xmlns:r="http://schemas.openxmlformats.org/officeDocument/2006/relationships" id="267" r:id="Rf7ba84d559a54663"/>
+    <p:sldId xmlns:r="http://schemas.openxmlformats.org/officeDocument/2006/relationships" id="256" r:id="R584a9e64a32f4d23"/>
+    <p:sldId xmlns:r="http://schemas.openxmlformats.org/officeDocument/2006/relationships" id="257" r:id="R51f8cede915f4a19"/>
+    <p:sldId xmlns:r="http://schemas.openxmlformats.org/officeDocument/2006/relationships" id="258" r:id="R989e85e7fc1044a2"/>
+    <p:sldId xmlns:r="http://schemas.openxmlformats.org/officeDocument/2006/relationships" id="259" r:id="R6ab771ae4e684694"/>
+    <p:sldId xmlns:r="http://schemas.openxmlformats.org/officeDocument/2006/relationships" id="260" r:id="Rf0022138ce39453e"/>
+    <p:sldId xmlns:r="http://schemas.openxmlformats.org/officeDocument/2006/relationships" id="261" r:id="R5274db2bccde4ca7"/>
+    <p:sldId xmlns:r="http://schemas.openxmlformats.org/officeDocument/2006/relationships" id="262" r:id="Ra67e97260e364836"/>
+    <p:sldId xmlns:r="http://schemas.openxmlformats.org/officeDocument/2006/relationships" id="263" r:id="Ref9bff16a5074e55"/>
+    <p:sldId xmlns:r="http://schemas.openxmlformats.org/officeDocument/2006/relationships" id="264" r:id="R1b370d9f2979460e"/>
+    <p:sldId xmlns:r="http://schemas.openxmlformats.org/officeDocument/2006/relationships" id="265" r:id="R280b61a6bf574197"/>
+    <p:sldId xmlns:r="http://schemas.openxmlformats.org/officeDocument/2006/relationships" id="266" r:id="R77a66de17e184d1f"/>
+    <p:sldId xmlns:r="http://schemas.openxmlformats.org/officeDocument/2006/relationships" id="267" r:id="R8f801576a3dd4587"/>
   </p:sldIdLst>
   <p:sldSz cx="12192000" cy="6858000"/>
   <p:notesSz cx="6858000" cy="9144000"/>
@@ -1292,7 +1292,7 @@
   </p:cSld>
   <p:clrMap bg1="lt1" tx1="dk1" bg2="lt2" tx2="dk2" accent1="accent1" accent2="accent2" accent3="accent3" accent4="accent4" accent5="accent5" accent6="accent6" hlink="hlink" folHlink="folHlink"/>
   <p:sldLayoutIdLst>
-    <p:sldLayoutId xmlns:r="http://schemas.openxmlformats.org/officeDocument/2006/relationships" id="2147483649" r:id="Rf8f26cc79ac144ba"/>
+    <p:sldLayoutId xmlns:r="http://schemas.openxmlformats.org/officeDocument/2006/relationships" id="2147483649" r:id="R35040c80297b457e"/>
   </p:sldLayoutIdLst>
   <p:txStyles>
     <p:titleStyle>
@@ -1794,7 +1794,7 @@
           <p:nvPr/>
         </p:nvPicPr>
         <p:blipFill>
-          <a:blip xmlns:r="http://schemas.openxmlformats.org/officeDocument/2006/relationships" xmlns:a="http://schemas.openxmlformats.org/drawingml/2006/main" r:embed="R30640edc3b614ad1"/>
+          <a:blip xmlns:r="http://schemas.openxmlformats.org/officeDocument/2006/relationships" xmlns:a="http://schemas.openxmlformats.org/drawingml/2006/main" r:embed="R5bb62d4f1f334111"/>
           <a:srcRect xmlns:a="http://schemas.openxmlformats.org/drawingml/2006/main" l="0" t="7813" r="0" b="7813"/>
           <a:stretch xmlns:a="http://schemas.openxmlformats.org/drawingml/2006/main">
             <a:fillRect l="0" t="0" r="0" b="0"/>
@@ -1815,7 +1815,7 @@
           <p:cNvPr id="2" name="">
             <a:extLst xmlns:a="http://schemas.openxmlformats.org/drawingml/2006/main">
               <a:ext uri="{FF2B5EF4-FFF2-40B4-BE49-F238E27FC236}">
-                <a16:creationId xmlns:a16="http://schemas.microsoft.com/office/drawing/2014/main" id="{D36267A4-44B8-4701-B9E7-3B0AAD0939C0}"/>
+                <a16:creationId xmlns:a16="http://schemas.microsoft.com/office/drawing/2014/main" id="{E4EE2D69-F08B-463C-9844-80838F09C10C}"/>
               </a:ext>
             </a:extLst>
           </p:cNvPr>
@@ -1852,7 +1852,7 @@
           <p:cNvPr id="3" name="">
             <a:extLst xmlns:a="http://schemas.openxmlformats.org/drawingml/2006/main">
               <a:ext uri="{FF2B5EF4-FFF2-40B4-BE49-F238E27FC236}">
-                <a16:creationId xmlns:a16="http://schemas.microsoft.com/office/drawing/2014/main" id="{044DC6BC-6914-4285-827B-779C074F4BF9}"/>
+                <a16:creationId xmlns:a16="http://schemas.microsoft.com/office/drawing/2014/main" id="{E0D294C6-BFD1-4051-8519-38984BB637CC}"/>
               </a:ext>
             </a:extLst>
           </p:cNvPr>
@@ -1889,7 +1889,7 @@
           <p:cNvPr id="4" name="">
             <a:extLst xmlns:a="http://schemas.openxmlformats.org/drawingml/2006/main">
               <a:ext uri="{FF2B5EF4-FFF2-40B4-BE49-F238E27FC236}">
-                <a16:creationId xmlns:a16="http://schemas.microsoft.com/office/drawing/2014/main" id="{A57E6112-FA71-43B5-A2E8-1E5D831DF492}"/>
+                <a16:creationId xmlns:a16="http://schemas.microsoft.com/office/drawing/2014/main" id="{15CB0BDE-4449-48DB-8774-6F678472D830}"/>
               </a:ext>
             </a:extLst>
           </p:cNvPr>
@@ -1953,7 +1953,7 @@
           <p:cNvPr id="5" name="">
             <a:extLst xmlns:a="http://schemas.openxmlformats.org/drawingml/2006/main">
               <a:ext uri="{FF2B5EF4-FFF2-40B4-BE49-F238E27FC236}">
-                <a16:creationId xmlns:a16="http://schemas.microsoft.com/office/drawing/2014/main" id="{373552DB-476A-4A0E-993E-4A366EF5FE35}"/>
+                <a16:creationId xmlns:a16="http://schemas.microsoft.com/office/drawing/2014/main" id="{586D2BB6-EC47-4901-AC07-55F1C974C673}"/>
               </a:ext>
             </a:extLst>
           </p:cNvPr>
@@ -2017,7 +2017,7 @@
           <p:cNvPr id="6" name="">
             <a:extLst xmlns:a="http://schemas.openxmlformats.org/drawingml/2006/main">
               <a:ext uri="{FF2B5EF4-FFF2-40B4-BE49-F238E27FC236}">
-                <a16:creationId xmlns:a16="http://schemas.microsoft.com/office/drawing/2014/main" id="{C219BEFE-62F6-4052-8C3E-5CCBB301BCA5}"/>
+                <a16:creationId xmlns:a16="http://schemas.microsoft.com/office/drawing/2014/main" id="{FB207C12-012D-4AED-A20E-D7721FC393BE}"/>
               </a:ext>
             </a:extLst>
           </p:cNvPr>
@@ -2050,7 +2050,7 @@
           <p:cNvPr id="7" name="">
             <a:extLst xmlns:a="http://schemas.openxmlformats.org/drawingml/2006/main">
               <a:ext uri="{FF2B5EF4-FFF2-40B4-BE49-F238E27FC236}">
-                <a16:creationId xmlns:a16="http://schemas.microsoft.com/office/drawing/2014/main" id="{AB8CFF76-228D-46DB-9DE5-04E99C14FD7B}"/>
+                <a16:creationId xmlns:a16="http://schemas.microsoft.com/office/drawing/2014/main" id="{2E378A55-3C7D-4E5E-B6EF-25018D4117AB}"/>
               </a:ext>
             </a:extLst>
           </p:cNvPr>
@@ -2114,7 +2114,7 @@
           <p:cNvPr id="8" name="">
             <a:extLst xmlns:a="http://schemas.openxmlformats.org/drawingml/2006/main">
               <a:ext uri="{FF2B5EF4-FFF2-40B4-BE49-F238E27FC236}">
-                <a16:creationId xmlns:a16="http://schemas.microsoft.com/office/drawing/2014/main" id="{65A3BDA8-F821-4A4C-9C14-3E13CFC52925}"/>
+                <a16:creationId xmlns:a16="http://schemas.microsoft.com/office/drawing/2014/main" id="{1DE93532-C798-449D-9532-CCC794F13C0A}"/>
               </a:ext>
             </a:extLst>
           </p:cNvPr>
@@ -2178,7 +2178,7 @@
           <p:cNvPr id="9" name="">
             <a:extLst xmlns:a="http://schemas.openxmlformats.org/drawingml/2006/main">
               <a:ext uri="{FF2B5EF4-FFF2-40B4-BE49-F238E27FC236}">
-                <a16:creationId xmlns:a16="http://schemas.microsoft.com/office/drawing/2014/main" id="{1A0F157D-9BA2-4395-B403-EC7CF3FC7931}"/>
+                <a16:creationId xmlns:a16="http://schemas.microsoft.com/office/drawing/2014/main" id="{6951E6CB-760B-44A7-83A8-681D140AA4A0}"/>
               </a:ext>
             </a:extLst>
           </p:cNvPr>
@@ -2213,7 +2213,7 @@
           <p:cNvPr id="10" name="">
             <a:extLst xmlns:a="http://schemas.openxmlformats.org/drawingml/2006/main">
               <a:ext uri="{FF2B5EF4-FFF2-40B4-BE49-F238E27FC236}">
-                <a16:creationId xmlns:a16="http://schemas.microsoft.com/office/drawing/2014/main" id="{59D49F0C-4CEC-4546-8803-A038DEA86625}"/>
+                <a16:creationId xmlns:a16="http://schemas.microsoft.com/office/drawing/2014/main" id="{15E6F850-E5D6-40A4-B854-B78F8AA1A930}"/>
               </a:ext>
             </a:extLst>
           </p:cNvPr>
@@ -2277,7 +2277,7 @@
           <p:cNvPr id="11" name="">
             <a:extLst xmlns:a="http://schemas.openxmlformats.org/drawingml/2006/main">
               <a:ext uri="{FF2B5EF4-FFF2-40B4-BE49-F238E27FC236}">
-                <a16:creationId xmlns:a16="http://schemas.microsoft.com/office/drawing/2014/main" id="{E7C7778C-DE01-4AAF-B8CE-B5BE58EBFA54}"/>
+                <a16:creationId xmlns:a16="http://schemas.microsoft.com/office/drawing/2014/main" id="{2FF6F375-01FC-4458-B233-377DCCDD9CE2}"/>
               </a:ext>
             </a:extLst>
           </p:cNvPr>
@@ -2312,7 +2312,7 @@
           <p:cNvPr id="12" name="">
             <a:extLst xmlns:a="http://schemas.openxmlformats.org/drawingml/2006/main">
               <a:ext uri="{FF2B5EF4-FFF2-40B4-BE49-F238E27FC236}">
-                <a16:creationId xmlns:a16="http://schemas.microsoft.com/office/drawing/2014/main" id="{0A6A3D23-047E-4564-9E02-7CEE6689B39F}"/>
+                <a16:creationId xmlns:a16="http://schemas.microsoft.com/office/drawing/2014/main" id="{B2C21D23-9EBC-46D8-B3D4-18DE11032E90}"/>
               </a:ext>
             </a:extLst>
           </p:cNvPr>
@@ -2376,7 +2376,7 @@
           <p:cNvPr id="13" name="">
             <a:extLst xmlns:a="http://schemas.openxmlformats.org/drawingml/2006/main">
               <a:ext uri="{FF2B5EF4-FFF2-40B4-BE49-F238E27FC236}">
-                <a16:creationId xmlns:a16="http://schemas.microsoft.com/office/drawing/2014/main" id="{6CF2C959-DB98-49F3-BE1E-251B96B7726C}"/>
+                <a16:creationId xmlns:a16="http://schemas.microsoft.com/office/drawing/2014/main" id="{3FA61519-B430-47E9-8AE8-A7D90599542B}"/>
               </a:ext>
             </a:extLst>
           </p:cNvPr>
@@ -2411,7 +2411,7 @@
           <p:cNvPr id="14" name="">
             <a:extLst xmlns:a="http://schemas.openxmlformats.org/drawingml/2006/main">
               <a:ext uri="{FF2B5EF4-FFF2-40B4-BE49-F238E27FC236}">
-                <a16:creationId xmlns:a16="http://schemas.microsoft.com/office/drawing/2014/main" id="{3008B68C-C814-4B99-A01C-2CAADFFC0FFE}"/>
+                <a16:creationId xmlns:a16="http://schemas.microsoft.com/office/drawing/2014/main" id="{36A94A7B-5E0C-42A0-BF2D-A577A612935C}"/>
               </a:ext>
             </a:extLst>
           </p:cNvPr>
@@ -2475,7 +2475,7 @@
           <p:cNvPr id="15" name="">
             <a:extLst xmlns:a="http://schemas.openxmlformats.org/drawingml/2006/main">
               <a:ext uri="{FF2B5EF4-FFF2-40B4-BE49-F238E27FC236}">
-                <a16:creationId xmlns:a16="http://schemas.microsoft.com/office/drawing/2014/main" id="{8CF6D924-607F-4236-A2A7-2A9C3DB0E138}"/>
+                <a16:creationId xmlns:a16="http://schemas.microsoft.com/office/drawing/2014/main" id="{D507C989-4148-47D0-9F5A-06B6F82A95B6}"/>
               </a:ext>
             </a:extLst>
           </p:cNvPr>
@@ -2539,7 +2539,7 @@
           <p:cNvPr id="16" name="">
             <a:extLst xmlns:a="http://schemas.openxmlformats.org/drawingml/2006/main">
               <a:ext uri="{FF2B5EF4-FFF2-40B4-BE49-F238E27FC236}">
-                <a16:creationId xmlns:a16="http://schemas.microsoft.com/office/drawing/2014/main" id="{568588D0-E4F3-4087-8134-6302130F6D19}"/>
+                <a16:creationId xmlns:a16="http://schemas.microsoft.com/office/drawing/2014/main" id="{838728E5-0B19-4000-8201-DC903DBFE97C}"/>
               </a:ext>
             </a:extLst>
           </p:cNvPr>
@@ -2574,7 +2574,7 @@
           <p:cNvPr id="17" name="">
             <a:extLst xmlns:a="http://schemas.openxmlformats.org/drawingml/2006/main">
               <a:ext uri="{FF2B5EF4-FFF2-40B4-BE49-F238E27FC236}">
-                <a16:creationId xmlns:a16="http://schemas.microsoft.com/office/drawing/2014/main" id="{B28EA79C-C980-448F-88E7-254044FC2848}"/>
+                <a16:creationId xmlns:a16="http://schemas.microsoft.com/office/drawing/2014/main" id="{05DF2673-35AF-4671-A58D-2B4ADE96ED9E}"/>
               </a:ext>
             </a:extLst>
           </p:cNvPr>
@@ -2638,7 +2638,7 @@
           <p:cNvPr id="18" name="">
             <a:extLst xmlns:a="http://schemas.openxmlformats.org/drawingml/2006/main">
               <a:ext uri="{FF2B5EF4-FFF2-40B4-BE49-F238E27FC236}">
-                <a16:creationId xmlns:a16="http://schemas.microsoft.com/office/drawing/2014/main" id="{549917E0-63E5-48C0-91A1-C8B29521B2CA}"/>
+                <a16:creationId xmlns:a16="http://schemas.microsoft.com/office/drawing/2014/main" id="{0EF1C7B0-5214-4CCC-B062-64884705F3AB}"/>
               </a:ext>
             </a:extLst>
           </p:cNvPr>
@@ -2702,7 +2702,7 @@
           <p:cNvPr id="19" name="">
             <a:extLst xmlns:a="http://schemas.openxmlformats.org/drawingml/2006/main">
               <a:ext uri="{FF2B5EF4-FFF2-40B4-BE49-F238E27FC236}">
-                <a16:creationId xmlns:a16="http://schemas.microsoft.com/office/drawing/2014/main" id="{5D23A485-257E-45ED-A7B4-147829963F98}"/>
+                <a16:creationId xmlns:a16="http://schemas.microsoft.com/office/drawing/2014/main" id="{0F39B563-AE27-410E-B3E3-3F4A12CBF1D1}"/>
               </a:ext>
             </a:extLst>
           </p:cNvPr>
@@ -2737,7 +2737,7 @@
           <p:cNvPr id="20" name="">
             <a:extLst xmlns:a="http://schemas.openxmlformats.org/drawingml/2006/main">
               <a:ext uri="{FF2B5EF4-FFF2-40B4-BE49-F238E27FC236}">
-                <a16:creationId xmlns:a16="http://schemas.microsoft.com/office/drawing/2014/main" id="{826CB431-910C-4A88-BA7A-60C15F31FD71}"/>
+                <a16:creationId xmlns:a16="http://schemas.microsoft.com/office/drawing/2014/main" id="{DD98A345-3038-4470-86B2-5BADA84E37AB}"/>
               </a:ext>
             </a:extLst>
           </p:cNvPr>
@@ -2801,7 +2801,7 @@
           <p:cNvPr id="21" name="">
             <a:extLst xmlns:a="http://schemas.openxmlformats.org/drawingml/2006/main">
               <a:ext uri="{FF2B5EF4-FFF2-40B4-BE49-F238E27FC236}">
-                <a16:creationId xmlns:a16="http://schemas.microsoft.com/office/drawing/2014/main" id="{7C57E954-6279-4814-BE9A-3994AAF206AB}"/>
+                <a16:creationId xmlns:a16="http://schemas.microsoft.com/office/drawing/2014/main" id="{4ADE362E-5FE2-44E2-A936-B7E1D7677138}"/>
               </a:ext>
             </a:extLst>
           </p:cNvPr>
@@ -2865,7 +2865,7 @@
           <p:cNvPr id="22" name="">
             <a:extLst xmlns:a="http://schemas.openxmlformats.org/drawingml/2006/main">
               <a:ext uri="{FF2B5EF4-FFF2-40B4-BE49-F238E27FC236}">
-                <a16:creationId xmlns:a16="http://schemas.microsoft.com/office/drawing/2014/main" id="{5F332A0F-2510-40B0-AC7F-7354EB396C29}"/>
+                <a16:creationId xmlns:a16="http://schemas.microsoft.com/office/drawing/2014/main" id="{17F0B14F-3956-47AB-9910-0B629AB2B9E7}"/>
               </a:ext>
             </a:extLst>
           </p:cNvPr>
@@ -2929,7 +2929,7 @@
           <p:cNvPr id="23" name="">
             <a:extLst xmlns:a="http://schemas.openxmlformats.org/drawingml/2006/main">
               <a:ext uri="{FF2B5EF4-FFF2-40B4-BE49-F238E27FC236}">
-                <a16:creationId xmlns:a16="http://schemas.microsoft.com/office/drawing/2014/main" id="{FDA368DC-982A-48DD-A333-20E35B6C0358}"/>
+                <a16:creationId xmlns:a16="http://schemas.microsoft.com/office/drawing/2014/main" id="{527DBDA0-797C-4D97-9EA4-22473DB6C81B}"/>
               </a:ext>
             </a:extLst>
           </p:cNvPr>
@@ -2962,7 +2962,7 @@
           <p:cNvPr id="24" name="">
             <a:extLst xmlns:a="http://schemas.openxmlformats.org/drawingml/2006/main">
               <a:ext uri="{FF2B5EF4-FFF2-40B4-BE49-F238E27FC236}">
-                <a16:creationId xmlns:a16="http://schemas.microsoft.com/office/drawing/2014/main" id="{5EB67B00-C9E3-42CF-BB64-82AAE9DD2E2B}"/>
+                <a16:creationId xmlns:a16="http://schemas.microsoft.com/office/drawing/2014/main" id="{972998BF-3FFE-44B9-99E5-0D19B7C21153}"/>
               </a:ext>
             </a:extLst>
           </p:cNvPr>
@@ -3026,7 +3026,7 @@
           <p:cNvPr id="25" name="">
             <a:extLst xmlns:a="http://schemas.openxmlformats.org/drawingml/2006/main">
               <a:ext uri="{FF2B5EF4-FFF2-40B4-BE49-F238E27FC236}">
-                <a16:creationId xmlns:a16="http://schemas.microsoft.com/office/drawing/2014/main" id="{DF28D70D-28F6-4B2A-A15D-B293C762D442}"/>
+                <a16:creationId xmlns:a16="http://schemas.microsoft.com/office/drawing/2014/main" id="{DB037D47-33B1-4FA5-8249-779E6FE380B8}"/>
               </a:ext>
             </a:extLst>
           </p:cNvPr>
@@ -3088,7 +3088,7 @@
     </p:spTree>
     <p:extLst>
       <p:ext uri="{BB962C8B-B14F-4D97-AF65-F5344CB8AC3E}">
-        <p14:creationId xmlns:p14="http://schemas.microsoft.com/office/powerpoint/2010/main" val="969726381"/>
+        <p14:creationId xmlns:p14="http://schemas.microsoft.com/office/powerpoint/2010/main" val="1785081389"/>
       </p:ext>
     </p:extLst>
   </p:cSld>
@@ -3116,7 +3116,7 @@
           <p:nvPr/>
         </p:nvPicPr>
         <p:blipFill>
-          <a:blip xmlns:r="http://schemas.openxmlformats.org/officeDocument/2006/relationships" xmlns:a="http://schemas.openxmlformats.org/drawingml/2006/main" r:embed="Ref645c9047424e76"/>
+          <a:blip xmlns:r="http://schemas.openxmlformats.org/officeDocument/2006/relationships" xmlns:a="http://schemas.openxmlformats.org/drawingml/2006/main" r:embed="Reb9863b91dec4300"/>
           <a:srcRect xmlns:a="http://schemas.openxmlformats.org/drawingml/2006/main" l="0" t="27" r="0" b="27"/>
           <a:stretch xmlns:a="http://schemas.openxmlformats.org/drawingml/2006/main">
             <a:fillRect l="0" t="0" r="0" b="0"/>
@@ -3137,7 +3137,7 @@
           <p:cNvPr id="2" name="">
             <a:extLst xmlns:a="http://schemas.openxmlformats.org/drawingml/2006/main">
               <a:ext uri="{FF2B5EF4-FFF2-40B4-BE49-F238E27FC236}">
-                <a16:creationId xmlns:a16="http://schemas.microsoft.com/office/drawing/2014/main" id="{52332064-B1BA-4274-8BB5-4D1AD9921F54}"/>
+                <a16:creationId xmlns:a16="http://schemas.microsoft.com/office/drawing/2014/main" id="{E162F2DD-7AEC-4247-BDB0-14372A208F84}"/>
               </a:ext>
             </a:extLst>
           </p:cNvPr>
@@ -3174,7 +3174,7 @@
           <p:cNvPr id="3" name="">
             <a:extLst xmlns:a="http://schemas.openxmlformats.org/drawingml/2006/main">
               <a:ext uri="{FF2B5EF4-FFF2-40B4-BE49-F238E27FC236}">
-                <a16:creationId xmlns:a16="http://schemas.microsoft.com/office/drawing/2014/main" id="{F743ABFE-DF40-475D-A555-C5E8EF3A432E}"/>
+                <a16:creationId xmlns:a16="http://schemas.microsoft.com/office/drawing/2014/main" id="{12FD4C55-5659-4A23-AEDF-591F9E0DFCF1}"/>
               </a:ext>
             </a:extLst>
           </p:cNvPr>
@@ -3211,7 +3211,7 @@
           <p:cNvPr id="4" name="">
             <a:extLst xmlns:a="http://schemas.openxmlformats.org/drawingml/2006/main">
               <a:ext uri="{FF2B5EF4-FFF2-40B4-BE49-F238E27FC236}">
-                <a16:creationId xmlns:a16="http://schemas.microsoft.com/office/drawing/2014/main" id="{995781CA-5608-4D56-BA68-24240C325378}"/>
+                <a16:creationId xmlns:a16="http://schemas.microsoft.com/office/drawing/2014/main" id="{5BF4CC30-5FB5-49BB-A285-FF630D3A726D}"/>
               </a:ext>
             </a:extLst>
           </p:cNvPr>
@@ -3275,7 +3275,7 @@
           <p:cNvPr id="5" name="">
             <a:extLst xmlns:a="http://schemas.openxmlformats.org/drawingml/2006/main">
               <a:ext uri="{FF2B5EF4-FFF2-40B4-BE49-F238E27FC236}">
-                <a16:creationId xmlns:a16="http://schemas.microsoft.com/office/drawing/2014/main" id="{2B2E6A99-3B33-46EE-A9E9-C71B12AEA353}"/>
+                <a16:creationId xmlns:a16="http://schemas.microsoft.com/office/drawing/2014/main" id="{DD822535-B8A8-40F6-9355-2869EAD20F0B}"/>
               </a:ext>
             </a:extLst>
           </p:cNvPr>
@@ -3339,7 +3339,7 @@
           <p:cNvPr id="6" name="">
             <a:extLst xmlns:a="http://schemas.openxmlformats.org/drawingml/2006/main">
               <a:ext uri="{FF2B5EF4-FFF2-40B4-BE49-F238E27FC236}">
-                <a16:creationId xmlns:a16="http://schemas.microsoft.com/office/drawing/2014/main" id="{7C699A84-BF53-4D16-84B2-7EAEFBA1A043}"/>
+                <a16:creationId xmlns:a16="http://schemas.microsoft.com/office/drawing/2014/main" id="{62CF6ABC-AA4E-4753-A3E6-DC59806CD525}"/>
               </a:ext>
             </a:extLst>
           </p:cNvPr>
@@ -3403,7 +3403,7 @@
           <p:cNvPr id="7" name="">
             <a:extLst xmlns:a="http://schemas.openxmlformats.org/drawingml/2006/main">
               <a:ext uri="{FF2B5EF4-FFF2-40B4-BE49-F238E27FC236}">
-                <a16:creationId xmlns:a16="http://schemas.microsoft.com/office/drawing/2014/main" id="{96B543CD-84DF-4603-B57D-4E2C2E48A8CF}"/>
+                <a16:creationId xmlns:a16="http://schemas.microsoft.com/office/drawing/2014/main" id="{B7E90AFE-C153-4DA0-BD86-8F37DFD3CA02}"/>
               </a:ext>
             </a:extLst>
           </p:cNvPr>
@@ -3438,7 +3438,7 @@
           <p:cNvPr id="8" name="">
             <a:extLst xmlns:a="http://schemas.openxmlformats.org/drawingml/2006/main">
               <a:ext uri="{FF2B5EF4-FFF2-40B4-BE49-F238E27FC236}">
-                <a16:creationId xmlns:a16="http://schemas.microsoft.com/office/drawing/2014/main" id="{22F12EA3-AE4D-4853-8F34-6DD538F47E5A}"/>
+                <a16:creationId xmlns:a16="http://schemas.microsoft.com/office/drawing/2014/main" id="{1C8D2D7D-077F-4028-BC37-3EF088DF34F8}"/>
               </a:ext>
             </a:extLst>
           </p:cNvPr>
@@ -3502,7 +3502,7 @@
           <p:cNvPr id="9" name="">
             <a:extLst xmlns:a="http://schemas.openxmlformats.org/drawingml/2006/main">
               <a:ext uri="{FF2B5EF4-FFF2-40B4-BE49-F238E27FC236}">
-                <a16:creationId xmlns:a16="http://schemas.microsoft.com/office/drawing/2014/main" id="{A23F43D1-A304-440A-9DEC-8AB08A2A53DF}"/>
+                <a16:creationId xmlns:a16="http://schemas.microsoft.com/office/drawing/2014/main" id="{11001D68-2B4D-481A-95D2-19C8C3349ABC}"/>
               </a:ext>
             </a:extLst>
           </p:cNvPr>
@@ -3537,7 +3537,7 @@
           <p:cNvPr id="10" name="">
             <a:extLst xmlns:a="http://schemas.openxmlformats.org/drawingml/2006/main">
               <a:ext uri="{FF2B5EF4-FFF2-40B4-BE49-F238E27FC236}">
-                <a16:creationId xmlns:a16="http://schemas.microsoft.com/office/drawing/2014/main" id="{EB10B594-8331-4359-A819-676482CF1852}"/>
+                <a16:creationId xmlns:a16="http://schemas.microsoft.com/office/drawing/2014/main" id="{27646BB4-2639-41B2-AA62-2380CD99C2D5}"/>
               </a:ext>
             </a:extLst>
           </p:cNvPr>
@@ -3601,7 +3601,7 @@
           <p:cNvPr id="11" name="">
             <a:extLst xmlns:a="http://schemas.openxmlformats.org/drawingml/2006/main">
               <a:ext uri="{FF2B5EF4-FFF2-40B4-BE49-F238E27FC236}">
-                <a16:creationId xmlns:a16="http://schemas.microsoft.com/office/drawing/2014/main" id="{CAD187EB-D6D7-48BB-B08B-596D8A2D10A2}"/>
+                <a16:creationId xmlns:a16="http://schemas.microsoft.com/office/drawing/2014/main" id="{333E8515-A124-42DA-A270-5418FBC293A0}"/>
               </a:ext>
             </a:extLst>
           </p:cNvPr>
@@ -3636,7 +3636,7 @@
           <p:cNvPr id="12" name="">
             <a:extLst xmlns:a="http://schemas.openxmlformats.org/drawingml/2006/main">
               <a:ext uri="{FF2B5EF4-FFF2-40B4-BE49-F238E27FC236}">
-                <a16:creationId xmlns:a16="http://schemas.microsoft.com/office/drawing/2014/main" id="{5A3B92AB-F2DB-49ED-A4B0-C12881A581EF}"/>
+                <a16:creationId xmlns:a16="http://schemas.microsoft.com/office/drawing/2014/main" id="{0E8CA3A4-4C96-4524-B8AA-EF0FF1BCAE78}"/>
               </a:ext>
             </a:extLst>
           </p:cNvPr>
@@ -3700,7 +3700,7 @@
           <p:cNvPr id="13" name="">
             <a:extLst xmlns:a="http://schemas.openxmlformats.org/drawingml/2006/main">
               <a:ext uri="{FF2B5EF4-FFF2-40B4-BE49-F238E27FC236}">
-                <a16:creationId xmlns:a16="http://schemas.microsoft.com/office/drawing/2014/main" id="{27559198-8B98-486E-80DF-4177BD626E14}"/>
+                <a16:creationId xmlns:a16="http://schemas.microsoft.com/office/drawing/2014/main" id="{38A31608-432E-4DFF-ABFE-082D862233D6}"/>
               </a:ext>
             </a:extLst>
           </p:cNvPr>
@@ -3735,7 +3735,7 @@
           <p:cNvPr id="14" name="">
             <a:extLst xmlns:a="http://schemas.openxmlformats.org/drawingml/2006/main">
               <a:ext uri="{FF2B5EF4-FFF2-40B4-BE49-F238E27FC236}">
-                <a16:creationId xmlns:a16="http://schemas.microsoft.com/office/drawing/2014/main" id="{A8AD1124-4DCD-4E08-9260-4326A13C849D}"/>
+                <a16:creationId xmlns:a16="http://schemas.microsoft.com/office/drawing/2014/main" id="{2D6C14D4-5071-4A4C-B2D9-686A020192D2}"/>
               </a:ext>
             </a:extLst>
           </p:cNvPr>
@@ -3799,7 +3799,7 @@
           <p:cNvPr id="15" name="">
             <a:extLst xmlns:a="http://schemas.openxmlformats.org/drawingml/2006/main">
               <a:ext uri="{FF2B5EF4-FFF2-40B4-BE49-F238E27FC236}">
-                <a16:creationId xmlns:a16="http://schemas.microsoft.com/office/drawing/2014/main" id="{5F27553F-AB3C-45CE-B376-27831D2A90FC}"/>
+                <a16:creationId xmlns:a16="http://schemas.microsoft.com/office/drawing/2014/main" id="{73B23F6D-109A-45C7-B090-47A7B0A0E426}"/>
               </a:ext>
             </a:extLst>
           </p:cNvPr>
@@ -3863,7 +3863,7 @@
           <p:cNvPr id="16" name="">
             <a:extLst xmlns:a="http://schemas.openxmlformats.org/drawingml/2006/main">
               <a:ext uri="{FF2B5EF4-FFF2-40B4-BE49-F238E27FC236}">
-                <a16:creationId xmlns:a16="http://schemas.microsoft.com/office/drawing/2014/main" id="{6D361FEA-E758-4A48-8BA9-D54D9808D590}"/>
+                <a16:creationId xmlns:a16="http://schemas.microsoft.com/office/drawing/2014/main" id="{183C4A5D-126C-4348-B663-27F7CFA5C2DF}"/>
               </a:ext>
             </a:extLst>
           </p:cNvPr>
@@ -3927,7 +3927,7 @@
           <p:cNvPr id="17" name="">
             <a:extLst xmlns:a="http://schemas.openxmlformats.org/drawingml/2006/main">
               <a:ext uri="{FF2B5EF4-FFF2-40B4-BE49-F238E27FC236}">
-                <a16:creationId xmlns:a16="http://schemas.microsoft.com/office/drawing/2014/main" id="{B03BCB44-2E72-4052-8EA9-2DADC93E58E4}"/>
+                <a16:creationId xmlns:a16="http://schemas.microsoft.com/office/drawing/2014/main" id="{F62CD0DB-9237-4DB5-9F64-024102D69188}"/>
               </a:ext>
             </a:extLst>
           </p:cNvPr>
@@ -3960,7 +3960,7 @@
           <p:cNvPr id="18" name="">
             <a:extLst xmlns:a="http://schemas.openxmlformats.org/drawingml/2006/main">
               <a:ext uri="{FF2B5EF4-FFF2-40B4-BE49-F238E27FC236}">
-                <a16:creationId xmlns:a16="http://schemas.microsoft.com/office/drawing/2014/main" id="{68FE3EB0-1BF0-4823-B224-C9349C938E4F}"/>
+                <a16:creationId xmlns:a16="http://schemas.microsoft.com/office/drawing/2014/main" id="{0D082E61-189B-4804-AB00-E41BBB232EB6}"/>
               </a:ext>
             </a:extLst>
           </p:cNvPr>
@@ -4024,7 +4024,7 @@
           <p:cNvPr id="19" name="">
             <a:extLst xmlns:a="http://schemas.openxmlformats.org/drawingml/2006/main">
               <a:ext uri="{FF2B5EF4-FFF2-40B4-BE49-F238E27FC236}">
-                <a16:creationId xmlns:a16="http://schemas.microsoft.com/office/drawing/2014/main" id="{46CEE378-3B94-4169-BB12-57F0224EEF46}"/>
+                <a16:creationId xmlns:a16="http://schemas.microsoft.com/office/drawing/2014/main" id="{E27688E9-B5C8-4971-A0D6-36E24DE225B3}"/>
               </a:ext>
             </a:extLst>
           </p:cNvPr>
@@ -4086,7 +4086,7 @@
     </p:spTree>
     <p:extLst>
       <p:ext uri="{BB962C8B-B14F-4D97-AF65-F5344CB8AC3E}">
-        <p14:creationId xmlns:p14="http://schemas.microsoft.com/office/powerpoint/2010/main" val="1724609241"/>
+        <p14:creationId xmlns:p14="http://schemas.microsoft.com/office/powerpoint/2010/main" val="1517367312"/>
       </p:ext>
     </p:extLst>
   </p:cSld>
@@ -4114,7 +4114,7 @@
           <p:nvPr/>
         </p:nvPicPr>
         <p:blipFill>
-          <a:blip xmlns:r="http://schemas.openxmlformats.org/officeDocument/2006/relationships" xmlns:a="http://schemas.openxmlformats.org/drawingml/2006/main" r:embed="R55bca4abb97344d8"/>
+          <a:blip xmlns:r="http://schemas.openxmlformats.org/officeDocument/2006/relationships" xmlns:a="http://schemas.openxmlformats.org/drawingml/2006/main" r:embed="Rc90c9532aa614e20"/>
           <a:srcRect xmlns:a="http://schemas.openxmlformats.org/drawingml/2006/main" l="0" t="27" r="0" b="27"/>
           <a:stretch xmlns:a="http://schemas.openxmlformats.org/drawingml/2006/main">
             <a:fillRect l="0" t="0" r="0" b="0"/>
@@ -4135,7 +4135,7 @@
           <p:cNvPr id="2" name="">
             <a:extLst xmlns:a="http://schemas.openxmlformats.org/drawingml/2006/main">
               <a:ext uri="{FF2B5EF4-FFF2-40B4-BE49-F238E27FC236}">
-                <a16:creationId xmlns:a16="http://schemas.microsoft.com/office/drawing/2014/main" id="{54ED0087-BFE0-4035-A38B-7CD72A381183}"/>
+                <a16:creationId xmlns:a16="http://schemas.microsoft.com/office/drawing/2014/main" id="{0D66CAF4-02B4-47F0-91E6-EBF2D95E08CF}"/>
               </a:ext>
             </a:extLst>
           </p:cNvPr>
@@ -4172,7 +4172,7 @@
           <p:cNvPr id="3" name="">
             <a:extLst xmlns:a="http://schemas.openxmlformats.org/drawingml/2006/main">
               <a:ext uri="{FF2B5EF4-FFF2-40B4-BE49-F238E27FC236}">
-                <a16:creationId xmlns:a16="http://schemas.microsoft.com/office/drawing/2014/main" id="{2F492BDD-A17A-4BB5-8849-448E24262E5A}"/>
+                <a16:creationId xmlns:a16="http://schemas.microsoft.com/office/drawing/2014/main" id="{B3814039-ABD4-4121-81E8-E5E40DEA85E2}"/>
               </a:ext>
             </a:extLst>
           </p:cNvPr>
@@ -4209,7 +4209,7 @@
           <p:cNvPr id="4" name="">
             <a:extLst xmlns:a="http://schemas.openxmlformats.org/drawingml/2006/main">
               <a:ext uri="{FF2B5EF4-FFF2-40B4-BE49-F238E27FC236}">
-                <a16:creationId xmlns:a16="http://schemas.microsoft.com/office/drawing/2014/main" id="{6F766172-2A39-401B-BC4B-A52EEFB66731}"/>
+                <a16:creationId xmlns:a16="http://schemas.microsoft.com/office/drawing/2014/main" id="{DACA7258-9475-4066-9EA1-7C63011D86F0}"/>
               </a:ext>
             </a:extLst>
           </p:cNvPr>
@@ -4273,7 +4273,7 @@
           <p:cNvPr id="5" name="">
             <a:extLst xmlns:a="http://schemas.openxmlformats.org/drawingml/2006/main">
               <a:ext uri="{FF2B5EF4-FFF2-40B4-BE49-F238E27FC236}">
-                <a16:creationId xmlns:a16="http://schemas.microsoft.com/office/drawing/2014/main" id="{E3404B9A-974D-4698-9367-3976C0051756}"/>
+                <a16:creationId xmlns:a16="http://schemas.microsoft.com/office/drawing/2014/main" id="{F0BCCD60-A0E7-4283-957A-05118814D038}"/>
               </a:ext>
             </a:extLst>
           </p:cNvPr>
@@ -4337,7 +4337,7 @@
           <p:cNvPr id="6" name="">
             <a:extLst xmlns:a="http://schemas.openxmlformats.org/drawingml/2006/main">
               <a:ext uri="{FF2B5EF4-FFF2-40B4-BE49-F238E27FC236}">
-                <a16:creationId xmlns:a16="http://schemas.microsoft.com/office/drawing/2014/main" id="{829D6077-BF7D-4FBC-BE2F-0BA1A66EAFF8}"/>
+                <a16:creationId xmlns:a16="http://schemas.microsoft.com/office/drawing/2014/main" id="{8A52F12B-0E18-470C-8134-561536AB3C93}"/>
               </a:ext>
             </a:extLst>
           </p:cNvPr>
@@ -4401,7 +4401,7 @@
           <p:cNvPr id="7" name="">
             <a:extLst xmlns:a="http://schemas.openxmlformats.org/drawingml/2006/main">
               <a:ext uri="{FF2B5EF4-FFF2-40B4-BE49-F238E27FC236}">
-                <a16:creationId xmlns:a16="http://schemas.microsoft.com/office/drawing/2014/main" id="{355AE1D2-D386-4029-AA83-29ACF3E0362D}"/>
+                <a16:creationId xmlns:a16="http://schemas.microsoft.com/office/drawing/2014/main" id="{28432CB7-5A6F-4A99-9E02-E5313AF7A7B2}"/>
               </a:ext>
             </a:extLst>
           </p:cNvPr>
@@ -4436,7 +4436,7 @@
           <p:cNvPr id="8" name="">
             <a:extLst xmlns:a="http://schemas.openxmlformats.org/drawingml/2006/main">
               <a:ext uri="{FF2B5EF4-FFF2-40B4-BE49-F238E27FC236}">
-                <a16:creationId xmlns:a16="http://schemas.microsoft.com/office/drawing/2014/main" id="{93FBFB09-D21E-4434-9F77-E188FCB5238E}"/>
+                <a16:creationId xmlns:a16="http://schemas.microsoft.com/office/drawing/2014/main" id="{E2CA7EF6-B074-4649-A698-C77FF64D3B76}"/>
               </a:ext>
             </a:extLst>
           </p:cNvPr>
@@ -4500,7 +4500,7 @@
           <p:cNvPr id="9" name="">
             <a:extLst xmlns:a="http://schemas.openxmlformats.org/drawingml/2006/main">
               <a:ext uri="{FF2B5EF4-FFF2-40B4-BE49-F238E27FC236}">
-                <a16:creationId xmlns:a16="http://schemas.microsoft.com/office/drawing/2014/main" id="{36B0F6BA-3BE7-4C9C-99E3-E4A6306E143C}"/>
+                <a16:creationId xmlns:a16="http://schemas.microsoft.com/office/drawing/2014/main" id="{1932CBDA-ABBF-45E9-B2EB-6C2F50835374}"/>
               </a:ext>
             </a:extLst>
           </p:cNvPr>
@@ -4564,7 +4564,7 @@
           <p:cNvPr id="10" name="">
             <a:extLst xmlns:a="http://schemas.openxmlformats.org/drawingml/2006/main">
               <a:ext uri="{FF2B5EF4-FFF2-40B4-BE49-F238E27FC236}">
-                <a16:creationId xmlns:a16="http://schemas.microsoft.com/office/drawing/2014/main" id="{D57F5311-B068-40D5-955A-C9F1A119DFEF}"/>
+                <a16:creationId xmlns:a16="http://schemas.microsoft.com/office/drawing/2014/main" id="{AB9F5216-39A6-4E74-88F0-FEE8E30D9DCB}"/>
               </a:ext>
             </a:extLst>
           </p:cNvPr>
@@ -4597,7 +4597,7 @@
           <p:cNvPr id="11" name="">
             <a:extLst xmlns:a="http://schemas.openxmlformats.org/drawingml/2006/main">
               <a:ext uri="{FF2B5EF4-FFF2-40B4-BE49-F238E27FC236}">
-                <a16:creationId xmlns:a16="http://schemas.microsoft.com/office/drawing/2014/main" id="{1E1409DA-FD1A-445D-B72E-1D1F7D37E477}"/>
+                <a16:creationId xmlns:a16="http://schemas.microsoft.com/office/drawing/2014/main" id="{5C5D0931-51B8-471E-BB27-D93D8B51B790}"/>
               </a:ext>
             </a:extLst>
           </p:cNvPr>
@@ -4632,7 +4632,7 @@
           <p:cNvPr id="12" name="">
             <a:extLst xmlns:a="http://schemas.openxmlformats.org/drawingml/2006/main">
               <a:ext uri="{FF2B5EF4-FFF2-40B4-BE49-F238E27FC236}">
-                <a16:creationId xmlns:a16="http://schemas.microsoft.com/office/drawing/2014/main" id="{74306F53-0883-470A-A261-A7AF07E46660}"/>
+                <a16:creationId xmlns:a16="http://schemas.microsoft.com/office/drawing/2014/main" id="{E77A6131-A153-4BA1-994D-D5A4423A69C8}"/>
               </a:ext>
             </a:extLst>
           </p:cNvPr>
@@ -4696,7 +4696,7 @@
           <p:cNvPr id="13" name="">
             <a:extLst xmlns:a="http://schemas.openxmlformats.org/drawingml/2006/main">
               <a:ext uri="{FF2B5EF4-FFF2-40B4-BE49-F238E27FC236}">
-                <a16:creationId xmlns:a16="http://schemas.microsoft.com/office/drawing/2014/main" id="{D94D5838-DE5A-4D52-9204-421AB15AF771}"/>
+                <a16:creationId xmlns:a16="http://schemas.microsoft.com/office/drawing/2014/main" id="{19A96818-9814-46A1-B3C2-D7387E2736E8}"/>
               </a:ext>
             </a:extLst>
           </p:cNvPr>
@@ -4760,7 +4760,7 @@
           <p:cNvPr id="14" name="">
             <a:extLst xmlns:a="http://schemas.openxmlformats.org/drawingml/2006/main">
               <a:ext uri="{FF2B5EF4-FFF2-40B4-BE49-F238E27FC236}">
-                <a16:creationId xmlns:a16="http://schemas.microsoft.com/office/drawing/2014/main" id="{A1F737E0-0925-4337-985C-E2D21D60A976}"/>
+                <a16:creationId xmlns:a16="http://schemas.microsoft.com/office/drawing/2014/main" id="{B420C778-23BB-441E-AF82-552A045196D0}"/>
               </a:ext>
             </a:extLst>
           </p:cNvPr>
@@ -4793,7 +4793,7 @@
           <p:cNvPr id="15" name="">
             <a:extLst xmlns:a="http://schemas.openxmlformats.org/drawingml/2006/main">
               <a:ext uri="{FF2B5EF4-FFF2-40B4-BE49-F238E27FC236}">
-                <a16:creationId xmlns:a16="http://schemas.microsoft.com/office/drawing/2014/main" id="{CA3F15A1-674D-4D83-931C-4173AF02E49A}"/>
+                <a16:creationId xmlns:a16="http://schemas.microsoft.com/office/drawing/2014/main" id="{6AF3A9FE-8D02-49B1-8766-619FB7234834}"/>
               </a:ext>
             </a:extLst>
           </p:cNvPr>
@@ -4828,7 +4828,7 @@
           <p:cNvPr id="16" name="">
             <a:extLst xmlns:a="http://schemas.openxmlformats.org/drawingml/2006/main">
               <a:ext uri="{FF2B5EF4-FFF2-40B4-BE49-F238E27FC236}">
-                <a16:creationId xmlns:a16="http://schemas.microsoft.com/office/drawing/2014/main" id="{C62CEB7A-5FF7-4878-BDDF-B5F13A7DDEAE}"/>
+                <a16:creationId xmlns:a16="http://schemas.microsoft.com/office/drawing/2014/main" id="{132BD45E-F218-448C-8884-4F3554009350}"/>
               </a:ext>
             </a:extLst>
           </p:cNvPr>
@@ -4892,7 +4892,7 @@
           <p:cNvPr id="17" name="">
             <a:extLst xmlns:a="http://schemas.openxmlformats.org/drawingml/2006/main">
               <a:ext uri="{FF2B5EF4-FFF2-40B4-BE49-F238E27FC236}">
-                <a16:creationId xmlns:a16="http://schemas.microsoft.com/office/drawing/2014/main" id="{60FED07B-4FF0-4F5E-B72C-7DBBF110AB35}"/>
+                <a16:creationId xmlns:a16="http://schemas.microsoft.com/office/drawing/2014/main" id="{95367724-C413-400E-A270-D73625CAD1EE}"/>
               </a:ext>
             </a:extLst>
           </p:cNvPr>
@@ -4956,7 +4956,7 @@
           <p:cNvPr id="18" name="">
             <a:extLst xmlns:a="http://schemas.openxmlformats.org/drawingml/2006/main">
               <a:ext uri="{FF2B5EF4-FFF2-40B4-BE49-F238E27FC236}">
-                <a16:creationId xmlns:a16="http://schemas.microsoft.com/office/drawing/2014/main" id="{90811513-1A3A-4E71-ABEC-8A922BDCA7D6}"/>
+                <a16:creationId xmlns:a16="http://schemas.microsoft.com/office/drawing/2014/main" id="{33B9C9B0-1EEC-4904-9369-E72EE31A377A}"/>
               </a:ext>
             </a:extLst>
           </p:cNvPr>
@@ -5020,7 +5020,7 @@
           <p:cNvPr id="19" name="">
             <a:extLst xmlns:a="http://schemas.openxmlformats.org/drawingml/2006/main">
               <a:ext uri="{FF2B5EF4-FFF2-40B4-BE49-F238E27FC236}">
-                <a16:creationId xmlns:a16="http://schemas.microsoft.com/office/drawing/2014/main" id="{9521EAE4-5329-4A9B-B8CA-E2AFE589EB32}"/>
+                <a16:creationId xmlns:a16="http://schemas.microsoft.com/office/drawing/2014/main" id="{ED3F5D70-5589-4075-B3C8-08A607E4CA40}"/>
               </a:ext>
             </a:extLst>
           </p:cNvPr>
@@ -5053,7 +5053,7 @@
           <p:cNvPr id="20" name="">
             <a:extLst xmlns:a="http://schemas.openxmlformats.org/drawingml/2006/main">
               <a:ext uri="{FF2B5EF4-FFF2-40B4-BE49-F238E27FC236}">
-                <a16:creationId xmlns:a16="http://schemas.microsoft.com/office/drawing/2014/main" id="{CE866C1F-07CE-4C60-81BA-8ADFC4A7BB07}"/>
+                <a16:creationId xmlns:a16="http://schemas.microsoft.com/office/drawing/2014/main" id="{24C5250E-82A3-4F4F-8CF0-640199D56A11}"/>
               </a:ext>
             </a:extLst>
           </p:cNvPr>
@@ -5117,7 +5117,7 @@
           <p:cNvPr id="21" name="">
             <a:extLst xmlns:a="http://schemas.openxmlformats.org/drawingml/2006/main">
               <a:ext uri="{FF2B5EF4-FFF2-40B4-BE49-F238E27FC236}">
-                <a16:creationId xmlns:a16="http://schemas.microsoft.com/office/drawing/2014/main" id="{5D9C7BAC-909F-4457-8837-0599EC35435F}"/>
+                <a16:creationId xmlns:a16="http://schemas.microsoft.com/office/drawing/2014/main" id="{8718B159-94B6-4FA3-BA08-1730A6AE5FF8}"/>
               </a:ext>
             </a:extLst>
           </p:cNvPr>
@@ -5179,7 +5179,7 @@
     </p:spTree>
     <p:extLst>
       <p:ext uri="{BB962C8B-B14F-4D97-AF65-F5344CB8AC3E}">
-        <p14:creationId xmlns:p14="http://schemas.microsoft.com/office/powerpoint/2010/main" val="1142929283"/>
+        <p14:creationId xmlns:p14="http://schemas.microsoft.com/office/powerpoint/2010/main" val="1847778701"/>
       </p:ext>
     </p:extLst>
   </p:cSld>
@@ -5207,7 +5207,7 @@
           <p:nvPr/>
         </p:nvPicPr>
         <p:blipFill>
-          <a:blip xmlns:r="http://schemas.openxmlformats.org/officeDocument/2006/relationships" xmlns:a="http://schemas.openxmlformats.org/drawingml/2006/main" r:embed="Rc153f5bab11a4780"/>
+          <a:blip xmlns:r="http://schemas.openxmlformats.org/officeDocument/2006/relationships" xmlns:a="http://schemas.openxmlformats.org/drawingml/2006/main" r:embed="R858f5045c6ff48c5"/>
           <a:srcRect xmlns:a="http://schemas.openxmlformats.org/drawingml/2006/main" l="0" t="27" r="0" b="27"/>
           <a:stretch xmlns:a="http://schemas.openxmlformats.org/drawingml/2006/main">
             <a:fillRect l="0" t="0" r="0" b="0"/>
@@ -5228,7 +5228,7 @@
           <p:cNvPr id="2" name="">
             <a:extLst xmlns:a="http://schemas.openxmlformats.org/drawingml/2006/main">
               <a:ext uri="{FF2B5EF4-FFF2-40B4-BE49-F238E27FC236}">
-                <a16:creationId xmlns:a16="http://schemas.microsoft.com/office/drawing/2014/main" id="{B5C3CAE7-EA81-4F51-9910-0BDDB5DEB5CB}"/>
+                <a16:creationId xmlns:a16="http://schemas.microsoft.com/office/drawing/2014/main" id="{9ECFAC70-2266-400F-83B7-178E15BC50E9}"/>
               </a:ext>
             </a:extLst>
           </p:cNvPr>
@@ -5265,7 +5265,7 @@
           <p:cNvPr id="3" name="">
             <a:extLst xmlns:a="http://schemas.openxmlformats.org/drawingml/2006/main">
               <a:ext uri="{FF2B5EF4-FFF2-40B4-BE49-F238E27FC236}">
-                <a16:creationId xmlns:a16="http://schemas.microsoft.com/office/drawing/2014/main" id="{6B9A516D-9064-46AA-92D0-A286E6FF5B82}"/>
+                <a16:creationId xmlns:a16="http://schemas.microsoft.com/office/drawing/2014/main" id="{CDEB88FA-4EC9-4CAD-99A4-5FFF5BAF30B3}"/>
               </a:ext>
             </a:extLst>
           </p:cNvPr>
@@ -5302,7 +5302,7 @@
           <p:cNvPr id="4" name="">
             <a:extLst xmlns:a="http://schemas.openxmlformats.org/drawingml/2006/main">
               <a:ext uri="{FF2B5EF4-FFF2-40B4-BE49-F238E27FC236}">
-                <a16:creationId xmlns:a16="http://schemas.microsoft.com/office/drawing/2014/main" id="{FCC0C814-053D-47F5-8E2A-9E9002A4BD34}"/>
+                <a16:creationId xmlns:a16="http://schemas.microsoft.com/office/drawing/2014/main" id="{9C1366F3-D542-4047-A77C-29DAB3D25B73}"/>
               </a:ext>
             </a:extLst>
           </p:cNvPr>
@@ -5366,7 +5366,7 @@
           <p:cNvPr id="5" name="">
             <a:extLst xmlns:a="http://schemas.openxmlformats.org/drawingml/2006/main">
               <a:ext uri="{FF2B5EF4-FFF2-40B4-BE49-F238E27FC236}">
-                <a16:creationId xmlns:a16="http://schemas.microsoft.com/office/drawing/2014/main" id="{B4CF8F3E-44E9-4C1B-8C5B-3D71C4E3634D}"/>
+                <a16:creationId xmlns:a16="http://schemas.microsoft.com/office/drawing/2014/main" id="{E450212E-4F44-4671-B626-E058577218A8}"/>
               </a:ext>
             </a:extLst>
           </p:cNvPr>
@@ -5430,7 +5430,7 @@
           <p:cNvPr id="6" name="">
             <a:extLst xmlns:a="http://schemas.openxmlformats.org/drawingml/2006/main">
               <a:ext uri="{FF2B5EF4-FFF2-40B4-BE49-F238E27FC236}">
-                <a16:creationId xmlns:a16="http://schemas.microsoft.com/office/drawing/2014/main" id="{D6EA3F0D-55AC-4EEE-A844-725FEBC61563}"/>
+                <a16:creationId xmlns:a16="http://schemas.microsoft.com/office/drawing/2014/main" id="{3D707184-0DB0-4142-A05D-F0EF5E50449F}"/>
               </a:ext>
             </a:extLst>
           </p:cNvPr>
@@ -5494,7 +5494,7 @@
           <p:cNvPr id="7" name="">
             <a:extLst xmlns:a="http://schemas.openxmlformats.org/drawingml/2006/main">
               <a:ext uri="{FF2B5EF4-FFF2-40B4-BE49-F238E27FC236}">
-                <a16:creationId xmlns:a16="http://schemas.microsoft.com/office/drawing/2014/main" id="{521E7826-4DF8-445D-8A54-ABCFA3A28F54}"/>
+                <a16:creationId xmlns:a16="http://schemas.microsoft.com/office/drawing/2014/main" id="{06BE7236-70DA-4F39-B234-E73F476E989D}"/>
               </a:ext>
             </a:extLst>
           </p:cNvPr>
@@ -5529,7 +5529,7 @@
           <p:cNvPr id="8" name="">
             <a:extLst xmlns:a="http://schemas.openxmlformats.org/drawingml/2006/main">
               <a:ext uri="{FF2B5EF4-FFF2-40B4-BE49-F238E27FC236}">
-                <a16:creationId xmlns:a16="http://schemas.microsoft.com/office/drawing/2014/main" id="{E1389872-09E5-4831-9416-8305D1B3337C}"/>
+                <a16:creationId xmlns:a16="http://schemas.microsoft.com/office/drawing/2014/main" id="{2BE17A23-69F9-434E-B30C-F84CE69C9B66}"/>
               </a:ext>
             </a:extLst>
           </p:cNvPr>
@@ -5593,7 +5593,7 @@
           <p:cNvPr id="9" name="">
             <a:extLst xmlns:a="http://schemas.openxmlformats.org/drawingml/2006/main">
               <a:ext uri="{FF2B5EF4-FFF2-40B4-BE49-F238E27FC236}">
-                <a16:creationId xmlns:a16="http://schemas.microsoft.com/office/drawing/2014/main" id="{DBCD7E12-BEC0-4959-BBC4-F546EED2794E}"/>
+                <a16:creationId xmlns:a16="http://schemas.microsoft.com/office/drawing/2014/main" id="{BDB9B843-22D1-444D-964C-A0C3E3D5E6A0}"/>
               </a:ext>
             </a:extLst>
           </p:cNvPr>
@@ -5657,7 +5657,7 @@
           <p:cNvPr id="10" name="">
             <a:extLst xmlns:a="http://schemas.openxmlformats.org/drawingml/2006/main">
               <a:ext uri="{FF2B5EF4-FFF2-40B4-BE49-F238E27FC236}">
-                <a16:creationId xmlns:a16="http://schemas.microsoft.com/office/drawing/2014/main" id="{A79BD241-0CF4-470A-B46E-C6E819F45F52}"/>
+                <a16:creationId xmlns:a16="http://schemas.microsoft.com/office/drawing/2014/main" id="{4F1A9EE2-9126-446C-8A6E-0EC48962EC10}"/>
               </a:ext>
             </a:extLst>
           </p:cNvPr>
@@ -5692,7 +5692,7 @@
           <p:cNvPr id="11" name="">
             <a:extLst xmlns:a="http://schemas.openxmlformats.org/drawingml/2006/main">
               <a:ext uri="{FF2B5EF4-FFF2-40B4-BE49-F238E27FC236}">
-                <a16:creationId xmlns:a16="http://schemas.microsoft.com/office/drawing/2014/main" id="{798D8DBA-8159-4879-841F-253E29CD0381}"/>
+                <a16:creationId xmlns:a16="http://schemas.microsoft.com/office/drawing/2014/main" id="{6244A8FA-30F2-45EB-9E9A-F4E71EF3540C}"/>
               </a:ext>
             </a:extLst>
           </p:cNvPr>
@@ -5756,7 +5756,7 @@
           <p:cNvPr id="12" name="">
             <a:extLst xmlns:a="http://schemas.openxmlformats.org/drawingml/2006/main">
               <a:ext uri="{FF2B5EF4-FFF2-40B4-BE49-F238E27FC236}">
-                <a16:creationId xmlns:a16="http://schemas.microsoft.com/office/drawing/2014/main" id="{4CCB7D57-CF6F-4A8C-A9E2-FE227F7EA998}"/>
+                <a16:creationId xmlns:a16="http://schemas.microsoft.com/office/drawing/2014/main" id="{DAF193F6-85D2-4BF0-AAB3-38EE4698490D}"/>
               </a:ext>
             </a:extLst>
           </p:cNvPr>
@@ -5820,7 +5820,7 @@
           <p:cNvPr id="13" name="">
             <a:extLst xmlns:a="http://schemas.openxmlformats.org/drawingml/2006/main">
               <a:ext uri="{FF2B5EF4-FFF2-40B4-BE49-F238E27FC236}">
-                <a16:creationId xmlns:a16="http://schemas.microsoft.com/office/drawing/2014/main" id="{61CFA5E2-EAD7-4A68-95EC-A38F1E45316B}"/>
+                <a16:creationId xmlns:a16="http://schemas.microsoft.com/office/drawing/2014/main" id="{6E5056B6-4088-4276-8718-4586902F4A4A}"/>
               </a:ext>
             </a:extLst>
           </p:cNvPr>
@@ -5855,7 +5855,7 @@
           <p:cNvPr id="14" name="">
             <a:extLst xmlns:a="http://schemas.openxmlformats.org/drawingml/2006/main">
               <a:ext uri="{FF2B5EF4-FFF2-40B4-BE49-F238E27FC236}">
-                <a16:creationId xmlns:a16="http://schemas.microsoft.com/office/drawing/2014/main" id="{00D211EB-1274-4938-8627-911201A61609}"/>
+                <a16:creationId xmlns:a16="http://schemas.microsoft.com/office/drawing/2014/main" id="{BF3AD8F4-AB9D-4CD2-9443-82CA9922B333}"/>
               </a:ext>
             </a:extLst>
           </p:cNvPr>
@@ -5919,7 +5919,7 @@
           <p:cNvPr id="15" name="">
             <a:extLst xmlns:a="http://schemas.openxmlformats.org/drawingml/2006/main">
               <a:ext uri="{FF2B5EF4-FFF2-40B4-BE49-F238E27FC236}">
-                <a16:creationId xmlns:a16="http://schemas.microsoft.com/office/drawing/2014/main" id="{C2AEDAB0-A9FC-469A-9C72-4A7365940EAB}"/>
+                <a16:creationId xmlns:a16="http://schemas.microsoft.com/office/drawing/2014/main" id="{0E5CE7A4-F4E7-4AFD-8574-251B1EC938CA}"/>
               </a:ext>
             </a:extLst>
           </p:cNvPr>
@@ -5983,7 +5983,7 @@
           <p:cNvPr id="16" name="">
             <a:extLst xmlns:a="http://schemas.openxmlformats.org/drawingml/2006/main">
               <a:ext uri="{FF2B5EF4-FFF2-40B4-BE49-F238E27FC236}">
-                <a16:creationId xmlns:a16="http://schemas.microsoft.com/office/drawing/2014/main" id="{41C5AB5B-E681-421D-AC8A-F3C7CE25579A}"/>
+                <a16:creationId xmlns:a16="http://schemas.microsoft.com/office/drawing/2014/main" id="{FE0E0558-EA99-431A-BCF6-1CCB4170A004}"/>
               </a:ext>
             </a:extLst>
           </p:cNvPr>
@@ -6018,7 +6018,7 @@
           <p:cNvPr id="17" name="">
             <a:extLst xmlns:a="http://schemas.openxmlformats.org/drawingml/2006/main">
               <a:ext uri="{FF2B5EF4-FFF2-40B4-BE49-F238E27FC236}">
-                <a16:creationId xmlns:a16="http://schemas.microsoft.com/office/drawing/2014/main" id="{C0F8A4AB-CD24-4185-92A6-F017EA21B894}"/>
+                <a16:creationId xmlns:a16="http://schemas.microsoft.com/office/drawing/2014/main" id="{ECBD4009-D9AE-46B9-BB63-15B1A51E373B}"/>
               </a:ext>
             </a:extLst>
           </p:cNvPr>
@@ -6082,7 +6082,7 @@
           <p:cNvPr id="18" name="">
             <a:extLst xmlns:a="http://schemas.openxmlformats.org/drawingml/2006/main">
               <a:ext uri="{FF2B5EF4-FFF2-40B4-BE49-F238E27FC236}">
-                <a16:creationId xmlns:a16="http://schemas.microsoft.com/office/drawing/2014/main" id="{B3263361-8C78-4744-9320-DA1D04D1228D}"/>
+                <a16:creationId xmlns:a16="http://schemas.microsoft.com/office/drawing/2014/main" id="{D3B8361B-2887-4068-B0F5-4C205CEF9AE1}"/>
               </a:ext>
             </a:extLst>
           </p:cNvPr>
@@ -6146,7 +6146,7 @@
           <p:cNvPr id="19" name="">
             <a:extLst xmlns:a="http://schemas.openxmlformats.org/drawingml/2006/main">
               <a:ext uri="{FF2B5EF4-FFF2-40B4-BE49-F238E27FC236}">
-                <a16:creationId xmlns:a16="http://schemas.microsoft.com/office/drawing/2014/main" id="{4C709D58-CD5B-445F-9549-DE60993ECB73}"/>
+                <a16:creationId xmlns:a16="http://schemas.microsoft.com/office/drawing/2014/main" id="{5FA6D37C-E2A0-47C6-BB95-7CF0E3A40589}"/>
               </a:ext>
             </a:extLst>
           </p:cNvPr>
@@ -6181,7 +6181,7 @@
           <p:cNvPr id="20" name="">
             <a:extLst xmlns:a="http://schemas.openxmlformats.org/drawingml/2006/main">
               <a:ext uri="{FF2B5EF4-FFF2-40B4-BE49-F238E27FC236}">
-                <a16:creationId xmlns:a16="http://schemas.microsoft.com/office/drawing/2014/main" id="{0D133687-A3CF-4E16-85BE-83C457A730DD}"/>
+                <a16:creationId xmlns:a16="http://schemas.microsoft.com/office/drawing/2014/main" id="{32EB8998-F025-4C48-97D9-853E681116C1}"/>
               </a:ext>
             </a:extLst>
           </p:cNvPr>
@@ -6245,7 +6245,7 @@
           <p:cNvPr id="21" name="">
             <a:extLst xmlns:a="http://schemas.openxmlformats.org/drawingml/2006/main">
               <a:ext uri="{FF2B5EF4-FFF2-40B4-BE49-F238E27FC236}">
-                <a16:creationId xmlns:a16="http://schemas.microsoft.com/office/drawing/2014/main" id="{1410CA3D-B611-4DEF-8C12-C804F6F6F974}"/>
+                <a16:creationId xmlns:a16="http://schemas.microsoft.com/office/drawing/2014/main" id="{60E556A1-C39A-4DAB-A1D7-F53208090A6B}"/>
               </a:ext>
             </a:extLst>
           </p:cNvPr>
@@ -6309,7 +6309,7 @@
           <p:cNvPr id="22" name="">
             <a:extLst xmlns:a="http://schemas.openxmlformats.org/drawingml/2006/main">
               <a:ext uri="{FF2B5EF4-FFF2-40B4-BE49-F238E27FC236}">
-                <a16:creationId xmlns:a16="http://schemas.microsoft.com/office/drawing/2014/main" id="{FDA15E1F-5281-4C9B-A790-322DD5834836}"/>
+                <a16:creationId xmlns:a16="http://schemas.microsoft.com/office/drawing/2014/main" id="{E8297FB0-9C24-49F1-971E-4E7ED29832C0}"/>
               </a:ext>
             </a:extLst>
           </p:cNvPr>
@@ -6342,7 +6342,7 @@
           <p:cNvPr id="23" name="">
             <a:extLst xmlns:a="http://schemas.openxmlformats.org/drawingml/2006/main">
               <a:ext uri="{FF2B5EF4-FFF2-40B4-BE49-F238E27FC236}">
-                <a16:creationId xmlns:a16="http://schemas.microsoft.com/office/drawing/2014/main" id="{C221CEC5-5346-46C9-BFF3-05895FAE9705}"/>
+                <a16:creationId xmlns:a16="http://schemas.microsoft.com/office/drawing/2014/main" id="{0E71D8EA-E047-4326-9F07-937B5AA04DBB}"/>
               </a:ext>
             </a:extLst>
           </p:cNvPr>
@@ -6406,7 +6406,7 @@
           <p:cNvPr id="24" name="">
             <a:extLst xmlns:a="http://schemas.openxmlformats.org/drawingml/2006/main">
               <a:ext uri="{FF2B5EF4-FFF2-40B4-BE49-F238E27FC236}">
-                <a16:creationId xmlns:a16="http://schemas.microsoft.com/office/drawing/2014/main" id="{01EF150C-E33E-4A1E-A698-F09A74EEDDFD}"/>
+                <a16:creationId xmlns:a16="http://schemas.microsoft.com/office/drawing/2014/main" id="{C43A1EEB-57A6-48F4-BDA4-57D344023E37}"/>
               </a:ext>
             </a:extLst>
           </p:cNvPr>
@@ -6468,7 +6468,7 @@
     </p:spTree>
     <p:extLst>
       <p:ext uri="{BB962C8B-B14F-4D97-AF65-F5344CB8AC3E}">
-        <p14:creationId xmlns:p14="http://schemas.microsoft.com/office/powerpoint/2010/main" val="1695256206"/>
+        <p14:creationId xmlns:p14="http://schemas.microsoft.com/office/powerpoint/2010/main" val="2113888146"/>
       </p:ext>
     </p:extLst>
   </p:cSld>
@@ -6496,7 +6496,7 @@
           <p:nvPr/>
         </p:nvPicPr>
         <p:blipFill>
-          <a:blip xmlns:r="http://schemas.openxmlformats.org/officeDocument/2006/relationships" xmlns:a="http://schemas.openxmlformats.org/drawingml/2006/main" r:embed="R899af9cda92e44bf"/>
+          <a:blip xmlns:r="http://schemas.openxmlformats.org/officeDocument/2006/relationships" xmlns:a="http://schemas.openxmlformats.org/drawingml/2006/main" r:embed="R9d736863464940b5"/>
           <a:srcRect xmlns:a="http://schemas.openxmlformats.org/drawingml/2006/main" l="0" t="27" r="0" b="27"/>
           <a:stretch xmlns:a="http://schemas.openxmlformats.org/drawingml/2006/main">
             <a:fillRect l="0" t="0" r="0" b="0"/>
@@ -6517,7 +6517,7 @@
           <p:cNvPr id="2" name="">
             <a:extLst xmlns:a="http://schemas.openxmlformats.org/drawingml/2006/main">
               <a:ext uri="{FF2B5EF4-FFF2-40B4-BE49-F238E27FC236}">
-                <a16:creationId xmlns:a16="http://schemas.microsoft.com/office/drawing/2014/main" id="{06B22F54-D18F-44AA-B7E1-F5BE23515387}"/>
+                <a16:creationId xmlns:a16="http://schemas.microsoft.com/office/drawing/2014/main" id="{489437F2-8CFB-425D-B992-2382EC737EBB}"/>
               </a:ext>
             </a:extLst>
           </p:cNvPr>
@@ -6554,7 +6554,7 @@
           <p:cNvPr id="3" name="">
             <a:extLst xmlns:a="http://schemas.openxmlformats.org/drawingml/2006/main">
               <a:ext uri="{FF2B5EF4-FFF2-40B4-BE49-F238E27FC236}">
-                <a16:creationId xmlns:a16="http://schemas.microsoft.com/office/drawing/2014/main" id="{44780F2A-8F61-45A8-820C-8C8A8FBAEEB3}"/>
+                <a16:creationId xmlns:a16="http://schemas.microsoft.com/office/drawing/2014/main" id="{AEF3248E-031A-4C10-9C5F-F053AADB7B4B}"/>
               </a:ext>
             </a:extLst>
           </p:cNvPr>
@@ -6591,7 +6591,7 @@
           <p:cNvPr id="4" name="">
             <a:extLst xmlns:a="http://schemas.openxmlformats.org/drawingml/2006/main">
               <a:ext uri="{FF2B5EF4-FFF2-40B4-BE49-F238E27FC236}">
-                <a16:creationId xmlns:a16="http://schemas.microsoft.com/office/drawing/2014/main" id="{93592253-623C-424B-95C1-7912B001F757}"/>
+                <a16:creationId xmlns:a16="http://schemas.microsoft.com/office/drawing/2014/main" id="{E2E6AA8B-D59E-4116-9629-E3B15756B145}"/>
               </a:ext>
             </a:extLst>
           </p:cNvPr>
@@ -6655,7 +6655,7 @@
           <p:cNvPr id="5" name="">
             <a:extLst xmlns:a="http://schemas.openxmlformats.org/drawingml/2006/main">
               <a:ext uri="{FF2B5EF4-FFF2-40B4-BE49-F238E27FC236}">
-                <a16:creationId xmlns:a16="http://schemas.microsoft.com/office/drawing/2014/main" id="{7F31B240-5749-4563-B221-6DE9FB55B924}"/>
+                <a16:creationId xmlns:a16="http://schemas.microsoft.com/office/drawing/2014/main" id="{2CDAB92F-34BF-4A97-9922-CBF33E6F1549}"/>
               </a:ext>
             </a:extLst>
           </p:cNvPr>
@@ -6719,7 +6719,7 @@
           <p:cNvPr id="6" name="">
             <a:extLst xmlns:a="http://schemas.openxmlformats.org/drawingml/2006/main">
               <a:ext uri="{FF2B5EF4-FFF2-40B4-BE49-F238E27FC236}">
-                <a16:creationId xmlns:a16="http://schemas.microsoft.com/office/drawing/2014/main" id="{56E1FD97-84FC-42F4-92D7-2DC5CF8C7797}"/>
+                <a16:creationId xmlns:a16="http://schemas.microsoft.com/office/drawing/2014/main" id="{0FD3559F-26E7-4059-A142-1D87FE101FF8}"/>
               </a:ext>
             </a:extLst>
           </p:cNvPr>
@@ -6783,7 +6783,7 @@
           <p:cNvPr id="7" name="">
             <a:extLst xmlns:a="http://schemas.openxmlformats.org/drawingml/2006/main">
               <a:ext uri="{FF2B5EF4-FFF2-40B4-BE49-F238E27FC236}">
-                <a16:creationId xmlns:a16="http://schemas.microsoft.com/office/drawing/2014/main" id="{B63BED8E-079E-441D-87B8-A6B2EEB2F5C8}"/>
+                <a16:creationId xmlns:a16="http://schemas.microsoft.com/office/drawing/2014/main" id="{A4257BA9-72E4-4677-8A3C-99C0F777F6EE}"/>
               </a:ext>
             </a:extLst>
           </p:cNvPr>
@@ -6818,7 +6818,7 @@
           <p:cNvPr id="8" name="">
             <a:extLst xmlns:a="http://schemas.openxmlformats.org/drawingml/2006/main">
               <a:ext uri="{FF2B5EF4-FFF2-40B4-BE49-F238E27FC236}">
-                <a16:creationId xmlns:a16="http://schemas.microsoft.com/office/drawing/2014/main" id="{1ED90236-F8F9-4B98-A6CA-1E98C2737412}"/>
+                <a16:creationId xmlns:a16="http://schemas.microsoft.com/office/drawing/2014/main" id="{26C108A5-F990-4E4D-853A-EAFB632639AA}"/>
               </a:ext>
             </a:extLst>
           </p:cNvPr>
@@ -6882,7 +6882,7 @@
           <p:cNvPr id="9" name="">
             <a:extLst xmlns:a="http://schemas.openxmlformats.org/drawingml/2006/main">
               <a:ext uri="{FF2B5EF4-FFF2-40B4-BE49-F238E27FC236}">
-                <a16:creationId xmlns:a16="http://schemas.microsoft.com/office/drawing/2014/main" id="{F9FA096F-85CB-4FFE-B445-51A9A9D9B15A}"/>
+                <a16:creationId xmlns:a16="http://schemas.microsoft.com/office/drawing/2014/main" id="{ED07DECF-65A3-4C49-910C-C55C349D1FC2}"/>
               </a:ext>
             </a:extLst>
           </p:cNvPr>
@@ -6946,7 +6946,7 @@
           <p:cNvPr id="10" name="">
             <a:extLst xmlns:a="http://schemas.openxmlformats.org/drawingml/2006/main">
               <a:ext uri="{FF2B5EF4-FFF2-40B4-BE49-F238E27FC236}">
-                <a16:creationId xmlns:a16="http://schemas.microsoft.com/office/drawing/2014/main" id="{C91BBFA0-A71F-4089-8626-D7D3608C4BD1}"/>
+                <a16:creationId xmlns:a16="http://schemas.microsoft.com/office/drawing/2014/main" id="{8F483360-69B4-4030-91F6-71DB6348941E}"/>
               </a:ext>
             </a:extLst>
           </p:cNvPr>
@@ -6979,7 +6979,7 @@
           <p:cNvPr id="11" name="">
             <a:extLst xmlns:a="http://schemas.openxmlformats.org/drawingml/2006/main">
               <a:ext uri="{FF2B5EF4-FFF2-40B4-BE49-F238E27FC236}">
-                <a16:creationId xmlns:a16="http://schemas.microsoft.com/office/drawing/2014/main" id="{44365BE3-3701-4B48-B0A2-B6042F6423DC}"/>
+                <a16:creationId xmlns:a16="http://schemas.microsoft.com/office/drawing/2014/main" id="{3F8892B1-9276-4B5E-9834-4530057E2A5C}"/>
               </a:ext>
             </a:extLst>
           </p:cNvPr>
@@ -7014,7 +7014,7 @@
           <p:cNvPr id="12" name="">
             <a:extLst xmlns:a="http://schemas.openxmlformats.org/drawingml/2006/main">
               <a:ext uri="{FF2B5EF4-FFF2-40B4-BE49-F238E27FC236}">
-                <a16:creationId xmlns:a16="http://schemas.microsoft.com/office/drawing/2014/main" id="{B884A32D-7446-4BC1-9DA6-F428A6CCE036}"/>
+                <a16:creationId xmlns:a16="http://schemas.microsoft.com/office/drawing/2014/main" id="{78EAEB68-2DD0-4BA9-B7A5-F187BE5EB55B}"/>
               </a:ext>
             </a:extLst>
           </p:cNvPr>
@@ -7078,7 +7078,7 @@
           <p:cNvPr id="13" name="">
             <a:extLst xmlns:a="http://schemas.openxmlformats.org/drawingml/2006/main">
               <a:ext uri="{FF2B5EF4-FFF2-40B4-BE49-F238E27FC236}">
-                <a16:creationId xmlns:a16="http://schemas.microsoft.com/office/drawing/2014/main" id="{415A67CB-5DDA-4883-95CC-380BBB1DB19F}"/>
+                <a16:creationId xmlns:a16="http://schemas.microsoft.com/office/drawing/2014/main" id="{142EE073-8126-4686-8919-5558E7719BFB}"/>
               </a:ext>
             </a:extLst>
           </p:cNvPr>
@@ -7142,7 +7142,7 @@
           <p:cNvPr id="14" name="">
             <a:extLst xmlns:a="http://schemas.openxmlformats.org/drawingml/2006/main">
               <a:ext uri="{FF2B5EF4-FFF2-40B4-BE49-F238E27FC236}">
-                <a16:creationId xmlns:a16="http://schemas.microsoft.com/office/drawing/2014/main" id="{BA442233-5774-4AC1-AB13-977A590DFA6B}"/>
+                <a16:creationId xmlns:a16="http://schemas.microsoft.com/office/drawing/2014/main" id="{4F45277C-AE79-478F-B4BC-27CE29DFCE4B}"/>
               </a:ext>
             </a:extLst>
           </p:cNvPr>
@@ -7175,7 +7175,7 @@
           <p:cNvPr id="15" name="">
             <a:extLst xmlns:a="http://schemas.openxmlformats.org/drawingml/2006/main">
               <a:ext uri="{FF2B5EF4-FFF2-40B4-BE49-F238E27FC236}">
-                <a16:creationId xmlns:a16="http://schemas.microsoft.com/office/drawing/2014/main" id="{36828D4E-4151-4A01-A6D2-ECCCA8703388}"/>
+                <a16:creationId xmlns:a16="http://schemas.microsoft.com/office/drawing/2014/main" id="{8C92B42A-691D-432F-8B91-E8ADD2B02C96}"/>
               </a:ext>
             </a:extLst>
           </p:cNvPr>
@@ -7210,7 +7210,7 @@
           <p:cNvPr id="16" name="">
             <a:extLst xmlns:a="http://schemas.openxmlformats.org/drawingml/2006/main">
               <a:ext uri="{FF2B5EF4-FFF2-40B4-BE49-F238E27FC236}">
-                <a16:creationId xmlns:a16="http://schemas.microsoft.com/office/drawing/2014/main" id="{1B793269-5BCC-42B9-8FA8-54FE36B4263E}"/>
+                <a16:creationId xmlns:a16="http://schemas.microsoft.com/office/drawing/2014/main" id="{6D5C5034-6AAE-4778-B5FA-BAFF8DE436F7}"/>
               </a:ext>
             </a:extLst>
           </p:cNvPr>
@@ -7274,7 +7274,7 @@
           <p:cNvPr id="17" name="">
             <a:extLst xmlns:a="http://schemas.openxmlformats.org/drawingml/2006/main">
               <a:ext uri="{FF2B5EF4-FFF2-40B4-BE49-F238E27FC236}">
-                <a16:creationId xmlns:a16="http://schemas.microsoft.com/office/drawing/2014/main" id="{5F9CE60C-B5D2-4DDB-97A1-BADF6CCB19B2}"/>
+                <a16:creationId xmlns:a16="http://schemas.microsoft.com/office/drawing/2014/main" id="{79429E68-65AF-4E75-8E55-903ED5B4C3D8}"/>
               </a:ext>
             </a:extLst>
           </p:cNvPr>
@@ -7338,7 +7338,7 @@
           <p:cNvPr id="18" name="">
             <a:extLst xmlns:a="http://schemas.openxmlformats.org/drawingml/2006/main">
               <a:ext uri="{FF2B5EF4-FFF2-40B4-BE49-F238E27FC236}">
-                <a16:creationId xmlns:a16="http://schemas.microsoft.com/office/drawing/2014/main" id="{CE3B618F-E9EF-44AD-96B8-EA2A14FE1E7C}"/>
+                <a16:creationId xmlns:a16="http://schemas.microsoft.com/office/drawing/2014/main" id="{4D2A5B0C-624D-4707-AB46-018C215B0BD4}"/>
               </a:ext>
             </a:extLst>
           </p:cNvPr>
@@ -7402,7 +7402,7 @@
           <p:cNvPr id="19" name="">
             <a:extLst xmlns:a="http://schemas.openxmlformats.org/drawingml/2006/main">
               <a:ext uri="{FF2B5EF4-FFF2-40B4-BE49-F238E27FC236}">
-                <a16:creationId xmlns:a16="http://schemas.microsoft.com/office/drawing/2014/main" id="{1850F866-DC6D-49B4-8EB1-881E1C46AFC1}"/>
+                <a16:creationId xmlns:a16="http://schemas.microsoft.com/office/drawing/2014/main" id="{18AC9A7A-F701-42FF-8958-C376E8992937}"/>
               </a:ext>
             </a:extLst>
           </p:cNvPr>
@@ -7435,7 +7435,7 @@
           <p:cNvPr id="20" name="">
             <a:extLst xmlns:a="http://schemas.openxmlformats.org/drawingml/2006/main">
               <a:ext uri="{FF2B5EF4-FFF2-40B4-BE49-F238E27FC236}">
-                <a16:creationId xmlns:a16="http://schemas.microsoft.com/office/drawing/2014/main" id="{A28CCA08-E2AD-4701-9E39-1F38DE39466D}"/>
+                <a16:creationId xmlns:a16="http://schemas.microsoft.com/office/drawing/2014/main" id="{AD79466E-FE47-418C-9765-AFE9B2CFDA20}"/>
               </a:ext>
             </a:extLst>
           </p:cNvPr>
@@ -7499,7 +7499,7 @@
           <p:cNvPr id="21" name="">
             <a:extLst xmlns:a="http://schemas.openxmlformats.org/drawingml/2006/main">
               <a:ext uri="{FF2B5EF4-FFF2-40B4-BE49-F238E27FC236}">
-                <a16:creationId xmlns:a16="http://schemas.microsoft.com/office/drawing/2014/main" id="{8D7BCBF6-C282-4BFA-A1CB-1B583F7367F8}"/>
+                <a16:creationId xmlns:a16="http://schemas.microsoft.com/office/drawing/2014/main" id="{F1D418CF-54B5-4421-AAD0-6E08BE1E7E2B}"/>
               </a:ext>
             </a:extLst>
           </p:cNvPr>
@@ -7561,7 +7561,7 @@
     </p:spTree>
     <p:extLst>
       <p:ext uri="{BB962C8B-B14F-4D97-AF65-F5344CB8AC3E}">
-        <p14:creationId xmlns:p14="http://schemas.microsoft.com/office/powerpoint/2010/main" val="1064527183"/>
+        <p14:creationId xmlns:p14="http://schemas.microsoft.com/office/powerpoint/2010/main" val="1051078566"/>
       </p:ext>
     </p:extLst>
   </p:cSld>
@@ -7589,7 +7589,7 @@
           <p:nvPr/>
         </p:nvPicPr>
         <p:blipFill>
-          <a:blip xmlns:r="http://schemas.openxmlformats.org/officeDocument/2006/relationships" xmlns:a="http://schemas.openxmlformats.org/drawingml/2006/main" r:embed="Ra89d313bc8ab4e7d"/>
+          <a:blip xmlns:r="http://schemas.openxmlformats.org/officeDocument/2006/relationships" xmlns:a="http://schemas.openxmlformats.org/drawingml/2006/main" r:embed="R8d269997407f424d"/>
           <a:srcRect xmlns:a="http://schemas.openxmlformats.org/drawingml/2006/main" l="0" t="27" r="0" b="27"/>
           <a:stretch xmlns:a="http://schemas.openxmlformats.org/drawingml/2006/main">
             <a:fillRect l="0" t="0" r="0" b="0"/>
@@ -7610,7 +7610,7 @@
           <p:cNvPr id="2" name="">
             <a:extLst xmlns:a="http://schemas.openxmlformats.org/drawingml/2006/main">
               <a:ext uri="{FF2B5EF4-FFF2-40B4-BE49-F238E27FC236}">
-                <a16:creationId xmlns:a16="http://schemas.microsoft.com/office/drawing/2014/main" id="{827D8F90-3020-45F6-AE8F-0981465E0498}"/>
+                <a16:creationId xmlns:a16="http://schemas.microsoft.com/office/drawing/2014/main" id="{58DAB6EC-A8B2-46DB-B08D-AC644AFF24F6}"/>
               </a:ext>
             </a:extLst>
           </p:cNvPr>
@@ -7647,7 +7647,7 @@
           <p:cNvPr id="3" name="">
             <a:extLst xmlns:a="http://schemas.openxmlformats.org/drawingml/2006/main">
               <a:ext uri="{FF2B5EF4-FFF2-40B4-BE49-F238E27FC236}">
-                <a16:creationId xmlns:a16="http://schemas.microsoft.com/office/drawing/2014/main" id="{A12CAD25-E579-4978-AD35-9145B1612C51}"/>
+                <a16:creationId xmlns:a16="http://schemas.microsoft.com/office/drawing/2014/main" id="{901DA4B8-6307-4435-B432-57859103DB5E}"/>
               </a:ext>
             </a:extLst>
           </p:cNvPr>
@@ -7684,7 +7684,7 @@
           <p:cNvPr id="4" name="">
             <a:extLst xmlns:a="http://schemas.openxmlformats.org/drawingml/2006/main">
               <a:ext uri="{FF2B5EF4-FFF2-40B4-BE49-F238E27FC236}">
-                <a16:creationId xmlns:a16="http://schemas.microsoft.com/office/drawing/2014/main" id="{9D437073-3207-43A9-9F88-9BEE054A7F3D}"/>
+                <a16:creationId xmlns:a16="http://schemas.microsoft.com/office/drawing/2014/main" id="{55C88AF1-2464-4814-9CE8-34CCCE1F7FEE}"/>
               </a:ext>
             </a:extLst>
           </p:cNvPr>
@@ -7748,7 +7748,7 @@
           <p:cNvPr id="5" name="">
             <a:extLst xmlns:a="http://schemas.openxmlformats.org/drawingml/2006/main">
               <a:ext uri="{FF2B5EF4-FFF2-40B4-BE49-F238E27FC236}">
-                <a16:creationId xmlns:a16="http://schemas.microsoft.com/office/drawing/2014/main" id="{4982B804-0044-4CAF-B2FD-97EC049E305E}"/>
+                <a16:creationId xmlns:a16="http://schemas.microsoft.com/office/drawing/2014/main" id="{DECA2A55-41C8-4EA8-ADDB-4758B97CEC08}"/>
               </a:ext>
             </a:extLst>
           </p:cNvPr>
@@ -7812,7 +7812,7 @@
           <p:cNvPr id="6" name="">
             <a:extLst xmlns:a="http://schemas.openxmlformats.org/drawingml/2006/main">
               <a:ext uri="{FF2B5EF4-FFF2-40B4-BE49-F238E27FC236}">
-                <a16:creationId xmlns:a16="http://schemas.microsoft.com/office/drawing/2014/main" id="{CB65949D-1BA7-4C1E-8FAA-BDBBD77A0345}"/>
+                <a16:creationId xmlns:a16="http://schemas.microsoft.com/office/drawing/2014/main" id="{DC59D78B-332E-4BCE-9E0B-83D55ECB902A}"/>
               </a:ext>
             </a:extLst>
           </p:cNvPr>
@@ -7876,7 +7876,7 @@
           <p:cNvPr id="7" name="">
             <a:extLst xmlns:a="http://schemas.openxmlformats.org/drawingml/2006/main">
               <a:ext uri="{FF2B5EF4-FFF2-40B4-BE49-F238E27FC236}">
-                <a16:creationId xmlns:a16="http://schemas.microsoft.com/office/drawing/2014/main" id="{B0465978-905E-41D4-8EE6-E412BD56A87E}"/>
+                <a16:creationId xmlns:a16="http://schemas.microsoft.com/office/drawing/2014/main" id="{4575B659-4A67-4A9A-A066-DCE1EE01072D}"/>
               </a:ext>
             </a:extLst>
           </p:cNvPr>
@@ -7911,7 +7911,7 @@
           <p:cNvPr id="8" name="">
             <a:extLst xmlns:a="http://schemas.openxmlformats.org/drawingml/2006/main">
               <a:ext uri="{FF2B5EF4-FFF2-40B4-BE49-F238E27FC236}">
-                <a16:creationId xmlns:a16="http://schemas.microsoft.com/office/drawing/2014/main" id="{BB24F372-72DA-4596-B6BD-57E26A60B1FA}"/>
+                <a16:creationId xmlns:a16="http://schemas.microsoft.com/office/drawing/2014/main" id="{82F203B7-D75E-4BD5-9C04-F5FEB4EFC1C0}"/>
               </a:ext>
             </a:extLst>
           </p:cNvPr>
@@ -7975,7 +7975,7 @@
           <p:cNvPr id="9" name="">
             <a:extLst xmlns:a="http://schemas.openxmlformats.org/drawingml/2006/main">
               <a:ext uri="{FF2B5EF4-FFF2-40B4-BE49-F238E27FC236}">
-                <a16:creationId xmlns:a16="http://schemas.microsoft.com/office/drawing/2014/main" id="{CED02311-A1C5-497F-9015-B56D5BD76229}"/>
+                <a16:creationId xmlns:a16="http://schemas.microsoft.com/office/drawing/2014/main" id="{DD6D5FD3-B3AA-403F-B902-FDC2B20DC760}"/>
               </a:ext>
             </a:extLst>
           </p:cNvPr>
@@ -8039,7 +8039,7 @@
           <p:cNvPr id="10" name="">
             <a:extLst xmlns:a="http://schemas.openxmlformats.org/drawingml/2006/main">
               <a:ext uri="{FF2B5EF4-FFF2-40B4-BE49-F238E27FC236}">
-                <a16:creationId xmlns:a16="http://schemas.microsoft.com/office/drawing/2014/main" id="{BCB463D3-622B-45CC-824C-8BE6824624E3}"/>
+                <a16:creationId xmlns:a16="http://schemas.microsoft.com/office/drawing/2014/main" id="{D071AFE6-4C43-4024-8525-2A7C33075BD2}"/>
               </a:ext>
             </a:extLst>
           </p:cNvPr>
@@ -8074,7 +8074,7 @@
           <p:cNvPr id="11" name="">
             <a:extLst xmlns:a="http://schemas.openxmlformats.org/drawingml/2006/main">
               <a:ext uri="{FF2B5EF4-FFF2-40B4-BE49-F238E27FC236}">
-                <a16:creationId xmlns:a16="http://schemas.microsoft.com/office/drawing/2014/main" id="{52573B21-11E2-4085-BB3A-64371CF3EE9E}"/>
+                <a16:creationId xmlns:a16="http://schemas.microsoft.com/office/drawing/2014/main" id="{FEC56983-C73B-4AA1-873E-6985E13514CF}"/>
               </a:ext>
             </a:extLst>
           </p:cNvPr>
@@ -8138,7 +8138,7 @@
           <p:cNvPr id="12" name="">
             <a:extLst xmlns:a="http://schemas.openxmlformats.org/drawingml/2006/main">
               <a:ext uri="{FF2B5EF4-FFF2-40B4-BE49-F238E27FC236}">
-                <a16:creationId xmlns:a16="http://schemas.microsoft.com/office/drawing/2014/main" id="{B33E2A8D-5138-4569-B97C-1CA06BDA4639}"/>
+                <a16:creationId xmlns:a16="http://schemas.microsoft.com/office/drawing/2014/main" id="{B34C4CF0-D630-496F-9723-A279DBDB6B23}"/>
               </a:ext>
             </a:extLst>
           </p:cNvPr>
@@ -8202,7 +8202,7 @@
           <p:cNvPr id="13" name="">
             <a:extLst xmlns:a="http://schemas.openxmlformats.org/drawingml/2006/main">
               <a:ext uri="{FF2B5EF4-FFF2-40B4-BE49-F238E27FC236}">
-                <a16:creationId xmlns:a16="http://schemas.microsoft.com/office/drawing/2014/main" id="{11374FC3-0BA3-4C12-9EEF-9880D22165B6}"/>
+                <a16:creationId xmlns:a16="http://schemas.microsoft.com/office/drawing/2014/main" id="{B43343E8-7230-482D-9CA7-1E75DC519848}"/>
               </a:ext>
             </a:extLst>
           </p:cNvPr>
@@ -8237,7 +8237,7 @@
           <p:cNvPr id="14" name="">
             <a:extLst xmlns:a="http://schemas.openxmlformats.org/drawingml/2006/main">
               <a:ext uri="{FF2B5EF4-FFF2-40B4-BE49-F238E27FC236}">
-                <a16:creationId xmlns:a16="http://schemas.microsoft.com/office/drawing/2014/main" id="{90D25A08-6476-4937-9D5C-A46446A57BBF}"/>
+                <a16:creationId xmlns:a16="http://schemas.microsoft.com/office/drawing/2014/main" id="{6B0260F2-8EBD-4274-A856-69DE64ECB49E}"/>
               </a:ext>
             </a:extLst>
           </p:cNvPr>
@@ -8301,7 +8301,7 @@
           <p:cNvPr id="15" name="">
             <a:extLst xmlns:a="http://schemas.openxmlformats.org/drawingml/2006/main">
               <a:ext uri="{FF2B5EF4-FFF2-40B4-BE49-F238E27FC236}">
-                <a16:creationId xmlns:a16="http://schemas.microsoft.com/office/drawing/2014/main" id="{6DA7402D-BD85-4CC7-827D-F4255DF77D08}"/>
+                <a16:creationId xmlns:a16="http://schemas.microsoft.com/office/drawing/2014/main" id="{9DF274F1-4071-4621-B5F9-47816F9DAC18}"/>
               </a:ext>
             </a:extLst>
           </p:cNvPr>
@@ -8365,7 +8365,7 @@
           <p:cNvPr id="16" name="">
             <a:extLst xmlns:a="http://schemas.openxmlformats.org/drawingml/2006/main">
               <a:ext uri="{FF2B5EF4-FFF2-40B4-BE49-F238E27FC236}">
-                <a16:creationId xmlns:a16="http://schemas.microsoft.com/office/drawing/2014/main" id="{CFC91E58-1077-4021-835E-7B9CF21A8D5E}"/>
+                <a16:creationId xmlns:a16="http://schemas.microsoft.com/office/drawing/2014/main" id="{4F98CC6E-15F9-4F87-B619-21A14A15479F}"/>
               </a:ext>
             </a:extLst>
           </p:cNvPr>
@@ -8400,7 +8400,7 @@
           <p:cNvPr id="17" name="">
             <a:extLst xmlns:a="http://schemas.openxmlformats.org/drawingml/2006/main">
               <a:ext uri="{FF2B5EF4-FFF2-40B4-BE49-F238E27FC236}">
-                <a16:creationId xmlns:a16="http://schemas.microsoft.com/office/drawing/2014/main" id="{3FC56C28-6CD4-4F26-8F28-0674704B233B}"/>
+                <a16:creationId xmlns:a16="http://schemas.microsoft.com/office/drawing/2014/main" id="{B1188936-224A-41CA-A854-C894BEF50EB0}"/>
               </a:ext>
             </a:extLst>
           </p:cNvPr>
@@ -8464,7 +8464,7 @@
           <p:cNvPr id="18" name="">
             <a:extLst xmlns:a="http://schemas.openxmlformats.org/drawingml/2006/main">
               <a:ext uri="{FF2B5EF4-FFF2-40B4-BE49-F238E27FC236}">
-                <a16:creationId xmlns:a16="http://schemas.microsoft.com/office/drawing/2014/main" id="{C3ED978D-834A-4D0F-A6EC-154559517F5B}"/>
+                <a16:creationId xmlns:a16="http://schemas.microsoft.com/office/drawing/2014/main" id="{EF642F58-A8DD-476F-9D8F-F632456CA04F}"/>
               </a:ext>
             </a:extLst>
           </p:cNvPr>
@@ -8528,7 +8528,7 @@
           <p:cNvPr id="19" name="">
             <a:extLst xmlns:a="http://schemas.openxmlformats.org/drawingml/2006/main">
               <a:ext uri="{FF2B5EF4-FFF2-40B4-BE49-F238E27FC236}">
-                <a16:creationId xmlns:a16="http://schemas.microsoft.com/office/drawing/2014/main" id="{006F0EE2-3A6E-475F-AA0B-EEF86E4A10D2}"/>
+                <a16:creationId xmlns:a16="http://schemas.microsoft.com/office/drawing/2014/main" id="{5B6FB6BF-B797-4479-8779-2950DEB90889}"/>
               </a:ext>
             </a:extLst>
           </p:cNvPr>
@@ -8592,7 +8592,7 @@
           <p:cNvPr id="20" name="">
             <a:extLst xmlns:a="http://schemas.openxmlformats.org/drawingml/2006/main">
               <a:ext uri="{FF2B5EF4-FFF2-40B4-BE49-F238E27FC236}">
-                <a16:creationId xmlns:a16="http://schemas.microsoft.com/office/drawing/2014/main" id="{0B5D0770-FF02-4A01-AF4A-3B7D9BD6450D}"/>
+                <a16:creationId xmlns:a16="http://schemas.microsoft.com/office/drawing/2014/main" id="{3BDF6DBD-13B0-4B94-BFA0-284D59F7369D}"/>
               </a:ext>
             </a:extLst>
           </p:cNvPr>
@@ -8625,7 +8625,7 @@
           <p:cNvPr id="21" name="">
             <a:extLst xmlns:a="http://schemas.openxmlformats.org/drawingml/2006/main">
               <a:ext uri="{FF2B5EF4-FFF2-40B4-BE49-F238E27FC236}">
-                <a16:creationId xmlns:a16="http://schemas.microsoft.com/office/drawing/2014/main" id="{A2C43F9E-875B-46E1-A0BD-BF177049BB21}"/>
+                <a16:creationId xmlns:a16="http://schemas.microsoft.com/office/drawing/2014/main" id="{AE5B6015-48F4-4384-BA4E-4FFF567CE25B}"/>
               </a:ext>
             </a:extLst>
           </p:cNvPr>
@@ -8658,7 +8658,7 @@
           <p:cNvPr id="22" name="">
             <a:extLst xmlns:a="http://schemas.openxmlformats.org/drawingml/2006/main">
               <a:ext uri="{FF2B5EF4-FFF2-40B4-BE49-F238E27FC236}">
-                <a16:creationId xmlns:a16="http://schemas.microsoft.com/office/drawing/2014/main" id="{EC1BDFFD-34AE-4778-B541-DC2D828C3410}"/>
+                <a16:creationId xmlns:a16="http://schemas.microsoft.com/office/drawing/2014/main" id="{26B829C5-B75F-4C25-930F-B0386D8650E6}"/>
               </a:ext>
             </a:extLst>
           </p:cNvPr>
@@ -8722,7 +8722,7 @@
           <p:cNvPr id="23" name="">
             <a:extLst xmlns:a="http://schemas.openxmlformats.org/drawingml/2006/main">
               <a:ext uri="{FF2B5EF4-FFF2-40B4-BE49-F238E27FC236}">
-                <a16:creationId xmlns:a16="http://schemas.microsoft.com/office/drawing/2014/main" id="{56C59E7F-3298-413F-81C7-553A846FA579}"/>
+                <a16:creationId xmlns:a16="http://schemas.microsoft.com/office/drawing/2014/main" id="{927051AD-5EEC-4904-9FAF-BE56F495A121}"/>
               </a:ext>
             </a:extLst>
           </p:cNvPr>
@@ -8755,7 +8755,7 @@
           <p:cNvPr id="24" name="">
             <a:extLst xmlns:a="http://schemas.openxmlformats.org/drawingml/2006/main">
               <a:ext uri="{FF2B5EF4-FFF2-40B4-BE49-F238E27FC236}">
-                <a16:creationId xmlns:a16="http://schemas.microsoft.com/office/drawing/2014/main" id="{6748B38F-82F2-4357-85FE-753DBC96C9E4}"/>
+                <a16:creationId xmlns:a16="http://schemas.microsoft.com/office/drawing/2014/main" id="{32FE4D4A-3A26-4EFA-8E6E-D93EB6BD4A9F}"/>
               </a:ext>
             </a:extLst>
           </p:cNvPr>
@@ -8788,7 +8788,7 @@
           <p:cNvPr id="25" name="">
             <a:extLst xmlns:a="http://schemas.openxmlformats.org/drawingml/2006/main">
               <a:ext uri="{FF2B5EF4-FFF2-40B4-BE49-F238E27FC236}">
-                <a16:creationId xmlns:a16="http://schemas.microsoft.com/office/drawing/2014/main" id="{7967E4B1-1FFE-4C46-A3E0-332CE6AAE4F8}"/>
+                <a16:creationId xmlns:a16="http://schemas.microsoft.com/office/drawing/2014/main" id="{7F459438-F7F0-419E-91F7-D7E2F4FED36E}"/>
               </a:ext>
             </a:extLst>
           </p:cNvPr>
@@ -8852,7 +8852,7 @@
           <p:cNvPr id="26" name="">
             <a:extLst xmlns:a="http://schemas.openxmlformats.org/drawingml/2006/main">
               <a:ext uri="{FF2B5EF4-FFF2-40B4-BE49-F238E27FC236}">
-                <a16:creationId xmlns:a16="http://schemas.microsoft.com/office/drawing/2014/main" id="{82438F64-D84F-4AC6-B39B-41745C5B2AE6}"/>
+                <a16:creationId xmlns:a16="http://schemas.microsoft.com/office/drawing/2014/main" id="{08B15516-23B4-4C19-9287-B60788DE7666}"/>
               </a:ext>
             </a:extLst>
           </p:cNvPr>
@@ -8885,7 +8885,7 @@
           <p:cNvPr id="27" name="">
             <a:extLst xmlns:a="http://schemas.openxmlformats.org/drawingml/2006/main">
               <a:ext uri="{FF2B5EF4-FFF2-40B4-BE49-F238E27FC236}">
-                <a16:creationId xmlns:a16="http://schemas.microsoft.com/office/drawing/2014/main" id="{E7E4AA18-41DA-4769-98CF-C8848E3EED89}"/>
+                <a16:creationId xmlns:a16="http://schemas.microsoft.com/office/drawing/2014/main" id="{3E9DC264-BC91-478A-AEBD-5AECA43179C3}"/>
               </a:ext>
             </a:extLst>
           </p:cNvPr>
@@ -8918,7 +8918,7 @@
           <p:cNvPr id="28" name="">
             <a:extLst xmlns:a="http://schemas.openxmlformats.org/drawingml/2006/main">
               <a:ext uri="{FF2B5EF4-FFF2-40B4-BE49-F238E27FC236}">
-                <a16:creationId xmlns:a16="http://schemas.microsoft.com/office/drawing/2014/main" id="{2A71FA2D-1AAD-4387-A3BC-B325D39E2848}"/>
+                <a16:creationId xmlns:a16="http://schemas.microsoft.com/office/drawing/2014/main" id="{933E257D-FB22-4AB9-B695-CE6DC81DFC13}"/>
               </a:ext>
             </a:extLst>
           </p:cNvPr>
@@ -8982,7 +8982,7 @@
           <p:cNvPr id="29" name="">
             <a:extLst xmlns:a="http://schemas.openxmlformats.org/drawingml/2006/main">
               <a:ext uri="{FF2B5EF4-FFF2-40B4-BE49-F238E27FC236}">
-                <a16:creationId xmlns:a16="http://schemas.microsoft.com/office/drawing/2014/main" id="{3C049217-B1B6-4F46-9BF7-6F67EFF55FF7}"/>
+                <a16:creationId xmlns:a16="http://schemas.microsoft.com/office/drawing/2014/main" id="{8B6D2CC8-A0B9-4593-A4D3-576C2CC39030}"/>
               </a:ext>
             </a:extLst>
           </p:cNvPr>
@@ -9015,7 +9015,7 @@
           <p:cNvPr id="30" name="">
             <a:extLst xmlns:a="http://schemas.openxmlformats.org/drawingml/2006/main">
               <a:ext uri="{FF2B5EF4-FFF2-40B4-BE49-F238E27FC236}">
-                <a16:creationId xmlns:a16="http://schemas.microsoft.com/office/drawing/2014/main" id="{E7E9B2CB-C07C-497A-97F9-6F28DAF7875D}"/>
+                <a16:creationId xmlns:a16="http://schemas.microsoft.com/office/drawing/2014/main" id="{08A76805-203F-4611-A8AC-54934DF25EFF}"/>
               </a:ext>
             </a:extLst>
           </p:cNvPr>
@@ -9079,7 +9079,7 @@
           <p:cNvPr id="31" name="">
             <a:extLst xmlns:a="http://schemas.openxmlformats.org/drawingml/2006/main">
               <a:ext uri="{FF2B5EF4-FFF2-40B4-BE49-F238E27FC236}">
-                <a16:creationId xmlns:a16="http://schemas.microsoft.com/office/drawing/2014/main" id="{1916A74E-30FA-476A-894D-454E40E989FA}"/>
+                <a16:creationId xmlns:a16="http://schemas.microsoft.com/office/drawing/2014/main" id="{F64BC68A-667E-499D-B198-EE3216062269}"/>
               </a:ext>
             </a:extLst>
           </p:cNvPr>
@@ -9141,7 +9141,7 @@
     </p:spTree>
     <p:extLst>
       <p:ext uri="{BB962C8B-B14F-4D97-AF65-F5344CB8AC3E}">
-        <p14:creationId xmlns:p14="http://schemas.microsoft.com/office/powerpoint/2010/main" val="1700041159"/>
+        <p14:creationId xmlns:p14="http://schemas.microsoft.com/office/powerpoint/2010/main" val="1247668284"/>
       </p:ext>
     </p:extLst>
   </p:cSld>
@@ -9169,7 +9169,7 @@
           <p:nvPr/>
         </p:nvPicPr>
         <p:blipFill>
-          <a:blip xmlns:r="http://schemas.openxmlformats.org/officeDocument/2006/relationships" xmlns:a="http://schemas.openxmlformats.org/drawingml/2006/main" r:embed="Rd0a280902b4245b2"/>
+          <a:blip xmlns:r="http://schemas.openxmlformats.org/officeDocument/2006/relationships" xmlns:a="http://schemas.openxmlformats.org/drawingml/2006/main" r:embed="R79e6838397a44327"/>
           <a:srcRect xmlns:a="http://schemas.openxmlformats.org/drawingml/2006/main" l="0" t="7813" r="0" b="7813"/>
           <a:stretch xmlns:a="http://schemas.openxmlformats.org/drawingml/2006/main">
             <a:fillRect l="0" t="0" r="0" b="0"/>
@@ -9190,7 +9190,7 @@
           <p:cNvPr id="2" name="">
             <a:extLst xmlns:a="http://schemas.openxmlformats.org/drawingml/2006/main">
               <a:ext uri="{FF2B5EF4-FFF2-40B4-BE49-F238E27FC236}">
-                <a16:creationId xmlns:a16="http://schemas.microsoft.com/office/drawing/2014/main" id="{85B16FC1-9D8B-475D-9F10-4F7EAE160582}"/>
+                <a16:creationId xmlns:a16="http://schemas.microsoft.com/office/drawing/2014/main" id="{98E63564-E449-4831-81AA-7E4CAC8A2D9D}"/>
               </a:ext>
             </a:extLst>
           </p:cNvPr>
@@ -9227,7 +9227,7 @@
           <p:cNvPr id="3" name="">
             <a:extLst xmlns:a="http://schemas.openxmlformats.org/drawingml/2006/main">
               <a:ext uri="{FF2B5EF4-FFF2-40B4-BE49-F238E27FC236}">
-                <a16:creationId xmlns:a16="http://schemas.microsoft.com/office/drawing/2014/main" id="{A53CA823-ABFB-4714-83FB-9080AE0597E4}"/>
+                <a16:creationId xmlns:a16="http://schemas.microsoft.com/office/drawing/2014/main" id="{FEC06D42-77C5-422D-823C-E6A8F1CCBB5D}"/>
               </a:ext>
             </a:extLst>
           </p:cNvPr>
@@ -9264,7 +9264,7 @@
           <p:cNvPr id="4" name="">
             <a:extLst xmlns:a="http://schemas.openxmlformats.org/drawingml/2006/main">
               <a:ext uri="{FF2B5EF4-FFF2-40B4-BE49-F238E27FC236}">
-                <a16:creationId xmlns:a16="http://schemas.microsoft.com/office/drawing/2014/main" id="{843DA2CE-895D-4065-BDB8-626AFEA06EC3}"/>
+                <a16:creationId xmlns:a16="http://schemas.microsoft.com/office/drawing/2014/main" id="{A5F9FCE2-9EA7-40E5-9654-6B79A4FD8DA9}"/>
               </a:ext>
             </a:extLst>
           </p:cNvPr>
@@ -9328,7 +9328,7 @@
           <p:cNvPr id="5" name="">
             <a:extLst xmlns:a="http://schemas.openxmlformats.org/drawingml/2006/main">
               <a:ext uri="{FF2B5EF4-FFF2-40B4-BE49-F238E27FC236}">
-                <a16:creationId xmlns:a16="http://schemas.microsoft.com/office/drawing/2014/main" id="{35F19958-FAB1-48F1-9010-965B39824641}"/>
+                <a16:creationId xmlns:a16="http://schemas.microsoft.com/office/drawing/2014/main" id="{D822ADA8-6D21-417B-B270-B1DDFEEDBF47}"/>
               </a:ext>
             </a:extLst>
           </p:cNvPr>
@@ -9392,7 +9392,7 @@
           <p:cNvPr id="6" name="">
             <a:extLst xmlns:a="http://schemas.openxmlformats.org/drawingml/2006/main">
               <a:ext uri="{FF2B5EF4-FFF2-40B4-BE49-F238E27FC236}">
-                <a16:creationId xmlns:a16="http://schemas.microsoft.com/office/drawing/2014/main" id="{C704F253-344C-4A11-A3DE-9154BF71616A}"/>
+                <a16:creationId xmlns:a16="http://schemas.microsoft.com/office/drawing/2014/main" id="{161ADCB0-15A9-45D8-B9FC-6D236AE6A65D}"/>
               </a:ext>
             </a:extLst>
           </p:cNvPr>
@@ -9456,7 +9456,7 @@
           <p:cNvPr id="7" name="">
             <a:extLst xmlns:a="http://schemas.openxmlformats.org/drawingml/2006/main">
               <a:ext uri="{FF2B5EF4-FFF2-40B4-BE49-F238E27FC236}">
-                <a16:creationId xmlns:a16="http://schemas.microsoft.com/office/drawing/2014/main" id="{8CD03670-BB06-498B-BB76-DE419C4855B5}"/>
+                <a16:creationId xmlns:a16="http://schemas.microsoft.com/office/drawing/2014/main" id="{EA73184B-A720-47B5-9513-FD5E3671EBA8}"/>
               </a:ext>
             </a:extLst>
           </p:cNvPr>
@@ -9491,7 +9491,7 @@
           <p:cNvPr id="8" name="">
             <a:extLst xmlns:a="http://schemas.openxmlformats.org/drawingml/2006/main">
               <a:ext uri="{FF2B5EF4-FFF2-40B4-BE49-F238E27FC236}">
-                <a16:creationId xmlns:a16="http://schemas.microsoft.com/office/drawing/2014/main" id="{73918CF9-7C2C-4A4A-A97B-F08A16410BC9}"/>
+                <a16:creationId xmlns:a16="http://schemas.microsoft.com/office/drawing/2014/main" id="{E1431BDE-7ECB-4B50-B9E9-830B185668A1}"/>
               </a:ext>
             </a:extLst>
           </p:cNvPr>
@@ -9555,7 +9555,7 @@
           <p:cNvPr id="9" name="">
             <a:extLst xmlns:a="http://schemas.openxmlformats.org/drawingml/2006/main">
               <a:ext uri="{FF2B5EF4-FFF2-40B4-BE49-F238E27FC236}">
-                <a16:creationId xmlns:a16="http://schemas.microsoft.com/office/drawing/2014/main" id="{4E788341-8FA8-4AC3-A311-1199ECAE1513}"/>
+                <a16:creationId xmlns:a16="http://schemas.microsoft.com/office/drawing/2014/main" id="{D1DD7BCE-B6EA-4AB7-95C2-A8A0B5C44360}"/>
               </a:ext>
             </a:extLst>
           </p:cNvPr>
@@ -9619,7 +9619,7 @@
           <p:cNvPr id="10" name="">
             <a:extLst xmlns:a="http://schemas.openxmlformats.org/drawingml/2006/main">
               <a:ext uri="{FF2B5EF4-FFF2-40B4-BE49-F238E27FC236}">
-                <a16:creationId xmlns:a16="http://schemas.microsoft.com/office/drawing/2014/main" id="{EE3ED319-606B-4B5C-ABEA-D7F4A2741A85}"/>
+                <a16:creationId xmlns:a16="http://schemas.microsoft.com/office/drawing/2014/main" id="{C7652351-E65E-4FCA-9A20-163EE9B47122}"/>
               </a:ext>
             </a:extLst>
           </p:cNvPr>
@@ -9652,7 +9652,7 @@
           <p:cNvPr id="11" name="">
             <a:extLst xmlns:a="http://schemas.openxmlformats.org/drawingml/2006/main">
               <a:ext uri="{FF2B5EF4-FFF2-40B4-BE49-F238E27FC236}">
-                <a16:creationId xmlns:a16="http://schemas.microsoft.com/office/drawing/2014/main" id="{0E96476C-8B7A-4717-AC89-7AB92C2D546F}"/>
+                <a16:creationId xmlns:a16="http://schemas.microsoft.com/office/drawing/2014/main" id="{E92F4F79-BD4D-42BA-A6CB-2C6F5A128097}"/>
               </a:ext>
             </a:extLst>
           </p:cNvPr>
@@ -9687,7 +9687,7 @@
           <p:cNvPr id="12" name="">
             <a:extLst xmlns:a="http://schemas.openxmlformats.org/drawingml/2006/main">
               <a:ext uri="{FF2B5EF4-FFF2-40B4-BE49-F238E27FC236}">
-                <a16:creationId xmlns:a16="http://schemas.microsoft.com/office/drawing/2014/main" id="{E4208170-958F-47FC-A7DA-6BCEEC678CAA}"/>
+                <a16:creationId xmlns:a16="http://schemas.microsoft.com/office/drawing/2014/main" id="{2131DFC7-E1D9-4CEF-83FA-F8B4184116DD}"/>
               </a:ext>
             </a:extLst>
           </p:cNvPr>
@@ -9751,7 +9751,7 @@
           <p:cNvPr id="13" name="">
             <a:extLst xmlns:a="http://schemas.openxmlformats.org/drawingml/2006/main">
               <a:ext uri="{FF2B5EF4-FFF2-40B4-BE49-F238E27FC236}">
-                <a16:creationId xmlns:a16="http://schemas.microsoft.com/office/drawing/2014/main" id="{9DE13ED6-A8F6-4248-BAE2-0260B26248BD}"/>
+                <a16:creationId xmlns:a16="http://schemas.microsoft.com/office/drawing/2014/main" id="{B2D0922B-CCC7-4D9A-9265-93A4F00BC6FC}"/>
               </a:ext>
             </a:extLst>
           </p:cNvPr>
@@ -9815,7 +9815,7 @@
           <p:cNvPr id="14" name="">
             <a:extLst xmlns:a="http://schemas.openxmlformats.org/drawingml/2006/main">
               <a:ext uri="{FF2B5EF4-FFF2-40B4-BE49-F238E27FC236}">
-                <a16:creationId xmlns:a16="http://schemas.microsoft.com/office/drawing/2014/main" id="{89526CF4-D1FA-4B82-A1E5-512A62268279}"/>
+                <a16:creationId xmlns:a16="http://schemas.microsoft.com/office/drawing/2014/main" id="{ECCEBF7B-972A-420B-AD51-2F6C38B2C965}"/>
               </a:ext>
             </a:extLst>
           </p:cNvPr>
@@ -9848,7 +9848,7 @@
           <p:cNvPr id="15" name="">
             <a:extLst xmlns:a="http://schemas.openxmlformats.org/drawingml/2006/main">
               <a:ext uri="{FF2B5EF4-FFF2-40B4-BE49-F238E27FC236}">
-                <a16:creationId xmlns:a16="http://schemas.microsoft.com/office/drawing/2014/main" id="{A92B0851-BF0F-4C43-B544-007FF24AC743}"/>
+                <a16:creationId xmlns:a16="http://schemas.microsoft.com/office/drawing/2014/main" id="{6F204044-8E15-4358-ACF9-2E1D327E82EC}"/>
               </a:ext>
             </a:extLst>
           </p:cNvPr>
@@ -9883,7 +9883,7 @@
           <p:cNvPr id="16" name="">
             <a:extLst xmlns:a="http://schemas.openxmlformats.org/drawingml/2006/main">
               <a:ext uri="{FF2B5EF4-FFF2-40B4-BE49-F238E27FC236}">
-                <a16:creationId xmlns:a16="http://schemas.microsoft.com/office/drawing/2014/main" id="{B57C1C2B-08A1-40FA-9D77-35E06DF92D77}"/>
+                <a16:creationId xmlns:a16="http://schemas.microsoft.com/office/drawing/2014/main" id="{C02A8F9E-EE54-454B-96E8-02CDC941D6DC}"/>
               </a:ext>
             </a:extLst>
           </p:cNvPr>
@@ -9947,7 +9947,7 @@
           <p:cNvPr id="17" name="">
             <a:extLst xmlns:a="http://schemas.openxmlformats.org/drawingml/2006/main">
               <a:ext uri="{FF2B5EF4-FFF2-40B4-BE49-F238E27FC236}">
-                <a16:creationId xmlns:a16="http://schemas.microsoft.com/office/drawing/2014/main" id="{0C78911A-F73C-4BC3-82EA-29ED194B462A}"/>
+                <a16:creationId xmlns:a16="http://schemas.microsoft.com/office/drawing/2014/main" id="{49F6DC70-BB39-4066-9F3B-21183879CD58}"/>
               </a:ext>
             </a:extLst>
           </p:cNvPr>
@@ -10011,7 +10011,7 @@
           <p:cNvPr id="18" name="">
             <a:extLst xmlns:a="http://schemas.openxmlformats.org/drawingml/2006/main">
               <a:ext uri="{FF2B5EF4-FFF2-40B4-BE49-F238E27FC236}">
-                <a16:creationId xmlns:a16="http://schemas.microsoft.com/office/drawing/2014/main" id="{343678DB-D2A1-403D-B829-2FAFB92781CF}"/>
+                <a16:creationId xmlns:a16="http://schemas.microsoft.com/office/drawing/2014/main" id="{7613135C-0926-4091-BC21-0848262909E8}"/>
               </a:ext>
             </a:extLst>
           </p:cNvPr>
@@ -10044,7 +10044,7 @@
           <p:cNvPr id="19" name="">
             <a:extLst xmlns:a="http://schemas.openxmlformats.org/drawingml/2006/main">
               <a:ext uri="{FF2B5EF4-FFF2-40B4-BE49-F238E27FC236}">
-                <a16:creationId xmlns:a16="http://schemas.microsoft.com/office/drawing/2014/main" id="{9656A65F-F337-4D17-A0BF-B91A04E50A7E}"/>
+                <a16:creationId xmlns:a16="http://schemas.microsoft.com/office/drawing/2014/main" id="{3D559DFE-676E-41B8-BA9A-46378EB98947}"/>
               </a:ext>
             </a:extLst>
           </p:cNvPr>
@@ -10079,7 +10079,7 @@
           <p:cNvPr id="20" name="">
             <a:extLst xmlns:a="http://schemas.openxmlformats.org/drawingml/2006/main">
               <a:ext uri="{FF2B5EF4-FFF2-40B4-BE49-F238E27FC236}">
-                <a16:creationId xmlns:a16="http://schemas.microsoft.com/office/drawing/2014/main" id="{9A6EC26A-45A6-4924-B46C-92C47B8847FE}"/>
+                <a16:creationId xmlns:a16="http://schemas.microsoft.com/office/drawing/2014/main" id="{7C8609AC-70AF-4135-8815-38AA8E2BF1A0}"/>
               </a:ext>
             </a:extLst>
           </p:cNvPr>
@@ -10143,7 +10143,7 @@
           <p:cNvPr id="21" name="">
             <a:extLst xmlns:a="http://schemas.openxmlformats.org/drawingml/2006/main">
               <a:ext uri="{FF2B5EF4-FFF2-40B4-BE49-F238E27FC236}">
-                <a16:creationId xmlns:a16="http://schemas.microsoft.com/office/drawing/2014/main" id="{15E3B1B5-294E-4F51-AF30-FC45E7D4DC86}"/>
+                <a16:creationId xmlns:a16="http://schemas.microsoft.com/office/drawing/2014/main" id="{6DCA58F5-B47C-4EE2-A498-FB9D7B347211}"/>
               </a:ext>
             </a:extLst>
           </p:cNvPr>
@@ -10207,7 +10207,7 @@
           <p:cNvPr id="22" name="">
             <a:extLst xmlns:a="http://schemas.openxmlformats.org/drawingml/2006/main">
               <a:ext uri="{FF2B5EF4-FFF2-40B4-BE49-F238E27FC236}">
-                <a16:creationId xmlns:a16="http://schemas.microsoft.com/office/drawing/2014/main" id="{940AC635-CAF6-415A-8D98-0664739D6260}"/>
+                <a16:creationId xmlns:a16="http://schemas.microsoft.com/office/drawing/2014/main" id="{DA7EE19C-641F-4130-A914-793ABC8B5308}"/>
               </a:ext>
             </a:extLst>
           </p:cNvPr>
@@ -10271,7 +10271,7 @@
           <p:cNvPr id="23" name="">
             <a:extLst xmlns:a="http://schemas.openxmlformats.org/drawingml/2006/main">
               <a:ext uri="{FF2B5EF4-FFF2-40B4-BE49-F238E27FC236}">
-                <a16:creationId xmlns:a16="http://schemas.microsoft.com/office/drawing/2014/main" id="{6253062D-1821-4917-818B-D0EC57D522CE}"/>
+                <a16:creationId xmlns:a16="http://schemas.microsoft.com/office/drawing/2014/main" id="{805F87D9-B660-4D46-80C8-4ECB8F558E97}"/>
               </a:ext>
             </a:extLst>
           </p:cNvPr>
@@ -10335,7 +10335,7 @@
           <p:cNvPr id="24" name="">
             <a:extLst xmlns:a="http://schemas.openxmlformats.org/drawingml/2006/main">
               <a:ext uri="{FF2B5EF4-FFF2-40B4-BE49-F238E27FC236}">
-                <a16:creationId xmlns:a16="http://schemas.microsoft.com/office/drawing/2014/main" id="{9C967B91-9711-4AA6-9282-65EDC10CAE0F}"/>
+                <a16:creationId xmlns:a16="http://schemas.microsoft.com/office/drawing/2014/main" id="{833B7851-9F83-4FD8-92EA-C18D4341FF01}"/>
               </a:ext>
             </a:extLst>
           </p:cNvPr>
@@ -10368,7 +10368,7 @@
           <p:cNvPr id="25" name="">
             <a:extLst xmlns:a="http://schemas.openxmlformats.org/drawingml/2006/main">
               <a:ext uri="{FF2B5EF4-FFF2-40B4-BE49-F238E27FC236}">
-                <a16:creationId xmlns:a16="http://schemas.microsoft.com/office/drawing/2014/main" id="{FBEFCB88-27F6-49CE-84FE-C05A28175669}"/>
+                <a16:creationId xmlns:a16="http://schemas.microsoft.com/office/drawing/2014/main" id="{9DF5BCE8-F2AF-483B-8E90-9F58B01C46D9}"/>
               </a:ext>
             </a:extLst>
           </p:cNvPr>
@@ -10432,7 +10432,7 @@
           <p:cNvPr id="26" name="">
             <a:extLst xmlns:a="http://schemas.openxmlformats.org/drawingml/2006/main">
               <a:ext uri="{FF2B5EF4-FFF2-40B4-BE49-F238E27FC236}">
-                <a16:creationId xmlns:a16="http://schemas.microsoft.com/office/drawing/2014/main" id="{6D5D2A90-C17F-497E-BD47-F0B7E40327AB}"/>
+                <a16:creationId xmlns:a16="http://schemas.microsoft.com/office/drawing/2014/main" id="{BD12AAD5-C843-48CA-865A-3D854D044612}"/>
               </a:ext>
             </a:extLst>
           </p:cNvPr>
@@ -10494,7 +10494,7 @@
     </p:spTree>
     <p:extLst>
       <p:ext uri="{BB962C8B-B14F-4D97-AF65-F5344CB8AC3E}">
-        <p14:creationId xmlns:p14="http://schemas.microsoft.com/office/powerpoint/2010/main" val="79925693"/>
+        <p14:creationId xmlns:p14="http://schemas.microsoft.com/office/powerpoint/2010/main" val="1815777584"/>
       </p:ext>
     </p:extLst>
   </p:cSld>
@@ -10522,7 +10522,7 @@
           <p:nvPr/>
         </p:nvPicPr>
         <p:blipFill>
-          <a:blip xmlns:r="http://schemas.openxmlformats.org/officeDocument/2006/relationships" xmlns:a="http://schemas.openxmlformats.org/drawingml/2006/main" r:embed="Rbfb25b2b39ac465c"/>
+          <a:blip xmlns:r="http://schemas.openxmlformats.org/officeDocument/2006/relationships" xmlns:a="http://schemas.openxmlformats.org/drawingml/2006/main" r:embed="R3f9ce175e2b941a8"/>
           <a:srcRect xmlns:a="http://schemas.openxmlformats.org/drawingml/2006/main" l="0" t="7813" r="0" b="7813"/>
           <a:stretch xmlns:a="http://schemas.openxmlformats.org/drawingml/2006/main">
             <a:fillRect l="0" t="0" r="0" b="0"/>
@@ -10543,7 +10543,7 @@
           <p:cNvPr id="2" name="">
             <a:extLst xmlns:a="http://schemas.openxmlformats.org/drawingml/2006/main">
               <a:ext uri="{FF2B5EF4-FFF2-40B4-BE49-F238E27FC236}">
-                <a16:creationId xmlns:a16="http://schemas.microsoft.com/office/drawing/2014/main" id="{E6311C57-EB60-466A-B183-5D79CF6CC9EC}"/>
+                <a16:creationId xmlns:a16="http://schemas.microsoft.com/office/drawing/2014/main" id="{167C59A9-1E2A-47A3-8B3F-85EB236D488F}"/>
               </a:ext>
             </a:extLst>
           </p:cNvPr>
@@ -10580,7 +10580,7 @@
           <p:cNvPr id="3" name="">
             <a:extLst xmlns:a="http://schemas.openxmlformats.org/drawingml/2006/main">
               <a:ext uri="{FF2B5EF4-FFF2-40B4-BE49-F238E27FC236}">
-                <a16:creationId xmlns:a16="http://schemas.microsoft.com/office/drawing/2014/main" id="{BAD5B819-30CA-4469-B28C-A40DABA1F829}"/>
+                <a16:creationId xmlns:a16="http://schemas.microsoft.com/office/drawing/2014/main" id="{5E1B8AED-ACDE-4219-9F4B-0558AE426EAF}"/>
               </a:ext>
             </a:extLst>
           </p:cNvPr>
@@ -10617,7 +10617,7 @@
           <p:cNvPr id="4" name="">
             <a:extLst xmlns:a="http://schemas.openxmlformats.org/drawingml/2006/main">
               <a:ext uri="{FF2B5EF4-FFF2-40B4-BE49-F238E27FC236}">
-                <a16:creationId xmlns:a16="http://schemas.microsoft.com/office/drawing/2014/main" id="{3B51A90C-E5E3-46FF-AAF7-930D7BFF1C12}"/>
+                <a16:creationId xmlns:a16="http://schemas.microsoft.com/office/drawing/2014/main" id="{AC7C340F-04BB-49CF-9C28-EC9B44AAB088}"/>
               </a:ext>
             </a:extLst>
           </p:cNvPr>
@@ -10681,7 +10681,7 @@
           <p:cNvPr id="5" name="">
             <a:extLst xmlns:a="http://schemas.openxmlformats.org/drawingml/2006/main">
               <a:ext uri="{FF2B5EF4-FFF2-40B4-BE49-F238E27FC236}">
-                <a16:creationId xmlns:a16="http://schemas.microsoft.com/office/drawing/2014/main" id="{E8989F59-1839-4E6D-A1B3-C8A8CF5E35AA}"/>
+                <a16:creationId xmlns:a16="http://schemas.microsoft.com/office/drawing/2014/main" id="{C99A09AA-78B3-474E-AE88-DADEA2F92E93}"/>
               </a:ext>
             </a:extLst>
           </p:cNvPr>
@@ -10745,7 +10745,7 @@
           <p:cNvPr id="6" name="">
             <a:extLst xmlns:a="http://schemas.openxmlformats.org/drawingml/2006/main">
               <a:ext uri="{FF2B5EF4-FFF2-40B4-BE49-F238E27FC236}">
-                <a16:creationId xmlns:a16="http://schemas.microsoft.com/office/drawing/2014/main" id="{432E17D0-B729-48F6-B898-DD82969775EE}"/>
+                <a16:creationId xmlns:a16="http://schemas.microsoft.com/office/drawing/2014/main" id="{DFDC6655-9300-4213-B3EC-1163756CCED5}"/>
               </a:ext>
             </a:extLst>
           </p:cNvPr>
@@ -10809,7 +10809,7 @@
           <p:cNvPr id="7" name="">
             <a:extLst xmlns:a="http://schemas.openxmlformats.org/drawingml/2006/main">
               <a:ext uri="{FF2B5EF4-FFF2-40B4-BE49-F238E27FC236}">
-                <a16:creationId xmlns:a16="http://schemas.microsoft.com/office/drawing/2014/main" id="{C1B16A5A-192D-42A1-A9EF-FBB6AF1CD89C}"/>
+                <a16:creationId xmlns:a16="http://schemas.microsoft.com/office/drawing/2014/main" id="{A185A337-D89E-43FB-BEF7-26E7FBFDDEBE}"/>
               </a:ext>
             </a:extLst>
           </p:cNvPr>
@@ -10844,7 +10844,7 @@
           <p:cNvPr id="8" name="">
             <a:extLst xmlns:a="http://schemas.openxmlformats.org/drawingml/2006/main">
               <a:ext uri="{FF2B5EF4-FFF2-40B4-BE49-F238E27FC236}">
-                <a16:creationId xmlns:a16="http://schemas.microsoft.com/office/drawing/2014/main" id="{48753EA6-E846-4D7E-9145-56A65DCA74C6}"/>
+                <a16:creationId xmlns:a16="http://schemas.microsoft.com/office/drawing/2014/main" id="{CC041387-FBF5-4BDA-BCDE-AF3C1C0751EA}"/>
               </a:ext>
             </a:extLst>
           </p:cNvPr>
@@ -10908,7 +10908,7 @@
           <p:cNvPr id="9" name="">
             <a:extLst xmlns:a="http://schemas.openxmlformats.org/drawingml/2006/main">
               <a:ext uri="{FF2B5EF4-FFF2-40B4-BE49-F238E27FC236}">
-                <a16:creationId xmlns:a16="http://schemas.microsoft.com/office/drawing/2014/main" id="{3F5CFA7B-DCC5-4621-8594-82CA6805EF32}"/>
+                <a16:creationId xmlns:a16="http://schemas.microsoft.com/office/drawing/2014/main" id="{F9ACB80A-0D96-494F-817E-613F8811D015}"/>
               </a:ext>
             </a:extLst>
           </p:cNvPr>
@@ -10943,7 +10943,7 @@
           <p:cNvPr id="10" name="">
             <a:extLst xmlns:a="http://schemas.openxmlformats.org/drawingml/2006/main">
               <a:ext uri="{FF2B5EF4-FFF2-40B4-BE49-F238E27FC236}">
-                <a16:creationId xmlns:a16="http://schemas.microsoft.com/office/drawing/2014/main" id="{BDDA7A06-4189-42BE-8B5C-E85024956693}"/>
+                <a16:creationId xmlns:a16="http://schemas.microsoft.com/office/drawing/2014/main" id="{2608FAAA-A8C0-4FA3-9563-1016F6187293}"/>
               </a:ext>
             </a:extLst>
           </p:cNvPr>
@@ -11007,7 +11007,7 @@
           <p:cNvPr id="11" name="">
             <a:extLst xmlns:a="http://schemas.openxmlformats.org/drawingml/2006/main">
               <a:ext uri="{FF2B5EF4-FFF2-40B4-BE49-F238E27FC236}">
-                <a16:creationId xmlns:a16="http://schemas.microsoft.com/office/drawing/2014/main" id="{B10BBD7E-0A40-47A8-A45F-AFD32869C485}"/>
+                <a16:creationId xmlns:a16="http://schemas.microsoft.com/office/drawing/2014/main" id="{7A407996-D344-4CC6-838B-9D58132679B8}"/>
               </a:ext>
             </a:extLst>
           </p:cNvPr>
@@ -11042,7 +11042,7 @@
           <p:cNvPr id="12" name="">
             <a:extLst xmlns:a="http://schemas.openxmlformats.org/drawingml/2006/main">
               <a:ext uri="{FF2B5EF4-FFF2-40B4-BE49-F238E27FC236}">
-                <a16:creationId xmlns:a16="http://schemas.microsoft.com/office/drawing/2014/main" id="{071CFDA8-5E44-4F83-8B55-B36FB44A1ABC}"/>
+                <a16:creationId xmlns:a16="http://schemas.microsoft.com/office/drawing/2014/main" id="{C1D27BA8-B7F6-4818-9646-90D26E36A244}"/>
               </a:ext>
             </a:extLst>
           </p:cNvPr>
@@ -11106,7 +11106,7 @@
           <p:cNvPr id="13" name="">
             <a:extLst xmlns:a="http://schemas.openxmlformats.org/drawingml/2006/main">
               <a:ext uri="{FF2B5EF4-FFF2-40B4-BE49-F238E27FC236}">
-                <a16:creationId xmlns:a16="http://schemas.microsoft.com/office/drawing/2014/main" id="{06BBBD65-7285-4E06-B8A4-D11528691034}"/>
+                <a16:creationId xmlns:a16="http://schemas.microsoft.com/office/drawing/2014/main" id="{81DC14E4-2374-4619-92D7-9441E2034396}"/>
               </a:ext>
             </a:extLst>
           </p:cNvPr>
@@ -11141,7 +11141,7 @@
           <p:cNvPr id="14" name="">
             <a:extLst xmlns:a="http://schemas.openxmlformats.org/drawingml/2006/main">
               <a:ext uri="{FF2B5EF4-FFF2-40B4-BE49-F238E27FC236}">
-                <a16:creationId xmlns:a16="http://schemas.microsoft.com/office/drawing/2014/main" id="{A3AE6365-4ADE-498E-9600-8C3A30D7A221}"/>
+                <a16:creationId xmlns:a16="http://schemas.microsoft.com/office/drawing/2014/main" id="{EB8F342D-2C93-4D72-ADCB-E885D85A2E1E}"/>
               </a:ext>
             </a:extLst>
           </p:cNvPr>
@@ -11205,7 +11205,7 @@
           <p:cNvPr id="15" name="">
             <a:extLst xmlns:a="http://schemas.openxmlformats.org/drawingml/2006/main">
               <a:ext uri="{FF2B5EF4-FFF2-40B4-BE49-F238E27FC236}">
-                <a16:creationId xmlns:a16="http://schemas.microsoft.com/office/drawing/2014/main" id="{B6B2A6C6-7E50-44BC-A013-78DEB517AD9A}"/>
+                <a16:creationId xmlns:a16="http://schemas.microsoft.com/office/drawing/2014/main" id="{4F334039-B3FF-4AAB-89EC-51B5B7F16352}"/>
               </a:ext>
             </a:extLst>
           </p:cNvPr>
@@ -11240,7 +11240,7 @@
           <p:cNvPr id="16" name="">
             <a:extLst xmlns:a="http://schemas.openxmlformats.org/drawingml/2006/main">
               <a:ext uri="{FF2B5EF4-FFF2-40B4-BE49-F238E27FC236}">
-                <a16:creationId xmlns:a16="http://schemas.microsoft.com/office/drawing/2014/main" id="{36F26B17-236E-4760-B1FD-9DCACE69A05C}"/>
+                <a16:creationId xmlns:a16="http://schemas.microsoft.com/office/drawing/2014/main" id="{C6D373F8-CEBB-46C8-84ED-192103B7C574}"/>
               </a:ext>
             </a:extLst>
           </p:cNvPr>
@@ -11304,7 +11304,7 @@
           <p:cNvPr id="17" name="">
             <a:extLst xmlns:a="http://schemas.openxmlformats.org/drawingml/2006/main">
               <a:ext uri="{FF2B5EF4-FFF2-40B4-BE49-F238E27FC236}">
-                <a16:creationId xmlns:a16="http://schemas.microsoft.com/office/drawing/2014/main" id="{F630A4C1-089E-48EB-9620-B74CD3906878}"/>
+                <a16:creationId xmlns:a16="http://schemas.microsoft.com/office/drawing/2014/main" id="{24BA41CA-1C13-4042-8DDB-D6C7410E9D4D}"/>
               </a:ext>
             </a:extLst>
           </p:cNvPr>
@@ -11339,7 +11339,7 @@
           <p:cNvPr id="18" name="">
             <a:extLst xmlns:a="http://schemas.openxmlformats.org/drawingml/2006/main">
               <a:ext uri="{FF2B5EF4-FFF2-40B4-BE49-F238E27FC236}">
-                <a16:creationId xmlns:a16="http://schemas.microsoft.com/office/drawing/2014/main" id="{26AB8BBC-AAFF-4439-85EB-DF64E66DFE50}"/>
+                <a16:creationId xmlns:a16="http://schemas.microsoft.com/office/drawing/2014/main" id="{99D67728-384E-4C2A-836A-0FC16111BF9B}"/>
               </a:ext>
             </a:extLst>
           </p:cNvPr>
@@ -11403,7 +11403,7 @@
           <p:cNvPr id="19" name="">
             <a:extLst xmlns:a="http://schemas.openxmlformats.org/drawingml/2006/main">
               <a:ext uri="{FF2B5EF4-FFF2-40B4-BE49-F238E27FC236}">
-                <a16:creationId xmlns:a16="http://schemas.microsoft.com/office/drawing/2014/main" id="{464EF715-2204-420B-97AD-5DB37E6981A9}"/>
+                <a16:creationId xmlns:a16="http://schemas.microsoft.com/office/drawing/2014/main" id="{CEC376F8-20B8-4CA5-8EF9-56586A8CBD88}"/>
               </a:ext>
             </a:extLst>
           </p:cNvPr>
@@ -11467,7 +11467,7 @@
           <p:cNvPr id="20" name="">
             <a:extLst xmlns:a="http://schemas.openxmlformats.org/drawingml/2006/main">
               <a:ext uri="{FF2B5EF4-FFF2-40B4-BE49-F238E27FC236}">
-                <a16:creationId xmlns:a16="http://schemas.microsoft.com/office/drawing/2014/main" id="{DB52D7C0-C8C1-427B-8F71-248A9E07A1A1}"/>
+                <a16:creationId xmlns:a16="http://schemas.microsoft.com/office/drawing/2014/main" id="{1F3BCEC9-673E-4F25-ADAA-45D910F49899}"/>
               </a:ext>
             </a:extLst>
           </p:cNvPr>
@@ -11500,7 +11500,7 @@
           <p:cNvPr id="21" name="">
             <a:extLst xmlns:a="http://schemas.openxmlformats.org/drawingml/2006/main">
               <a:ext uri="{FF2B5EF4-FFF2-40B4-BE49-F238E27FC236}">
-                <a16:creationId xmlns:a16="http://schemas.microsoft.com/office/drawing/2014/main" id="{07A5328D-5CD9-491B-A5E5-432D7E4B1B09}"/>
+                <a16:creationId xmlns:a16="http://schemas.microsoft.com/office/drawing/2014/main" id="{1A18D53E-6C35-43C3-922C-BE8DFA87C837}"/>
               </a:ext>
             </a:extLst>
           </p:cNvPr>
@@ -11564,7 +11564,7 @@
           <p:cNvPr id="22" name="">
             <a:extLst xmlns:a="http://schemas.openxmlformats.org/drawingml/2006/main">
               <a:ext uri="{FF2B5EF4-FFF2-40B4-BE49-F238E27FC236}">
-                <a16:creationId xmlns:a16="http://schemas.microsoft.com/office/drawing/2014/main" id="{51DC3FA3-CF17-45B5-9F4A-AFC1FE167571}"/>
+                <a16:creationId xmlns:a16="http://schemas.microsoft.com/office/drawing/2014/main" id="{D3DF8FBD-102A-4910-A1E0-C759D1B685E0}"/>
               </a:ext>
             </a:extLst>
           </p:cNvPr>
@@ -11626,7 +11626,7 @@
     </p:spTree>
     <p:extLst>
       <p:ext uri="{BB962C8B-B14F-4D97-AF65-F5344CB8AC3E}">
-        <p14:creationId xmlns:p14="http://schemas.microsoft.com/office/powerpoint/2010/main" val="294914271"/>
+        <p14:creationId xmlns:p14="http://schemas.microsoft.com/office/powerpoint/2010/main" val="694476317"/>
       </p:ext>
     </p:extLst>
   </p:cSld>
@@ -11654,7 +11654,7 @@
           <p:nvPr/>
         </p:nvPicPr>
         <p:blipFill>
-          <a:blip xmlns:r="http://schemas.openxmlformats.org/officeDocument/2006/relationships" xmlns:a="http://schemas.openxmlformats.org/drawingml/2006/main" r:embed="Rdf1491f90aac4979"/>
+          <a:blip xmlns:r="http://schemas.openxmlformats.org/officeDocument/2006/relationships" xmlns:a="http://schemas.openxmlformats.org/drawingml/2006/main" r:embed="R2dd4115d6ccf44aa"/>
           <a:srcRect xmlns:a="http://schemas.openxmlformats.org/drawingml/2006/main" l="0" t="27" r="0" b="27"/>
           <a:stretch xmlns:a="http://schemas.openxmlformats.org/drawingml/2006/main">
             <a:fillRect l="0" t="0" r="0" b="0"/>
@@ -11675,7 +11675,7 @@
           <p:cNvPr id="2" name="">
             <a:extLst xmlns:a="http://schemas.openxmlformats.org/drawingml/2006/main">
               <a:ext uri="{FF2B5EF4-FFF2-40B4-BE49-F238E27FC236}">
-                <a16:creationId xmlns:a16="http://schemas.microsoft.com/office/drawing/2014/main" id="{2BE87FF2-9EBE-4CE1-B76D-8BD1708B576B}"/>
+                <a16:creationId xmlns:a16="http://schemas.microsoft.com/office/drawing/2014/main" id="{C2EDE407-3DC0-49C3-8E04-90C3B72713D0}"/>
               </a:ext>
             </a:extLst>
           </p:cNvPr>
@@ -11712,7 +11712,7 @@
           <p:cNvPr id="3" name="">
             <a:extLst xmlns:a="http://schemas.openxmlformats.org/drawingml/2006/main">
               <a:ext uri="{FF2B5EF4-FFF2-40B4-BE49-F238E27FC236}">
-                <a16:creationId xmlns:a16="http://schemas.microsoft.com/office/drawing/2014/main" id="{79AB03D4-3B8D-4B6B-85A8-9F0CA82C3BCD}"/>
+                <a16:creationId xmlns:a16="http://schemas.microsoft.com/office/drawing/2014/main" id="{CD0446AF-21AD-4E2E-9D90-2FA4D0556D1B}"/>
               </a:ext>
             </a:extLst>
           </p:cNvPr>
@@ -11749,7 +11749,7 @@
           <p:cNvPr id="4" name="">
             <a:extLst xmlns:a="http://schemas.openxmlformats.org/drawingml/2006/main">
               <a:ext uri="{FF2B5EF4-FFF2-40B4-BE49-F238E27FC236}">
-                <a16:creationId xmlns:a16="http://schemas.microsoft.com/office/drawing/2014/main" id="{55515CB3-525F-413D-A607-8EFB5696E839}"/>
+                <a16:creationId xmlns:a16="http://schemas.microsoft.com/office/drawing/2014/main" id="{840CB58B-9FCB-46D6-BDEF-660309949231}"/>
               </a:ext>
             </a:extLst>
           </p:cNvPr>
@@ -11813,7 +11813,7 @@
           <p:cNvPr id="5" name="">
             <a:extLst xmlns:a="http://schemas.openxmlformats.org/drawingml/2006/main">
               <a:ext uri="{FF2B5EF4-FFF2-40B4-BE49-F238E27FC236}">
-                <a16:creationId xmlns:a16="http://schemas.microsoft.com/office/drawing/2014/main" id="{CD077CF2-3E32-4E56-AD48-D9B4588EDF9A}"/>
+                <a16:creationId xmlns:a16="http://schemas.microsoft.com/office/drawing/2014/main" id="{0352C0BA-C5CE-4D08-87C3-5896851E019A}"/>
               </a:ext>
             </a:extLst>
           </p:cNvPr>
@@ -11877,7 +11877,7 @@
           <p:cNvPr id="6" name="">
             <a:extLst xmlns:a="http://schemas.openxmlformats.org/drawingml/2006/main">
               <a:ext uri="{FF2B5EF4-FFF2-40B4-BE49-F238E27FC236}">
-                <a16:creationId xmlns:a16="http://schemas.microsoft.com/office/drawing/2014/main" id="{36670EF2-0651-4A12-96D0-6DD6637093AB}"/>
+                <a16:creationId xmlns:a16="http://schemas.microsoft.com/office/drawing/2014/main" id="{7745EDE8-B6BF-4FBA-ADA1-73C66FFFAF4C}"/>
               </a:ext>
             </a:extLst>
           </p:cNvPr>
@@ -11941,7 +11941,7 @@
           <p:cNvPr id="7" name="">
             <a:extLst xmlns:a="http://schemas.openxmlformats.org/drawingml/2006/main">
               <a:ext uri="{FF2B5EF4-FFF2-40B4-BE49-F238E27FC236}">
-                <a16:creationId xmlns:a16="http://schemas.microsoft.com/office/drawing/2014/main" id="{F9FE29D7-E492-4B74-84B5-C3197D6A67BE}"/>
+                <a16:creationId xmlns:a16="http://schemas.microsoft.com/office/drawing/2014/main" id="{B23FFCF6-36AB-435D-9EF4-1B26658DCBE5}"/>
               </a:ext>
             </a:extLst>
           </p:cNvPr>
@@ -11976,7 +11976,7 @@
           <p:cNvPr id="8" name="">
             <a:extLst xmlns:a="http://schemas.openxmlformats.org/drawingml/2006/main">
               <a:ext uri="{FF2B5EF4-FFF2-40B4-BE49-F238E27FC236}">
-                <a16:creationId xmlns:a16="http://schemas.microsoft.com/office/drawing/2014/main" id="{C8E3AA6E-B07A-4F82-9678-7D88015AAE25}"/>
+                <a16:creationId xmlns:a16="http://schemas.microsoft.com/office/drawing/2014/main" id="{7D3797EF-0D24-4EA8-BFD6-B6D602924498}"/>
               </a:ext>
             </a:extLst>
           </p:cNvPr>
@@ -12040,7 +12040,7 @@
           <p:cNvPr id="9" name="">
             <a:extLst xmlns:a="http://schemas.openxmlformats.org/drawingml/2006/main">
               <a:ext uri="{FF2B5EF4-FFF2-40B4-BE49-F238E27FC236}">
-                <a16:creationId xmlns:a16="http://schemas.microsoft.com/office/drawing/2014/main" id="{3359701E-7ECB-4DD6-9198-712D0674D02E}"/>
+                <a16:creationId xmlns:a16="http://schemas.microsoft.com/office/drawing/2014/main" id="{886284E7-06CF-4A36-A2AE-B00B510F3430}"/>
               </a:ext>
             </a:extLst>
           </p:cNvPr>
@@ -12104,7 +12104,7 @@
           <p:cNvPr id="10" name="">
             <a:extLst xmlns:a="http://schemas.openxmlformats.org/drawingml/2006/main">
               <a:ext uri="{FF2B5EF4-FFF2-40B4-BE49-F238E27FC236}">
-                <a16:creationId xmlns:a16="http://schemas.microsoft.com/office/drawing/2014/main" id="{54B3D71A-7B60-4150-A389-9E5E92EC02E1}"/>
+                <a16:creationId xmlns:a16="http://schemas.microsoft.com/office/drawing/2014/main" id="{9668F286-B757-4B79-A733-914DF6D87E3D}"/>
               </a:ext>
             </a:extLst>
           </p:cNvPr>
@@ -12137,7 +12137,7 @@
           <p:cNvPr id="11" name="">
             <a:extLst xmlns:a="http://schemas.openxmlformats.org/drawingml/2006/main">
               <a:ext uri="{FF2B5EF4-FFF2-40B4-BE49-F238E27FC236}">
-                <a16:creationId xmlns:a16="http://schemas.microsoft.com/office/drawing/2014/main" id="{15B15F94-32D3-4837-814A-5C946C7F9815}"/>
+                <a16:creationId xmlns:a16="http://schemas.microsoft.com/office/drawing/2014/main" id="{560B1C19-98C3-4E6C-B312-B8C1163A2690}"/>
               </a:ext>
             </a:extLst>
           </p:cNvPr>
@@ -12172,7 +12172,7 @@
           <p:cNvPr id="12" name="">
             <a:extLst xmlns:a="http://schemas.openxmlformats.org/drawingml/2006/main">
               <a:ext uri="{FF2B5EF4-FFF2-40B4-BE49-F238E27FC236}">
-                <a16:creationId xmlns:a16="http://schemas.microsoft.com/office/drawing/2014/main" id="{F01F14F2-99EE-41FA-81A4-E40536031170}"/>
+                <a16:creationId xmlns:a16="http://schemas.microsoft.com/office/drawing/2014/main" id="{B045FC58-F6C8-41E1-832D-046079B7459A}"/>
               </a:ext>
             </a:extLst>
           </p:cNvPr>
@@ -12236,7 +12236,7 @@
           <p:cNvPr id="13" name="">
             <a:extLst xmlns:a="http://schemas.openxmlformats.org/drawingml/2006/main">
               <a:ext uri="{FF2B5EF4-FFF2-40B4-BE49-F238E27FC236}">
-                <a16:creationId xmlns:a16="http://schemas.microsoft.com/office/drawing/2014/main" id="{F5C5E830-3E7A-438E-81C4-DE6B6AFC1CBA}"/>
+                <a16:creationId xmlns:a16="http://schemas.microsoft.com/office/drawing/2014/main" id="{C4292A92-4741-4158-AD67-639F6024F26A}"/>
               </a:ext>
             </a:extLst>
           </p:cNvPr>
@@ -12300,7 +12300,7 @@
           <p:cNvPr id="14" name="">
             <a:extLst xmlns:a="http://schemas.openxmlformats.org/drawingml/2006/main">
               <a:ext uri="{FF2B5EF4-FFF2-40B4-BE49-F238E27FC236}">
-                <a16:creationId xmlns:a16="http://schemas.microsoft.com/office/drawing/2014/main" id="{E9CFFA3C-5464-4843-9BB0-ABDC7E290ADE}"/>
+                <a16:creationId xmlns:a16="http://schemas.microsoft.com/office/drawing/2014/main" id="{ED7EEDE4-F221-42E1-84CF-232BFB9033C0}"/>
               </a:ext>
             </a:extLst>
           </p:cNvPr>
@@ -12333,7 +12333,7 @@
           <p:cNvPr id="15" name="">
             <a:extLst xmlns:a="http://schemas.openxmlformats.org/drawingml/2006/main">
               <a:ext uri="{FF2B5EF4-FFF2-40B4-BE49-F238E27FC236}">
-                <a16:creationId xmlns:a16="http://schemas.microsoft.com/office/drawing/2014/main" id="{28C24103-7D07-4DE5-BB50-968D0E626642}"/>
+                <a16:creationId xmlns:a16="http://schemas.microsoft.com/office/drawing/2014/main" id="{4E68E978-3A0E-426C-8802-5AB58B979432}"/>
               </a:ext>
             </a:extLst>
           </p:cNvPr>
@@ -12368,7 +12368,7 @@
           <p:cNvPr id="16" name="">
             <a:extLst xmlns:a="http://schemas.openxmlformats.org/drawingml/2006/main">
               <a:ext uri="{FF2B5EF4-FFF2-40B4-BE49-F238E27FC236}">
-                <a16:creationId xmlns:a16="http://schemas.microsoft.com/office/drawing/2014/main" id="{299526EB-6300-4D00-83BE-4886BDCEBCA5}"/>
+                <a16:creationId xmlns:a16="http://schemas.microsoft.com/office/drawing/2014/main" id="{7C1B33E9-8D5A-4420-BA71-5399C108E7D6}"/>
               </a:ext>
             </a:extLst>
           </p:cNvPr>
@@ -12432,7 +12432,7 @@
           <p:cNvPr id="17" name="">
             <a:extLst xmlns:a="http://schemas.openxmlformats.org/drawingml/2006/main">
               <a:ext uri="{FF2B5EF4-FFF2-40B4-BE49-F238E27FC236}">
-                <a16:creationId xmlns:a16="http://schemas.microsoft.com/office/drawing/2014/main" id="{45DB30B2-297F-4EFB-80F4-EC9F2C26B213}"/>
+                <a16:creationId xmlns:a16="http://schemas.microsoft.com/office/drawing/2014/main" id="{DB860E2C-C609-4438-AFB0-D9EFCB4FBA72}"/>
               </a:ext>
             </a:extLst>
           </p:cNvPr>
@@ -12496,7 +12496,7 @@
           <p:cNvPr id="18" name="">
             <a:extLst xmlns:a="http://schemas.openxmlformats.org/drawingml/2006/main">
               <a:ext uri="{FF2B5EF4-FFF2-40B4-BE49-F238E27FC236}">
-                <a16:creationId xmlns:a16="http://schemas.microsoft.com/office/drawing/2014/main" id="{46817D0F-D65C-4904-AF14-9494DD23B3B6}"/>
+                <a16:creationId xmlns:a16="http://schemas.microsoft.com/office/drawing/2014/main" id="{4DE48579-09CA-4C1D-BEE3-760C209F927F}"/>
               </a:ext>
             </a:extLst>
           </p:cNvPr>
@@ -12529,7 +12529,7 @@
           <p:cNvPr id="19" name="">
             <a:extLst xmlns:a="http://schemas.openxmlformats.org/drawingml/2006/main">
               <a:ext uri="{FF2B5EF4-FFF2-40B4-BE49-F238E27FC236}">
-                <a16:creationId xmlns:a16="http://schemas.microsoft.com/office/drawing/2014/main" id="{65F34499-113E-4058-B825-E8D27599A466}"/>
+                <a16:creationId xmlns:a16="http://schemas.microsoft.com/office/drawing/2014/main" id="{CF896C1C-BADB-493F-ACEB-78F505CDEDF6}"/>
               </a:ext>
             </a:extLst>
           </p:cNvPr>
@@ -12564,7 +12564,7 @@
           <p:cNvPr id="20" name="">
             <a:extLst xmlns:a="http://schemas.openxmlformats.org/drawingml/2006/main">
               <a:ext uri="{FF2B5EF4-FFF2-40B4-BE49-F238E27FC236}">
-                <a16:creationId xmlns:a16="http://schemas.microsoft.com/office/drawing/2014/main" id="{D9CB60F9-3789-4142-B246-0633EDFE5969}"/>
+                <a16:creationId xmlns:a16="http://schemas.microsoft.com/office/drawing/2014/main" id="{9A221AC9-9BC5-4F1D-9E8E-5C09E2AA67E7}"/>
               </a:ext>
             </a:extLst>
           </p:cNvPr>
@@ -12628,7 +12628,7 @@
           <p:cNvPr id="21" name="">
             <a:extLst xmlns:a="http://schemas.openxmlformats.org/drawingml/2006/main">
               <a:ext uri="{FF2B5EF4-FFF2-40B4-BE49-F238E27FC236}">
-                <a16:creationId xmlns:a16="http://schemas.microsoft.com/office/drawing/2014/main" id="{FE3C9D73-531F-44A3-A2BB-EF9C4A56A9D1}"/>
+                <a16:creationId xmlns:a16="http://schemas.microsoft.com/office/drawing/2014/main" id="{6B4D1EBE-5352-402A-BC53-B4759C9B30C8}"/>
               </a:ext>
             </a:extLst>
           </p:cNvPr>
@@ -12692,7 +12692,7 @@
           <p:cNvPr id="22" name="">
             <a:extLst xmlns:a="http://schemas.openxmlformats.org/drawingml/2006/main">
               <a:ext uri="{FF2B5EF4-FFF2-40B4-BE49-F238E27FC236}">
-                <a16:creationId xmlns:a16="http://schemas.microsoft.com/office/drawing/2014/main" id="{9B138860-DA56-4068-AD12-636C8E4382B0}"/>
+                <a16:creationId xmlns:a16="http://schemas.microsoft.com/office/drawing/2014/main" id="{016CD4A5-9212-434D-94E7-F44655BE665F}"/>
               </a:ext>
             </a:extLst>
           </p:cNvPr>
@@ -12756,7 +12756,7 @@
           <p:cNvPr id="23" name="">
             <a:extLst xmlns:a="http://schemas.openxmlformats.org/drawingml/2006/main">
               <a:ext uri="{FF2B5EF4-FFF2-40B4-BE49-F238E27FC236}">
-                <a16:creationId xmlns:a16="http://schemas.microsoft.com/office/drawing/2014/main" id="{7C835762-17EE-43A7-AAC3-3362B4BF0DD9}"/>
+                <a16:creationId xmlns:a16="http://schemas.microsoft.com/office/drawing/2014/main" id="{A4DCC1E7-9883-4112-95A2-4C1D99B7AE87}"/>
               </a:ext>
             </a:extLst>
           </p:cNvPr>
@@ -12820,7 +12820,7 @@
           <p:cNvPr id="24" name="">
             <a:extLst xmlns:a="http://schemas.openxmlformats.org/drawingml/2006/main">
               <a:ext uri="{FF2B5EF4-FFF2-40B4-BE49-F238E27FC236}">
-                <a16:creationId xmlns:a16="http://schemas.microsoft.com/office/drawing/2014/main" id="{014EF9F7-E337-4295-88F9-D76F88C850D3}"/>
+                <a16:creationId xmlns:a16="http://schemas.microsoft.com/office/drawing/2014/main" id="{A813CA3E-F7C6-40F2-BF64-D765745FD55A}"/>
               </a:ext>
             </a:extLst>
           </p:cNvPr>
@@ -12853,7 +12853,7 @@
           <p:cNvPr id="25" name="">
             <a:extLst xmlns:a="http://schemas.openxmlformats.org/drawingml/2006/main">
               <a:ext uri="{FF2B5EF4-FFF2-40B4-BE49-F238E27FC236}">
-                <a16:creationId xmlns:a16="http://schemas.microsoft.com/office/drawing/2014/main" id="{47CD4254-59AA-464B-B6E0-9D0FB7A079A0}"/>
+                <a16:creationId xmlns:a16="http://schemas.microsoft.com/office/drawing/2014/main" id="{A501FFE1-BE1C-4233-B0E5-C06B68F08978}"/>
               </a:ext>
             </a:extLst>
           </p:cNvPr>
@@ -12917,7 +12917,7 @@
           <p:cNvPr id="26" name="">
             <a:extLst xmlns:a="http://schemas.openxmlformats.org/drawingml/2006/main">
               <a:ext uri="{FF2B5EF4-FFF2-40B4-BE49-F238E27FC236}">
-                <a16:creationId xmlns:a16="http://schemas.microsoft.com/office/drawing/2014/main" id="{993545AB-1B63-4E9B-B27F-F519CDEAB231}"/>
+                <a16:creationId xmlns:a16="http://schemas.microsoft.com/office/drawing/2014/main" id="{1A93FC29-6C75-45E8-94D7-684EBC27C988}"/>
               </a:ext>
             </a:extLst>
           </p:cNvPr>
@@ -12979,7 +12979,7 @@
     </p:spTree>
     <p:extLst>
       <p:ext uri="{BB962C8B-B14F-4D97-AF65-F5344CB8AC3E}">
-        <p14:creationId xmlns:p14="http://schemas.microsoft.com/office/powerpoint/2010/main" val="434314777"/>
+        <p14:creationId xmlns:p14="http://schemas.microsoft.com/office/powerpoint/2010/main" val="1124928524"/>
       </p:ext>
     </p:extLst>
   </p:cSld>
@@ -13007,7 +13007,7 @@
           <p:nvPr/>
         </p:nvPicPr>
         <p:blipFill>
-          <a:blip xmlns:r="http://schemas.openxmlformats.org/officeDocument/2006/relationships" xmlns:a="http://schemas.openxmlformats.org/drawingml/2006/main" r:embed="Rd44345c93ef440ff"/>
+          <a:blip xmlns:r="http://schemas.openxmlformats.org/officeDocument/2006/relationships" xmlns:a="http://schemas.openxmlformats.org/drawingml/2006/main" r:embed="R52c543a7b85d40cb"/>
           <a:srcRect xmlns:a="http://schemas.openxmlformats.org/drawingml/2006/main" l="0" t="27" r="0" b="27"/>
           <a:stretch xmlns:a="http://schemas.openxmlformats.org/drawingml/2006/main">
             <a:fillRect l="0" t="0" r="0" b="0"/>
@@ -13028,7 +13028,7 @@
           <p:cNvPr id="2" name="">
             <a:extLst xmlns:a="http://schemas.openxmlformats.org/drawingml/2006/main">
               <a:ext uri="{FF2B5EF4-FFF2-40B4-BE49-F238E27FC236}">
-                <a16:creationId xmlns:a16="http://schemas.microsoft.com/office/drawing/2014/main" id="{FB11625C-BB2A-4A86-8664-383FA95144FE}"/>
+                <a16:creationId xmlns:a16="http://schemas.microsoft.com/office/drawing/2014/main" id="{27C93472-9918-4F73-9E0A-A43B055B0618}"/>
               </a:ext>
             </a:extLst>
           </p:cNvPr>
@@ -13065,7 +13065,7 @@
           <p:cNvPr id="3" name="">
             <a:extLst xmlns:a="http://schemas.openxmlformats.org/drawingml/2006/main">
               <a:ext uri="{FF2B5EF4-FFF2-40B4-BE49-F238E27FC236}">
-                <a16:creationId xmlns:a16="http://schemas.microsoft.com/office/drawing/2014/main" id="{71C0D146-C281-4CEB-B92C-015ED3FAF5D1}"/>
+                <a16:creationId xmlns:a16="http://schemas.microsoft.com/office/drawing/2014/main" id="{132DA335-000E-4C6F-9D3D-7A94A822CEDE}"/>
               </a:ext>
             </a:extLst>
           </p:cNvPr>
@@ -13102,7 +13102,7 @@
           <p:cNvPr id="4" name="">
             <a:extLst xmlns:a="http://schemas.openxmlformats.org/drawingml/2006/main">
               <a:ext uri="{FF2B5EF4-FFF2-40B4-BE49-F238E27FC236}">
-                <a16:creationId xmlns:a16="http://schemas.microsoft.com/office/drawing/2014/main" id="{6BA8AA3B-24D4-4ECB-B7FC-52CFC27A6615}"/>
+                <a16:creationId xmlns:a16="http://schemas.microsoft.com/office/drawing/2014/main" id="{80BE558D-E3DD-486C-B06F-95A544589B0E}"/>
               </a:ext>
             </a:extLst>
           </p:cNvPr>
@@ -13166,7 +13166,7 @@
           <p:cNvPr id="5" name="">
             <a:extLst xmlns:a="http://schemas.openxmlformats.org/drawingml/2006/main">
               <a:ext uri="{FF2B5EF4-FFF2-40B4-BE49-F238E27FC236}">
-                <a16:creationId xmlns:a16="http://schemas.microsoft.com/office/drawing/2014/main" id="{0F30A3F8-A610-48F1-ACD7-5AF43619B672}"/>
+                <a16:creationId xmlns:a16="http://schemas.microsoft.com/office/drawing/2014/main" id="{13CC7172-2216-49CD-A63F-17D921C7C120}"/>
               </a:ext>
             </a:extLst>
           </p:cNvPr>
@@ -13230,7 +13230,7 @@
           <p:cNvPr id="6" name="">
             <a:extLst xmlns:a="http://schemas.openxmlformats.org/drawingml/2006/main">
               <a:ext uri="{FF2B5EF4-FFF2-40B4-BE49-F238E27FC236}">
-                <a16:creationId xmlns:a16="http://schemas.microsoft.com/office/drawing/2014/main" id="{294E6414-2642-41E9-97A2-85829B367B12}"/>
+                <a16:creationId xmlns:a16="http://schemas.microsoft.com/office/drawing/2014/main" id="{4FEB91B4-4EA9-4CF0-8EA5-A7A139191FC3}"/>
               </a:ext>
             </a:extLst>
           </p:cNvPr>
@@ -13294,19 +13294,19 @@
           <p:cNvPr id="7" name="">
             <a:extLst xmlns:a="http://schemas.openxmlformats.org/drawingml/2006/main">
               <a:ext uri="{FF2B5EF4-FFF2-40B4-BE49-F238E27FC236}">
-                <a16:creationId xmlns:a16="http://schemas.microsoft.com/office/drawing/2014/main" id="{95E478FA-5C97-4BE7-B7AE-A673252345F3}"/>
-              </a:ext>
-            </a:extLst>
-          </p:cNvPr>
-          <p:cNvSpPr>
-            <a:spLocks xmlns:a="http://schemas.openxmlformats.org/drawingml/2006/main" noGrp="1"/>
-          </p:cNvSpPr>
-          <p:nvPr/>
-        </p:nvSpPr>
-        <p:spPr>
-          <a:xfrm xmlns:a="http://schemas.openxmlformats.org/drawingml/2006/main">
-            <a:off x="4705350" y="3505200"/>
-            <a:ext cx="2247900" cy="990600"/>
+                <a16:creationId xmlns:a16="http://schemas.microsoft.com/office/drawing/2014/main" id="{F96F9D80-73D4-4400-8B0B-21E8FA27708B}"/>
+              </a:ext>
+            </a:extLst>
+          </p:cNvPr>
+          <p:cNvSpPr>
+            <a:spLocks xmlns:a="http://schemas.openxmlformats.org/drawingml/2006/main" noGrp="1"/>
+          </p:cNvSpPr>
+          <p:nvPr/>
+        </p:nvSpPr>
+        <p:spPr>
+          <a:xfrm xmlns:a="http://schemas.openxmlformats.org/drawingml/2006/main">
+            <a:off x="4514850" y="3371850"/>
+            <a:ext cx="3143250" cy="876300"/>
           </a:xfrm>
           <a:prstGeom xmlns:a="http://schemas.openxmlformats.org/drawingml/2006/main" prst="rect">
             <a:avLst/>
@@ -13316,7 +13316,7 @@
               <a:alpha val="93333"/>
             </a:srgbClr>
           </a:solidFill>
-          <a:ln xmlns:a="http://schemas.openxmlformats.org/drawingml/2006/main" w="9525">
+          <a:ln xmlns:a="http://schemas.openxmlformats.org/drawingml/2006/main" w="19050">
             <a:solidFill>
               <a:srgbClr val="55E6FF"/>
             </a:solidFill>
@@ -13329,19 +13329,19 @@
           <p:cNvPr id="8" name="">
             <a:extLst xmlns:a="http://schemas.openxmlformats.org/drawingml/2006/main">
               <a:ext uri="{FF2B5EF4-FFF2-40B4-BE49-F238E27FC236}">
-                <a16:creationId xmlns:a16="http://schemas.microsoft.com/office/drawing/2014/main" id="{FDB90E10-94A1-4474-982E-4DD6C7E0BD65}"/>
-              </a:ext>
-            </a:extLst>
-          </p:cNvPr>
-          <p:cNvSpPr>
-            <a:spLocks xmlns:a="http://schemas.openxmlformats.org/drawingml/2006/main" noGrp="1"/>
-          </p:cNvSpPr>
-          <p:nvPr/>
-        </p:nvSpPr>
-        <p:spPr>
-          <a:xfrm xmlns:a="http://schemas.openxmlformats.org/drawingml/2006/main">
-            <a:off x="4991100" y="3676650"/>
-            <a:ext cx="1676400" cy="647700"/>
+                <a16:creationId xmlns:a16="http://schemas.microsoft.com/office/drawing/2014/main" id="{833FD78D-DDD2-4CF1-A1C5-21B5BB0A3CD0}"/>
+              </a:ext>
+            </a:extLst>
+          </p:cNvPr>
+          <p:cNvSpPr>
+            <a:spLocks xmlns:a="http://schemas.openxmlformats.org/drawingml/2006/main" noGrp="1"/>
+          </p:cNvSpPr>
+          <p:nvPr/>
+        </p:nvSpPr>
+        <p:spPr>
+          <a:xfrm xmlns:a="http://schemas.openxmlformats.org/drawingml/2006/main">
+            <a:off x="4953000" y="3581400"/>
+            <a:ext cx="2266950" cy="514350"/>
           </a:xfrm>
           <a:prstGeom xmlns:a="http://schemas.openxmlformats.org/drawingml/2006/main" prst="rect">
             <a:avLst/>
@@ -13365,7 +13365,7 @@
           <a:lstStyle xmlns:a="http://schemas.openxmlformats.org/drawingml/2006/main"/>
           <a:p xmlns:a="http://schemas.openxmlformats.org/drawingml/2006/main">
             <a:pPr algn="ctr">
-              <a:defRPr sz="1650" b="1">
+              <a:defRPr sz="1800" b="1">
                 <a:solidFill>
                   <a:srgbClr val="EAF8FF"/>
                 </a:solidFill>
@@ -13375,7 +13375,7 @@
               </a:defRPr>
             </a:pPr>
             <a:r>
-              <a:rPr sz="1650" b="1">
+              <a:rPr sz="1800" b="1">
                 <a:solidFill>
                   <a:srgbClr val="EAF8FF"/>
                 </a:solidFill>
@@ -13388,7 +13388,7 @@
           </a:p>
           <a:p xmlns:a="http://schemas.openxmlformats.org/drawingml/2006/main">
             <a:pPr algn="ctr">
-              <a:defRPr sz="1650" b="1">
+              <a:defRPr sz="1800" b="1">
                 <a:solidFill>
                   <a:srgbClr val="EAF8FF"/>
                 </a:solidFill>
@@ -13398,7 +13398,7 @@
               </a:defRPr>
             </a:pPr>
             <a:r>
-              <a:rPr sz="1650" b="1">
+              <a:rPr sz="1800" b="1">
                 <a:solidFill>
                   <a:srgbClr val="EAF8FF"/>
                 </a:solidFill>
@@ -13416,19 +13416,83 @@
           <p:cNvPr id="9" name="">
             <a:extLst xmlns:a="http://schemas.openxmlformats.org/drawingml/2006/main">
               <a:ext uri="{FF2B5EF4-FFF2-40B4-BE49-F238E27FC236}">
-                <a16:creationId xmlns:a16="http://schemas.microsoft.com/office/drawing/2014/main" id="{92A26D63-9D6C-4FDB-8449-CA86AADF69CB}"/>
-              </a:ext>
-            </a:extLst>
-          </p:cNvPr>
-          <p:cNvSpPr>
-            <a:spLocks xmlns:a="http://schemas.openxmlformats.org/drawingml/2006/main" noGrp="1"/>
-          </p:cNvSpPr>
-          <p:nvPr/>
-        </p:nvSpPr>
-        <p:spPr>
-          <a:xfrm xmlns:a="http://schemas.openxmlformats.org/drawingml/2006/main">
-            <a:off x="4781550" y="2133600"/>
-            <a:ext cx="2095500" cy="647700"/>
+                <a16:creationId xmlns:a16="http://schemas.microsoft.com/office/drawing/2014/main" id="{20B38D06-1918-4637-9C95-C63F6366E255}"/>
+              </a:ext>
+            </a:extLst>
+          </p:cNvPr>
+          <p:cNvSpPr>
+            <a:spLocks xmlns:a="http://schemas.openxmlformats.org/drawingml/2006/main" noGrp="1"/>
+          </p:cNvSpPr>
+          <p:nvPr/>
+        </p:nvSpPr>
+        <p:spPr>
+          <a:xfrm xmlns:a="http://schemas.openxmlformats.org/drawingml/2006/main">
+            <a:off x="4171950" y="4457700"/>
+            <a:ext cx="3848100" cy="228600"/>
+          </a:xfrm>
+          <a:prstGeom xmlns:a="http://schemas.openxmlformats.org/drawingml/2006/main" prst="rect">
+            <a:avLst/>
+          </a:prstGeom>
+          <a:solidFill xmlns:a="http://schemas.openxmlformats.org/drawingml/2006/main">
+            <a:srgbClr val="000000">
+              <a:alpha val="0"/>
+            </a:srgbClr>
+          </a:solidFill>
+          <a:ln xmlns:a="http://schemas.openxmlformats.org/drawingml/2006/main" w="0">
+            <a:solidFill>
+              <a:srgbClr val="000000">
+                <a:alpha val="0"/>
+              </a:srgbClr>
+            </a:solidFill>
+            <a:prstDash val="solid"/>
+          </a:ln>
+        </p:spPr>
+        <p:txBody>
+          <a:bodyPr xmlns:a="http://schemas.openxmlformats.org/drawingml/2006/main" lIns="0" tIns="0" rIns="0" bIns="0" anchor="t"/>
+          <a:lstStyle xmlns:a="http://schemas.openxmlformats.org/drawingml/2006/main"/>
+          <a:p xmlns:a="http://schemas.openxmlformats.org/drawingml/2006/main">
+            <a:pPr algn="ctr">
+              <a:defRPr sz="1125" b="1">
+                <a:solidFill>
+                  <a:srgbClr val="55E6FF"/>
+                </a:solidFill>
+                <a:latin typeface="Aptos"/>
+                <a:ea typeface="Aptos"/>
+                <a:cs typeface="Aptos"/>
+              </a:defRPr>
+            </a:pPr>
+            <a:r>
+              <a:rPr sz="1125" b="1">
+                <a:solidFill>
+                  <a:srgbClr val="55E6FF"/>
+                </a:solidFill>
+                <a:latin typeface="Aptos"/>
+                <a:ea typeface="Aptos"/>
+                <a:cs typeface="Aptos"/>
+              </a:rPr>
+              <a:t>Shared IP, data and reusable playbooks</a:t>
+            </a:r>
+          </a:p>
+        </p:txBody>
+      </p:sp>
+      <p:sp>
+        <p:nvSpPr>
+          <p:cNvPr id="10" name="">
+            <a:extLst xmlns:a="http://schemas.openxmlformats.org/drawingml/2006/main">
+              <a:ext uri="{FF2B5EF4-FFF2-40B4-BE49-F238E27FC236}">
+                <a16:creationId xmlns:a16="http://schemas.microsoft.com/office/drawing/2014/main" id="{EC65C832-929F-43CA-9C73-E940435D5283}"/>
+              </a:ext>
+            </a:extLst>
+          </p:cNvPr>
+          <p:cNvSpPr>
+            <a:spLocks xmlns:a="http://schemas.openxmlformats.org/drawingml/2006/main" noGrp="1"/>
+          </p:cNvSpPr>
+          <p:nvPr/>
+        </p:nvSpPr>
+        <p:spPr>
+          <a:xfrm xmlns:a="http://schemas.openxmlformats.org/drawingml/2006/main">
+            <a:off x="723900" y="5143500"/>
+            <a:ext cx="2038350" cy="723900"/>
           </a:xfrm>
           <a:prstGeom xmlns:a="http://schemas.openxmlformats.org/drawingml/2006/main" prst="rect">
             <a:avLst/>
@@ -13448,22 +13512,22 @@
       </p:sp>
       <p:sp>
         <p:nvSpPr>
-          <p:cNvPr id="10" name="">
-            <a:extLst xmlns:a="http://schemas.openxmlformats.org/drawingml/2006/main">
-              <a:ext uri="{FF2B5EF4-FFF2-40B4-BE49-F238E27FC236}">
-                <a16:creationId xmlns:a16="http://schemas.microsoft.com/office/drawing/2014/main" id="{2B4378FD-B458-44FF-BA11-6027D51DD3C1}"/>
-              </a:ext>
-            </a:extLst>
-          </p:cNvPr>
-          <p:cNvSpPr>
-            <a:spLocks xmlns:a="http://schemas.openxmlformats.org/drawingml/2006/main" noGrp="1"/>
-          </p:cNvSpPr>
-          <p:nvPr/>
-        </p:nvSpPr>
-        <p:spPr>
-          <a:xfrm xmlns:a="http://schemas.openxmlformats.org/drawingml/2006/main">
-            <a:off x="4953000" y="2305050"/>
-            <a:ext cx="1752600" cy="247650"/>
+          <p:cNvPr id="11" name="">
+            <a:extLst xmlns:a="http://schemas.openxmlformats.org/drawingml/2006/main">
+              <a:ext uri="{FF2B5EF4-FFF2-40B4-BE49-F238E27FC236}">
+                <a16:creationId xmlns:a16="http://schemas.microsoft.com/office/drawing/2014/main" id="{E0E7C5D7-E540-4C21-88C0-614DC52FE56A}"/>
+              </a:ext>
+            </a:extLst>
+          </p:cNvPr>
+          <p:cNvSpPr>
+            <a:spLocks xmlns:a="http://schemas.openxmlformats.org/drawingml/2006/main" noGrp="1"/>
+          </p:cNvSpPr>
+          <p:nvPr/>
+        </p:nvSpPr>
+        <p:spPr>
+          <a:xfrm xmlns:a="http://schemas.openxmlformats.org/drawingml/2006/main">
+            <a:off x="857250" y="5353050"/>
+            <a:ext cx="1771650" cy="266700"/>
           </a:xfrm>
           <a:prstGeom xmlns:a="http://schemas.openxmlformats.org/drawingml/2006/main" prst="rect">
             <a:avLst/>
@@ -13512,22 +13576,22 @@
       </p:sp>
       <p:sp>
         <p:nvSpPr>
-          <p:cNvPr id="11" name="">
-            <a:extLst xmlns:a="http://schemas.openxmlformats.org/drawingml/2006/main">
-              <a:ext uri="{FF2B5EF4-FFF2-40B4-BE49-F238E27FC236}">
-                <a16:creationId xmlns:a16="http://schemas.microsoft.com/office/drawing/2014/main" id="{6A43992B-C4A1-4005-B264-864B931E6E75}"/>
-              </a:ext>
-            </a:extLst>
-          </p:cNvPr>
-          <p:cNvSpPr>
-            <a:spLocks xmlns:a="http://schemas.openxmlformats.org/drawingml/2006/main" noGrp="1"/>
-          </p:cNvSpPr>
-          <p:nvPr/>
-        </p:nvSpPr>
-        <p:spPr>
-          <a:xfrm xmlns:a="http://schemas.openxmlformats.org/drawingml/2006/main">
-            <a:off x="5829300" y="2457450"/>
-            <a:ext cx="19050" cy="19050"/>
+          <p:cNvPr id="12" name="">
+            <a:extLst xmlns:a="http://schemas.openxmlformats.org/drawingml/2006/main">
+              <a:ext uri="{FF2B5EF4-FFF2-40B4-BE49-F238E27FC236}">
+                <a16:creationId xmlns:a16="http://schemas.microsoft.com/office/drawing/2014/main" id="{4F80E9BE-DA3E-4C20-A157-26B3E3D741F9}"/>
+              </a:ext>
+            </a:extLst>
+          </p:cNvPr>
+          <p:cNvSpPr>
+            <a:spLocks xmlns:a="http://schemas.openxmlformats.org/drawingml/2006/main" noGrp="1"/>
+          </p:cNvSpPr>
+          <p:nvPr/>
+        </p:nvSpPr>
+        <p:spPr>
+          <a:xfrm xmlns:a="http://schemas.openxmlformats.org/drawingml/2006/main">
+            <a:off x="1733550" y="4762500"/>
+            <a:ext cx="19050" cy="381000"/>
           </a:xfrm>
           <a:prstGeom xmlns:a="http://schemas.openxmlformats.org/drawingml/2006/main" prst="rect">
             <a:avLst/>
@@ -13545,22 +13609,22 @@
       </p:sp>
       <p:sp>
         <p:nvSpPr>
-          <p:cNvPr id="12" name="">
-            <a:extLst xmlns:a="http://schemas.openxmlformats.org/drawingml/2006/main">
-              <a:ext uri="{FF2B5EF4-FFF2-40B4-BE49-F238E27FC236}">
-                <a16:creationId xmlns:a16="http://schemas.microsoft.com/office/drawing/2014/main" id="{32634645-4D41-4960-8ACB-46449F7F8C21}"/>
-              </a:ext>
-            </a:extLst>
-          </p:cNvPr>
-          <p:cNvSpPr>
-            <a:spLocks xmlns:a="http://schemas.openxmlformats.org/drawingml/2006/main" noGrp="1"/>
-          </p:cNvSpPr>
-          <p:nvPr/>
-        </p:nvSpPr>
-        <p:spPr>
-          <a:xfrm xmlns:a="http://schemas.openxmlformats.org/drawingml/2006/main">
-            <a:off x="7879664" y="3199821"/>
-            <a:ext cx="2095500" cy="647700"/>
+          <p:cNvPr id="13" name="">
+            <a:extLst xmlns:a="http://schemas.openxmlformats.org/drawingml/2006/main">
+              <a:ext uri="{FF2B5EF4-FFF2-40B4-BE49-F238E27FC236}">
+                <a16:creationId xmlns:a16="http://schemas.microsoft.com/office/drawing/2014/main" id="{1CD41D80-AE52-4AAE-8454-86DE882A1FAF}"/>
+              </a:ext>
+            </a:extLst>
+          </p:cNvPr>
+          <p:cNvSpPr>
+            <a:spLocks xmlns:a="http://schemas.openxmlformats.org/drawingml/2006/main" noGrp="1"/>
+          </p:cNvSpPr>
+          <p:nvPr/>
+        </p:nvSpPr>
+        <p:spPr>
+          <a:xfrm xmlns:a="http://schemas.openxmlformats.org/drawingml/2006/main">
+            <a:off x="2895600" y="5143500"/>
+            <a:ext cx="2038350" cy="723900"/>
           </a:xfrm>
           <a:prstGeom xmlns:a="http://schemas.openxmlformats.org/drawingml/2006/main" prst="rect">
             <a:avLst/>
@@ -13580,22 +13644,154 @@
       </p:sp>
       <p:sp>
         <p:nvSpPr>
-          <p:cNvPr id="13" name="">
-            <a:extLst xmlns:a="http://schemas.openxmlformats.org/drawingml/2006/main">
-              <a:ext uri="{FF2B5EF4-FFF2-40B4-BE49-F238E27FC236}">
-                <a16:creationId xmlns:a16="http://schemas.microsoft.com/office/drawing/2014/main" id="{B22F5E72-8785-42B6-BE56-51C816CA5450}"/>
-              </a:ext>
-            </a:extLst>
-          </p:cNvPr>
-          <p:cNvSpPr>
-            <a:spLocks xmlns:a="http://schemas.openxmlformats.org/drawingml/2006/main" noGrp="1"/>
-          </p:cNvSpPr>
-          <p:nvPr/>
-        </p:nvSpPr>
-        <p:spPr>
-          <a:xfrm xmlns:a="http://schemas.openxmlformats.org/drawingml/2006/main">
-            <a:off x="8051114" y="3371271"/>
-            <a:ext cx="1752600" cy="247650"/>
+          <p:cNvPr id="14" name="">
+            <a:extLst xmlns:a="http://schemas.openxmlformats.org/drawingml/2006/main">
+              <a:ext uri="{FF2B5EF4-FFF2-40B4-BE49-F238E27FC236}">
+                <a16:creationId xmlns:a16="http://schemas.microsoft.com/office/drawing/2014/main" id="{F5D1E4D6-387C-4259-B2E8-FE3622780386}"/>
+              </a:ext>
+            </a:extLst>
+          </p:cNvPr>
+          <p:cNvSpPr>
+            <a:spLocks xmlns:a="http://schemas.openxmlformats.org/drawingml/2006/main" noGrp="1"/>
+          </p:cNvSpPr>
+          <p:nvPr/>
+        </p:nvSpPr>
+        <p:spPr>
+          <a:xfrm xmlns:a="http://schemas.openxmlformats.org/drawingml/2006/main">
+            <a:off x="3028950" y="5353050"/>
+            <a:ext cx="1771650" cy="266700"/>
+          </a:xfrm>
+          <a:prstGeom xmlns:a="http://schemas.openxmlformats.org/drawingml/2006/main" prst="rect">
+            <a:avLst/>
+          </a:prstGeom>
+          <a:solidFill xmlns:a="http://schemas.openxmlformats.org/drawingml/2006/main">
+            <a:srgbClr val="000000">
+              <a:alpha val="0"/>
+            </a:srgbClr>
+          </a:solidFill>
+          <a:ln xmlns:a="http://schemas.openxmlformats.org/drawingml/2006/main" w="0">
+            <a:solidFill>
+              <a:srgbClr val="000000">
+                <a:alpha val="0"/>
+              </a:srgbClr>
+            </a:solidFill>
+            <a:prstDash val="solid"/>
+          </a:ln>
+        </p:spPr>
+        <p:txBody>
+          <a:bodyPr xmlns:a="http://schemas.openxmlformats.org/drawingml/2006/main" lIns="0" tIns="0" rIns="0" bIns="0" anchor="t"/>
+          <a:lstStyle xmlns:a="http://schemas.openxmlformats.org/drawingml/2006/main"/>
+          <a:p xmlns:a="http://schemas.openxmlformats.org/drawingml/2006/main">
+            <a:pPr algn="ctr">
+              <a:defRPr sz="1125" b="1">
+                <a:solidFill>
+                  <a:srgbClr val="EAF8FF"/>
+                </a:solidFill>
+                <a:latin typeface="Aptos"/>
+                <a:ea typeface="Aptos"/>
+                <a:cs typeface="Aptos"/>
+              </a:defRPr>
+            </a:pPr>
+            <a:r>
+              <a:rPr sz="1125" b="1">
+                <a:solidFill>
+                  <a:srgbClr val="EAF8FF"/>
+                </a:solidFill>
+                <a:latin typeface="Aptos"/>
+                <a:ea typeface="Aptos"/>
+                <a:cs typeface="Aptos"/>
+              </a:rPr>
+              <a:t>Inteligência artificial</a:t>
+            </a:r>
+          </a:p>
+        </p:txBody>
+      </p:sp>
+      <p:sp>
+        <p:nvSpPr>
+          <p:cNvPr id="15" name="">
+            <a:extLst xmlns:a="http://schemas.openxmlformats.org/drawingml/2006/main">
+              <a:ext uri="{FF2B5EF4-FFF2-40B4-BE49-F238E27FC236}">
+                <a16:creationId xmlns:a16="http://schemas.microsoft.com/office/drawing/2014/main" id="{7F263634-54D2-4D6C-A898-02E18E774380}"/>
+              </a:ext>
+            </a:extLst>
+          </p:cNvPr>
+          <p:cNvSpPr>
+            <a:spLocks xmlns:a="http://schemas.openxmlformats.org/drawingml/2006/main" noGrp="1"/>
+          </p:cNvSpPr>
+          <p:nvPr/>
+        </p:nvSpPr>
+        <p:spPr>
+          <a:xfrm xmlns:a="http://schemas.openxmlformats.org/drawingml/2006/main">
+            <a:off x="3905250" y="4762500"/>
+            <a:ext cx="19050" cy="381000"/>
+          </a:xfrm>
+          <a:prstGeom xmlns:a="http://schemas.openxmlformats.org/drawingml/2006/main" prst="rect">
+            <a:avLst/>
+          </a:prstGeom>
+          <a:solidFill xmlns:a="http://schemas.openxmlformats.org/drawingml/2006/main">
+            <a:srgbClr val="285563"/>
+          </a:solidFill>
+          <a:ln xmlns:a="http://schemas.openxmlformats.org/drawingml/2006/main" w="0">
+            <a:solidFill>
+              <a:srgbClr val="285563"/>
+            </a:solidFill>
+            <a:prstDash val="solid"/>
+          </a:ln>
+        </p:spPr>
+      </p:sp>
+      <p:sp>
+        <p:nvSpPr>
+          <p:cNvPr id="16" name="">
+            <a:extLst xmlns:a="http://schemas.openxmlformats.org/drawingml/2006/main">
+              <a:ext uri="{FF2B5EF4-FFF2-40B4-BE49-F238E27FC236}">
+                <a16:creationId xmlns:a16="http://schemas.microsoft.com/office/drawing/2014/main" id="{A1078422-CE92-4C84-A088-84FC6B372EB1}"/>
+              </a:ext>
+            </a:extLst>
+          </p:cNvPr>
+          <p:cNvSpPr>
+            <a:spLocks xmlns:a="http://schemas.openxmlformats.org/drawingml/2006/main" noGrp="1"/>
+          </p:cNvSpPr>
+          <p:nvPr/>
+        </p:nvSpPr>
+        <p:spPr>
+          <a:xfrm xmlns:a="http://schemas.openxmlformats.org/drawingml/2006/main">
+            <a:off x="5067300" y="5143500"/>
+            <a:ext cx="2038350" cy="723900"/>
+          </a:xfrm>
+          <a:prstGeom xmlns:a="http://schemas.openxmlformats.org/drawingml/2006/main" prst="rect">
+            <a:avLst/>
+          </a:prstGeom>
+          <a:solidFill xmlns:a="http://schemas.openxmlformats.org/drawingml/2006/main">
+            <a:srgbClr val="081A23">
+              <a:alpha val="86667"/>
+            </a:srgbClr>
+          </a:solidFill>
+          <a:ln xmlns:a="http://schemas.openxmlformats.org/drawingml/2006/main" w="9525">
+            <a:solidFill>
+              <a:srgbClr val="25505B"/>
+            </a:solidFill>
+            <a:prstDash val="solid"/>
+          </a:ln>
+        </p:spPr>
+      </p:sp>
+      <p:sp>
+        <p:nvSpPr>
+          <p:cNvPr id="17" name="">
+            <a:extLst xmlns:a="http://schemas.openxmlformats.org/drawingml/2006/main">
+              <a:ext uri="{FF2B5EF4-FFF2-40B4-BE49-F238E27FC236}">
+                <a16:creationId xmlns:a16="http://schemas.microsoft.com/office/drawing/2014/main" id="{CC14248B-4D41-4DEC-A1E3-CEECCDEB9C41}"/>
+              </a:ext>
+            </a:extLst>
+          </p:cNvPr>
+          <p:cNvSpPr>
+            <a:spLocks xmlns:a="http://schemas.openxmlformats.org/drawingml/2006/main" noGrp="1"/>
+          </p:cNvSpPr>
+          <p:nvPr/>
+        </p:nvSpPr>
+        <p:spPr>
+          <a:xfrm xmlns:a="http://schemas.openxmlformats.org/drawingml/2006/main">
+            <a:off x="5200650" y="5353050"/>
+            <a:ext cx="1771650" cy="266700"/>
           </a:xfrm>
           <a:prstGeom xmlns:a="http://schemas.openxmlformats.org/drawingml/2006/main" prst="rect">
             <a:avLst/>
@@ -13637,29 +13833,29 @@
                 <a:ea typeface="Aptos"/>
                 <a:cs typeface="Aptos"/>
               </a:rPr>
-              <a:t>Inteligência artificial</a:t>
+              <a:t>Videogames</a:t>
             </a:r>
           </a:p>
         </p:txBody>
       </p:sp>
       <p:sp>
         <p:nvSpPr>
-          <p:cNvPr id="14" name="">
-            <a:extLst xmlns:a="http://schemas.openxmlformats.org/drawingml/2006/main">
-              <a:ext uri="{FF2B5EF4-FFF2-40B4-BE49-F238E27FC236}">
-                <a16:creationId xmlns:a16="http://schemas.microsoft.com/office/drawing/2014/main" id="{8ECC224E-AE72-484C-A926-CA227FA81A98}"/>
-              </a:ext>
-            </a:extLst>
-          </p:cNvPr>
-          <p:cNvSpPr>
-            <a:spLocks xmlns:a="http://schemas.openxmlformats.org/drawingml/2006/main" noGrp="1"/>
-          </p:cNvSpPr>
-          <p:nvPr/>
-        </p:nvSpPr>
-        <p:spPr>
-          <a:xfrm xmlns:a="http://schemas.openxmlformats.org/drawingml/2006/main">
-            <a:off x="5829300" y="3523671"/>
-            <a:ext cx="3098114" cy="19050"/>
+          <p:cNvPr id="18" name="">
+            <a:extLst xmlns:a="http://schemas.openxmlformats.org/drawingml/2006/main">
+              <a:ext uri="{FF2B5EF4-FFF2-40B4-BE49-F238E27FC236}">
+                <a16:creationId xmlns:a16="http://schemas.microsoft.com/office/drawing/2014/main" id="{B943C426-3936-46ED-8DFA-55E9B80FAD2B}"/>
+              </a:ext>
+            </a:extLst>
+          </p:cNvPr>
+          <p:cNvSpPr>
+            <a:spLocks xmlns:a="http://schemas.openxmlformats.org/drawingml/2006/main" noGrp="1"/>
+          </p:cNvSpPr>
+          <p:nvPr/>
+        </p:nvSpPr>
+        <p:spPr>
+          <a:xfrm xmlns:a="http://schemas.openxmlformats.org/drawingml/2006/main">
+            <a:off x="6076950" y="4762500"/>
+            <a:ext cx="19050" cy="381000"/>
           </a:xfrm>
           <a:prstGeom xmlns:a="http://schemas.openxmlformats.org/drawingml/2006/main" prst="rect">
             <a:avLst/>
@@ -13677,22 +13873,22 @@
       </p:sp>
       <p:sp>
         <p:nvSpPr>
-          <p:cNvPr id="15" name="">
-            <a:extLst xmlns:a="http://schemas.openxmlformats.org/drawingml/2006/main">
-              <a:ext uri="{FF2B5EF4-FFF2-40B4-BE49-F238E27FC236}">
-                <a16:creationId xmlns:a16="http://schemas.microsoft.com/office/drawing/2014/main" id="{A9F0E121-29C5-47DF-9D60-E244F7B39B25}"/>
-              </a:ext>
-            </a:extLst>
-          </p:cNvPr>
-          <p:cNvSpPr>
-            <a:spLocks xmlns:a="http://schemas.openxmlformats.org/drawingml/2006/main" noGrp="1"/>
-          </p:cNvSpPr>
-          <p:nvPr/>
-        </p:nvSpPr>
-        <p:spPr>
-          <a:xfrm xmlns:a="http://schemas.openxmlformats.org/drawingml/2006/main">
-            <a:off x="6696290" y="4925004"/>
-            <a:ext cx="2095500" cy="647700"/>
+          <p:cNvPr id="19" name="">
+            <a:extLst xmlns:a="http://schemas.openxmlformats.org/drawingml/2006/main">
+              <a:ext uri="{FF2B5EF4-FFF2-40B4-BE49-F238E27FC236}">
+                <a16:creationId xmlns:a16="http://schemas.microsoft.com/office/drawing/2014/main" id="{425A66B8-E35A-4374-8C6C-4B149475253B}"/>
+              </a:ext>
+            </a:extLst>
+          </p:cNvPr>
+          <p:cNvSpPr>
+            <a:spLocks xmlns:a="http://schemas.openxmlformats.org/drawingml/2006/main" noGrp="1"/>
+          </p:cNvSpPr>
+          <p:nvPr/>
+        </p:nvSpPr>
+        <p:spPr>
+          <a:xfrm xmlns:a="http://schemas.openxmlformats.org/drawingml/2006/main">
+            <a:off x="7239000" y="5143500"/>
+            <a:ext cx="2038350" cy="723900"/>
           </a:xfrm>
           <a:prstGeom xmlns:a="http://schemas.openxmlformats.org/drawingml/2006/main" prst="rect">
             <a:avLst/>
@@ -13712,22 +13908,22 @@
       </p:sp>
       <p:sp>
         <p:nvSpPr>
-          <p:cNvPr id="16" name="">
-            <a:extLst xmlns:a="http://schemas.openxmlformats.org/drawingml/2006/main">
-              <a:ext uri="{FF2B5EF4-FFF2-40B4-BE49-F238E27FC236}">
-                <a16:creationId xmlns:a16="http://schemas.microsoft.com/office/drawing/2014/main" id="{B42A31F7-9651-4D3D-A6F4-9B9322F868A7}"/>
-              </a:ext>
-            </a:extLst>
-          </p:cNvPr>
-          <p:cNvSpPr>
-            <a:spLocks xmlns:a="http://schemas.openxmlformats.org/drawingml/2006/main" noGrp="1"/>
-          </p:cNvSpPr>
-          <p:nvPr/>
-        </p:nvSpPr>
-        <p:spPr>
-          <a:xfrm xmlns:a="http://schemas.openxmlformats.org/drawingml/2006/main">
-            <a:off x="6867740" y="5096454"/>
-            <a:ext cx="1752600" cy="247650"/>
+          <p:cNvPr id="20" name="">
+            <a:extLst xmlns:a="http://schemas.openxmlformats.org/drawingml/2006/main">
+              <a:ext uri="{FF2B5EF4-FFF2-40B4-BE49-F238E27FC236}">
+                <a16:creationId xmlns:a16="http://schemas.microsoft.com/office/drawing/2014/main" id="{4BC87C2F-F195-4292-A4BB-FF48CF0445E1}"/>
+              </a:ext>
+            </a:extLst>
+          </p:cNvPr>
+          <p:cNvSpPr>
+            <a:spLocks xmlns:a="http://schemas.openxmlformats.org/drawingml/2006/main" noGrp="1"/>
+          </p:cNvSpPr>
+          <p:nvPr/>
+        </p:nvSpPr>
+        <p:spPr>
+          <a:xfrm xmlns:a="http://schemas.openxmlformats.org/drawingml/2006/main">
+            <a:off x="7372350" y="5353050"/>
+            <a:ext cx="1771650" cy="266700"/>
           </a:xfrm>
           <a:prstGeom xmlns:a="http://schemas.openxmlformats.org/drawingml/2006/main" prst="rect">
             <a:avLst/>
@@ -13769,29 +13965,29 @@
                 <a:ea typeface="Aptos"/>
                 <a:cs typeface="Aptos"/>
               </a:rPr>
-              <a:t>Videogames</a:t>
+              <a:t>Robótica</a:t>
             </a:r>
           </a:p>
         </p:txBody>
       </p:sp>
       <p:sp>
         <p:nvSpPr>
-          <p:cNvPr id="17" name="">
-            <a:extLst xmlns:a="http://schemas.openxmlformats.org/drawingml/2006/main">
-              <a:ext uri="{FF2B5EF4-FFF2-40B4-BE49-F238E27FC236}">
-                <a16:creationId xmlns:a16="http://schemas.microsoft.com/office/drawing/2014/main" id="{599402D9-8D69-410D-A73F-91AFCF60AE71}"/>
-              </a:ext>
-            </a:extLst>
-          </p:cNvPr>
-          <p:cNvSpPr>
-            <a:spLocks xmlns:a="http://schemas.openxmlformats.org/drawingml/2006/main" noGrp="1"/>
-          </p:cNvSpPr>
-          <p:nvPr/>
-        </p:nvSpPr>
-        <p:spPr>
-          <a:xfrm xmlns:a="http://schemas.openxmlformats.org/drawingml/2006/main">
-            <a:off x="5829300" y="4000500"/>
-            <a:ext cx="1914740" cy="19050"/>
+          <p:cNvPr id="21" name="">
+            <a:extLst xmlns:a="http://schemas.openxmlformats.org/drawingml/2006/main">
+              <a:ext uri="{FF2B5EF4-FFF2-40B4-BE49-F238E27FC236}">
+                <a16:creationId xmlns:a16="http://schemas.microsoft.com/office/drawing/2014/main" id="{6F00C404-6FB6-4E05-8B6F-3AF8A5E79549}"/>
+              </a:ext>
+            </a:extLst>
+          </p:cNvPr>
+          <p:cNvSpPr>
+            <a:spLocks xmlns:a="http://schemas.openxmlformats.org/drawingml/2006/main" noGrp="1"/>
+          </p:cNvSpPr>
+          <p:nvPr/>
+        </p:nvSpPr>
+        <p:spPr>
+          <a:xfrm xmlns:a="http://schemas.openxmlformats.org/drawingml/2006/main">
+            <a:off x="8248650" y="4762500"/>
+            <a:ext cx="19050" cy="381000"/>
           </a:xfrm>
           <a:prstGeom xmlns:a="http://schemas.openxmlformats.org/drawingml/2006/main" prst="rect">
             <a:avLst/>
@@ -13809,22 +14005,22 @@
       </p:sp>
       <p:sp>
         <p:nvSpPr>
-          <p:cNvPr id="18" name="">
-            <a:extLst xmlns:a="http://schemas.openxmlformats.org/drawingml/2006/main">
-              <a:ext uri="{FF2B5EF4-FFF2-40B4-BE49-F238E27FC236}">
-                <a16:creationId xmlns:a16="http://schemas.microsoft.com/office/drawing/2014/main" id="{9D926F86-97B3-4DBA-8BAA-4D73534CAE4B}"/>
-              </a:ext>
-            </a:extLst>
-          </p:cNvPr>
-          <p:cNvSpPr>
-            <a:spLocks xmlns:a="http://schemas.openxmlformats.org/drawingml/2006/main" noGrp="1"/>
-          </p:cNvSpPr>
-          <p:nvPr/>
-        </p:nvSpPr>
-        <p:spPr>
-          <a:xfrm xmlns:a="http://schemas.openxmlformats.org/drawingml/2006/main">
-            <a:off x="2866810" y="4925004"/>
-            <a:ext cx="2095500" cy="647700"/>
+          <p:cNvPr id="22" name="">
+            <a:extLst xmlns:a="http://schemas.openxmlformats.org/drawingml/2006/main">
+              <a:ext uri="{FF2B5EF4-FFF2-40B4-BE49-F238E27FC236}">
+                <a16:creationId xmlns:a16="http://schemas.microsoft.com/office/drawing/2014/main" id="{A02BD343-7D26-41AD-9BBA-8B9A7EE55EB6}"/>
+              </a:ext>
+            </a:extLst>
+          </p:cNvPr>
+          <p:cNvSpPr>
+            <a:spLocks xmlns:a="http://schemas.openxmlformats.org/drawingml/2006/main" noGrp="1"/>
+          </p:cNvSpPr>
+          <p:nvPr/>
+        </p:nvSpPr>
+        <p:spPr>
+          <a:xfrm xmlns:a="http://schemas.openxmlformats.org/drawingml/2006/main">
+            <a:off x="9410700" y="5143500"/>
+            <a:ext cx="2038350" cy="723900"/>
           </a:xfrm>
           <a:prstGeom xmlns:a="http://schemas.openxmlformats.org/drawingml/2006/main" prst="rect">
             <a:avLst/>
@@ -13844,22 +14040,22 @@
       </p:sp>
       <p:sp>
         <p:nvSpPr>
-          <p:cNvPr id="19" name="">
-            <a:extLst xmlns:a="http://schemas.openxmlformats.org/drawingml/2006/main">
-              <a:ext uri="{FF2B5EF4-FFF2-40B4-BE49-F238E27FC236}">
-                <a16:creationId xmlns:a16="http://schemas.microsoft.com/office/drawing/2014/main" id="{0D474844-22EF-478F-9B23-1E2FF2B55AE0}"/>
-              </a:ext>
-            </a:extLst>
-          </p:cNvPr>
-          <p:cNvSpPr>
-            <a:spLocks xmlns:a="http://schemas.openxmlformats.org/drawingml/2006/main" noGrp="1"/>
-          </p:cNvSpPr>
-          <p:nvPr/>
-        </p:nvSpPr>
-        <p:spPr>
-          <a:xfrm xmlns:a="http://schemas.openxmlformats.org/drawingml/2006/main">
-            <a:off x="3038260" y="5096454"/>
-            <a:ext cx="1752600" cy="247650"/>
+          <p:cNvPr id="23" name="">
+            <a:extLst xmlns:a="http://schemas.openxmlformats.org/drawingml/2006/main">
+              <a:ext uri="{FF2B5EF4-FFF2-40B4-BE49-F238E27FC236}">
+                <a16:creationId xmlns:a16="http://schemas.microsoft.com/office/drawing/2014/main" id="{7EEF4E7C-385D-40C1-AEBF-3776088BBB33}"/>
+              </a:ext>
+            </a:extLst>
+          </p:cNvPr>
+          <p:cNvSpPr>
+            <a:spLocks xmlns:a="http://schemas.openxmlformats.org/drawingml/2006/main" noGrp="1"/>
+          </p:cNvSpPr>
+          <p:nvPr/>
+        </p:nvSpPr>
+        <p:spPr>
+          <a:xfrm xmlns:a="http://schemas.openxmlformats.org/drawingml/2006/main">
+            <a:off x="9544050" y="5353050"/>
+            <a:ext cx="1771650" cy="266700"/>
           </a:xfrm>
           <a:prstGeom xmlns:a="http://schemas.openxmlformats.org/drawingml/2006/main" prst="rect">
             <a:avLst/>
@@ -13883,7 +14079,7 @@
           <a:lstStyle xmlns:a="http://schemas.openxmlformats.org/drawingml/2006/main"/>
           <a:p xmlns:a="http://schemas.openxmlformats.org/drawingml/2006/main">
             <a:pPr algn="ctr">
-              <a:defRPr sz="1275" b="1">
+              <a:defRPr sz="1125" b="1">
                 <a:solidFill>
                   <a:srgbClr val="EAF8FF"/>
                 </a:solidFill>
@@ -13893,139 +14089,7 @@
               </a:defRPr>
             </a:pPr>
             <a:r>
-              <a:rPr sz="1275" b="1">
-                <a:solidFill>
-                  <a:srgbClr val="EAF8FF"/>
-                </a:solidFill>
-                <a:latin typeface="Aptos"/>
-                <a:ea typeface="Aptos"/>
-                <a:cs typeface="Aptos"/>
-              </a:rPr>
-              <a:t>Robótica</a:t>
-            </a:r>
-          </a:p>
-        </p:txBody>
-      </p:sp>
-      <p:sp>
-        <p:nvSpPr>
-          <p:cNvPr id="20" name="">
-            <a:extLst xmlns:a="http://schemas.openxmlformats.org/drawingml/2006/main">
-              <a:ext uri="{FF2B5EF4-FFF2-40B4-BE49-F238E27FC236}">
-                <a16:creationId xmlns:a16="http://schemas.microsoft.com/office/drawing/2014/main" id="{CA8A6515-7DB1-4E1D-A2EC-12F1BB868C3C}"/>
-              </a:ext>
-            </a:extLst>
-          </p:cNvPr>
-          <p:cNvSpPr>
-            <a:spLocks xmlns:a="http://schemas.openxmlformats.org/drawingml/2006/main" noGrp="1"/>
-          </p:cNvSpPr>
-          <p:nvPr/>
-        </p:nvSpPr>
-        <p:spPr>
-          <a:xfrm xmlns:a="http://schemas.openxmlformats.org/drawingml/2006/main">
-            <a:off x="3914560" y="4000500"/>
-            <a:ext cx="1914740" cy="19050"/>
-          </a:xfrm>
-          <a:prstGeom xmlns:a="http://schemas.openxmlformats.org/drawingml/2006/main" prst="rect">
-            <a:avLst/>
-          </a:prstGeom>
-          <a:solidFill xmlns:a="http://schemas.openxmlformats.org/drawingml/2006/main">
-            <a:srgbClr val="285563"/>
-          </a:solidFill>
-          <a:ln xmlns:a="http://schemas.openxmlformats.org/drawingml/2006/main" w="0">
-            <a:solidFill>
-              <a:srgbClr val="285563"/>
-            </a:solidFill>
-            <a:prstDash val="solid"/>
-          </a:ln>
-        </p:spPr>
-      </p:sp>
-      <p:sp>
-        <p:nvSpPr>
-          <p:cNvPr id="21" name="">
-            <a:extLst xmlns:a="http://schemas.openxmlformats.org/drawingml/2006/main">
-              <a:ext uri="{FF2B5EF4-FFF2-40B4-BE49-F238E27FC236}">
-                <a16:creationId xmlns:a16="http://schemas.microsoft.com/office/drawing/2014/main" id="{93F1F560-CA0A-4AE6-9A83-A169711C8ADF}"/>
-              </a:ext>
-            </a:extLst>
-          </p:cNvPr>
-          <p:cNvSpPr>
-            <a:spLocks xmlns:a="http://schemas.openxmlformats.org/drawingml/2006/main" noGrp="1"/>
-          </p:cNvSpPr>
-          <p:nvPr/>
-        </p:nvSpPr>
-        <p:spPr>
-          <a:xfrm xmlns:a="http://schemas.openxmlformats.org/drawingml/2006/main">
-            <a:off x="1683436" y="3199821"/>
-            <a:ext cx="2095500" cy="647700"/>
-          </a:xfrm>
-          <a:prstGeom xmlns:a="http://schemas.openxmlformats.org/drawingml/2006/main" prst="rect">
-            <a:avLst/>
-          </a:prstGeom>
-          <a:solidFill xmlns:a="http://schemas.openxmlformats.org/drawingml/2006/main">
-            <a:srgbClr val="081A23">
-              <a:alpha val="86667"/>
-            </a:srgbClr>
-          </a:solidFill>
-          <a:ln xmlns:a="http://schemas.openxmlformats.org/drawingml/2006/main" w="9525">
-            <a:solidFill>
-              <a:srgbClr val="25505B"/>
-            </a:solidFill>
-            <a:prstDash val="solid"/>
-          </a:ln>
-        </p:spPr>
-      </p:sp>
-      <p:sp>
-        <p:nvSpPr>
-          <p:cNvPr id="22" name="">
-            <a:extLst xmlns:a="http://schemas.openxmlformats.org/drawingml/2006/main">
-              <a:ext uri="{FF2B5EF4-FFF2-40B4-BE49-F238E27FC236}">
-                <a16:creationId xmlns:a16="http://schemas.microsoft.com/office/drawing/2014/main" id="{8DF08053-12FB-4996-9E35-66D942C828FA}"/>
-              </a:ext>
-            </a:extLst>
-          </p:cNvPr>
-          <p:cNvSpPr>
-            <a:spLocks xmlns:a="http://schemas.openxmlformats.org/drawingml/2006/main" noGrp="1"/>
-          </p:cNvSpPr>
-          <p:nvPr/>
-        </p:nvSpPr>
-        <p:spPr>
-          <a:xfrm xmlns:a="http://schemas.openxmlformats.org/drawingml/2006/main">
-            <a:off x="1854886" y="3371271"/>
-            <a:ext cx="1752600" cy="247650"/>
-          </a:xfrm>
-          <a:prstGeom xmlns:a="http://schemas.openxmlformats.org/drawingml/2006/main" prst="rect">
-            <a:avLst/>
-          </a:prstGeom>
-          <a:solidFill xmlns:a="http://schemas.openxmlformats.org/drawingml/2006/main">
-            <a:srgbClr val="000000">
-              <a:alpha val="0"/>
-            </a:srgbClr>
-          </a:solidFill>
-          <a:ln xmlns:a="http://schemas.openxmlformats.org/drawingml/2006/main" w="0">
-            <a:solidFill>
-              <a:srgbClr val="000000">
-                <a:alpha val="0"/>
-              </a:srgbClr>
-            </a:solidFill>
-            <a:prstDash val="solid"/>
-          </a:ln>
-        </p:spPr>
-        <p:txBody>
-          <a:bodyPr xmlns:a="http://schemas.openxmlformats.org/drawingml/2006/main" lIns="0" tIns="0" rIns="0" bIns="0" anchor="t"/>
-          <a:lstStyle xmlns:a="http://schemas.openxmlformats.org/drawingml/2006/main"/>
-          <a:p xmlns:a="http://schemas.openxmlformats.org/drawingml/2006/main">
-            <a:pPr algn="ctr">
-              <a:defRPr sz="1275" b="1">
-                <a:solidFill>
-                  <a:srgbClr val="EAF8FF"/>
-                </a:solidFill>
-                <a:latin typeface="Aptos"/>
-                <a:ea typeface="Aptos"/>
-                <a:cs typeface="Aptos"/>
-              </a:defRPr>
-            </a:pPr>
-            <a:r>
-              <a:rPr sz="1275" b="1">
+              <a:rPr sz="1125" b="1">
                 <a:solidFill>
                   <a:srgbClr val="EAF8FF"/>
                 </a:solidFill>
@@ -14040,22 +14104,22 @@
       </p:sp>
       <p:sp>
         <p:nvSpPr>
-          <p:cNvPr id="23" name="">
-            <a:extLst xmlns:a="http://schemas.openxmlformats.org/drawingml/2006/main">
-              <a:ext uri="{FF2B5EF4-FFF2-40B4-BE49-F238E27FC236}">
-                <a16:creationId xmlns:a16="http://schemas.microsoft.com/office/drawing/2014/main" id="{6E688F99-3E4C-4C79-A37D-4893B88E49CF}"/>
-              </a:ext>
-            </a:extLst>
-          </p:cNvPr>
-          <p:cNvSpPr>
-            <a:spLocks xmlns:a="http://schemas.openxmlformats.org/drawingml/2006/main" noGrp="1"/>
-          </p:cNvSpPr>
-          <p:nvPr/>
-        </p:nvSpPr>
-        <p:spPr>
-          <a:xfrm xmlns:a="http://schemas.openxmlformats.org/drawingml/2006/main">
-            <a:off x="2731186" y="3523671"/>
-            <a:ext cx="3098114" cy="19050"/>
+          <p:cNvPr id="24" name="">
+            <a:extLst xmlns:a="http://schemas.openxmlformats.org/drawingml/2006/main">
+              <a:ext uri="{FF2B5EF4-FFF2-40B4-BE49-F238E27FC236}">
+                <a16:creationId xmlns:a16="http://schemas.microsoft.com/office/drawing/2014/main" id="{A719D576-98DF-4891-9DEE-7875436D4707}"/>
+              </a:ext>
+            </a:extLst>
+          </p:cNvPr>
+          <p:cNvSpPr>
+            <a:spLocks xmlns:a="http://schemas.openxmlformats.org/drawingml/2006/main" noGrp="1"/>
+          </p:cNvSpPr>
+          <p:nvPr/>
+        </p:nvSpPr>
+        <p:spPr>
+          <a:xfrm xmlns:a="http://schemas.openxmlformats.org/drawingml/2006/main">
+            <a:off x="10420350" y="4762500"/>
+            <a:ext cx="19050" cy="381000"/>
           </a:xfrm>
           <a:prstGeom xmlns:a="http://schemas.openxmlformats.org/drawingml/2006/main" prst="rect">
             <a:avLst/>
@@ -14073,10 +14137,43 @@
       </p:sp>
       <p:sp>
         <p:nvSpPr>
-          <p:cNvPr id="24" name="">
-            <a:extLst xmlns:a="http://schemas.openxmlformats.org/drawingml/2006/main">
-              <a:ext uri="{FF2B5EF4-FFF2-40B4-BE49-F238E27FC236}">
-                <a16:creationId xmlns:a16="http://schemas.microsoft.com/office/drawing/2014/main" id="{F1D59102-A0B3-4A34-9715-110053EC242D}"/>
+          <p:cNvPr id="25" name="">
+            <a:extLst xmlns:a="http://schemas.openxmlformats.org/drawingml/2006/main">
+              <a:ext uri="{FF2B5EF4-FFF2-40B4-BE49-F238E27FC236}">
+                <a16:creationId xmlns:a16="http://schemas.microsoft.com/office/drawing/2014/main" id="{69DBC8FF-2890-4DD4-84F3-F685CFF91D62}"/>
+              </a:ext>
+            </a:extLst>
+          </p:cNvPr>
+          <p:cNvSpPr>
+            <a:spLocks xmlns:a="http://schemas.openxmlformats.org/drawingml/2006/main" noGrp="1"/>
+          </p:cNvSpPr>
+          <p:nvPr/>
+        </p:nvSpPr>
+        <p:spPr>
+          <a:xfrm xmlns:a="http://schemas.openxmlformats.org/drawingml/2006/main">
+            <a:off x="1743075" y="4762500"/>
+            <a:ext cx="8686800" cy="19050"/>
+          </a:xfrm>
+          <a:prstGeom xmlns:a="http://schemas.openxmlformats.org/drawingml/2006/main" prst="rect">
+            <a:avLst/>
+          </a:prstGeom>
+          <a:solidFill xmlns:a="http://schemas.openxmlformats.org/drawingml/2006/main">
+            <a:srgbClr val="285563"/>
+          </a:solidFill>
+          <a:ln xmlns:a="http://schemas.openxmlformats.org/drawingml/2006/main" w="0">
+            <a:solidFill>
+              <a:srgbClr val="285563"/>
+            </a:solidFill>
+            <a:prstDash val="solid"/>
+          </a:ln>
+        </p:spPr>
+      </p:sp>
+      <p:sp>
+        <p:nvSpPr>
+          <p:cNvPr id="26" name="">
+            <a:extLst xmlns:a="http://schemas.openxmlformats.org/drawingml/2006/main">
+              <a:ext uri="{FF2B5EF4-FFF2-40B4-BE49-F238E27FC236}">
+                <a16:creationId xmlns:a16="http://schemas.microsoft.com/office/drawing/2014/main" id="{1BE9F497-CDB1-4B34-B8DC-DF9164DB0079}"/>
               </a:ext>
             </a:extLst>
           </p:cNvPr>
@@ -14137,10 +14234,10 @@
       </p:sp>
       <p:sp>
         <p:nvSpPr>
-          <p:cNvPr id="25" name="">
-            <a:extLst xmlns:a="http://schemas.openxmlformats.org/drawingml/2006/main">
-              <a:ext uri="{FF2B5EF4-FFF2-40B4-BE49-F238E27FC236}">
-                <a16:creationId xmlns:a16="http://schemas.microsoft.com/office/drawing/2014/main" id="{95032EF8-CB83-40DC-8E25-384457B0F09B}"/>
+          <p:cNvPr id="27" name="">
+            <a:extLst xmlns:a="http://schemas.openxmlformats.org/drawingml/2006/main">
+              <a:ext uri="{FF2B5EF4-FFF2-40B4-BE49-F238E27FC236}">
+                <a16:creationId xmlns:a16="http://schemas.microsoft.com/office/drawing/2014/main" id="{A021A331-7E9C-4022-83C0-96B6C3D68734}"/>
               </a:ext>
             </a:extLst>
           </p:cNvPr>
@@ -14170,10 +14267,10 @@
       </p:sp>
       <p:sp>
         <p:nvSpPr>
-          <p:cNvPr id="26" name="">
-            <a:extLst xmlns:a="http://schemas.openxmlformats.org/drawingml/2006/main">
-              <a:ext uri="{FF2B5EF4-FFF2-40B4-BE49-F238E27FC236}">
-                <a16:creationId xmlns:a16="http://schemas.microsoft.com/office/drawing/2014/main" id="{7F3AFB57-0A4A-4095-BC68-152ED4590C4E}"/>
+          <p:cNvPr id="28" name="">
+            <a:extLst xmlns:a="http://schemas.openxmlformats.org/drawingml/2006/main">
+              <a:ext uri="{FF2B5EF4-FFF2-40B4-BE49-F238E27FC236}">
+                <a16:creationId xmlns:a16="http://schemas.microsoft.com/office/drawing/2014/main" id="{F542551E-8A3F-4207-A88D-596221A1A169}"/>
               </a:ext>
             </a:extLst>
           </p:cNvPr>
@@ -14234,10 +14331,10 @@
       </p:sp>
       <p:sp>
         <p:nvSpPr>
-          <p:cNvPr id="27" name="">
-            <a:extLst xmlns:a="http://schemas.openxmlformats.org/drawingml/2006/main">
-              <a:ext uri="{FF2B5EF4-FFF2-40B4-BE49-F238E27FC236}">
-                <a16:creationId xmlns:a16="http://schemas.microsoft.com/office/drawing/2014/main" id="{416D2BAE-0953-4EEC-A84A-F906C4973628}"/>
+          <p:cNvPr id="29" name="">
+            <a:extLst xmlns:a="http://schemas.openxmlformats.org/drawingml/2006/main">
+              <a:ext uri="{FF2B5EF4-FFF2-40B4-BE49-F238E27FC236}">
+                <a16:creationId xmlns:a16="http://schemas.microsoft.com/office/drawing/2014/main" id="{1C07B0FA-5D05-4D25-9D0C-CDE5B2FE399D}"/>
               </a:ext>
             </a:extLst>
           </p:cNvPr>
@@ -14299,7 +14396,7 @@
     </p:spTree>
     <p:extLst>
       <p:ext uri="{BB962C8B-B14F-4D97-AF65-F5344CB8AC3E}">
-        <p14:creationId xmlns:p14="http://schemas.microsoft.com/office/powerpoint/2010/main" val="1168815515"/>
+        <p14:creationId xmlns:p14="http://schemas.microsoft.com/office/powerpoint/2010/main" val="1038212782"/>
       </p:ext>
     </p:extLst>
   </p:cSld>
@@ -14327,7 +14424,7 @@
           <p:nvPr/>
         </p:nvPicPr>
         <p:blipFill>
-          <a:blip xmlns:r="http://schemas.openxmlformats.org/officeDocument/2006/relationships" xmlns:a="http://schemas.openxmlformats.org/drawingml/2006/main" r:embed="R1d16ebec4adc4164"/>
+          <a:blip xmlns:r="http://schemas.openxmlformats.org/officeDocument/2006/relationships" xmlns:a="http://schemas.openxmlformats.org/drawingml/2006/main" r:embed="R35d4d6e2b2a94359"/>
           <a:srcRect xmlns:a="http://schemas.openxmlformats.org/drawingml/2006/main" l="0" t="27" r="0" b="27"/>
           <a:stretch xmlns:a="http://schemas.openxmlformats.org/drawingml/2006/main">
             <a:fillRect l="0" t="0" r="0" b="0"/>
@@ -14348,7 +14445,7 @@
           <p:cNvPr id="2" name="">
             <a:extLst xmlns:a="http://schemas.openxmlformats.org/drawingml/2006/main">
               <a:ext uri="{FF2B5EF4-FFF2-40B4-BE49-F238E27FC236}">
-                <a16:creationId xmlns:a16="http://schemas.microsoft.com/office/drawing/2014/main" id="{9273137E-BE38-4DFA-9281-B80B646C525B}"/>
+                <a16:creationId xmlns:a16="http://schemas.microsoft.com/office/drawing/2014/main" id="{39C8DC50-2556-428A-B56C-B49B7FFA37F5}"/>
               </a:ext>
             </a:extLst>
           </p:cNvPr>
@@ -14385,7 +14482,7 @@
           <p:cNvPr id="3" name="">
             <a:extLst xmlns:a="http://schemas.openxmlformats.org/drawingml/2006/main">
               <a:ext uri="{FF2B5EF4-FFF2-40B4-BE49-F238E27FC236}">
-                <a16:creationId xmlns:a16="http://schemas.microsoft.com/office/drawing/2014/main" id="{DF59BF3C-F4EE-40BC-B7C8-E41375558077}"/>
+                <a16:creationId xmlns:a16="http://schemas.microsoft.com/office/drawing/2014/main" id="{F52D76E4-7CCE-4B6A-9796-9E1D4F8B3C4B}"/>
               </a:ext>
             </a:extLst>
           </p:cNvPr>
@@ -14422,7 +14519,7 @@
           <p:cNvPr id="4" name="">
             <a:extLst xmlns:a="http://schemas.openxmlformats.org/drawingml/2006/main">
               <a:ext uri="{FF2B5EF4-FFF2-40B4-BE49-F238E27FC236}">
-                <a16:creationId xmlns:a16="http://schemas.microsoft.com/office/drawing/2014/main" id="{32FD363A-DEEF-4E36-BC12-C143D4F20AB5}"/>
+                <a16:creationId xmlns:a16="http://schemas.microsoft.com/office/drawing/2014/main" id="{A8B38D47-CBA5-4871-8D37-C5202404751E}"/>
               </a:ext>
             </a:extLst>
           </p:cNvPr>
@@ -14486,7 +14583,7 @@
           <p:cNvPr id="5" name="">
             <a:extLst xmlns:a="http://schemas.openxmlformats.org/drawingml/2006/main">
               <a:ext uri="{FF2B5EF4-FFF2-40B4-BE49-F238E27FC236}">
-                <a16:creationId xmlns:a16="http://schemas.microsoft.com/office/drawing/2014/main" id="{A76225CF-78D9-48A4-BF9F-EF4A2B7ED8A7}"/>
+                <a16:creationId xmlns:a16="http://schemas.microsoft.com/office/drawing/2014/main" id="{2BD4CAB6-A97A-44E5-ACBD-4A8B5F91B2EF}"/>
               </a:ext>
             </a:extLst>
           </p:cNvPr>
@@ -14550,7 +14647,7 @@
           <p:cNvPr id="6" name="">
             <a:extLst xmlns:a="http://schemas.openxmlformats.org/drawingml/2006/main">
               <a:ext uri="{FF2B5EF4-FFF2-40B4-BE49-F238E27FC236}">
-                <a16:creationId xmlns:a16="http://schemas.microsoft.com/office/drawing/2014/main" id="{0BF31495-153B-48F5-9366-20FCE61D7D3D}"/>
+                <a16:creationId xmlns:a16="http://schemas.microsoft.com/office/drawing/2014/main" id="{EFD1A1EF-E5F7-473B-AC2C-EE64AD023719}"/>
               </a:ext>
             </a:extLst>
           </p:cNvPr>
@@ -14614,7 +14711,7 @@
           <p:cNvPr id="7" name="">
             <a:extLst xmlns:a="http://schemas.openxmlformats.org/drawingml/2006/main">
               <a:ext uri="{FF2B5EF4-FFF2-40B4-BE49-F238E27FC236}">
-                <a16:creationId xmlns:a16="http://schemas.microsoft.com/office/drawing/2014/main" id="{B30DD687-2D95-4F8A-B7D5-AD7328703AA5}"/>
+                <a16:creationId xmlns:a16="http://schemas.microsoft.com/office/drawing/2014/main" id="{8ECE5CFE-3D76-4082-ABD3-0E1859080513}"/>
               </a:ext>
             </a:extLst>
           </p:cNvPr>
@@ -14649,7 +14746,7 @@
           <p:cNvPr id="8" name="">
             <a:extLst xmlns:a="http://schemas.openxmlformats.org/drawingml/2006/main">
               <a:ext uri="{FF2B5EF4-FFF2-40B4-BE49-F238E27FC236}">
-                <a16:creationId xmlns:a16="http://schemas.microsoft.com/office/drawing/2014/main" id="{2F9015D1-D158-4FA8-B2D4-74CA90A0AE04}"/>
+                <a16:creationId xmlns:a16="http://schemas.microsoft.com/office/drawing/2014/main" id="{494D1AE4-D1CB-48DD-8E83-09F1C29ED173}"/>
               </a:ext>
             </a:extLst>
           </p:cNvPr>
@@ -14713,7 +14810,7 @@
           <p:cNvPr id="9" name="">
             <a:extLst xmlns:a="http://schemas.openxmlformats.org/drawingml/2006/main">
               <a:ext uri="{FF2B5EF4-FFF2-40B4-BE49-F238E27FC236}">
-                <a16:creationId xmlns:a16="http://schemas.microsoft.com/office/drawing/2014/main" id="{A1930E8F-CABC-4B5B-A0F7-CE6E37BB45C6}"/>
+                <a16:creationId xmlns:a16="http://schemas.microsoft.com/office/drawing/2014/main" id="{FC8E3A5C-1461-46B3-9115-74D3CF15C36C}"/>
               </a:ext>
             </a:extLst>
           </p:cNvPr>
@@ -14777,7 +14874,7 @@
           <p:cNvPr id="10" name="">
             <a:extLst xmlns:a="http://schemas.openxmlformats.org/drawingml/2006/main">
               <a:ext uri="{FF2B5EF4-FFF2-40B4-BE49-F238E27FC236}">
-                <a16:creationId xmlns:a16="http://schemas.microsoft.com/office/drawing/2014/main" id="{895A2391-B102-4793-9C31-EFAF839C12D0}"/>
+                <a16:creationId xmlns:a16="http://schemas.microsoft.com/office/drawing/2014/main" id="{DCE5FFB2-231C-46D3-9ABA-5F4A5DD6C675}"/>
               </a:ext>
             </a:extLst>
           </p:cNvPr>
@@ -14810,7 +14907,7 @@
           <p:cNvPr id="11" name="">
             <a:extLst xmlns:a="http://schemas.openxmlformats.org/drawingml/2006/main">
               <a:ext uri="{FF2B5EF4-FFF2-40B4-BE49-F238E27FC236}">
-                <a16:creationId xmlns:a16="http://schemas.microsoft.com/office/drawing/2014/main" id="{2D8B2320-7360-4BE4-8FDD-90B1958AB44D}"/>
+                <a16:creationId xmlns:a16="http://schemas.microsoft.com/office/drawing/2014/main" id="{2176368A-BD16-4935-9ABE-1C17CD95B4CD}"/>
               </a:ext>
             </a:extLst>
           </p:cNvPr>
@@ -14845,7 +14942,7 @@
           <p:cNvPr id="12" name="">
             <a:extLst xmlns:a="http://schemas.openxmlformats.org/drawingml/2006/main">
               <a:ext uri="{FF2B5EF4-FFF2-40B4-BE49-F238E27FC236}">
-                <a16:creationId xmlns:a16="http://schemas.microsoft.com/office/drawing/2014/main" id="{B21CCB7E-6860-4E6E-9EB8-DFBD7DA21FA7}"/>
+                <a16:creationId xmlns:a16="http://schemas.microsoft.com/office/drawing/2014/main" id="{D80E31E7-36D9-4C84-B5B1-BC3B3A19620D}"/>
               </a:ext>
             </a:extLst>
           </p:cNvPr>
@@ -14909,7 +15006,7 @@
           <p:cNvPr id="13" name="">
             <a:extLst xmlns:a="http://schemas.openxmlformats.org/drawingml/2006/main">
               <a:ext uri="{FF2B5EF4-FFF2-40B4-BE49-F238E27FC236}">
-                <a16:creationId xmlns:a16="http://schemas.microsoft.com/office/drawing/2014/main" id="{4AE89F11-7B9E-4F17-A987-9532A9BFF2E0}"/>
+                <a16:creationId xmlns:a16="http://schemas.microsoft.com/office/drawing/2014/main" id="{D6049E0A-8B4A-472C-AB81-8CDE88E9E936}"/>
               </a:ext>
             </a:extLst>
           </p:cNvPr>
@@ -14973,7 +15070,7 @@
           <p:cNvPr id="14" name="">
             <a:extLst xmlns:a="http://schemas.openxmlformats.org/drawingml/2006/main">
               <a:ext uri="{FF2B5EF4-FFF2-40B4-BE49-F238E27FC236}">
-                <a16:creationId xmlns:a16="http://schemas.microsoft.com/office/drawing/2014/main" id="{23B711FD-EE08-4D8D-BD0B-D99F889E569B}"/>
+                <a16:creationId xmlns:a16="http://schemas.microsoft.com/office/drawing/2014/main" id="{0590825A-AB2E-43C3-83BC-14906B89A9DB}"/>
               </a:ext>
             </a:extLst>
           </p:cNvPr>
@@ -15006,7 +15103,7 @@
           <p:cNvPr id="15" name="">
             <a:extLst xmlns:a="http://schemas.openxmlformats.org/drawingml/2006/main">
               <a:ext uri="{FF2B5EF4-FFF2-40B4-BE49-F238E27FC236}">
-                <a16:creationId xmlns:a16="http://schemas.microsoft.com/office/drawing/2014/main" id="{6A9A57C3-0F8B-455D-B8A7-9A997DE51C9D}"/>
+                <a16:creationId xmlns:a16="http://schemas.microsoft.com/office/drawing/2014/main" id="{AF77B43E-AF26-4306-95B4-A052784E1EDF}"/>
               </a:ext>
             </a:extLst>
           </p:cNvPr>
@@ -15041,7 +15138,7 @@
           <p:cNvPr id="16" name="">
             <a:extLst xmlns:a="http://schemas.openxmlformats.org/drawingml/2006/main">
               <a:ext uri="{FF2B5EF4-FFF2-40B4-BE49-F238E27FC236}">
-                <a16:creationId xmlns:a16="http://schemas.microsoft.com/office/drawing/2014/main" id="{A43FF84F-8124-444C-90FC-FB9918C2662A}"/>
+                <a16:creationId xmlns:a16="http://schemas.microsoft.com/office/drawing/2014/main" id="{92B6C479-DB8A-4BFD-A3B8-402BA688AB57}"/>
               </a:ext>
             </a:extLst>
           </p:cNvPr>
@@ -15105,7 +15202,7 @@
           <p:cNvPr id="17" name="">
             <a:extLst xmlns:a="http://schemas.openxmlformats.org/drawingml/2006/main">
               <a:ext uri="{FF2B5EF4-FFF2-40B4-BE49-F238E27FC236}">
-                <a16:creationId xmlns:a16="http://schemas.microsoft.com/office/drawing/2014/main" id="{002AB8FF-1038-4BDD-AE24-8CCCFC0D0A42}"/>
+                <a16:creationId xmlns:a16="http://schemas.microsoft.com/office/drawing/2014/main" id="{7F82979A-5A6B-4B6B-BC90-64CE371AE944}"/>
               </a:ext>
             </a:extLst>
           </p:cNvPr>
@@ -15169,7 +15266,7 @@
           <p:cNvPr id="18" name="">
             <a:extLst xmlns:a="http://schemas.openxmlformats.org/drawingml/2006/main">
               <a:ext uri="{FF2B5EF4-FFF2-40B4-BE49-F238E27FC236}">
-                <a16:creationId xmlns:a16="http://schemas.microsoft.com/office/drawing/2014/main" id="{CF234BDE-49E0-4CB6-A5FD-7753B91834EC}"/>
+                <a16:creationId xmlns:a16="http://schemas.microsoft.com/office/drawing/2014/main" id="{9AEF7A60-51D2-4479-BC1A-CC02819C52F8}"/>
               </a:ext>
             </a:extLst>
           </p:cNvPr>
@@ -15202,7 +15299,7 @@
           <p:cNvPr id="19" name="">
             <a:extLst xmlns:a="http://schemas.openxmlformats.org/drawingml/2006/main">
               <a:ext uri="{FF2B5EF4-FFF2-40B4-BE49-F238E27FC236}">
-                <a16:creationId xmlns:a16="http://schemas.microsoft.com/office/drawing/2014/main" id="{CF37D5A3-8F78-424D-AD13-C1B8921FB68D}"/>
+                <a16:creationId xmlns:a16="http://schemas.microsoft.com/office/drawing/2014/main" id="{427F0FB8-CC5A-4A88-808D-FE4C5344763F}"/>
               </a:ext>
             </a:extLst>
           </p:cNvPr>
@@ -15237,7 +15334,7 @@
           <p:cNvPr id="20" name="">
             <a:extLst xmlns:a="http://schemas.openxmlformats.org/drawingml/2006/main">
               <a:ext uri="{FF2B5EF4-FFF2-40B4-BE49-F238E27FC236}">
-                <a16:creationId xmlns:a16="http://schemas.microsoft.com/office/drawing/2014/main" id="{642A6510-71C6-4DAE-96C3-424722169BE5}"/>
+                <a16:creationId xmlns:a16="http://schemas.microsoft.com/office/drawing/2014/main" id="{4F14D310-1221-4A84-95F7-D0E45C1FF732}"/>
               </a:ext>
             </a:extLst>
           </p:cNvPr>
@@ -15301,7 +15398,7 @@
           <p:cNvPr id="21" name="">
             <a:extLst xmlns:a="http://schemas.openxmlformats.org/drawingml/2006/main">
               <a:ext uri="{FF2B5EF4-FFF2-40B4-BE49-F238E27FC236}">
-                <a16:creationId xmlns:a16="http://schemas.microsoft.com/office/drawing/2014/main" id="{0990BDBF-93E2-4596-AAA2-6A29A7CE2587}"/>
+                <a16:creationId xmlns:a16="http://schemas.microsoft.com/office/drawing/2014/main" id="{4A8A1339-1AAF-4A95-B890-45E40ECBF3BD}"/>
               </a:ext>
             </a:extLst>
           </p:cNvPr>
@@ -15365,7 +15462,7 @@
           <p:cNvPr id="22" name="">
             <a:extLst xmlns:a="http://schemas.openxmlformats.org/drawingml/2006/main">
               <a:ext uri="{FF2B5EF4-FFF2-40B4-BE49-F238E27FC236}">
-                <a16:creationId xmlns:a16="http://schemas.microsoft.com/office/drawing/2014/main" id="{C8CF2AD8-5ECD-451B-95A1-CDB91C047713}"/>
+                <a16:creationId xmlns:a16="http://schemas.microsoft.com/office/drawing/2014/main" id="{16AF67F2-95C7-43C6-83A4-8195EEFBD93B}"/>
               </a:ext>
             </a:extLst>
           </p:cNvPr>
@@ -15429,7 +15526,7 @@
           <p:cNvPr id="23" name="">
             <a:extLst xmlns:a="http://schemas.openxmlformats.org/drawingml/2006/main">
               <a:ext uri="{FF2B5EF4-FFF2-40B4-BE49-F238E27FC236}">
-                <a16:creationId xmlns:a16="http://schemas.microsoft.com/office/drawing/2014/main" id="{9311F352-21FA-4A2B-B918-34B097E5B002}"/>
+                <a16:creationId xmlns:a16="http://schemas.microsoft.com/office/drawing/2014/main" id="{19A4C9F7-136B-4378-BD1D-50D7A776C43E}"/>
               </a:ext>
             </a:extLst>
           </p:cNvPr>
@@ -15493,7 +15590,7 @@
           <p:cNvPr id="24" name="">
             <a:extLst xmlns:a="http://schemas.openxmlformats.org/drawingml/2006/main">
               <a:ext uri="{FF2B5EF4-FFF2-40B4-BE49-F238E27FC236}">
-                <a16:creationId xmlns:a16="http://schemas.microsoft.com/office/drawing/2014/main" id="{868651D8-88DA-40DE-AD61-370701FA13A8}"/>
+                <a16:creationId xmlns:a16="http://schemas.microsoft.com/office/drawing/2014/main" id="{FD5A0027-8717-439C-B02E-11D1B4D3829C}"/>
               </a:ext>
             </a:extLst>
           </p:cNvPr>
@@ -15526,7 +15623,7 @@
           <p:cNvPr id="25" name="">
             <a:extLst xmlns:a="http://schemas.openxmlformats.org/drawingml/2006/main">
               <a:ext uri="{FF2B5EF4-FFF2-40B4-BE49-F238E27FC236}">
-                <a16:creationId xmlns:a16="http://schemas.microsoft.com/office/drawing/2014/main" id="{F6B5006F-C3AA-4C73-B711-3463AD7E0CCF}"/>
+                <a16:creationId xmlns:a16="http://schemas.microsoft.com/office/drawing/2014/main" id="{6623C3D7-34E4-4A0B-8729-EB655A3C0ABC}"/>
               </a:ext>
             </a:extLst>
           </p:cNvPr>
@@ -15590,7 +15687,7 @@
           <p:cNvPr id="26" name="">
             <a:extLst xmlns:a="http://schemas.openxmlformats.org/drawingml/2006/main">
               <a:ext uri="{FF2B5EF4-FFF2-40B4-BE49-F238E27FC236}">
-                <a16:creationId xmlns:a16="http://schemas.microsoft.com/office/drawing/2014/main" id="{808C55DC-F1E8-4D8B-8C9C-4532383B73D3}"/>
+                <a16:creationId xmlns:a16="http://schemas.microsoft.com/office/drawing/2014/main" id="{BF681422-890D-4425-AFD4-0A282263C2E0}"/>
               </a:ext>
             </a:extLst>
           </p:cNvPr>
@@ -15652,7 +15749,7 @@
     </p:spTree>
     <p:extLst>
       <p:ext uri="{BB962C8B-B14F-4D97-AF65-F5344CB8AC3E}">
-        <p14:creationId xmlns:p14="http://schemas.microsoft.com/office/powerpoint/2010/main" val="1797002349"/>
+        <p14:creationId xmlns:p14="http://schemas.microsoft.com/office/powerpoint/2010/main" val="564295870"/>
       </p:ext>
     </p:extLst>
   </p:cSld>
@@ -15680,7 +15777,7 @@
           <p:nvPr/>
         </p:nvPicPr>
         <p:blipFill>
-          <a:blip xmlns:r="http://schemas.openxmlformats.org/officeDocument/2006/relationships" xmlns:a="http://schemas.openxmlformats.org/drawingml/2006/main" r:embed="R11f9f2ce3a274ac4"/>
+          <a:blip xmlns:r="http://schemas.openxmlformats.org/officeDocument/2006/relationships" xmlns:a="http://schemas.openxmlformats.org/drawingml/2006/main" r:embed="Rd9e60495fbcb4b7d"/>
           <a:srcRect xmlns:a="http://schemas.openxmlformats.org/drawingml/2006/main" l="0" t="7813" r="0" b="7813"/>
           <a:stretch xmlns:a="http://schemas.openxmlformats.org/drawingml/2006/main">
             <a:fillRect l="0" t="0" r="0" b="0"/>
@@ -15701,7 +15798,7 @@
           <p:cNvPr id="2" name="">
             <a:extLst xmlns:a="http://schemas.openxmlformats.org/drawingml/2006/main">
               <a:ext uri="{FF2B5EF4-FFF2-40B4-BE49-F238E27FC236}">
-                <a16:creationId xmlns:a16="http://schemas.microsoft.com/office/drawing/2014/main" id="{55AD395F-534C-415D-8FA0-8824B6583E11}"/>
+                <a16:creationId xmlns:a16="http://schemas.microsoft.com/office/drawing/2014/main" id="{2CB42836-2DFB-4110-81D1-0C57E9895500}"/>
               </a:ext>
             </a:extLst>
           </p:cNvPr>
@@ -15738,7 +15835,7 @@
           <p:cNvPr id="3" name="">
             <a:extLst xmlns:a="http://schemas.openxmlformats.org/drawingml/2006/main">
               <a:ext uri="{FF2B5EF4-FFF2-40B4-BE49-F238E27FC236}">
-                <a16:creationId xmlns:a16="http://schemas.microsoft.com/office/drawing/2014/main" id="{DF7732E5-1B3A-44CA-A400-054C6447BDBA}"/>
+                <a16:creationId xmlns:a16="http://schemas.microsoft.com/office/drawing/2014/main" id="{2FC168AD-9FDD-4DAD-99E9-CF0BF52B433B}"/>
               </a:ext>
             </a:extLst>
           </p:cNvPr>
@@ -15775,7 +15872,7 @@
           <p:cNvPr id="4" name="">
             <a:extLst xmlns:a="http://schemas.openxmlformats.org/drawingml/2006/main">
               <a:ext uri="{FF2B5EF4-FFF2-40B4-BE49-F238E27FC236}">
-                <a16:creationId xmlns:a16="http://schemas.microsoft.com/office/drawing/2014/main" id="{217C35E4-D1D2-467E-BCC9-C25CC2AC32AF}"/>
+                <a16:creationId xmlns:a16="http://schemas.microsoft.com/office/drawing/2014/main" id="{F476F907-458C-46EB-B424-5A731B098CD8}"/>
               </a:ext>
             </a:extLst>
           </p:cNvPr>
@@ -15839,7 +15936,7 @@
           <p:cNvPr id="5" name="">
             <a:extLst xmlns:a="http://schemas.openxmlformats.org/drawingml/2006/main">
               <a:ext uri="{FF2B5EF4-FFF2-40B4-BE49-F238E27FC236}">
-                <a16:creationId xmlns:a16="http://schemas.microsoft.com/office/drawing/2014/main" id="{7E6BEBD5-9384-4967-B5AF-0C1B1CC0A3E3}"/>
+                <a16:creationId xmlns:a16="http://schemas.microsoft.com/office/drawing/2014/main" id="{DE081465-198D-4B3C-8970-295A07815BA8}"/>
               </a:ext>
             </a:extLst>
           </p:cNvPr>
@@ -15903,7 +16000,7 @@
           <p:cNvPr id="6" name="">
             <a:extLst xmlns:a="http://schemas.openxmlformats.org/drawingml/2006/main">
               <a:ext uri="{FF2B5EF4-FFF2-40B4-BE49-F238E27FC236}">
-                <a16:creationId xmlns:a16="http://schemas.microsoft.com/office/drawing/2014/main" id="{FA0321D0-6065-471A-A6CA-60E37B0A3053}"/>
+                <a16:creationId xmlns:a16="http://schemas.microsoft.com/office/drawing/2014/main" id="{212134BA-E5B4-47C4-97A1-81F2A3192F1F}"/>
               </a:ext>
             </a:extLst>
           </p:cNvPr>
@@ -15967,7 +16064,7 @@
           <p:cNvPr id="7" name="">
             <a:extLst xmlns:a="http://schemas.openxmlformats.org/drawingml/2006/main">
               <a:ext uri="{FF2B5EF4-FFF2-40B4-BE49-F238E27FC236}">
-                <a16:creationId xmlns:a16="http://schemas.microsoft.com/office/drawing/2014/main" id="{1F5E9BB8-0FE8-4FEE-82BD-C6881A7DBB92}"/>
+                <a16:creationId xmlns:a16="http://schemas.microsoft.com/office/drawing/2014/main" id="{2CF87F8C-0C90-4ED8-84E6-B06FC6AD0FE7}"/>
               </a:ext>
             </a:extLst>
           </p:cNvPr>
@@ -16002,7 +16099,7 @@
           <p:cNvPr id="8" name="">
             <a:extLst xmlns:a="http://schemas.openxmlformats.org/drawingml/2006/main">
               <a:ext uri="{FF2B5EF4-FFF2-40B4-BE49-F238E27FC236}">
-                <a16:creationId xmlns:a16="http://schemas.microsoft.com/office/drawing/2014/main" id="{42308C02-5F29-4B74-A921-0D04842E9245}"/>
+                <a16:creationId xmlns:a16="http://schemas.microsoft.com/office/drawing/2014/main" id="{3D0FD46C-6157-486A-96B3-B1045EEA4ED4}"/>
               </a:ext>
             </a:extLst>
           </p:cNvPr>
@@ -16066,7 +16163,7 @@
           <p:cNvPr id="9" name="">
             <a:extLst xmlns:a="http://schemas.openxmlformats.org/drawingml/2006/main">
               <a:ext uri="{FF2B5EF4-FFF2-40B4-BE49-F238E27FC236}">
-                <a16:creationId xmlns:a16="http://schemas.microsoft.com/office/drawing/2014/main" id="{19B0A7C6-5287-4F9E-A9F6-ABC3461150E7}"/>
+                <a16:creationId xmlns:a16="http://schemas.microsoft.com/office/drawing/2014/main" id="{562273D0-49D3-436B-B607-E7B1C473DAF8}"/>
               </a:ext>
             </a:extLst>
           </p:cNvPr>
@@ -16130,7 +16227,7 @@
           <p:cNvPr id="10" name="">
             <a:extLst xmlns:a="http://schemas.openxmlformats.org/drawingml/2006/main">
               <a:ext uri="{FF2B5EF4-FFF2-40B4-BE49-F238E27FC236}">
-                <a16:creationId xmlns:a16="http://schemas.microsoft.com/office/drawing/2014/main" id="{9B6B5A8A-7A60-4CF3-8FC8-76C9F3E80FA3}"/>
+                <a16:creationId xmlns:a16="http://schemas.microsoft.com/office/drawing/2014/main" id="{7F62A147-31A1-45C5-9EF4-8B552212945D}"/>
               </a:ext>
             </a:extLst>
           </p:cNvPr>
@@ -16165,7 +16262,7 @@
           <p:cNvPr id="11" name="">
             <a:extLst xmlns:a="http://schemas.openxmlformats.org/drawingml/2006/main">
               <a:ext uri="{FF2B5EF4-FFF2-40B4-BE49-F238E27FC236}">
-                <a16:creationId xmlns:a16="http://schemas.microsoft.com/office/drawing/2014/main" id="{F78CA332-CF82-427E-85D2-A364A4C001ED}"/>
+                <a16:creationId xmlns:a16="http://schemas.microsoft.com/office/drawing/2014/main" id="{B607CA6F-C7C7-45C9-B17D-C2790AF52AB4}"/>
               </a:ext>
             </a:extLst>
           </p:cNvPr>
@@ -16229,7 +16326,7 @@
           <p:cNvPr id="12" name="">
             <a:extLst xmlns:a="http://schemas.openxmlformats.org/drawingml/2006/main">
               <a:ext uri="{FF2B5EF4-FFF2-40B4-BE49-F238E27FC236}">
-                <a16:creationId xmlns:a16="http://schemas.microsoft.com/office/drawing/2014/main" id="{F90296B9-CD95-4728-AE28-E40769817A51}"/>
+                <a16:creationId xmlns:a16="http://schemas.microsoft.com/office/drawing/2014/main" id="{8112CC5F-614A-454B-A4CF-0039F13DF284}"/>
               </a:ext>
             </a:extLst>
           </p:cNvPr>
@@ -16293,7 +16390,7 @@
           <p:cNvPr id="13" name="">
             <a:extLst xmlns:a="http://schemas.openxmlformats.org/drawingml/2006/main">
               <a:ext uri="{FF2B5EF4-FFF2-40B4-BE49-F238E27FC236}">
-                <a16:creationId xmlns:a16="http://schemas.microsoft.com/office/drawing/2014/main" id="{C499504E-4FC3-4A99-8EC1-D6AC686924B0}"/>
+                <a16:creationId xmlns:a16="http://schemas.microsoft.com/office/drawing/2014/main" id="{BA1FA3EF-3422-4FD2-9833-0F9CF40AA639}"/>
               </a:ext>
             </a:extLst>
           </p:cNvPr>
@@ -16328,7 +16425,7 @@
           <p:cNvPr id="14" name="">
             <a:extLst xmlns:a="http://schemas.openxmlformats.org/drawingml/2006/main">
               <a:ext uri="{FF2B5EF4-FFF2-40B4-BE49-F238E27FC236}">
-                <a16:creationId xmlns:a16="http://schemas.microsoft.com/office/drawing/2014/main" id="{191B70E8-C612-4B84-AD37-DF2FD69763BD}"/>
+                <a16:creationId xmlns:a16="http://schemas.microsoft.com/office/drawing/2014/main" id="{DC64A3E1-788C-439E-BB16-92F2AA5ADACC}"/>
               </a:ext>
             </a:extLst>
           </p:cNvPr>
@@ -16392,7 +16489,7 @@
           <p:cNvPr id="15" name="">
             <a:extLst xmlns:a="http://schemas.openxmlformats.org/drawingml/2006/main">
               <a:ext uri="{FF2B5EF4-FFF2-40B4-BE49-F238E27FC236}">
-                <a16:creationId xmlns:a16="http://schemas.microsoft.com/office/drawing/2014/main" id="{2410D2C3-4ECA-4FCE-A096-989B4D01C264}"/>
+                <a16:creationId xmlns:a16="http://schemas.microsoft.com/office/drawing/2014/main" id="{B20003B3-C205-4EFA-8752-6EEAAC4BCB91}"/>
               </a:ext>
             </a:extLst>
           </p:cNvPr>
@@ -16456,7 +16553,7 @@
           <p:cNvPr id="16" name="">
             <a:extLst xmlns:a="http://schemas.openxmlformats.org/drawingml/2006/main">
               <a:ext uri="{FF2B5EF4-FFF2-40B4-BE49-F238E27FC236}">
-                <a16:creationId xmlns:a16="http://schemas.microsoft.com/office/drawing/2014/main" id="{F57437BC-63F3-4DB1-9123-997FDBBC494B}"/>
+                <a16:creationId xmlns:a16="http://schemas.microsoft.com/office/drawing/2014/main" id="{7454DADF-FC04-453D-BC12-200554A95BB2}"/>
               </a:ext>
             </a:extLst>
           </p:cNvPr>
@@ -16491,7 +16588,7 @@
           <p:cNvPr id="17" name="">
             <a:extLst xmlns:a="http://schemas.openxmlformats.org/drawingml/2006/main">
               <a:ext uri="{FF2B5EF4-FFF2-40B4-BE49-F238E27FC236}">
-                <a16:creationId xmlns:a16="http://schemas.microsoft.com/office/drawing/2014/main" id="{F6A8C30C-0DD2-4503-82C2-A30EB761DF94}"/>
+                <a16:creationId xmlns:a16="http://schemas.microsoft.com/office/drawing/2014/main" id="{98FB7F72-F2CB-4E69-8BCC-31DEF8A8FE4C}"/>
               </a:ext>
             </a:extLst>
           </p:cNvPr>
@@ -16555,7 +16652,7 @@
           <p:cNvPr id="18" name="">
             <a:extLst xmlns:a="http://schemas.openxmlformats.org/drawingml/2006/main">
               <a:ext uri="{FF2B5EF4-FFF2-40B4-BE49-F238E27FC236}">
-                <a16:creationId xmlns:a16="http://schemas.microsoft.com/office/drawing/2014/main" id="{C44BA2A3-45B0-4F3B-B288-3A0618E902C8}"/>
+                <a16:creationId xmlns:a16="http://schemas.microsoft.com/office/drawing/2014/main" id="{58A2DB8D-5A4F-4E5E-8CF9-D8D7388FA7CF}"/>
               </a:ext>
             </a:extLst>
           </p:cNvPr>
@@ -16619,7 +16716,7 @@
           <p:cNvPr id="19" name="">
             <a:extLst xmlns:a="http://schemas.openxmlformats.org/drawingml/2006/main">
               <a:ext uri="{FF2B5EF4-FFF2-40B4-BE49-F238E27FC236}">
-                <a16:creationId xmlns:a16="http://schemas.microsoft.com/office/drawing/2014/main" id="{21052E2B-90CB-42D4-AFBA-039D78B01B92}"/>
+                <a16:creationId xmlns:a16="http://schemas.microsoft.com/office/drawing/2014/main" id="{1FCF55FD-04E1-441D-BEB9-81C5784A089A}"/>
               </a:ext>
             </a:extLst>
           </p:cNvPr>
@@ -16654,7 +16751,7 @@
           <p:cNvPr id="20" name="">
             <a:extLst xmlns:a="http://schemas.openxmlformats.org/drawingml/2006/main">
               <a:ext uri="{FF2B5EF4-FFF2-40B4-BE49-F238E27FC236}">
-                <a16:creationId xmlns:a16="http://schemas.microsoft.com/office/drawing/2014/main" id="{68BD17E3-D73F-4028-B70E-E95942BD26C6}"/>
+                <a16:creationId xmlns:a16="http://schemas.microsoft.com/office/drawing/2014/main" id="{9B166E74-7BE4-42D0-804E-2CB35B77A5EF}"/>
               </a:ext>
             </a:extLst>
           </p:cNvPr>
@@ -16718,7 +16815,7 @@
           <p:cNvPr id="21" name="">
             <a:extLst xmlns:a="http://schemas.openxmlformats.org/drawingml/2006/main">
               <a:ext uri="{FF2B5EF4-FFF2-40B4-BE49-F238E27FC236}">
-                <a16:creationId xmlns:a16="http://schemas.microsoft.com/office/drawing/2014/main" id="{CC5E25CD-BFB6-41E4-91D4-A3ADE9384CB8}"/>
+                <a16:creationId xmlns:a16="http://schemas.microsoft.com/office/drawing/2014/main" id="{90FEA1BC-D6CD-4C96-B95A-42A7EB7BC7EF}"/>
               </a:ext>
             </a:extLst>
           </p:cNvPr>
@@ -16782,7 +16879,7 @@
           <p:cNvPr id="22" name="">
             <a:extLst xmlns:a="http://schemas.openxmlformats.org/drawingml/2006/main">
               <a:ext uri="{FF2B5EF4-FFF2-40B4-BE49-F238E27FC236}">
-                <a16:creationId xmlns:a16="http://schemas.microsoft.com/office/drawing/2014/main" id="{0ED80188-958F-4FE8-8DD0-CC82FA08C475}"/>
+                <a16:creationId xmlns:a16="http://schemas.microsoft.com/office/drawing/2014/main" id="{083560F1-BE2A-42F7-8B34-1387E9EAC015}"/>
               </a:ext>
             </a:extLst>
           </p:cNvPr>
@@ -16815,7 +16912,7 @@
           <p:cNvPr id="23" name="">
             <a:extLst xmlns:a="http://schemas.openxmlformats.org/drawingml/2006/main">
               <a:ext uri="{FF2B5EF4-FFF2-40B4-BE49-F238E27FC236}">
-                <a16:creationId xmlns:a16="http://schemas.microsoft.com/office/drawing/2014/main" id="{26430186-2783-41E3-90B8-7ADEF542CAAF}"/>
+                <a16:creationId xmlns:a16="http://schemas.microsoft.com/office/drawing/2014/main" id="{DD88C060-61FD-4C3F-B54E-319FCA735A1C}"/>
               </a:ext>
             </a:extLst>
           </p:cNvPr>
@@ -16850,7 +16947,7 @@
           <p:cNvPr id="24" name="">
             <a:extLst xmlns:a="http://schemas.openxmlformats.org/drawingml/2006/main">
               <a:ext uri="{FF2B5EF4-FFF2-40B4-BE49-F238E27FC236}">
-                <a16:creationId xmlns:a16="http://schemas.microsoft.com/office/drawing/2014/main" id="{F9900048-C8E1-426C-A386-BE25B952E7E1}"/>
+                <a16:creationId xmlns:a16="http://schemas.microsoft.com/office/drawing/2014/main" id="{068C7D1C-D18B-4662-8386-4DF2A4361789}"/>
               </a:ext>
             </a:extLst>
           </p:cNvPr>
@@ -16914,7 +17011,7 @@
           <p:cNvPr id="25" name="">
             <a:extLst xmlns:a="http://schemas.openxmlformats.org/drawingml/2006/main">
               <a:ext uri="{FF2B5EF4-FFF2-40B4-BE49-F238E27FC236}">
-                <a16:creationId xmlns:a16="http://schemas.microsoft.com/office/drawing/2014/main" id="{395491F7-DFB1-46CD-8603-3C0B32CDBCD8}"/>
+                <a16:creationId xmlns:a16="http://schemas.microsoft.com/office/drawing/2014/main" id="{3B217E73-8DB5-48C8-88C1-06707D968D8A}"/>
               </a:ext>
             </a:extLst>
           </p:cNvPr>
@@ -16978,7 +17075,7 @@
           <p:cNvPr id="26" name="">
             <a:extLst xmlns:a="http://schemas.openxmlformats.org/drawingml/2006/main">
               <a:ext uri="{FF2B5EF4-FFF2-40B4-BE49-F238E27FC236}">
-                <a16:creationId xmlns:a16="http://schemas.microsoft.com/office/drawing/2014/main" id="{6CC13EDF-97C1-46B3-BB97-4475867EE337}"/>
+                <a16:creationId xmlns:a16="http://schemas.microsoft.com/office/drawing/2014/main" id="{6B331B08-159F-4A87-9F00-FBC25EA1C8F8}"/>
               </a:ext>
             </a:extLst>
           </p:cNvPr>
@@ -17011,7 +17108,7 @@
           <p:cNvPr id="27" name="">
             <a:extLst xmlns:a="http://schemas.openxmlformats.org/drawingml/2006/main">
               <a:ext uri="{FF2B5EF4-FFF2-40B4-BE49-F238E27FC236}">
-                <a16:creationId xmlns:a16="http://schemas.microsoft.com/office/drawing/2014/main" id="{7EFC069A-13D2-472A-A770-57678384A1E1}"/>
+                <a16:creationId xmlns:a16="http://schemas.microsoft.com/office/drawing/2014/main" id="{F1E06610-B75F-4EA4-ACF3-D5A7E8DDDC6E}"/>
               </a:ext>
             </a:extLst>
           </p:cNvPr>
@@ -17046,7 +17143,7 @@
           <p:cNvPr id="28" name="">
             <a:extLst xmlns:a="http://schemas.openxmlformats.org/drawingml/2006/main">
               <a:ext uri="{FF2B5EF4-FFF2-40B4-BE49-F238E27FC236}">
-                <a16:creationId xmlns:a16="http://schemas.microsoft.com/office/drawing/2014/main" id="{6505F685-E9B5-4326-86F0-4E87067C8D7D}"/>
+                <a16:creationId xmlns:a16="http://schemas.microsoft.com/office/drawing/2014/main" id="{A0234F08-E67D-4CA8-A8AA-DBCE4DB5E59C}"/>
               </a:ext>
             </a:extLst>
           </p:cNvPr>
@@ -17110,7 +17207,7 @@
           <p:cNvPr id="29" name="">
             <a:extLst xmlns:a="http://schemas.openxmlformats.org/drawingml/2006/main">
               <a:ext uri="{FF2B5EF4-FFF2-40B4-BE49-F238E27FC236}">
-                <a16:creationId xmlns:a16="http://schemas.microsoft.com/office/drawing/2014/main" id="{72F32B1D-EFF0-4DD9-B71B-1B73DE7A43B0}"/>
+                <a16:creationId xmlns:a16="http://schemas.microsoft.com/office/drawing/2014/main" id="{36844F5B-2542-4F3B-9757-42E277FD2BFF}"/>
               </a:ext>
             </a:extLst>
           </p:cNvPr>
@@ -17174,7 +17271,7 @@
           <p:cNvPr id="30" name="">
             <a:extLst xmlns:a="http://schemas.openxmlformats.org/drawingml/2006/main">
               <a:ext uri="{FF2B5EF4-FFF2-40B4-BE49-F238E27FC236}">
-                <a16:creationId xmlns:a16="http://schemas.microsoft.com/office/drawing/2014/main" id="{692CE9E8-12E9-4D6F-9BCC-48BE9C73E641}"/>
+                <a16:creationId xmlns:a16="http://schemas.microsoft.com/office/drawing/2014/main" id="{A193B71F-C871-47A0-99FD-82E596B58D08}"/>
               </a:ext>
             </a:extLst>
           </p:cNvPr>
@@ -17207,7 +17304,7 @@
           <p:cNvPr id="31" name="">
             <a:extLst xmlns:a="http://schemas.openxmlformats.org/drawingml/2006/main">
               <a:ext uri="{FF2B5EF4-FFF2-40B4-BE49-F238E27FC236}">
-                <a16:creationId xmlns:a16="http://schemas.microsoft.com/office/drawing/2014/main" id="{01D5516E-E755-4401-9F11-5F86BB7B6E61}"/>
+                <a16:creationId xmlns:a16="http://schemas.microsoft.com/office/drawing/2014/main" id="{59C0307D-2F0F-4134-939B-131530C33F58}"/>
               </a:ext>
             </a:extLst>
           </p:cNvPr>
@@ -17242,7 +17339,7 @@
           <p:cNvPr id="32" name="">
             <a:extLst xmlns:a="http://schemas.openxmlformats.org/drawingml/2006/main">
               <a:ext uri="{FF2B5EF4-FFF2-40B4-BE49-F238E27FC236}">
-                <a16:creationId xmlns:a16="http://schemas.microsoft.com/office/drawing/2014/main" id="{0E492707-5A95-4177-94EE-ED6108CF0E31}"/>
+                <a16:creationId xmlns:a16="http://schemas.microsoft.com/office/drawing/2014/main" id="{267699EB-1ECE-441A-9669-30069EE06317}"/>
               </a:ext>
             </a:extLst>
           </p:cNvPr>
@@ -17306,7 +17403,7 @@
           <p:cNvPr id="33" name="">
             <a:extLst xmlns:a="http://schemas.openxmlformats.org/drawingml/2006/main">
               <a:ext uri="{FF2B5EF4-FFF2-40B4-BE49-F238E27FC236}">
-                <a16:creationId xmlns:a16="http://schemas.microsoft.com/office/drawing/2014/main" id="{F849F32B-7F1D-44BA-9CA4-CA4BE6147FF6}"/>
+                <a16:creationId xmlns:a16="http://schemas.microsoft.com/office/drawing/2014/main" id="{880B6C96-D10E-4835-ADC6-B555D4EA25CE}"/>
               </a:ext>
             </a:extLst>
           </p:cNvPr>
@@ -17370,7 +17467,7 @@
           <p:cNvPr id="34" name="">
             <a:extLst xmlns:a="http://schemas.openxmlformats.org/drawingml/2006/main">
               <a:ext uri="{FF2B5EF4-FFF2-40B4-BE49-F238E27FC236}">
-                <a16:creationId xmlns:a16="http://schemas.microsoft.com/office/drawing/2014/main" id="{874E21C8-E3C1-4D60-BF50-8788E75AC9BE}"/>
+                <a16:creationId xmlns:a16="http://schemas.microsoft.com/office/drawing/2014/main" id="{6FE80DE1-E491-4F79-BDBE-3D599B0D4C30}"/>
               </a:ext>
             </a:extLst>
           </p:cNvPr>
@@ -17434,7 +17531,7 @@
           <p:cNvPr id="35" name="">
             <a:extLst xmlns:a="http://schemas.openxmlformats.org/drawingml/2006/main">
               <a:ext uri="{FF2B5EF4-FFF2-40B4-BE49-F238E27FC236}">
-                <a16:creationId xmlns:a16="http://schemas.microsoft.com/office/drawing/2014/main" id="{497F9B6D-44CB-4E35-8F25-A7CA647CD4A5}"/>
+                <a16:creationId xmlns:a16="http://schemas.microsoft.com/office/drawing/2014/main" id="{2676007D-CA3D-4051-A0A9-2A740A8A10F8}"/>
               </a:ext>
             </a:extLst>
           </p:cNvPr>
@@ -17467,7 +17564,7 @@
           <p:cNvPr id="36" name="">
             <a:extLst xmlns:a="http://schemas.openxmlformats.org/drawingml/2006/main">
               <a:ext uri="{FF2B5EF4-FFF2-40B4-BE49-F238E27FC236}">
-                <a16:creationId xmlns:a16="http://schemas.microsoft.com/office/drawing/2014/main" id="{6CD6A887-9378-4AB9-9547-BFE0838F80B4}"/>
+                <a16:creationId xmlns:a16="http://schemas.microsoft.com/office/drawing/2014/main" id="{15140188-2742-49F9-ABC2-D3B88C1FF0C0}"/>
               </a:ext>
             </a:extLst>
           </p:cNvPr>
@@ -17531,7 +17628,7 @@
           <p:cNvPr id="37" name="">
             <a:extLst xmlns:a="http://schemas.openxmlformats.org/drawingml/2006/main">
               <a:ext uri="{FF2B5EF4-FFF2-40B4-BE49-F238E27FC236}">
-                <a16:creationId xmlns:a16="http://schemas.microsoft.com/office/drawing/2014/main" id="{37360D9F-2674-4429-B665-E01D3E4D3C67}"/>
+                <a16:creationId xmlns:a16="http://schemas.microsoft.com/office/drawing/2014/main" id="{78D6FD2A-FE8B-419F-B360-F1EEC10B5C20}"/>
               </a:ext>
             </a:extLst>
           </p:cNvPr>
@@ -17593,7 +17690,7 @@
     </p:spTree>
     <p:extLst>
       <p:ext uri="{BB962C8B-B14F-4D97-AF65-F5344CB8AC3E}">
-        <p14:creationId xmlns:p14="http://schemas.microsoft.com/office/powerpoint/2010/main" val="1625690011"/>
+        <p14:creationId xmlns:p14="http://schemas.microsoft.com/office/powerpoint/2010/main" val="1935402461"/>
       </p:ext>
     </p:extLst>
   </p:cSld>

--- a/assets/investor-deck/Tecnotitan-Investor-Deck-PT.pptx
+++ b/assets/investor-deck/Tecnotitan-Investor-Deck-PT.pptx
@@ -2,24 +2,24 @@
 <file path=ppt/presentation.xml><?xml version="1.0" encoding="utf-8"?>
 <p:presentation xmlns:p="http://schemas.openxmlformats.org/presentationml/2006/main">
   <p:sldMasterIdLst>
-    <p:sldMasterId xmlns:r="http://schemas.openxmlformats.org/officeDocument/2006/relationships" id="2147483648" r:id="R7f432d05a6f14b83"/>
+    <p:sldMasterId xmlns:r="http://schemas.openxmlformats.org/officeDocument/2006/relationships" id="2147483648" r:id="R6ff328e1b8d34677"/>
   </p:sldMasterIdLst>
   <p:notesMasterIdLst>
-    <p:notesMasterId xmlns:r="http://schemas.openxmlformats.org/officeDocument/2006/relationships" r:id="Ra11ee16271ad4d68"/>
+    <p:notesMasterId xmlns:r="http://schemas.openxmlformats.org/officeDocument/2006/relationships" r:id="Ra54c0abecc3847dd"/>
   </p:notesMasterIdLst>
   <p:sldIdLst>
-    <p:sldId xmlns:r="http://schemas.openxmlformats.org/officeDocument/2006/relationships" id="256" r:id="R584a9e64a32f4d23"/>
-    <p:sldId xmlns:r="http://schemas.openxmlformats.org/officeDocument/2006/relationships" id="257" r:id="R51f8cede915f4a19"/>
-    <p:sldId xmlns:r="http://schemas.openxmlformats.org/officeDocument/2006/relationships" id="258" r:id="R989e85e7fc1044a2"/>
-    <p:sldId xmlns:r="http://schemas.openxmlformats.org/officeDocument/2006/relationships" id="259" r:id="R6ab771ae4e684694"/>
-    <p:sldId xmlns:r="http://schemas.openxmlformats.org/officeDocument/2006/relationships" id="260" r:id="Rf0022138ce39453e"/>
-    <p:sldId xmlns:r="http://schemas.openxmlformats.org/officeDocument/2006/relationships" id="261" r:id="R5274db2bccde4ca7"/>
-    <p:sldId xmlns:r="http://schemas.openxmlformats.org/officeDocument/2006/relationships" id="262" r:id="Ra67e97260e364836"/>
-    <p:sldId xmlns:r="http://schemas.openxmlformats.org/officeDocument/2006/relationships" id="263" r:id="Ref9bff16a5074e55"/>
-    <p:sldId xmlns:r="http://schemas.openxmlformats.org/officeDocument/2006/relationships" id="264" r:id="R1b370d9f2979460e"/>
-    <p:sldId xmlns:r="http://schemas.openxmlformats.org/officeDocument/2006/relationships" id="265" r:id="R280b61a6bf574197"/>
-    <p:sldId xmlns:r="http://schemas.openxmlformats.org/officeDocument/2006/relationships" id="266" r:id="R77a66de17e184d1f"/>
-    <p:sldId xmlns:r="http://schemas.openxmlformats.org/officeDocument/2006/relationships" id="267" r:id="R8f801576a3dd4587"/>
+    <p:sldId xmlns:r="http://schemas.openxmlformats.org/officeDocument/2006/relationships" id="256" r:id="R679581df0c3144fd"/>
+    <p:sldId xmlns:r="http://schemas.openxmlformats.org/officeDocument/2006/relationships" id="257" r:id="R1f53db10ca504ccb"/>
+    <p:sldId xmlns:r="http://schemas.openxmlformats.org/officeDocument/2006/relationships" id="258" r:id="R9f049f5dbe2a4f9a"/>
+    <p:sldId xmlns:r="http://schemas.openxmlformats.org/officeDocument/2006/relationships" id="259" r:id="R0621268569ff4e8d"/>
+    <p:sldId xmlns:r="http://schemas.openxmlformats.org/officeDocument/2006/relationships" id="260" r:id="R81bf5648927440eb"/>
+    <p:sldId xmlns:r="http://schemas.openxmlformats.org/officeDocument/2006/relationships" id="261" r:id="Rca621b92fd3844a7"/>
+    <p:sldId xmlns:r="http://schemas.openxmlformats.org/officeDocument/2006/relationships" id="262" r:id="R6d0cafd5615e4694"/>
+    <p:sldId xmlns:r="http://schemas.openxmlformats.org/officeDocument/2006/relationships" id="263" r:id="Rd24c4d01668046e0"/>
+    <p:sldId xmlns:r="http://schemas.openxmlformats.org/officeDocument/2006/relationships" id="264" r:id="R0bee5f82f4564c52"/>
+    <p:sldId xmlns:r="http://schemas.openxmlformats.org/officeDocument/2006/relationships" id="265" r:id="R787e905e6b6e47c2"/>
+    <p:sldId xmlns:r="http://schemas.openxmlformats.org/officeDocument/2006/relationships" id="266" r:id="R5d06e0b071044558"/>
+    <p:sldId xmlns:r="http://schemas.openxmlformats.org/officeDocument/2006/relationships" id="267" r:id="Rfa6b6f4147964e6e"/>
   </p:sldIdLst>
   <p:sldSz cx="12192000" cy="6858000"/>
   <p:notesSz cx="6858000" cy="9144000"/>
@@ -1292,7 +1292,7 @@
   </p:cSld>
   <p:clrMap bg1="lt1" tx1="dk1" bg2="lt2" tx2="dk2" accent1="accent1" accent2="accent2" accent3="accent3" accent4="accent4" accent5="accent5" accent6="accent6" hlink="hlink" folHlink="folHlink"/>
   <p:sldLayoutIdLst>
-    <p:sldLayoutId xmlns:r="http://schemas.openxmlformats.org/officeDocument/2006/relationships" id="2147483649" r:id="R35040c80297b457e"/>
+    <p:sldLayoutId xmlns:r="http://schemas.openxmlformats.org/officeDocument/2006/relationships" id="2147483649" r:id="R6a3431ca097648a8"/>
   </p:sldLayoutIdLst>
   <p:txStyles>
     <p:titleStyle>
@@ -1794,7 +1794,7 @@
           <p:nvPr/>
         </p:nvPicPr>
         <p:blipFill>
-          <a:blip xmlns:r="http://schemas.openxmlformats.org/officeDocument/2006/relationships" xmlns:a="http://schemas.openxmlformats.org/drawingml/2006/main" r:embed="R5bb62d4f1f334111"/>
+          <a:blip xmlns:r="http://schemas.openxmlformats.org/officeDocument/2006/relationships" xmlns:a="http://schemas.openxmlformats.org/drawingml/2006/main" r:embed="Rbc68fc825b7a4b01"/>
           <a:srcRect xmlns:a="http://schemas.openxmlformats.org/drawingml/2006/main" l="0" t="7813" r="0" b="7813"/>
           <a:stretch xmlns:a="http://schemas.openxmlformats.org/drawingml/2006/main">
             <a:fillRect l="0" t="0" r="0" b="0"/>
@@ -1815,7 +1815,7 @@
           <p:cNvPr id="2" name="">
             <a:extLst xmlns:a="http://schemas.openxmlformats.org/drawingml/2006/main">
               <a:ext uri="{FF2B5EF4-FFF2-40B4-BE49-F238E27FC236}">
-                <a16:creationId xmlns:a16="http://schemas.microsoft.com/office/drawing/2014/main" id="{E4EE2D69-F08B-463C-9844-80838F09C10C}"/>
+                <a16:creationId xmlns:a16="http://schemas.microsoft.com/office/drawing/2014/main" id="{498FAFB2-A40B-4CDE-9B82-8B85242F806D}"/>
               </a:ext>
             </a:extLst>
           </p:cNvPr>
@@ -1852,7 +1852,7 @@
           <p:cNvPr id="3" name="">
             <a:extLst xmlns:a="http://schemas.openxmlformats.org/drawingml/2006/main">
               <a:ext uri="{FF2B5EF4-FFF2-40B4-BE49-F238E27FC236}">
-                <a16:creationId xmlns:a16="http://schemas.microsoft.com/office/drawing/2014/main" id="{E0D294C6-BFD1-4051-8519-38984BB637CC}"/>
+                <a16:creationId xmlns:a16="http://schemas.microsoft.com/office/drawing/2014/main" id="{E6B45B56-EB14-4C89-B0CB-24C0DD8126B2}"/>
               </a:ext>
             </a:extLst>
           </p:cNvPr>
@@ -1889,7 +1889,7 @@
           <p:cNvPr id="4" name="">
             <a:extLst xmlns:a="http://schemas.openxmlformats.org/drawingml/2006/main">
               <a:ext uri="{FF2B5EF4-FFF2-40B4-BE49-F238E27FC236}">
-                <a16:creationId xmlns:a16="http://schemas.microsoft.com/office/drawing/2014/main" id="{15CB0BDE-4449-48DB-8774-6F678472D830}"/>
+                <a16:creationId xmlns:a16="http://schemas.microsoft.com/office/drawing/2014/main" id="{50FBC40F-32C9-44EF-94AA-BF1D8E8E8292}"/>
               </a:ext>
             </a:extLst>
           </p:cNvPr>
@@ -1953,7 +1953,7 @@
           <p:cNvPr id="5" name="">
             <a:extLst xmlns:a="http://schemas.openxmlformats.org/drawingml/2006/main">
               <a:ext uri="{FF2B5EF4-FFF2-40B4-BE49-F238E27FC236}">
-                <a16:creationId xmlns:a16="http://schemas.microsoft.com/office/drawing/2014/main" id="{586D2BB6-EC47-4901-AC07-55F1C974C673}"/>
+                <a16:creationId xmlns:a16="http://schemas.microsoft.com/office/drawing/2014/main" id="{B794B7AD-2313-451E-B1A7-F13CC930BA12}"/>
               </a:ext>
             </a:extLst>
           </p:cNvPr>
@@ -2017,7 +2017,7 @@
           <p:cNvPr id="6" name="">
             <a:extLst xmlns:a="http://schemas.openxmlformats.org/drawingml/2006/main">
               <a:ext uri="{FF2B5EF4-FFF2-40B4-BE49-F238E27FC236}">
-                <a16:creationId xmlns:a16="http://schemas.microsoft.com/office/drawing/2014/main" id="{FB207C12-012D-4AED-A20E-D7721FC393BE}"/>
+                <a16:creationId xmlns:a16="http://schemas.microsoft.com/office/drawing/2014/main" id="{091101BD-06C3-4B84-B44F-E3A1FE0A2989}"/>
               </a:ext>
             </a:extLst>
           </p:cNvPr>
@@ -2050,7 +2050,7 @@
           <p:cNvPr id="7" name="">
             <a:extLst xmlns:a="http://schemas.openxmlformats.org/drawingml/2006/main">
               <a:ext uri="{FF2B5EF4-FFF2-40B4-BE49-F238E27FC236}">
-                <a16:creationId xmlns:a16="http://schemas.microsoft.com/office/drawing/2014/main" id="{2E378A55-3C7D-4E5E-B6EF-25018D4117AB}"/>
+                <a16:creationId xmlns:a16="http://schemas.microsoft.com/office/drawing/2014/main" id="{0C8DFB49-B6CC-432F-90B2-310CC080D873}"/>
               </a:ext>
             </a:extLst>
           </p:cNvPr>
@@ -2114,7 +2114,7 @@
           <p:cNvPr id="8" name="">
             <a:extLst xmlns:a="http://schemas.openxmlformats.org/drawingml/2006/main">
               <a:ext uri="{FF2B5EF4-FFF2-40B4-BE49-F238E27FC236}">
-                <a16:creationId xmlns:a16="http://schemas.microsoft.com/office/drawing/2014/main" id="{1DE93532-C798-449D-9532-CCC794F13C0A}"/>
+                <a16:creationId xmlns:a16="http://schemas.microsoft.com/office/drawing/2014/main" id="{75EB190D-A183-4336-B2B6-5E6E2F210682}"/>
               </a:ext>
             </a:extLst>
           </p:cNvPr>
@@ -2178,7 +2178,7 @@
           <p:cNvPr id="9" name="">
             <a:extLst xmlns:a="http://schemas.openxmlformats.org/drawingml/2006/main">
               <a:ext uri="{FF2B5EF4-FFF2-40B4-BE49-F238E27FC236}">
-                <a16:creationId xmlns:a16="http://schemas.microsoft.com/office/drawing/2014/main" id="{6951E6CB-760B-44A7-83A8-681D140AA4A0}"/>
+                <a16:creationId xmlns:a16="http://schemas.microsoft.com/office/drawing/2014/main" id="{E4285EBC-0108-45B9-B2EC-DC390D2C9557}"/>
               </a:ext>
             </a:extLst>
           </p:cNvPr>
@@ -2213,7 +2213,7 @@
           <p:cNvPr id="10" name="">
             <a:extLst xmlns:a="http://schemas.openxmlformats.org/drawingml/2006/main">
               <a:ext uri="{FF2B5EF4-FFF2-40B4-BE49-F238E27FC236}">
-                <a16:creationId xmlns:a16="http://schemas.microsoft.com/office/drawing/2014/main" id="{15E6F850-E5D6-40A4-B854-B78F8AA1A930}"/>
+                <a16:creationId xmlns:a16="http://schemas.microsoft.com/office/drawing/2014/main" id="{6B996C56-A39D-40C0-A922-5EE586B73C0F}"/>
               </a:ext>
             </a:extLst>
           </p:cNvPr>
@@ -2277,7 +2277,7 @@
           <p:cNvPr id="11" name="">
             <a:extLst xmlns:a="http://schemas.openxmlformats.org/drawingml/2006/main">
               <a:ext uri="{FF2B5EF4-FFF2-40B4-BE49-F238E27FC236}">
-                <a16:creationId xmlns:a16="http://schemas.microsoft.com/office/drawing/2014/main" id="{2FF6F375-01FC-4458-B233-377DCCDD9CE2}"/>
+                <a16:creationId xmlns:a16="http://schemas.microsoft.com/office/drawing/2014/main" id="{9E9729AE-53CC-4D37-9FC6-64893C6AF83D}"/>
               </a:ext>
             </a:extLst>
           </p:cNvPr>
@@ -2312,7 +2312,7 @@
           <p:cNvPr id="12" name="">
             <a:extLst xmlns:a="http://schemas.openxmlformats.org/drawingml/2006/main">
               <a:ext uri="{FF2B5EF4-FFF2-40B4-BE49-F238E27FC236}">
-                <a16:creationId xmlns:a16="http://schemas.microsoft.com/office/drawing/2014/main" id="{B2C21D23-9EBC-46D8-B3D4-18DE11032E90}"/>
+                <a16:creationId xmlns:a16="http://schemas.microsoft.com/office/drawing/2014/main" id="{FCF87A08-BC97-4C8E-A099-9CD04F62C9C2}"/>
               </a:ext>
             </a:extLst>
           </p:cNvPr>
@@ -2376,7 +2376,7 @@
           <p:cNvPr id="13" name="">
             <a:extLst xmlns:a="http://schemas.openxmlformats.org/drawingml/2006/main">
               <a:ext uri="{FF2B5EF4-FFF2-40B4-BE49-F238E27FC236}">
-                <a16:creationId xmlns:a16="http://schemas.microsoft.com/office/drawing/2014/main" id="{3FA61519-B430-47E9-8AE8-A7D90599542B}"/>
+                <a16:creationId xmlns:a16="http://schemas.microsoft.com/office/drawing/2014/main" id="{3342DDB2-F021-4BC3-9CDD-802D00E83E09}"/>
               </a:ext>
             </a:extLst>
           </p:cNvPr>
@@ -2411,7 +2411,7 @@
           <p:cNvPr id="14" name="">
             <a:extLst xmlns:a="http://schemas.openxmlformats.org/drawingml/2006/main">
               <a:ext uri="{FF2B5EF4-FFF2-40B4-BE49-F238E27FC236}">
-                <a16:creationId xmlns:a16="http://schemas.microsoft.com/office/drawing/2014/main" id="{36A94A7B-5E0C-42A0-BF2D-A577A612935C}"/>
+                <a16:creationId xmlns:a16="http://schemas.microsoft.com/office/drawing/2014/main" id="{11241005-E9C5-45CB-B4B2-07ACEB3068A1}"/>
               </a:ext>
             </a:extLst>
           </p:cNvPr>
@@ -2475,7 +2475,7 @@
           <p:cNvPr id="15" name="">
             <a:extLst xmlns:a="http://schemas.openxmlformats.org/drawingml/2006/main">
               <a:ext uri="{FF2B5EF4-FFF2-40B4-BE49-F238E27FC236}">
-                <a16:creationId xmlns:a16="http://schemas.microsoft.com/office/drawing/2014/main" id="{D507C989-4148-47D0-9F5A-06B6F82A95B6}"/>
+                <a16:creationId xmlns:a16="http://schemas.microsoft.com/office/drawing/2014/main" id="{C3EDE249-0B36-4A36-A582-A546841D0463}"/>
               </a:ext>
             </a:extLst>
           </p:cNvPr>
@@ -2529,7 +2529,7 @@
                 <a:ea typeface="Aptos"/>
                 <a:cs typeface="Aptos"/>
               </a:rPr>
-              <a:t>6 linhas de produto</a:t>
+              <a:t>US$500K pre-seed</a:t>
             </a:r>
           </a:p>
         </p:txBody>
@@ -2539,7 +2539,7 @@
           <p:cNvPr id="16" name="">
             <a:extLst xmlns:a="http://schemas.openxmlformats.org/drawingml/2006/main">
               <a:ext uri="{FF2B5EF4-FFF2-40B4-BE49-F238E27FC236}">
-                <a16:creationId xmlns:a16="http://schemas.microsoft.com/office/drawing/2014/main" id="{838728E5-0B19-4000-8201-DC903DBFE97C}"/>
+                <a16:creationId xmlns:a16="http://schemas.microsoft.com/office/drawing/2014/main" id="{86A0E50B-F057-4347-9DF2-ECE095386081}"/>
               </a:ext>
             </a:extLst>
           </p:cNvPr>
@@ -2574,7 +2574,7 @@
           <p:cNvPr id="17" name="">
             <a:extLst xmlns:a="http://schemas.openxmlformats.org/drawingml/2006/main">
               <a:ext uri="{FF2B5EF4-FFF2-40B4-BE49-F238E27FC236}">
-                <a16:creationId xmlns:a16="http://schemas.microsoft.com/office/drawing/2014/main" id="{05DF2673-35AF-4671-A58D-2B4ADE96ED9E}"/>
+                <a16:creationId xmlns:a16="http://schemas.microsoft.com/office/drawing/2014/main" id="{4822AAB3-9612-4DF4-A8B9-D375A747F51B}"/>
               </a:ext>
             </a:extLst>
           </p:cNvPr>
@@ -2638,7 +2638,7 @@
           <p:cNvPr id="18" name="">
             <a:extLst xmlns:a="http://schemas.openxmlformats.org/drawingml/2006/main">
               <a:ext uri="{FF2B5EF4-FFF2-40B4-BE49-F238E27FC236}">
-                <a16:creationId xmlns:a16="http://schemas.microsoft.com/office/drawing/2014/main" id="{0EF1C7B0-5214-4CCC-B062-64884705F3AB}"/>
+                <a16:creationId xmlns:a16="http://schemas.microsoft.com/office/drawing/2014/main" id="{9697AB6A-5C1B-48B8-9648-29777EB186C9}"/>
               </a:ext>
             </a:extLst>
           </p:cNvPr>
@@ -2692,7 +2692,7 @@
                 <a:ea typeface="Aptos"/>
                 <a:cs typeface="Aptos"/>
               </a:rPr>
-              <a:t>5 divisões tecnológicas</a:t>
+              <a:t>18 meses de runway</a:t>
             </a:r>
           </a:p>
         </p:txBody>
@@ -2702,7 +2702,7 @@
           <p:cNvPr id="19" name="">
             <a:extLst xmlns:a="http://schemas.openxmlformats.org/drawingml/2006/main">
               <a:ext uri="{FF2B5EF4-FFF2-40B4-BE49-F238E27FC236}">
-                <a16:creationId xmlns:a16="http://schemas.microsoft.com/office/drawing/2014/main" id="{0F39B563-AE27-410E-B3E3-3F4A12CBF1D1}"/>
+                <a16:creationId xmlns:a16="http://schemas.microsoft.com/office/drawing/2014/main" id="{E18D08CF-249F-444C-BDDF-369B924130E3}"/>
               </a:ext>
             </a:extLst>
           </p:cNvPr>
@@ -2737,7 +2737,7 @@
           <p:cNvPr id="20" name="">
             <a:extLst xmlns:a="http://schemas.openxmlformats.org/drawingml/2006/main">
               <a:ext uri="{FF2B5EF4-FFF2-40B4-BE49-F238E27FC236}">
-                <a16:creationId xmlns:a16="http://schemas.microsoft.com/office/drawing/2014/main" id="{DD98A345-3038-4470-86B2-5BADA84E37AB}"/>
+                <a16:creationId xmlns:a16="http://schemas.microsoft.com/office/drawing/2014/main" id="{DA74EC46-3F38-42A9-9938-663F08A44D00}"/>
               </a:ext>
             </a:extLst>
           </p:cNvPr>
@@ -2801,7 +2801,7 @@
           <p:cNvPr id="21" name="">
             <a:extLst xmlns:a="http://schemas.openxmlformats.org/drawingml/2006/main">
               <a:ext uri="{FF2B5EF4-FFF2-40B4-BE49-F238E27FC236}">
-                <a16:creationId xmlns:a16="http://schemas.microsoft.com/office/drawing/2014/main" id="{4ADE362E-5FE2-44E2-A936-B7E1D7677138}"/>
+                <a16:creationId xmlns:a16="http://schemas.microsoft.com/office/drawing/2014/main" id="{37E9C74E-AA2B-4E7C-9CC5-187AA35F78F5}"/>
               </a:ext>
             </a:extLst>
           </p:cNvPr>
@@ -2855,7 +2855,7 @@
                 <a:ea typeface="Aptos"/>
                 <a:cs typeface="Aptos"/>
               </a:rPr>
-              <a:t>Equipe lean em execução</a:t>
+              <a:t>6 linhas de produto</a:t>
             </a:r>
           </a:p>
         </p:txBody>
@@ -2865,7 +2865,7 @@
           <p:cNvPr id="22" name="">
             <a:extLst xmlns:a="http://schemas.openxmlformats.org/drawingml/2006/main">
               <a:ext uri="{FF2B5EF4-FFF2-40B4-BE49-F238E27FC236}">
-                <a16:creationId xmlns:a16="http://schemas.microsoft.com/office/drawing/2014/main" id="{17F0B14F-3956-47AB-9910-0B629AB2B9E7}"/>
+                <a16:creationId xmlns:a16="http://schemas.microsoft.com/office/drawing/2014/main" id="{50199AC4-77DC-40B8-A21F-E36234B858FD}"/>
               </a:ext>
             </a:extLst>
           </p:cNvPr>
@@ -2929,7 +2929,7 @@
           <p:cNvPr id="23" name="">
             <a:extLst xmlns:a="http://schemas.openxmlformats.org/drawingml/2006/main">
               <a:ext uri="{FF2B5EF4-FFF2-40B4-BE49-F238E27FC236}">
-                <a16:creationId xmlns:a16="http://schemas.microsoft.com/office/drawing/2014/main" id="{527DBDA0-797C-4D97-9EA4-22473DB6C81B}"/>
+                <a16:creationId xmlns:a16="http://schemas.microsoft.com/office/drawing/2014/main" id="{8A115F28-54A6-40EC-83E9-251DB2F18282}"/>
               </a:ext>
             </a:extLst>
           </p:cNvPr>
@@ -2962,7 +2962,7 @@
           <p:cNvPr id="24" name="">
             <a:extLst xmlns:a="http://schemas.openxmlformats.org/drawingml/2006/main">
               <a:ext uri="{FF2B5EF4-FFF2-40B4-BE49-F238E27FC236}">
-                <a16:creationId xmlns:a16="http://schemas.microsoft.com/office/drawing/2014/main" id="{972998BF-3FFE-44B9-99E5-0D19B7C21153}"/>
+                <a16:creationId xmlns:a16="http://schemas.microsoft.com/office/drawing/2014/main" id="{C3546A7D-BA4B-4AB1-B6E2-E8BCDA7B5D71}"/>
               </a:ext>
             </a:extLst>
           </p:cNvPr>
@@ -3026,7 +3026,7 @@
           <p:cNvPr id="25" name="">
             <a:extLst xmlns:a="http://schemas.openxmlformats.org/drawingml/2006/main">
               <a:ext uri="{FF2B5EF4-FFF2-40B4-BE49-F238E27FC236}">
-                <a16:creationId xmlns:a16="http://schemas.microsoft.com/office/drawing/2014/main" id="{DB037D47-33B1-4FA5-8249-779E6FE380B8}"/>
+                <a16:creationId xmlns:a16="http://schemas.microsoft.com/office/drawing/2014/main" id="{CFCDB2A0-5696-4BE7-8843-BF51BC0BB95A}"/>
               </a:ext>
             </a:extLst>
           </p:cNvPr>
@@ -3088,7 +3088,7 @@
     </p:spTree>
     <p:extLst>
       <p:ext uri="{BB962C8B-B14F-4D97-AF65-F5344CB8AC3E}">
-        <p14:creationId xmlns:p14="http://schemas.microsoft.com/office/powerpoint/2010/main" val="1785081389"/>
+        <p14:creationId xmlns:p14="http://schemas.microsoft.com/office/powerpoint/2010/main" val="1074459926"/>
       </p:ext>
     </p:extLst>
   </p:cSld>
@@ -3116,7 +3116,7 @@
           <p:nvPr/>
         </p:nvPicPr>
         <p:blipFill>
-          <a:blip xmlns:r="http://schemas.openxmlformats.org/officeDocument/2006/relationships" xmlns:a="http://schemas.openxmlformats.org/drawingml/2006/main" r:embed="Reb9863b91dec4300"/>
+          <a:blip xmlns:r="http://schemas.openxmlformats.org/officeDocument/2006/relationships" xmlns:a="http://schemas.openxmlformats.org/drawingml/2006/main" r:embed="R78322dcce2f646ff"/>
           <a:srcRect xmlns:a="http://schemas.openxmlformats.org/drawingml/2006/main" l="0" t="27" r="0" b="27"/>
           <a:stretch xmlns:a="http://schemas.openxmlformats.org/drawingml/2006/main">
             <a:fillRect l="0" t="0" r="0" b="0"/>
@@ -3137,7 +3137,7 @@
           <p:cNvPr id="2" name="">
             <a:extLst xmlns:a="http://schemas.openxmlformats.org/drawingml/2006/main">
               <a:ext uri="{FF2B5EF4-FFF2-40B4-BE49-F238E27FC236}">
-                <a16:creationId xmlns:a16="http://schemas.microsoft.com/office/drawing/2014/main" id="{E162F2DD-7AEC-4247-BDB0-14372A208F84}"/>
+                <a16:creationId xmlns:a16="http://schemas.microsoft.com/office/drawing/2014/main" id="{9B6A39C5-958E-4838-A02B-F4A2BCAFD6F7}"/>
               </a:ext>
             </a:extLst>
           </p:cNvPr>
@@ -3174,7 +3174,7 @@
           <p:cNvPr id="3" name="">
             <a:extLst xmlns:a="http://schemas.openxmlformats.org/drawingml/2006/main">
               <a:ext uri="{FF2B5EF4-FFF2-40B4-BE49-F238E27FC236}">
-                <a16:creationId xmlns:a16="http://schemas.microsoft.com/office/drawing/2014/main" id="{12FD4C55-5659-4A23-AEDF-591F9E0DFCF1}"/>
+                <a16:creationId xmlns:a16="http://schemas.microsoft.com/office/drawing/2014/main" id="{EC9C7AE3-CF61-4C16-BC65-B4219D72E7A4}"/>
               </a:ext>
             </a:extLst>
           </p:cNvPr>
@@ -3211,7 +3211,7 @@
           <p:cNvPr id="4" name="">
             <a:extLst xmlns:a="http://schemas.openxmlformats.org/drawingml/2006/main">
               <a:ext uri="{FF2B5EF4-FFF2-40B4-BE49-F238E27FC236}">
-                <a16:creationId xmlns:a16="http://schemas.microsoft.com/office/drawing/2014/main" id="{5BF4CC30-5FB5-49BB-A285-FF630D3A726D}"/>
+                <a16:creationId xmlns:a16="http://schemas.microsoft.com/office/drawing/2014/main" id="{26339A7D-1AB7-41E9-8236-193BC108A640}"/>
               </a:ext>
             </a:extLst>
           </p:cNvPr>
@@ -3275,7 +3275,7 @@
           <p:cNvPr id="5" name="">
             <a:extLst xmlns:a="http://schemas.openxmlformats.org/drawingml/2006/main">
               <a:ext uri="{FF2B5EF4-FFF2-40B4-BE49-F238E27FC236}">
-                <a16:creationId xmlns:a16="http://schemas.microsoft.com/office/drawing/2014/main" id="{DD822535-B8A8-40F6-9355-2869EAD20F0B}"/>
+                <a16:creationId xmlns:a16="http://schemas.microsoft.com/office/drawing/2014/main" id="{590F4F99-5D0A-4FEA-9FCD-1C5C44DE79EC}"/>
               </a:ext>
             </a:extLst>
           </p:cNvPr>
@@ -3339,7 +3339,7 @@
           <p:cNvPr id="6" name="">
             <a:extLst xmlns:a="http://schemas.openxmlformats.org/drawingml/2006/main">
               <a:ext uri="{FF2B5EF4-FFF2-40B4-BE49-F238E27FC236}">
-                <a16:creationId xmlns:a16="http://schemas.microsoft.com/office/drawing/2014/main" id="{62CF6ABC-AA4E-4753-A3E6-DC59806CD525}"/>
+                <a16:creationId xmlns:a16="http://schemas.microsoft.com/office/drawing/2014/main" id="{68E188D0-68A6-4DED-9A37-697C63A39E3D}"/>
               </a:ext>
             </a:extLst>
           </p:cNvPr>
@@ -3403,7 +3403,7 @@
           <p:cNvPr id="7" name="">
             <a:extLst xmlns:a="http://schemas.openxmlformats.org/drawingml/2006/main">
               <a:ext uri="{FF2B5EF4-FFF2-40B4-BE49-F238E27FC236}">
-                <a16:creationId xmlns:a16="http://schemas.microsoft.com/office/drawing/2014/main" id="{B7E90AFE-C153-4DA0-BD86-8F37DFD3CA02}"/>
+                <a16:creationId xmlns:a16="http://schemas.microsoft.com/office/drawing/2014/main" id="{B56F2B84-C2A3-4799-94B1-C0704DBFEA22}"/>
               </a:ext>
             </a:extLst>
           </p:cNvPr>
@@ -3438,7 +3438,7 @@
           <p:cNvPr id="8" name="">
             <a:extLst xmlns:a="http://schemas.openxmlformats.org/drawingml/2006/main">
               <a:ext uri="{FF2B5EF4-FFF2-40B4-BE49-F238E27FC236}">
-                <a16:creationId xmlns:a16="http://schemas.microsoft.com/office/drawing/2014/main" id="{1C8D2D7D-077F-4028-BC37-3EF088DF34F8}"/>
+                <a16:creationId xmlns:a16="http://schemas.microsoft.com/office/drawing/2014/main" id="{A36688F4-7529-4894-9F89-CE1236DE166F}"/>
               </a:ext>
             </a:extLst>
           </p:cNvPr>
@@ -3502,7 +3502,7 @@
           <p:cNvPr id="9" name="">
             <a:extLst xmlns:a="http://schemas.openxmlformats.org/drawingml/2006/main">
               <a:ext uri="{FF2B5EF4-FFF2-40B4-BE49-F238E27FC236}">
-                <a16:creationId xmlns:a16="http://schemas.microsoft.com/office/drawing/2014/main" id="{11001D68-2B4D-481A-95D2-19C8C3349ABC}"/>
+                <a16:creationId xmlns:a16="http://schemas.microsoft.com/office/drawing/2014/main" id="{C53883A2-60F8-488C-9EDF-9D223DFCCD6C}"/>
               </a:ext>
             </a:extLst>
           </p:cNvPr>
@@ -3537,7 +3537,7 @@
           <p:cNvPr id="10" name="">
             <a:extLst xmlns:a="http://schemas.openxmlformats.org/drawingml/2006/main">
               <a:ext uri="{FF2B5EF4-FFF2-40B4-BE49-F238E27FC236}">
-                <a16:creationId xmlns:a16="http://schemas.microsoft.com/office/drawing/2014/main" id="{27646BB4-2639-41B2-AA62-2380CD99C2D5}"/>
+                <a16:creationId xmlns:a16="http://schemas.microsoft.com/office/drawing/2014/main" id="{037089F4-B87D-420F-880C-A33298E2567E}"/>
               </a:ext>
             </a:extLst>
           </p:cNvPr>
@@ -3601,7 +3601,7 @@
           <p:cNvPr id="11" name="">
             <a:extLst xmlns:a="http://schemas.openxmlformats.org/drawingml/2006/main">
               <a:ext uri="{FF2B5EF4-FFF2-40B4-BE49-F238E27FC236}">
-                <a16:creationId xmlns:a16="http://schemas.microsoft.com/office/drawing/2014/main" id="{333E8515-A124-42DA-A270-5418FBC293A0}"/>
+                <a16:creationId xmlns:a16="http://schemas.microsoft.com/office/drawing/2014/main" id="{02396513-BB03-4700-AFAA-41C09344ADCD}"/>
               </a:ext>
             </a:extLst>
           </p:cNvPr>
@@ -3636,7 +3636,7 @@
           <p:cNvPr id="12" name="">
             <a:extLst xmlns:a="http://schemas.openxmlformats.org/drawingml/2006/main">
               <a:ext uri="{FF2B5EF4-FFF2-40B4-BE49-F238E27FC236}">
-                <a16:creationId xmlns:a16="http://schemas.microsoft.com/office/drawing/2014/main" id="{0E8CA3A4-4C96-4524-B8AA-EF0FF1BCAE78}"/>
+                <a16:creationId xmlns:a16="http://schemas.microsoft.com/office/drawing/2014/main" id="{41443300-6E89-4E91-B727-3DB27EE7879E}"/>
               </a:ext>
             </a:extLst>
           </p:cNvPr>
@@ -3700,7 +3700,7 @@
           <p:cNvPr id="13" name="">
             <a:extLst xmlns:a="http://schemas.openxmlformats.org/drawingml/2006/main">
               <a:ext uri="{FF2B5EF4-FFF2-40B4-BE49-F238E27FC236}">
-                <a16:creationId xmlns:a16="http://schemas.microsoft.com/office/drawing/2014/main" id="{38A31608-432E-4DFF-ABFE-082D862233D6}"/>
+                <a16:creationId xmlns:a16="http://schemas.microsoft.com/office/drawing/2014/main" id="{C4C84AA9-3C79-4277-B214-BE8CA0A887A0}"/>
               </a:ext>
             </a:extLst>
           </p:cNvPr>
@@ -3735,7 +3735,7 @@
           <p:cNvPr id="14" name="">
             <a:extLst xmlns:a="http://schemas.openxmlformats.org/drawingml/2006/main">
               <a:ext uri="{FF2B5EF4-FFF2-40B4-BE49-F238E27FC236}">
-                <a16:creationId xmlns:a16="http://schemas.microsoft.com/office/drawing/2014/main" id="{2D6C14D4-5071-4A4C-B2D9-686A020192D2}"/>
+                <a16:creationId xmlns:a16="http://schemas.microsoft.com/office/drawing/2014/main" id="{49ED8E2B-467F-4887-9DC8-4E8561C62C7F}"/>
               </a:ext>
             </a:extLst>
           </p:cNvPr>
@@ -3799,7 +3799,7 @@
           <p:cNvPr id="15" name="">
             <a:extLst xmlns:a="http://schemas.openxmlformats.org/drawingml/2006/main">
               <a:ext uri="{FF2B5EF4-FFF2-40B4-BE49-F238E27FC236}">
-                <a16:creationId xmlns:a16="http://schemas.microsoft.com/office/drawing/2014/main" id="{73B23F6D-109A-45C7-B090-47A7B0A0E426}"/>
+                <a16:creationId xmlns:a16="http://schemas.microsoft.com/office/drawing/2014/main" id="{F048B31F-224A-477D-91F4-65AEA135EF6F}"/>
               </a:ext>
             </a:extLst>
           </p:cNvPr>
@@ -3863,7 +3863,7 @@
           <p:cNvPr id="16" name="">
             <a:extLst xmlns:a="http://schemas.openxmlformats.org/drawingml/2006/main">
               <a:ext uri="{FF2B5EF4-FFF2-40B4-BE49-F238E27FC236}">
-                <a16:creationId xmlns:a16="http://schemas.microsoft.com/office/drawing/2014/main" id="{183C4A5D-126C-4348-B663-27F7CFA5C2DF}"/>
+                <a16:creationId xmlns:a16="http://schemas.microsoft.com/office/drawing/2014/main" id="{5F3F378F-5C3C-4680-9476-C08FF50355EE}"/>
               </a:ext>
             </a:extLst>
           </p:cNvPr>
@@ -3927,7 +3927,7 @@
           <p:cNvPr id="17" name="">
             <a:extLst xmlns:a="http://schemas.openxmlformats.org/drawingml/2006/main">
               <a:ext uri="{FF2B5EF4-FFF2-40B4-BE49-F238E27FC236}">
-                <a16:creationId xmlns:a16="http://schemas.microsoft.com/office/drawing/2014/main" id="{F62CD0DB-9237-4DB5-9F64-024102D69188}"/>
+                <a16:creationId xmlns:a16="http://schemas.microsoft.com/office/drawing/2014/main" id="{8ACD7C70-CD79-425B-B63C-51CCB4E5F9ED}"/>
               </a:ext>
             </a:extLst>
           </p:cNvPr>
@@ -3960,7 +3960,7 @@
           <p:cNvPr id="18" name="">
             <a:extLst xmlns:a="http://schemas.openxmlformats.org/drawingml/2006/main">
               <a:ext uri="{FF2B5EF4-FFF2-40B4-BE49-F238E27FC236}">
-                <a16:creationId xmlns:a16="http://schemas.microsoft.com/office/drawing/2014/main" id="{0D082E61-189B-4804-AB00-E41BBB232EB6}"/>
+                <a16:creationId xmlns:a16="http://schemas.microsoft.com/office/drawing/2014/main" id="{335672FF-5624-4FFE-855D-7CA538ECCEB4}"/>
               </a:ext>
             </a:extLst>
           </p:cNvPr>
@@ -4024,7 +4024,7 @@
           <p:cNvPr id="19" name="">
             <a:extLst xmlns:a="http://schemas.openxmlformats.org/drawingml/2006/main">
               <a:ext uri="{FF2B5EF4-FFF2-40B4-BE49-F238E27FC236}">
-                <a16:creationId xmlns:a16="http://schemas.microsoft.com/office/drawing/2014/main" id="{E27688E9-B5C8-4971-A0D6-36E24DE225B3}"/>
+                <a16:creationId xmlns:a16="http://schemas.microsoft.com/office/drawing/2014/main" id="{8CCB10D5-ACD5-407A-992D-DA8E44909DB3}"/>
               </a:ext>
             </a:extLst>
           </p:cNvPr>
@@ -4086,7 +4086,7 @@
     </p:spTree>
     <p:extLst>
       <p:ext uri="{BB962C8B-B14F-4D97-AF65-F5344CB8AC3E}">
-        <p14:creationId xmlns:p14="http://schemas.microsoft.com/office/powerpoint/2010/main" val="1517367312"/>
+        <p14:creationId xmlns:p14="http://schemas.microsoft.com/office/powerpoint/2010/main" val="66793435"/>
       </p:ext>
     </p:extLst>
   </p:cSld>
@@ -4114,7 +4114,7 @@
           <p:nvPr/>
         </p:nvPicPr>
         <p:blipFill>
-          <a:blip xmlns:r="http://schemas.openxmlformats.org/officeDocument/2006/relationships" xmlns:a="http://schemas.openxmlformats.org/drawingml/2006/main" r:embed="Rc90c9532aa614e20"/>
+          <a:blip xmlns:r="http://schemas.openxmlformats.org/officeDocument/2006/relationships" xmlns:a="http://schemas.openxmlformats.org/drawingml/2006/main" r:embed="Rc9504bc1327f4c1c"/>
           <a:srcRect xmlns:a="http://schemas.openxmlformats.org/drawingml/2006/main" l="0" t="27" r="0" b="27"/>
           <a:stretch xmlns:a="http://schemas.openxmlformats.org/drawingml/2006/main">
             <a:fillRect l="0" t="0" r="0" b="0"/>
@@ -4135,7 +4135,7 @@
           <p:cNvPr id="2" name="">
             <a:extLst xmlns:a="http://schemas.openxmlformats.org/drawingml/2006/main">
               <a:ext uri="{FF2B5EF4-FFF2-40B4-BE49-F238E27FC236}">
-                <a16:creationId xmlns:a16="http://schemas.microsoft.com/office/drawing/2014/main" id="{0D66CAF4-02B4-47F0-91E6-EBF2D95E08CF}"/>
+                <a16:creationId xmlns:a16="http://schemas.microsoft.com/office/drawing/2014/main" id="{C5A13FCB-2C6F-42A7-9103-3681E918B3D9}"/>
               </a:ext>
             </a:extLst>
           </p:cNvPr>
@@ -4172,7 +4172,7 @@
           <p:cNvPr id="3" name="">
             <a:extLst xmlns:a="http://schemas.openxmlformats.org/drawingml/2006/main">
               <a:ext uri="{FF2B5EF4-FFF2-40B4-BE49-F238E27FC236}">
-                <a16:creationId xmlns:a16="http://schemas.microsoft.com/office/drawing/2014/main" id="{B3814039-ABD4-4121-81E8-E5E40DEA85E2}"/>
+                <a16:creationId xmlns:a16="http://schemas.microsoft.com/office/drawing/2014/main" id="{8A8ADDC5-9200-4481-81AD-45107183B9CC}"/>
               </a:ext>
             </a:extLst>
           </p:cNvPr>
@@ -4209,7 +4209,7 @@
           <p:cNvPr id="4" name="">
             <a:extLst xmlns:a="http://schemas.openxmlformats.org/drawingml/2006/main">
               <a:ext uri="{FF2B5EF4-FFF2-40B4-BE49-F238E27FC236}">
-                <a16:creationId xmlns:a16="http://schemas.microsoft.com/office/drawing/2014/main" id="{DACA7258-9475-4066-9EA1-7C63011D86F0}"/>
+                <a16:creationId xmlns:a16="http://schemas.microsoft.com/office/drawing/2014/main" id="{F8225AE4-7954-4FB4-9999-63E96D73F95F}"/>
               </a:ext>
             </a:extLst>
           </p:cNvPr>
@@ -4273,7 +4273,7 @@
           <p:cNvPr id="5" name="">
             <a:extLst xmlns:a="http://schemas.openxmlformats.org/drawingml/2006/main">
               <a:ext uri="{FF2B5EF4-FFF2-40B4-BE49-F238E27FC236}">
-                <a16:creationId xmlns:a16="http://schemas.microsoft.com/office/drawing/2014/main" id="{F0BCCD60-A0E7-4283-957A-05118814D038}"/>
+                <a16:creationId xmlns:a16="http://schemas.microsoft.com/office/drawing/2014/main" id="{F8644BA7-5BF9-4F2A-8F35-D7980031C5DF}"/>
               </a:ext>
             </a:extLst>
           </p:cNvPr>
@@ -4337,7 +4337,7 @@
           <p:cNvPr id="6" name="">
             <a:extLst xmlns:a="http://schemas.openxmlformats.org/drawingml/2006/main">
               <a:ext uri="{FF2B5EF4-FFF2-40B4-BE49-F238E27FC236}">
-                <a16:creationId xmlns:a16="http://schemas.microsoft.com/office/drawing/2014/main" id="{8A52F12B-0E18-470C-8134-561536AB3C93}"/>
+                <a16:creationId xmlns:a16="http://schemas.microsoft.com/office/drawing/2014/main" id="{E7E3B2C7-5FEC-4A0E-A446-8C8FD258295F}"/>
               </a:ext>
             </a:extLst>
           </p:cNvPr>
@@ -4401,7 +4401,7 @@
           <p:cNvPr id="7" name="">
             <a:extLst xmlns:a="http://schemas.openxmlformats.org/drawingml/2006/main">
               <a:ext uri="{FF2B5EF4-FFF2-40B4-BE49-F238E27FC236}">
-                <a16:creationId xmlns:a16="http://schemas.microsoft.com/office/drawing/2014/main" id="{28432CB7-5A6F-4A99-9E02-E5313AF7A7B2}"/>
+                <a16:creationId xmlns:a16="http://schemas.microsoft.com/office/drawing/2014/main" id="{34D2D7B7-0339-4005-AD23-94F0F187B148}"/>
               </a:ext>
             </a:extLst>
           </p:cNvPr>
@@ -4436,7 +4436,7 @@
           <p:cNvPr id="8" name="">
             <a:extLst xmlns:a="http://schemas.openxmlformats.org/drawingml/2006/main">
               <a:ext uri="{FF2B5EF4-FFF2-40B4-BE49-F238E27FC236}">
-                <a16:creationId xmlns:a16="http://schemas.microsoft.com/office/drawing/2014/main" id="{E2CA7EF6-B074-4649-A698-C77FF64D3B76}"/>
+                <a16:creationId xmlns:a16="http://schemas.microsoft.com/office/drawing/2014/main" id="{CCC277A7-CFC7-4F32-8484-E36377D96588}"/>
               </a:ext>
             </a:extLst>
           </p:cNvPr>
@@ -4500,7 +4500,7 @@
           <p:cNvPr id="9" name="">
             <a:extLst xmlns:a="http://schemas.openxmlformats.org/drawingml/2006/main">
               <a:ext uri="{FF2B5EF4-FFF2-40B4-BE49-F238E27FC236}">
-                <a16:creationId xmlns:a16="http://schemas.microsoft.com/office/drawing/2014/main" id="{1932CBDA-ABBF-45E9-B2EB-6C2F50835374}"/>
+                <a16:creationId xmlns:a16="http://schemas.microsoft.com/office/drawing/2014/main" id="{FE9FB702-7720-4F22-8760-3B9707FE39FC}"/>
               </a:ext>
             </a:extLst>
           </p:cNvPr>
@@ -4564,7 +4564,7 @@
           <p:cNvPr id="10" name="">
             <a:extLst xmlns:a="http://schemas.openxmlformats.org/drawingml/2006/main">
               <a:ext uri="{FF2B5EF4-FFF2-40B4-BE49-F238E27FC236}">
-                <a16:creationId xmlns:a16="http://schemas.microsoft.com/office/drawing/2014/main" id="{AB9F5216-39A6-4E74-88F0-FEE8E30D9DCB}"/>
+                <a16:creationId xmlns:a16="http://schemas.microsoft.com/office/drawing/2014/main" id="{7397CE0E-8EAB-430D-9866-7CF7A1ED6BFF}"/>
               </a:ext>
             </a:extLst>
           </p:cNvPr>
@@ -4597,7 +4597,7 @@
           <p:cNvPr id="11" name="">
             <a:extLst xmlns:a="http://schemas.openxmlformats.org/drawingml/2006/main">
               <a:ext uri="{FF2B5EF4-FFF2-40B4-BE49-F238E27FC236}">
-                <a16:creationId xmlns:a16="http://schemas.microsoft.com/office/drawing/2014/main" id="{5C5D0931-51B8-471E-BB27-D93D8B51B790}"/>
+                <a16:creationId xmlns:a16="http://schemas.microsoft.com/office/drawing/2014/main" id="{40886E87-992D-43BB-9CA0-D80CFBEBDADE}"/>
               </a:ext>
             </a:extLst>
           </p:cNvPr>
@@ -4632,7 +4632,7 @@
           <p:cNvPr id="12" name="">
             <a:extLst xmlns:a="http://schemas.openxmlformats.org/drawingml/2006/main">
               <a:ext uri="{FF2B5EF4-FFF2-40B4-BE49-F238E27FC236}">
-                <a16:creationId xmlns:a16="http://schemas.microsoft.com/office/drawing/2014/main" id="{E77A6131-A153-4BA1-994D-D5A4423A69C8}"/>
+                <a16:creationId xmlns:a16="http://schemas.microsoft.com/office/drawing/2014/main" id="{B25E2993-8629-4633-ACDA-EFB49B5A50B7}"/>
               </a:ext>
             </a:extLst>
           </p:cNvPr>
@@ -4696,7 +4696,7 @@
           <p:cNvPr id="13" name="">
             <a:extLst xmlns:a="http://schemas.openxmlformats.org/drawingml/2006/main">
               <a:ext uri="{FF2B5EF4-FFF2-40B4-BE49-F238E27FC236}">
-                <a16:creationId xmlns:a16="http://schemas.microsoft.com/office/drawing/2014/main" id="{19A96818-9814-46A1-B3C2-D7387E2736E8}"/>
+                <a16:creationId xmlns:a16="http://schemas.microsoft.com/office/drawing/2014/main" id="{59142D7A-8427-4462-B5B0-37E93F1F4450}"/>
               </a:ext>
             </a:extLst>
           </p:cNvPr>
@@ -4760,7 +4760,7 @@
           <p:cNvPr id="14" name="">
             <a:extLst xmlns:a="http://schemas.openxmlformats.org/drawingml/2006/main">
               <a:ext uri="{FF2B5EF4-FFF2-40B4-BE49-F238E27FC236}">
-                <a16:creationId xmlns:a16="http://schemas.microsoft.com/office/drawing/2014/main" id="{B420C778-23BB-441E-AF82-552A045196D0}"/>
+                <a16:creationId xmlns:a16="http://schemas.microsoft.com/office/drawing/2014/main" id="{DDA6B96C-2745-42BE-A547-A3959C13183C}"/>
               </a:ext>
             </a:extLst>
           </p:cNvPr>
@@ -4793,7 +4793,7 @@
           <p:cNvPr id="15" name="">
             <a:extLst xmlns:a="http://schemas.openxmlformats.org/drawingml/2006/main">
               <a:ext uri="{FF2B5EF4-FFF2-40B4-BE49-F238E27FC236}">
-                <a16:creationId xmlns:a16="http://schemas.microsoft.com/office/drawing/2014/main" id="{6AF3A9FE-8D02-49B1-8766-619FB7234834}"/>
+                <a16:creationId xmlns:a16="http://schemas.microsoft.com/office/drawing/2014/main" id="{B118DA58-5B7C-4409-B758-31FAEED4C0C2}"/>
               </a:ext>
             </a:extLst>
           </p:cNvPr>
@@ -4828,7 +4828,7 @@
           <p:cNvPr id="16" name="">
             <a:extLst xmlns:a="http://schemas.openxmlformats.org/drawingml/2006/main">
               <a:ext uri="{FF2B5EF4-FFF2-40B4-BE49-F238E27FC236}">
-                <a16:creationId xmlns:a16="http://schemas.microsoft.com/office/drawing/2014/main" id="{132BD45E-F218-448C-8884-4F3554009350}"/>
+                <a16:creationId xmlns:a16="http://schemas.microsoft.com/office/drawing/2014/main" id="{1A05D36A-D842-4E79-9B19-4267C6DC5E3B}"/>
               </a:ext>
             </a:extLst>
           </p:cNvPr>
@@ -4892,7 +4892,7 @@
           <p:cNvPr id="17" name="">
             <a:extLst xmlns:a="http://schemas.openxmlformats.org/drawingml/2006/main">
               <a:ext uri="{FF2B5EF4-FFF2-40B4-BE49-F238E27FC236}">
-                <a16:creationId xmlns:a16="http://schemas.microsoft.com/office/drawing/2014/main" id="{95367724-C413-400E-A270-D73625CAD1EE}"/>
+                <a16:creationId xmlns:a16="http://schemas.microsoft.com/office/drawing/2014/main" id="{C6400515-11B4-4338-90C5-1FEE0DC640A7}"/>
               </a:ext>
             </a:extLst>
           </p:cNvPr>
@@ -4956,7 +4956,7 @@
           <p:cNvPr id="18" name="">
             <a:extLst xmlns:a="http://schemas.openxmlformats.org/drawingml/2006/main">
               <a:ext uri="{FF2B5EF4-FFF2-40B4-BE49-F238E27FC236}">
-                <a16:creationId xmlns:a16="http://schemas.microsoft.com/office/drawing/2014/main" id="{33B9C9B0-1EEC-4904-9369-E72EE31A377A}"/>
+                <a16:creationId xmlns:a16="http://schemas.microsoft.com/office/drawing/2014/main" id="{950F5B30-CE60-4AC2-9D43-460518FFA07D}"/>
               </a:ext>
             </a:extLst>
           </p:cNvPr>
@@ -5020,7 +5020,7 @@
           <p:cNvPr id="19" name="">
             <a:extLst xmlns:a="http://schemas.openxmlformats.org/drawingml/2006/main">
               <a:ext uri="{FF2B5EF4-FFF2-40B4-BE49-F238E27FC236}">
-                <a16:creationId xmlns:a16="http://schemas.microsoft.com/office/drawing/2014/main" id="{ED3F5D70-5589-4075-B3C8-08A607E4CA40}"/>
+                <a16:creationId xmlns:a16="http://schemas.microsoft.com/office/drawing/2014/main" id="{73CB9338-22D5-4B95-AFB8-A63B88A3E385}"/>
               </a:ext>
             </a:extLst>
           </p:cNvPr>
@@ -5053,7 +5053,7 @@
           <p:cNvPr id="20" name="">
             <a:extLst xmlns:a="http://schemas.openxmlformats.org/drawingml/2006/main">
               <a:ext uri="{FF2B5EF4-FFF2-40B4-BE49-F238E27FC236}">
-                <a16:creationId xmlns:a16="http://schemas.microsoft.com/office/drawing/2014/main" id="{24C5250E-82A3-4F4F-8CF0-640199D56A11}"/>
+                <a16:creationId xmlns:a16="http://schemas.microsoft.com/office/drawing/2014/main" id="{F04CA3F1-37CF-4F7E-AD77-D1935EFC1987}"/>
               </a:ext>
             </a:extLst>
           </p:cNvPr>
@@ -5117,7 +5117,7 @@
           <p:cNvPr id="21" name="">
             <a:extLst xmlns:a="http://schemas.openxmlformats.org/drawingml/2006/main">
               <a:ext uri="{FF2B5EF4-FFF2-40B4-BE49-F238E27FC236}">
-                <a16:creationId xmlns:a16="http://schemas.microsoft.com/office/drawing/2014/main" id="{8718B159-94B6-4FA3-BA08-1730A6AE5FF8}"/>
+                <a16:creationId xmlns:a16="http://schemas.microsoft.com/office/drawing/2014/main" id="{D09E5574-DAA3-447E-AAD0-1C72AF1E2EC2}"/>
               </a:ext>
             </a:extLst>
           </p:cNvPr>
@@ -5179,7 +5179,7 @@
     </p:spTree>
     <p:extLst>
       <p:ext uri="{BB962C8B-B14F-4D97-AF65-F5344CB8AC3E}">
-        <p14:creationId xmlns:p14="http://schemas.microsoft.com/office/powerpoint/2010/main" val="1847778701"/>
+        <p14:creationId xmlns:p14="http://schemas.microsoft.com/office/powerpoint/2010/main" val="197099415"/>
       </p:ext>
     </p:extLst>
   </p:cSld>
@@ -5207,7 +5207,7 @@
           <p:nvPr/>
         </p:nvPicPr>
         <p:blipFill>
-          <a:blip xmlns:r="http://schemas.openxmlformats.org/officeDocument/2006/relationships" xmlns:a="http://schemas.openxmlformats.org/drawingml/2006/main" r:embed="R858f5045c6ff48c5"/>
+          <a:blip xmlns:r="http://schemas.openxmlformats.org/officeDocument/2006/relationships" xmlns:a="http://schemas.openxmlformats.org/drawingml/2006/main" r:embed="R4c2765499c224522"/>
           <a:srcRect xmlns:a="http://schemas.openxmlformats.org/drawingml/2006/main" l="0" t="27" r="0" b="27"/>
           <a:stretch xmlns:a="http://schemas.openxmlformats.org/drawingml/2006/main">
             <a:fillRect l="0" t="0" r="0" b="0"/>
@@ -5228,7 +5228,7 @@
           <p:cNvPr id="2" name="">
             <a:extLst xmlns:a="http://schemas.openxmlformats.org/drawingml/2006/main">
               <a:ext uri="{FF2B5EF4-FFF2-40B4-BE49-F238E27FC236}">
-                <a16:creationId xmlns:a16="http://schemas.microsoft.com/office/drawing/2014/main" id="{9ECFAC70-2266-400F-83B7-178E15BC50E9}"/>
+                <a16:creationId xmlns:a16="http://schemas.microsoft.com/office/drawing/2014/main" id="{E88658D8-FE71-4B3A-B86D-73138CBDAE7A}"/>
               </a:ext>
             </a:extLst>
           </p:cNvPr>
@@ -5265,7 +5265,7 @@
           <p:cNvPr id="3" name="">
             <a:extLst xmlns:a="http://schemas.openxmlformats.org/drawingml/2006/main">
               <a:ext uri="{FF2B5EF4-FFF2-40B4-BE49-F238E27FC236}">
-                <a16:creationId xmlns:a16="http://schemas.microsoft.com/office/drawing/2014/main" id="{CDEB88FA-4EC9-4CAD-99A4-5FFF5BAF30B3}"/>
+                <a16:creationId xmlns:a16="http://schemas.microsoft.com/office/drawing/2014/main" id="{7548F009-DF77-4ECB-9F1E-A5835CCBE4E9}"/>
               </a:ext>
             </a:extLst>
           </p:cNvPr>
@@ -5302,7 +5302,7 @@
           <p:cNvPr id="4" name="">
             <a:extLst xmlns:a="http://schemas.openxmlformats.org/drawingml/2006/main">
               <a:ext uri="{FF2B5EF4-FFF2-40B4-BE49-F238E27FC236}">
-                <a16:creationId xmlns:a16="http://schemas.microsoft.com/office/drawing/2014/main" id="{9C1366F3-D542-4047-A77C-29DAB3D25B73}"/>
+                <a16:creationId xmlns:a16="http://schemas.microsoft.com/office/drawing/2014/main" id="{66CEC6B6-43E7-4E3A-809D-411ECECDA257}"/>
               </a:ext>
             </a:extLst>
           </p:cNvPr>
@@ -5366,7 +5366,7 @@
           <p:cNvPr id="5" name="">
             <a:extLst xmlns:a="http://schemas.openxmlformats.org/drawingml/2006/main">
               <a:ext uri="{FF2B5EF4-FFF2-40B4-BE49-F238E27FC236}">
-                <a16:creationId xmlns:a16="http://schemas.microsoft.com/office/drawing/2014/main" id="{E450212E-4F44-4671-B626-E058577218A8}"/>
+                <a16:creationId xmlns:a16="http://schemas.microsoft.com/office/drawing/2014/main" id="{8AFF91EE-551B-4BC2-82DD-422934CED3F0}"/>
               </a:ext>
             </a:extLst>
           </p:cNvPr>
@@ -5420,7 +5420,7 @@
                 <a:ea typeface="Aptos Display"/>
                 <a:cs typeface="Aptos Display"/>
               </a:rPr>
-              <a:t>Buscamos capital e aliados para acelerar produto, vendas e talento</a:t>
+              <a:t>Levantamos US$500K pre-seed para chegar a pilotos pagos e produto repetível</a:t>
             </a:r>
           </a:p>
         </p:txBody>
@@ -5430,7 +5430,7 @@
           <p:cNvPr id="6" name="">
             <a:extLst xmlns:a="http://schemas.openxmlformats.org/drawingml/2006/main">
               <a:ext uri="{FF2B5EF4-FFF2-40B4-BE49-F238E27FC236}">
-                <a16:creationId xmlns:a16="http://schemas.microsoft.com/office/drawing/2014/main" id="{3D707184-0DB0-4142-A05D-F0EF5E50449F}"/>
+                <a16:creationId xmlns:a16="http://schemas.microsoft.com/office/drawing/2014/main" id="{E686042E-A335-4403-A88F-3C71879B6440}"/>
               </a:ext>
             </a:extLst>
           </p:cNvPr>
@@ -5484,7 +5484,7 @@
                 <a:ea typeface="Aptos"/>
                 <a:cs typeface="Aptos"/>
               </a:rPr>
-              <a:t>A Tecnotitan está construindo uma empresa tecnológica multidivisão com ambição global a partir da América Latina.</a:t>
+              <a:t>A rodada financia 18 meses para transformar serviços de IA e software em produtos próprios com clientes iniciais, casos de uso mensuráveis e base comercial global.</a:t>
             </a:r>
           </a:p>
         </p:txBody>
@@ -5494,7 +5494,7 @@
           <p:cNvPr id="7" name="">
             <a:extLst xmlns:a="http://schemas.openxmlformats.org/drawingml/2006/main">
               <a:ext uri="{FF2B5EF4-FFF2-40B4-BE49-F238E27FC236}">
-                <a16:creationId xmlns:a16="http://schemas.microsoft.com/office/drawing/2014/main" id="{06BE7236-70DA-4F39-B234-E73F476E989D}"/>
+                <a16:creationId xmlns:a16="http://schemas.microsoft.com/office/drawing/2014/main" id="{711FCF6B-2D32-4C73-AC93-A9690E878F9C}"/>
               </a:ext>
             </a:extLst>
           </p:cNvPr>
@@ -5529,7 +5529,7 @@
           <p:cNvPr id="8" name="">
             <a:extLst xmlns:a="http://schemas.openxmlformats.org/drawingml/2006/main">
               <a:ext uri="{FF2B5EF4-FFF2-40B4-BE49-F238E27FC236}">
-                <a16:creationId xmlns:a16="http://schemas.microsoft.com/office/drawing/2014/main" id="{2BE17A23-69F9-434E-B30C-F84CE69C9B66}"/>
+                <a16:creationId xmlns:a16="http://schemas.microsoft.com/office/drawing/2014/main" id="{137AAAC4-A84B-4570-B28D-5A99456640E1}"/>
               </a:ext>
             </a:extLst>
           </p:cNvPr>
@@ -5593,7 +5593,7 @@
           <p:cNvPr id="9" name="">
             <a:extLst xmlns:a="http://schemas.openxmlformats.org/drawingml/2006/main">
               <a:ext uri="{FF2B5EF4-FFF2-40B4-BE49-F238E27FC236}">
-                <a16:creationId xmlns:a16="http://schemas.microsoft.com/office/drawing/2014/main" id="{BDB9B843-22D1-444D-964C-A0C3E3D5E6A0}"/>
+                <a16:creationId xmlns:a16="http://schemas.microsoft.com/office/drawing/2014/main" id="{51E4DD2F-C904-4B5D-8C4B-7A33D2D822E5}"/>
               </a:ext>
             </a:extLst>
           </p:cNvPr>
@@ -5647,7 +5647,7 @@
                 <a:ea typeface="Aptos"/>
                 <a:cs typeface="Aptos"/>
               </a:rPr>
-              <a:t>Produto</a:t>
+              <a:t>40% produto e engenharia</a:t>
             </a:r>
           </a:p>
         </p:txBody>
@@ -5657,7 +5657,7 @@
           <p:cNvPr id="10" name="">
             <a:extLst xmlns:a="http://schemas.openxmlformats.org/drawingml/2006/main">
               <a:ext uri="{FF2B5EF4-FFF2-40B4-BE49-F238E27FC236}">
-                <a16:creationId xmlns:a16="http://schemas.microsoft.com/office/drawing/2014/main" id="{4F1A9EE2-9126-446C-8A6E-0EC48962EC10}"/>
+                <a16:creationId xmlns:a16="http://schemas.microsoft.com/office/drawing/2014/main" id="{E70603E2-57CB-4333-A181-413D2CD7B112}"/>
               </a:ext>
             </a:extLst>
           </p:cNvPr>
@@ -5692,7 +5692,7 @@
           <p:cNvPr id="11" name="">
             <a:extLst xmlns:a="http://schemas.openxmlformats.org/drawingml/2006/main">
               <a:ext uri="{FF2B5EF4-FFF2-40B4-BE49-F238E27FC236}">
-                <a16:creationId xmlns:a16="http://schemas.microsoft.com/office/drawing/2014/main" id="{6244A8FA-30F2-45EB-9E9A-F4E71EF3540C}"/>
+                <a16:creationId xmlns:a16="http://schemas.microsoft.com/office/drawing/2014/main" id="{49415646-CEDA-41E3-963D-4DF82B50B6AF}"/>
               </a:ext>
             </a:extLst>
           </p:cNvPr>
@@ -5756,7 +5756,7 @@
           <p:cNvPr id="12" name="">
             <a:extLst xmlns:a="http://schemas.openxmlformats.org/drawingml/2006/main">
               <a:ext uri="{FF2B5EF4-FFF2-40B4-BE49-F238E27FC236}">
-                <a16:creationId xmlns:a16="http://schemas.microsoft.com/office/drawing/2014/main" id="{DAF193F6-85D2-4BF0-AAB3-38EE4698490D}"/>
+                <a16:creationId xmlns:a16="http://schemas.microsoft.com/office/drawing/2014/main" id="{5BAFF4D6-D967-45F8-B0E1-652266E545A4}"/>
               </a:ext>
             </a:extLst>
           </p:cNvPr>
@@ -5810,7 +5810,7 @@
                 <a:ea typeface="Aptos"/>
                 <a:cs typeface="Aptos"/>
               </a:rPr>
-              <a:t>Vendas</a:t>
+              <a:t>25% vendas e pilotos</a:t>
             </a:r>
           </a:p>
         </p:txBody>
@@ -5820,7 +5820,7 @@
           <p:cNvPr id="13" name="">
             <a:extLst xmlns:a="http://schemas.openxmlformats.org/drawingml/2006/main">
               <a:ext uri="{FF2B5EF4-FFF2-40B4-BE49-F238E27FC236}">
-                <a16:creationId xmlns:a16="http://schemas.microsoft.com/office/drawing/2014/main" id="{6E5056B6-4088-4276-8718-4586902F4A4A}"/>
+                <a16:creationId xmlns:a16="http://schemas.microsoft.com/office/drawing/2014/main" id="{E298A9AB-04E9-41C7-9EAB-283CD4EB3E1F}"/>
               </a:ext>
             </a:extLst>
           </p:cNvPr>
@@ -5855,7 +5855,7 @@
           <p:cNvPr id="14" name="">
             <a:extLst xmlns:a="http://schemas.openxmlformats.org/drawingml/2006/main">
               <a:ext uri="{FF2B5EF4-FFF2-40B4-BE49-F238E27FC236}">
-                <a16:creationId xmlns:a16="http://schemas.microsoft.com/office/drawing/2014/main" id="{BF3AD8F4-AB9D-4CD2-9443-82CA9922B333}"/>
+                <a16:creationId xmlns:a16="http://schemas.microsoft.com/office/drawing/2014/main" id="{6828FDC4-0A5B-4595-844B-F638A6BC6239}"/>
               </a:ext>
             </a:extLst>
           </p:cNvPr>
@@ -5919,7 +5919,7 @@
           <p:cNvPr id="15" name="">
             <a:extLst xmlns:a="http://schemas.openxmlformats.org/drawingml/2006/main">
               <a:ext uri="{FF2B5EF4-FFF2-40B4-BE49-F238E27FC236}">
-                <a16:creationId xmlns:a16="http://schemas.microsoft.com/office/drawing/2014/main" id="{0E5CE7A4-F4E7-4AFD-8574-251B1EC938CA}"/>
+                <a16:creationId xmlns:a16="http://schemas.microsoft.com/office/drawing/2014/main" id="{68CC5531-0208-4E3B-9F2A-FCC881FDB21D}"/>
               </a:ext>
             </a:extLst>
           </p:cNvPr>
@@ -5973,7 +5973,7 @@
                 <a:ea typeface="Aptos"/>
                 <a:cs typeface="Aptos"/>
               </a:rPr>
-              <a:t>Talento técnico</a:t>
+              <a:t>20% delivery de IA</a:t>
             </a:r>
           </a:p>
         </p:txBody>
@@ -5983,7 +5983,7 @@
           <p:cNvPr id="16" name="">
             <a:extLst xmlns:a="http://schemas.openxmlformats.org/drawingml/2006/main">
               <a:ext uri="{FF2B5EF4-FFF2-40B4-BE49-F238E27FC236}">
-                <a16:creationId xmlns:a16="http://schemas.microsoft.com/office/drawing/2014/main" id="{FE0E0558-EA99-431A-BCF6-1CCB4170A004}"/>
+                <a16:creationId xmlns:a16="http://schemas.microsoft.com/office/drawing/2014/main" id="{0C09FDDB-9B80-4223-9B35-0201D7C4DD26}"/>
               </a:ext>
             </a:extLst>
           </p:cNvPr>
@@ -6018,7 +6018,7 @@
           <p:cNvPr id="17" name="">
             <a:extLst xmlns:a="http://schemas.openxmlformats.org/drawingml/2006/main">
               <a:ext uri="{FF2B5EF4-FFF2-40B4-BE49-F238E27FC236}">
-                <a16:creationId xmlns:a16="http://schemas.microsoft.com/office/drawing/2014/main" id="{ECBD4009-D9AE-46B9-BB63-15B1A51E373B}"/>
+                <a16:creationId xmlns:a16="http://schemas.microsoft.com/office/drawing/2014/main" id="{9E3EFB7D-B516-4AC0-B9A2-2682BDDE9585}"/>
               </a:ext>
             </a:extLst>
           </p:cNvPr>
@@ -6082,7 +6082,7 @@
           <p:cNvPr id="18" name="">
             <a:extLst xmlns:a="http://schemas.openxmlformats.org/drawingml/2006/main">
               <a:ext uri="{FF2B5EF4-FFF2-40B4-BE49-F238E27FC236}">
-                <a16:creationId xmlns:a16="http://schemas.microsoft.com/office/drawing/2014/main" id="{D3B8361B-2887-4068-B0F5-4C205CEF9AE1}"/>
+                <a16:creationId xmlns:a16="http://schemas.microsoft.com/office/drawing/2014/main" id="{9049022F-4371-4503-AC94-6FCA26653549}"/>
               </a:ext>
             </a:extLst>
           </p:cNvPr>
@@ -6136,7 +6136,7 @@
                 <a:ea typeface="Aptos"/>
                 <a:cs typeface="Aptos"/>
               </a:rPr>
-              <a:t>Data room</a:t>
+              <a:t>15% operações e data room</a:t>
             </a:r>
           </a:p>
         </p:txBody>
@@ -6146,7 +6146,7 @@
           <p:cNvPr id="19" name="">
             <a:extLst xmlns:a="http://schemas.openxmlformats.org/drawingml/2006/main">
               <a:ext uri="{FF2B5EF4-FFF2-40B4-BE49-F238E27FC236}">
-                <a16:creationId xmlns:a16="http://schemas.microsoft.com/office/drawing/2014/main" id="{5FA6D37C-E2A0-47C6-BB95-7CF0E3A40589}"/>
+                <a16:creationId xmlns:a16="http://schemas.microsoft.com/office/drawing/2014/main" id="{EB3FA840-27EE-4BFD-8F0B-874BD5AA720C}"/>
               </a:ext>
             </a:extLst>
           </p:cNvPr>
@@ -6181,7 +6181,7 @@
           <p:cNvPr id="20" name="">
             <a:extLst xmlns:a="http://schemas.openxmlformats.org/drawingml/2006/main">
               <a:ext uri="{FF2B5EF4-FFF2-40B4-BE49-F238E27FC236}">
-                <a16:creationId xmlns:a16="http://schemas.microsoft.com/office/drawing/2014/main" id="{32EB8998-F025-4C48-97D9-853E681116C1}"/>
+                <a16:creationId xmlns:a16="http://schemas.microsoft.com/office/drawing/2014/main" id="{E9AF4306-297B-4990-B8D9-4145B7AB4CB2}"/>
               </a:ext>
             </a:extLst>
           </p:cNvPr>
@@ -6245,7 +6245,7 @@
           <p:cNvPr id="21" name="">
             <a:extLst xmlns:a="http://schemas.openxmlformats.org/drawingml/2006/main">
               <a:ext uri="{FF2B5EF4-FFF2-40B4-BE49-F238E27FC236}">
-                <a16:creationId xmlns:a16="http://schemas.microsoft.com/office/drawing/2014/main" id="{60E556A1-C39A-4DAB-A1D7-F53208090A6B}"/>
+                <a16:creationId xmlns:a16="http://schemas.microsoft.com/office/drawing/2014/main" id="{6C5B1323-873A-461A-8546-812686C473A3}"/>
               </a:ext>
             </a:extLst>
           </p:cNvPr>
@@ -6309,7 +6309,7 @@
           <p:cNvPr id="22" name="">
             <a:extLst xmlns:a="http://schemas.openxmlformats.org/drawingml/2006/main">
               <a:ext uri="{FF2B5EF4-FFF2-40B4-BE49-F238E27FC236}">
-                <a16:creationId xmlns:a16="http://schemas.microsoft.com/office/drawing/2014/main" id="{E8297FB0-9C24-49F1-971E-4E7ED29832C0}"/>
+                <a16:creationId xmlns:a16="http://schemas.microsoft.com/office/drawing/2014/main" id="{9BA93F32-0D94-4A9D-9D65-8D5DDE282B77}"/>
               </a:ext>
             </a:extLst>
           </p:cNvPr>
@@ -6342,7 +6342,7 @@
           <p:cNvPr id="23" name="">
             <a:extLst xmlns:a="http://schemas.openxmlformats.org/drawingml/2006/main">
               <a:ext uri="{FF2B5EF4-FFF2-40B4-BE49-F238E27FC236}">
-                <a16:creationId xmlns:a16="http://schemas.microsoft.com/office/drawing/2014/main" id="{0E71D8EA-E047-4326-9F07-937B5AA04DBB}"/>
+                <a16:creationId xmlns:a16="http://schemas.microsoft.com/office/drawing/2014/main" id="{226E56A4-348C-4A07-BAB2-7DB75241F4F4}"/>
               </a:ext>
             </a:extLst>
           </p:cNvPr>
@@ -6406,7 +6406,7 @@
           <p:cNvPr id="24" name="">
             <a:extLst xmlns:a="http://schemas.openxmlformats.org/drawingml/2006/main">
               <a:ext uri="{FF2B5EF4-FFF2-40B4-BE49-F238E27FC236}">
-                <a16:creationId xmlns:a16="http://schemas.microsoft.com/office/drawing/2014/main" id="{C43A1EEB-57A6-48F4-BDA4-57D344023E37}"/>
+                <a16:creationId xmlns:a16="http://schemas.microsoft.com/office/drawing/2014/main" id="{EEDE4F56-E1DB-451A-A919-7573DFC7FA8F}"/>
               </a:ext>
             </a:extLst>
           </p:cNvPr>
@@ -6468,7 +6468,7 @@
     </p:spTree>
     <p:extLst>
       <p:ext uri="{BB962C8B-B14F-4D97-AF65-F5344CB8AC3E}">
-        <p14:creationId xmlns:p14="http://schemas.microsoft.com/office/powerpoint/2010/main" val="2113888146"/>
+        <p14:creationId xmlns:p14="http://schemas.microsoft.com/office/powerpoint/2010/main" val="1282234247"/>
       </p:ext>
     </p:extLst>
   </p:cSld>
@@ -6496,7 +6496,7 @@
           <p:nvPr/>
         </p:nvPicPr>
         <p:blipFill>
-          <a:blip xmlns:r="http://schemas.openxmlformats.org/officeDocument/2006/relationships" xmlns:a="http://schemas.openxmlformats.org/drawingml/2006/main" r:embed="R9d736863464940b5"/>
+          <a:blip xmlns:r="http://schemas.openxmlformats.org/officeDocument/2006/relationships" xmlns:a="http://schemas.openxmlformats.org/drawingml/2006/main" r:embed="R895e81b5fab64d5a"/>
           <a:srcRect xmlns:a="http://schemas.openxmlformats.org/drawingml/2006/main" l="0" t="27" r="0" b="27"/>
           <a:stretch xmlns:a="http://schemas.openxmlformats.org/drawingml/2006/main">
             <a:fillRect l="0" t="0" r="0" b="0"/>
@@ -6517,7 +6517,7 @@
           <p:cNvPr id="2" name="">
             <a:extLst xmlns:a="http://schemas.openxmlformats.org/drawingml/2006/main">
               <a:ext uri="{FF2B5EF4-FFF2-40B4-BE49-F238E27FC236}">
-                <a16:creationId xmlns:a16="http://schemas.microsoft.com/office/drawing/2014/main" id="{489437F2-8CFB-425D-B992-2382EC737EBB}"/>
+                <a16:creationId xmlns:a16="http://schemas.microsoft.com/office/drawing/2014/main" id="{760B273B-ED1A-419E-A9C9-4AA261351053}"/>
               </a:ext>
             </a:extLst>
           </p:cNvPr>
@@ -6554,7 +6554,7 @@
           <p:cNvPr id="3" name="">
             <a:extLst xmlns:a="http://schemas.openxmlformats.org/drawingml/2006/main">
               <a:ext uri="{FF2B5EF4-FFF2-40B4-BE49-F238E27FC236}">
-                <a16:creationId xmlns:a16="http://schemas.microsoft.com/office/drawing/2014/main" id="{AEF3248E-031A-4C10-9C5F-F053AADB7B4B}"/>
+                <a16:creationId xmlns:a16="http://schemas.microsoft.com/office/drawing/2014/main" id="{14B9B8B6-18BB-42B4-9840-2706E6B32967}"/>
               </a:ext>
             </a:extLst>
           </p:cNvPr>
@@ -6591,7 +6591,7 @@
           <p:cNvPr id="4" name="">
             <a:extLst xmlns:a="http://schemas.openxmlformats.org/drawingml/2006/main">
               <a:ext uri="{FF2B5EF4-FFF2-40B4-BE49-F238E27FC236}">
-                <a16:creationId xmlns:a16="http://schemas.microsoft.com/office/drawing/2014/main" id="{E2E6AA8B-D59E-4116-9629-E3B15756B145}"/>
+                <a16:creationId xmlns:a16="http://schemas.microsoft.com/office/drawing/2014/main" id="{5E75EBB4-48DA-4E87-B7F5-49A38FE3C479}"/>
               </a:ext>
             </a:extLst>
           </p:cNvPr>
@@ -6645,7 +6645,7 @@
                 <a:ea typeface="Aptos"/>
                 <a:cs typeface="Aptos"/>
               </a:rPr>
-              <a:t>TESE</a:t>
+              <a:t>POR QUE AGORA</a:t>
             </a:r>
           </a:p>
         </p:txBody>
@@ -6655,7 +6655,7 @@
           <p:cNvPr id="5" name="">
             <a:extLst xmlns:a="http://schemas.openxmlformats.org/drawingml/2006/main">
               <a:ext uri="{FF2B5EF4-FFF2-40B4-BE49-F238E27FC236}">
-                <a16:creationId xmlns:a16="http://schemas.microsoft.com/office/drawing/2014/main" id="{2CDAB92F-34BF-4A97-9922-CBF33E6F1549}"/>
+                <a16:creationId xmlns:a16="http://schemas.microsoft.com/office/drawing/2014/main" id="{154F7027-BC06-4A85-BDE2-9A01733BF630}"/>
               </a:ext>
             </a:extLst>
           </p:cNvPr>
@@ -6709,7 +6709,7 @@
                 <a:ea typeface="Aptos Display"/>
                 <a:cs typeface="Aptos Display"/>
               </a:rPr>
-              <a:t>Empresas precisam de builders, não apenas consultores</a:t>
+              <a:t>Empresas precisam implementar IA, não comprar mais apresentações</a:t>
             </a:r>
           </a:p>
         </p:txBody>
@@ -6719,7 +6719,7 @@
           <p:cNvPr id="6" name="">
             <a:extLst xmlns:a="http://schemas.openxmlformats.org/drawingml/2006/main">
               <a:ext uri="{FF2B5EF4-FFF2-40B4-BE49-F238E27FC236}">
-                <a16:creationId xmlns:a16="http://schemas.microsoft.com/office/drawing/2014/main" id="{0FD3559F-26E7-4059-A142-1D87FE101FF8}"/>
+                <a16:creationId xmlns:a16="http://schemas.microsoft.com/office/drawing/2014/main" id="{516E6EF1-0A27-426B-8805-D21B4637F6A4}"/>
               </a:ext>
             </a:extLst>
           </p:cNvPr>
@@ -6773,7 +6773,7 @@
                 <a:ea typeface="Aptos"/>
                 <a:cs typeface="Aptos"/>
               </a:rPr>
-              <a:t>A adoção real de IA exige diagnóstico, software, dados, automação e cultura operacional trabalhando como um sistema.</a:t>
+              <a:t>A pressão por adotar IA chegou a empresas que ainda operam com processos manuais, dados dispersos e equipes sem capacidade interna para construir.</a:t>
             </a:r>
           </a:p>
         </p:txBody>
@@ -6783,7 +6783,7 @@
           <p:cNvPr id="7" name="">
             <a:extLst xmlns:a="http://schemas.openxmlformats.org/drawingml/2006/main">
               <a:ext uri="{FF2B5EF4-FFF2-40B4-BE49-F238E27FC236}">
-                <a16:creationId xmlns:a16="http://schemas.microsoft.com/office/drawing/2014/main" id="{A4257BA9-72E4-4677-8A3C-99C0F777F6EE}"/>
+                <a16:creationId xmlns:a16="http://schemas.microsoft.com/office/drawing/2014/main" id="{C59C641E-F33D-45FC-92CE-45DE2824ED14}"/>
               </a:ext>
             </a:extLst>
           </p:cNvPr>
@@ -6818,7 +6818,7 @@
           <p:cNvPr id="8" name="">
             <a:extLst xmlns:a="http://schemas.openxmlformats.org/drawingml/2006/main">
               <a:ext uri="{FF2B5EF4-FFF2-40B4-BE49-F238E27FC236}">
-                <a16:creationId xmlns:a16="http://schemas.microsoft.com/office/drawing/2014/main" id="{26C108A5-F990-4E4D-853A-EAFB632639AA}"/>
+                <a16:creationId xmlns:a16="http://schemas.microsoft.com/office/drawing/2014/main" id="{F4D38D8A-EE26-4F39-90F1-14A54D43BA7B}"/>
               </a:ext>
             </a:extLst>
           </p:cNvPr>
@@ -6882,7 +6882,7 @@
           <p:cNvPr id="9" name="">
             <a:extLst xmlns:a="http://schemas.openxmlformats.org/drawingml/2006/main">
               <a:ext uri="{FF2B5EF4-FFF2-40B4-BE49-F238E27FC236}">
-                <a16:creationId xmlns:a16="http://schemas.microsoft.com/office/drawing/2014/main" id="{ED07DECF-65A3-4C49-910C-C55C349D1FC2}"/>
+                <a16:creationId xmlns:a16="http://schemas.microsoft.com/office/drawing/2014/main" id="{1F035514-EAE5-4C5C-B008-D6F4D14ADC87}"/>
               </a:ext>
             </a:extLst>
           </p:cNvPr>
@@ -6936,7 +6936,7 @@
                 <a:ea typeface="Aptos"/>
                 <a:cs typeface="Aptos"/>
               </a:rPr>
-              <a:t>IA + software como núcleo</a:t>
+              <a:t>Dor operacional clara</a:t>
             </a:r>
           </a:p>
         </p:txBody>
@@ -6946,7 +6946,7 @@
           <p:cNvPr id="10" name="">
             <a:extLst xmlns:a="http://schemas.openxmlformats.org/drawingml/2006/main">
               <a:ext uri="{FF2B5EF4-FFF2-40B4-BE49-F238E27FC236}">
-                <a16:creationId xmlns:a16="http://schemas.microsoft.com/office/drawing/2014/main" id="{8F483360-69B4-4030-91F6-71DB6348941E}"/>
+                <a16:creationId xmlns:a16="http://schemas.microsoft.com/office/drawing/2014/main" id="{3652E2D8-5D1B-41FE-9879-7FB3C9BA132F}"/>
               </a:ext>
             </a:extLst>
           </p:cNvPr>
@@ -6979,7 +6979,7 @@
           <p:cNvPr id="11" name="">
             <a:extLst xmlns:a="http://schemas.openxmlformats.org/drawingml/2006/main">
               <a:ext uri="{FF2B5EF4-FFF2-40B4-BE49-F238E27FC236}">
-                <a16:creationId xmlns:a16="http://schemas.microsoft.com/office/drawing/2014/main" id="{3F8892B1-9276-4B5E-9834-4530057E2A5C}"/>
+                <a16:creationId xmlns:a16="http://schemas.microsoft.com/office/drawing/2014/main" id="{F21720A6-E2A0-4930-8DD7-87B8E8401E13}"/>
               </a:ext>
             </a:extLst>
           </p:cNvPr>
@@ -7014,7 +7014,7 @@
           <p:cNvPr id="12" name="">
             <a:extLst xmlns:a="http://schemas.openxmlformats.org/drawingml/2006/main">
               <a:ext uri="{FF2B5EF4-FFF2-40B4-BE49-F238E27FC236}">
-                <a16:creationId xmlns:a16="http://schemas.microsoft.com/office/drawing/2014/main" id="{78EAEB68-2DD0-4BA9-B7A5-F187BE5EB55B}"/>
+                <a16:creationId xmlns:a16="http://schemas.microsoft.com/office/drawing/2014/main" id="{739D69A7-C6F5-4C2A-84EB-7FE03AA51528}"/>
               </a:ext>
             </a:extLst>
           </p:cNvPr>
@@ -7078,7 +7078,7 @@
           <p:cNvPr id="13" name="">
             <a:extLst xmlns:a="http://schemas.openxmlformats.org/drawingml/2006/main">
               <a:ext uri="{FF2B5EF4-FFF2-40B4-BE49-F238E27FC236}">
-                <a16:creationId xmlns:a16="http://schemas.microsoft.com/office/drawing/2014/main" id="{142EE073-8126-4686-8919-5558E7719BFB}"/>
+                <a16:creationId xmlns:a16="http://schemas.microsoft.com/office/drawing/2014/main" id="{5C83F73E-2CB8-40A8-B9EA-905A42473CD7}"/>
               </a:ext>
             </a:extLst>
           </p:cNvPr>
@@ -7132,7 +7132,7 @@
                 <a:ea typeface="Aptos"/>
                 <a:cs typeface="Aptos"/>
               </a:rPr>
-              <a:t>Experiências interativas de adoção</a:t>
+              <a:t>Demanda crescente por IA</a:t>
             </a:r>
           </a:p>
         </p:txBody>
@@ -7142,7 +7142,7 @@
           <p:cNvPr id="14" name="">
             <a:extLst xmlns:a="http://schemas.openxmlformats.org/drawingml/2006/main">
               <a:ext uri="{FF2B5EF4-FFF2-40B4-BE49-F238E27FC236}">
-                <a16:creationId xmlns:a16="http://schemas.microsoft.com/office/drawing/2014/main" id="{4F45277C-AE79-478F-B4BC-27CE29DFCE4B}"/>
+                <a16:creationId xmlns:a16="http://schemas.microsoft.com/office/drawing/2014/main" id="{44CBAFD5-9F7D-47AC-A4C3-667B6832B991}"/>
               </a:ext>
             </a:extLst>
           </p:cNvPr>
@@ -7175,7 +7175,7 @@
           <p:cNvPr id="15" name="">
             <a:extLst xmlns:a="http://schemas.openxmlformats.org/drawingml/2006/main">
               <a:ext uri="{FF2B5EF4-FFF2-40B4-BE49-F238E27FC236}">
-                <a16:creationId xmlns:a16="http://schemas.microsoft.com/office/drawing/2014/main" id="{8C92B42A-691D-432F-8B91-E8ADD2B02C96}"/>
+                <a16:creationId xmlns:a16="http://schemas.microsoft.com/office/drawing/2014/main" id="{A65DCD8A-FAB5-4B35-B26C-AB8F00DDF400}"/>
               </a:ext>
             </a:extLst>
           </p:cNvPr>
@@ -7210,7 +7210,7 @@
           <p:cNvPr id="16" name="">
             <a:extLst xmlns:a="http://schemas.openxmlformats.org/drawingml/2006/main">
               <a:ext uri="{FF2B5EF4-FFF2-40B4-BE49-F238E27FC236}">
-                <a16:creationId xmlns:a16="http://schemas.microsoft.com/office/drawing/2014/main" id="{6D5C5034-6AAE-4778-B5FA-BAFF8DE436F7}"/>
+                <a16:creationId xmlns:a16="http://schemas.microsoft.com/office/drawing/2014/main" id="{8C9B79FE-661F-458A-8BF8-2DB2F7C8EA3E}"/>
               </a:ext>
             </a:extLst>
           </p:cNvPr>
@@ -7274,7 +7274,7 @@
           <p:cNvPr id="17" name="">
             <a:extLst xmlns:a="http://schemas.openxmlformats.org/drawingml/2006/main">
               <a:ext uri="{FF2B5EF4-FFF2-40B4-BE49-F238E27FC236}">
-                <a16:creationId xmlns:a16="http://schemas.microsoft.com/office/drawing/2014/main" id="{79429E68-65AF-4E75-8E55-903ED5B4C3D8}"/>
+                <a16:creationId xmlns:a16="http://schemas.microsoft.com/office/drawing/2014/main" id="{58B652B7-29E0-4DE4-879A-91FACED0C502}"/>
               </a:ext>
             </a:extLst>
           </p:cNvPr>
@@ -7328,7 +7328,7 @@
                 <a:ea typeface="Aptos"/>
                 <a:cs typeface="Aptos"/>
               </a:rPr>
-              <a:t>Robótica e automação como fronteira</a:t>
+              <a:t>Necessidade de execução técnica</a:t>
             </a:r>
           </a:p>
         </p:txBody>
@@ -7338,7 +7338,7 @@
           <p:cNvPr id="18" name="">
             <a:extLst xmlns:a="http://schemas.openxmlformats.org/drawingml/2006/main">
               <a:ext uri="{FF2B5EF4-FFF2-40B4-BE49-F238E27FC236}">
-                <a16:creationId xmlns:a16="http://schemas.microsoft.com/office/drawing/2014/main" id="{4D2A5B0C-624D-4707-AB46-018C215B0BD4}"/>
+                <a16:creationId xmlns:a16="http://schemas.microsoft.com/office/drawing/2014/main" id="{8840AC41-B21D-4D01-A707-259BF6F89F64}"/>
               </a:ext>
             </a:extLst>
           </p:cNvPr>
@@ -7402,7 +7402,7 @@
           <p:cNvPr id="19" name="">
             <a:extLst xmlns:a="http://schemas.openxmlformats.org/drawingml/2006/main">
               <a:ext uri="{FF2B5EF4-FFF2-40B4-BE49-F238E27FC236}">
-                <a16:creationId xmlns:a16="http://schemas.microsoft.com/office/drawing/2014/main" id="{18AC9A7A-F701-42FF-8958-C376E8992937}"/>
+                <a16:creationId xmlns:a16="http://schemas.microsoft.com/office/drawing/2014/main" id="{1B2BB3F1-6BFC-4795-9F86-4ABC348D9316}"/>
               </a:ext>
             </a:extLst>
           </p:cNvPr>
@@ -7435,7 +7435,7 @@
           <p:cNvPr id="20" name="">
             <a:extLst xmlns:a="http://schemas.openxmlformats.org/drawingml/2006/main">
               <a:ext uri="{FF2B5EF4-FFF2-40B4-BE49-F238E27FC236}">
-                <a16:creationId xmlns:a16="http://schemas.microsoft.com/office/drawing/2014/main" id="{AD79466E-FE47-418C-9765-AFE9B2CFDA20}"/>
+                <a16:creationId xmlns:a16="http://schemas.microsoft.com/office/drawing/2014/main" id="{46B598A5-D80A-42D9-A21C-9B604A3EB8E7}"/>
               </a:ext>
             </a:extLst>
           </p:cNvPr>
@@ -7499,7 +7499,7 @@
           <p:cNvPr id="21" name="">
             <a:extLst xmlns:a="http://schemas.openxmlformats.org/drawingml/2006/main">
               <a:ext uri="{FF2B5EF4-FFF2-40B4-BE49-F238E27FC236}">
-                <a16:creationId xmlns:a16="http://schemas.microsoft.com/office/drawing/2014/main" id="{F1D418CF-54B5-4421-AAD0-6E08BE1E7E2B}"/>
+                <a16:creationId xmlns:a16="http://schemas.microsoft.com/office/drawing/2014/main" id="{D6255842-A39C-4900-85AA-AEE5775601FE}"/>
               </a:ext>
             </a:extLst>
           </p:cNvPr>
@@ -7561,7 +7561,7 @@
     </p:spTree>
     <p:extLst>
       <p:ext uri="{BB962C8B-B14F-4D97-AF65-F5344CB8AC3E}">
-        <p14:creationId xmlns:p14="http://schemas.microsoft.com/office/powerpoint/2010/main" val="1051078566"/>
+        <p14:creationId xmlns:p14="http://schemas.microsoft.com/office/powerpoint/2010/main" val="557828485"/>
       </p:ext>
     </p:extLst>
   </p:cSld>
@@ -7589,7 +7589,7 @@
           <p:nvPr/>
         </p:nvPicPr>
         <p:blipFill>
-          <a:blip xmlns:r="http://schemas.openxmlformats.org/officeDocument/2006/relationships" xmlns:a="http://schemas.openxmlformats.org/drawingml/2006/main" r:embed="R8d269997407f424d"/>
+          <a:blip xmlns:r="http://schemas.openxmlformats.org/officeDocument/2006/relationships" xmlns:a="http://schemas.openxmlformats.org/drawingml/2006/main" r:embed="R789bf16f38ce43cf"/>
           <a:srcRect xmlns:a="http://schemas.openxmlformats.org/drawingml/2006/main" l="0" t="27" r="0" b="27"/>
           <a:stretch xmlns:a="http://schemas.openxmlformats.org/drawingml/2006/main">
             <a:fillRect l="0" t="0" r="0" b="0"/>
@@ -7610,7 +7610,7 @@
           <p:cNvPr id="2" name="">
             <a:extLst xmlns:a="http://schemas.openxmlformats.org/drawingml/2006/main">
               <a:ext uri="{FF2B5EF4-FFF2-40B4-BE49-F238E27FC236}">
-                <a16:creationId xmlns:a16="http://schemas.microsoft.com/office/drawing/2014/main" id="{58DAB6EC-A8B2-46DB-B08D-AC644AFF24F6}"/>
+                <a16:creationId xmlns:a16="http://schemas.microsoft.com/office/drawing/2014/main" id="{EB06E840-4FD8-4D62-9C65-C1C6AA496CE4}"/>
               </a:ext>
             </a:extLst>
           </p:cNvPr>
@@ -7647,7 +7647,7 @@
           <p:cNvPr id="3" name="">
             <a:extLst xmlns:a="http://schemas.openxmlformats.org/drawingml/2006/main">
               <a:ext uri="{FF2B5EF4-FFF2-40B4-BE49-F238E27FC236}">
-                <a16:creationId xmlns:a16="http://schemas.microsoft.com/office/drawing/2014/main" id="{901DA4B8-6307-4435-B432-57859103DB5E}"/>
+                <a16:creationId xmlns:a16="http://schemas.microsoft.com/office/drawing/2014/main" id="{4A29E1AE-5ABD-454C-A40C-8346C811597F}"/>
               </a:ext>
             </a:extLst>
           </p:cNvPr>
@@ -7684,7 +7684,7 @@
           <p:cNvPr id="4" name="">
             <a:extLst xmlns:a="http://schemas.openxmlformats.org/drawingml/2006/main">
               <a:ext uri="{FF2B5EF4-FFF2-40B4-BE49-F238E27FC236}">
-                <a16:creationId xmlns:a16="http://schemas.microsoft.com/office/drawing/2014/main" id="{55C88AF1-2464-4814-9CE8-34CCCE1F7FEE}"/>
+                <a16:creationId xmlns:a16="http://schemas.microsoft.com/office/drawing/2014/main" id="{82593ED1-95C9-42AC-9D34-5A8B1897608B}"/>
               </a:ext>
             </a:extLst>
           </p:cNvPr>
@@ -7748,7 +7748,7 @@
           <p:cNvPr id="5" name="">
             <a:extLst xmlns:a="http://schemas.openxmlformats.org/drawingml/2006/main">
               <a:ext uri="{FF2B5EF4-FFF2-40B4-BE49-F238E27FC236}">
-                <a16:creationId xmlns:a16="http://schemas.microsoft.com/office/drawing/2014/main" id="{DECA2A55-41C8-4EA8-ADDB-4758B97CEC08}"/>
+                <a16:creationId xmlns:a16="http://schemas.microsoft.com/office/drawing/2014/main" id="{F0E23339-BE37-4856-BDAD-442E4CFE03B0}"/>
               </a:ext>
             </a:extLst>
           </p:cNvPr>
@@ -7812,7 +7812,7 @@
           <p:cNvPr id="6" name="">
             <a:extLst xmlns:a="http://schemas.openxmlformats.org/drawingml/2006/main">
               <a:ext uri="{FF2B5EF4-FFF2-40B4-BE49-F238E27FC236}">
-                <a16:creationId xmlns:a16="http://schemas.microsoft.com/office/drawing/2014/main" id="{DC59D78B-332E-4BCE-9E0B-83D55ECB902A}"/>
+                <a16:creationId xmlns:a16="http://schemas.microsoft.com/office/drawing/2014/main" id="{A66B122E-A22A-4FDF-9C6D-84A86D39305D}"/>
               </a:ext>
             </a:extLst>
           </p:cNvPr>
@@ -7876,7 +7876,7 @@
           <p:cNvPr id="7" name="">
             <a:extLst xmlns:a="http://schemas.openxmlformats.org/drawingml/2006/main">
               <a:ext uri="{FF2B5EF4-FFF2-40B4-BE49-F238E27FC236}">
-                <a16:creationId xmlns:a16="http://schemas.microsoft.com/office/drawing/2014/main" id="{4575B659-4A67-4A9A-A066-DCE1EE01072D}"/>
+                <a16:creationId xmlns:a16="http://schemas.microsoft.com/office/drawing/2014/main" id="{B982EB57-5622-4F05-831B-1457D92BE72B}"/>
               </a:ext>
             </a:extLst>
           </p:cNvPr>
@@ -7911,7 +7911,7 @@
           <p:cNvPr id="8" name="">
             <a:extLst xmlns:a="http://schemas.openxmlformats.org/drawingml/2006/main">
               <a:ext uri="{FF2B5EF4-FFF2-40B4-BE49-F238E27FC236}">
-                <a16:creationId xmlns:a16="http://schemas.microsoft.com/office/drawing/2014/main" id="{82F203B7-D75E-4BD5-9C04-F5FEB4EFC1C0}"/>
+                <a16:creationId xmlns:a16="http://schemas.microsoft.com/office/drawing/2014/main" id="{25738EBB-6ADF-4DB4-9F57-DF7B8C0269BA}"/>
               </a:ext>
             </a:extLst>
           </p:cNvPr>
@@ -7975,7 +7975,7 @@
           <p:cNvPr id="9" name="">
             <a:extLst xmlns:a="http://schemas.openxmlformats.org/drawingml/2006/main">
               <a:ext uri="{FF2B5EF4-FFF2-40B4-BE49-F238E27FC236}">
-                <a16:creationId xmlns:a16="http://schemas.microsoft.com/office/drawing/2014/main" id="{DD6D5FD3-B3AA-403F-B902-FDC2B20DC760}"/>
+                <a16:creationId xmlns:a16="http://schemas.microsoft.com/office/drawing/2014/main" id="{AF1160D4-43A5-48FE-BB1D-426E24A37DC4}"/>
               </a:ext>
             </a:extLst>
           </p:cNvPr>
@@ -8039,7 +8039,7 @@
           <p:cNvPr id="10" name="">
             <a:extLst xmlns:a="http://schemas.openxmlformats.org/drawingml/2006/main">
               <a:ext uri="{FF2B5EF4-FFF2-40B4-BE49-F238E27FC236}">
-                <a16:creationId xmlns:a16="http://schemas.microsoft.com/office/drawing/2014/main" id="{D071AFE6-4C43-4024-8525-2A7C33075BD2}"/>
+                <a16:creationId xmlns:a16="http://schemas.microsoft.com/office/drawing/2014/main" id="{4B81077F-19E0-4F3D-87E3-0253DA4BBA09}"/>
               </a:ext>
             </a:extLst>
           </p:cNvPr>
@@ -8074,7 +8074,7 @@
           <p:cNvPr id="11" name="">
             <a:extLst xmlns:a="http://schemas.openxmlformats.org/drawingml/2006/main">
               <a:ext uri="{FF2B5EF4-FFF2-40B4-BE49-F238E27FC236}">
-                <a16:creationId xmlns:a16="http://schemas.microsoft.com/office/drawing/2014/main" id="{FEC56983-C73B-4AA1-873E-6985E13514CF}"/>
+                <a16:creationId xmlns:a16="http://schemas.microsoft.com/office/drawing/2014/main" id="{74AE98E2-D05A-48A6-BE93-9642F8C8DC0F}"/>
               </a:ext>
             </a:extLst>
           </p:cNvPr>
@@ -8138,7 +8138,7 @@
           <p:cNvPr id="12" name="">
             <a:extLst xmlns:a="http://schemas.openxmlformats.org/drawingml/2006/main">
               <a:ext uri="{FF2B5EF4-FFF2-40B4-BE49-F238E27FC236}">
-                <a16:creationId xmlns:a16="http://schemas.microsoft.com/office/drawing/2014/main" id="{B34C4CF0-D630-496F-9723-A279DBDB6B23}"/>
+                <a16:creationId xmlns:a16="http://schemas.microsoft.com/office/drawing/2014/main" id="{D2670993-0195-462B-8965-604E4163C479}"/>
               </a:ext>
             </a:extLst>
           </p:cNvPr>
@@ -8202,7 +8202,7 @@
           <p:cNvPr id="13" name="">
             <a:extLst xmlns:a="http://schemas.openxmlformats.org/drawingml/2006/main">
               <a:ext uri="{FF2B5EF4-FFF2-40B4-BE49-F238E27FC236}">
-                <a16:creationId xmlns:a16="http://schemas.microsoft.com/office/drawing/2014/main" id="{B43343E8-7230-482D-9CA7-1E75DC519848}"/>
+                <a16:creationId xmlns:a16="http://schemas.microsoft.com/office/drawing/2014/main" id="{0259A624-D3A1-4A53-B2B9-91699D3A58C7}"/>
               </a:ext>
             </a:extLst>
           </p:cNvPr>
@@ -8237,7 +8237,7 @@
           <p:cNvPr id="14" name="">
             <a:extLst xmlns:a="http://schemas.openxmlformats.org/drawingml/2006/main">
               <a:ext uri="{FF2B5EF4-FFF2-40B4-BE49-F238E27FC236}">
-                <a16:creationId xmlns:a16="http://schemas.microsoft.com/office/drawing/2014/main" id="{6B0260F2-8EBD-4274-A856-69DE64ECB49E}"/>
+                <a16:creationId xmlns:a16="http://schemas.microsoft.com/office/drawing/2014/main" id="{00F6482A-9362-4094-9B60-E474D9420761}"/>
               </a:ext>
             </a:extLst>
           </p:cNvPr>
@@ -8301,7 +8301,7 @@
           <p:cNvPr id="15" name="">
             <a:extLst xmlns:a="http://schemas.openxmlformats.org/drawingml/2006/main">
               <a:ext uri="{FF2B5EF4-FFF2-40B4-BE49-F238E27FC236}">
-                <a16:creationId xmlns:a16="http://schemas.microsoft.com/office/drawing/2014/main" id="{9DF274F1-4071-4621-B5F9-47816F9DAC18}"/>
+                <a16:creationId xmlns:a16="http://schemas.microsoft.com/office/drawing/2014/main" id="{9B2620C2-8394-4C7A-A754-93CD5F1326CD}"/>
               </a:ext>
             </a:extLst>
           </p:cNvPr>
@@ -8365,7 +8365,7 @@
           <p:cNvPr id="16" name="">
             <a:extLst xmlns:a="http://schemas.openxmlformats.org/drawingml/2006/main">
               <a:ext uri="{FF2B5EF4-FFF2-40B4-BE49-F238E27FC236}">
-                <a16:creationId xmlns:a16="http://schemas.microsoft.com/office/drawing/2014/main" id="{4F98CC6E-15F9-4F87-B619-21A14A15479F}"/>
+                <a16:creationId xmlns:a16="http://schemas.microsoft.com/office/drawing/2014/main" id="{3DADDE7E-6275-45DD-A76D-1F9ABFF155C9}"/>
               </a:ext>
             </a:extLst>
           </p:cNvPr>
@@ -8400,7 +8400,7 @@
           <p:cNvPr id="17" name="">
             <a:extLst xmlns:a="http://schemas.openxmlformats.org/drawingml/2006/main">
               <a:ext uri="{FF2B5EF4-FFF2-40B4-BE49-F238E27FC236}">
-                <a16:creationId xmlns:a16="http://schemas.microsoft.com/office/drawing/2014/main" id="{B1188936-224A-41CA-A854-C894BEF50EB0}"/>
+                <a16:creationId xmlns:a16="http://schemas.microsoft.com/office/drawing/2014/main" id="{65FDF0A4-9FFC-42CF-9B3A-5A79964FA0EF}"/>
               </a:ext>
             </a:extLst>
           </p:cNvPr>
@@ -8464,7 +8464,7 @@
           <p:cNvPr id="18" name="">
             <a:extLst xmlns:a="http://schemas.openxmlformats.org/drawingml/2006/main">
               <a:ext uri="{FF2B5EF4-FFF2-40B4-BE49-F238E27FC236}">
-                <a16:creationId xmlns:a16="http://schemas.microsoft.com/office/drawing/2014/main" id="{EF642F58-A8DD-476F-9D8F-F632456CA04F}"/>
+                <a16:creationId xmlns:a16="http://schemas.microsoft.com/office/drawing/2014/main" id="{59120869-C689-4C4D-A5C7-0DC0697C4AAB}"/>
               </a:ext>
             </a:extLst>
           </p:cNvPr>
@@ -8528,7 +8528,7 @@
           <p:cNvPr id="19" name="">
             <a:extLst xmlns:a="http://schemas.openxmlformats.org/drawingml/2006/main">
               <a:ext uri="{FF2B5EF4-FFF2-40B4-BE49-F238E27FC236}">
-                <a16:creationId xmlns:a16="http://schemas.microsoft.com/office/drawing/2014/main" id="{5B6FB6BF-B797-4479-8779-2950DEB90889}"/>
+                <a16:creationId xmlns:a16="http://schemas.microsoft.com/office/drawing/2014/main" id="{A6A79283-026B-4420-B488-C27938A1F4E5}"/>
               </a:ext>
             </a:extLst>
           </p:cNvPr>
@@ -8592,7 +8592,7 @@
           <p:cNvPr id="20" name="">
             <a:extLst xmlns:a="http://schemas.openxmlformats.org/drawingml/2006/main">
               <a:ext uri="{FF2B5EF4-FFF2-40B4-BE49-F238E27FC236}">
-                <a16:creationId xmlns:a16="http://schemas.microsoft.com/office/drawing/2014/main" id="{3BDF6DBD-13B0-4B94-BFA0-284D59F7369D}"/>
+                <a16:creationId xmlns:a16="http://schemas.microsoft.com/office/drawing/2014/main" id="{634C1611-E87E-45DA-926C-2D6E0EF18112}"/>
               </a:ext>
             </a:extLst>
           </p:cNvPr>
@@ -8625,7 +8625,7 @@
           <p:cNvPr id="21" name="">
             <a:extLst xmlns:a="http://schemas.openxmlformats.org/drawingml/2006/main">
               <a:ext uri="{FF2B5EF4-FFF2-40B4-BE49-F238E27FC236}">
-                <a16:creationId xmlns:a16="http://schemas.microsoft.com/office/drawing/2014/main" id="{AE5B6015-48F4-4384-BA4E-4FFF567CE25B}"/>
+                <a16:creationId xmlns:a16="http://schemas.microsoft.com/office/drawing/2014/main" id="{9B0FB49B-C35F-4540-9F8B-36FFCB7E62B2}"/>
               </a:ext>
             </a:extLst>
           </p:cNvPr>
@@ -8658,7 +8658,7 @@
           <p:cNvPr id="22" name="">
             <a:extLst xmlns:a="http://schemas.openxmlformats.org/drawingml/2006/main">
               <a:ext uri="{FF2B5EF4-FFF2-40B4-BE49-F238E27FC236}">
-                <a16:creationId xmlns:a16="http://schemas.microsoft.com/office/drawing/2014/main" id="{26B829C5-B75F-4C25-930F-B0386D8650E6}"/>
+                <a16:creationId xmlns:a16="http://schemas.microsoft.com/office/drawing/2014/main" id="{5E5883BC-8DF2-4A44-9F30-A13066CBB1B2}"/>
               </a:ext>
             </a:extLst>
           </p:cNvPr>
@@ -8722,7 +8722,7 @@
           <p:cNvPr id="23" name="">
             <a:extLst xmlns:a="http://schemas.openxmlformats.org/drawingml/2006/main">
               <a:ext uri="{FF2B5EF4-FFF2-40B4-BE49-F238E27FC236}">
-                <a16:creationId xmlns:a16="http://schemas.microsoft.com/office/drawing/2014/main" id="{927051AD-5EEC-4904-9FAF-BE56F495A121}"/>
+                <a16:creationId xmlns:a16="http://schemas.microsoft.com/office/drawing/2014/main" id="{AF90E14E-5818-42A5-8303-3C7FB9C0E979}"/>
               </a:ext>
             </a:extLst>
           </p:cNvPr>
@@ -8755,7 +8755,7 @@
           <p:cNvPr id="24" name="">
             <a:extLst xmlns:a="http://schemas.openxmlformats.org/drawingml/2006/main">
               <a:ext uri="{FF2B5EF4-FFF2-40B4-BE49-F238E27FC236}">
-                <a16:creationId xmlns:a16="http://schemas.microsoft.com/office/drawing/2014/main" id="{32FE4D4A-3A26-4EFA-8E6E-D93EB6BD4A9F}"/>
+                <a16:creationId xmlns:a16="http://schemas.microsoft.com/office/drawing/2014/main" id="{4B18BD54-02C1-4896-933F-CDEDB98CD47F}"/>
               </a:ext>
             </a:extLst>
           </p:cNvPr>
@@ -8788,7 +8788,7 @@
           <p:cNvPr id="25" name="">
             <a:extLst xmlns:a="http://schemas.openxmlformats.org/drawingml/2006/main">
               <a:ext uri="{FF2B5EF4-FFF2-40B4-BE49-F238E27FC236}">
-                <a16:creationId xmlns:a16="http://schemas.microsoft.com/office/drawing/2014/main" id="{7F459438-F7F0-419E-91F7-D7E2F4FED36E}"/>
+                <a16:creationId xmlns:a16="http://schemas.microsoft.com/office/drawing/2014/main" id="{07ED9C38-7860-49B3-B2D6-4AED8DFD905B}"/>
               </a:ext>
             </a:extLst>
           </p:cNvPr>
@@ -8852,7 +8852,7 @@
           <p:cNvPr id="26" name="">
             <a:extLst xmlns:a="http://schemas.openxmlformats.org/drawingml/2006/main">
               <a:ext uri="{FF2B5EF4-FFF2-40B4-BE49-F238E27FC236}">
-                <a16:creationId xmlns:a16="http://schemas.microsoft.com/office/drawing/2014/main" id="{08B15516-23B4-4C19-9287-B60788DE7666}"/>
+                <a16:creationId xmlns:a16="http://schemas.microsoft.com/office/drawing/2014/main" id="{9DFC53B5-4B8F-4DE9-A43F-2077BED825FE}"/>
               </a:ext>
             </a:extLst>
           </p:cNvPr>
@@ -8885,7 +8885,7 @@
           <p:cNvPr id="27" name="">
             <a:extLst xmlns:a="http://schemas.openxmlformats.org/drawingml/2006/main">
               <a:ext uri="{FF2B5EF4-FFF2-40B4-BE49-F238E27FC236}">
-                <a16:creationId xmlns:a16="http://schemas.microsoft.com/office/drawing/2014/main" id="{3E9DC264-BC91-478A-AEBD-5AECA43179C3}"/>
+                <a16:creationId xmlns:a16="http://schemas.microsoft.com/office/drawing/2014/main" id="{A31D76A8-9B6A-435D-B732-0982A98104D0}"/>
               </a:ext>
             </a:extLst>
           </p:cNvPr>
@@ -8918,7 +8918,7 @@
           <p:cNvPr id="28" name="">
             <a:extLst xmlns:a="http://schemas.openxmlformats.org/drawingml/2006/main">
               <a:ext uri="{FF2B5EF4-FFF2-40B4-BE49-F238E27FC236}">
-                <a16:creationId xmlns:a16="http://schemas.microsoft.com/office/drawing/2014/main" id="{933E257D-FB22-4AB9-B695-CE6DC81DFC13}"/>
+                <a16:creationId xmlns:a16="http://schemas.microsoft.com/office/drawing/2014/main" id="{ADC1B49E-E05B-4D80-BB93-B87B917E8AA7}"/>
               </a:ext>
             </a:extLst>
           </p:cNvPr>
@@ -8982,7 +8982,7 @@
           <p:cNvPr id="29" name="">
             <a:extLst xmlns:a="http://schemas.openxmlformats.org/drawingml/2006/main">
               <a:ext uri="{FF2B5EF4-FFF2-40B4-BE49-F238E27FC236}">
-                <a16:creationId xmlns:a16="http://schemas.microsoft.com/office/drawing/2014/main" id="{8B6D2CC8-A0B9-4593-A4D3-576C2CC39030}"/>
+                <a16:creationId xmlns:a16="http://schemas.microsoft.com/office/drawing/2014/main" id="{4D82BC06-4740-40DC-8973-37EFA56065F9}"/>
               </a:ext>
             </a:extLst>
           </p:cNvPr>
@@ -9015,7 +9015,7 @@
           <p:cNvPr id="30" name="">
             <a:extLst xmlns:a="http://schemas.openxmlformats.org/drawingml/2006/main">
               <a:ext uri="{FF2B5EF4-FFF2-40B4-BE49-F238E27FC236}">
-                <a16:creationId xmlns:a16="http://schemas.microsoft.com/office/drawing/2014/main" id="{08A76805-203F-4611-A8AC-54934DF25EFF}"/>
+                <a16:creationId xmlns:a16="http://schemas.microsoft.com/office/drawing/2014/main" id="{74DDD714-16A0-4D3A-B182-E338E4F3728A}"/>
               </a:ext>
             </a:extLst>
           </p:cNvPr>
@@ -9079,7 +9079,7 @@
           <p:cNvPr id="31" name="">
             <a:extLst xmlns:a="http://schemas.openxmlformats.org/drawingml/2006/main">
               <a:ext uri="{FF2B5EF4-FFF2-40B4-BE49-F238E27FC236}">
-                <a16:creationId xmlns:a16="http://schemas.microsoft.com/office/drawing/2014/main" id="{F64BC68A-667E-499D-B198-EE3216062269}"/>
+                <a16:creationId xmlns:a16="http://schemas.microsoft.com/office/drawing/2014/main" id="{80277A85-6EBC-402B-9FCA-D3EF8EB90601}"/>
               </a:ext>
             </a:extLst>
           </p:cNvPr>
@@ -9141,7 +9141,7 @@
     </p:spTree>
     <p:extLst>
       <p:ext uri="{BB962C8B-B14F-4D97-AF65-F5344CB8AC3E}">
-        <p14:creationId xmlns:p14="http://schemas.microsoft.com/office/powerpoint/2010/main" val="1247668284"/>
+        <p14:creationId xmlns:p14="http://schemas.microsoft.com/office/powerpoint/2010/main" val="1998386219"/>
       </p:ext>
     </p:extLst>
   </p:cSld>
@@ -9169,7 +9169,7 @@
           <p:nvPr/>
         </p:nvPicPr>
         <p:blipFill>
-          <a:blip xmlns:r="http://schemas.openxmlformats.org/officeDocument/2006/relationships" xmlns:a="http://schemas.openxmlformats.org/drawingml/2006/main" r:embed="R79e6838397a44327"/>
+          <a:blip xmlns:r="http://schemas.openxmlformats.org/officeDocument/2006/relationships" xmlns:a="http://schemas.openxmlformats.org/drawingml/2006/main" r:embed="R502f72f47aac45ed"/>
           <a:srcRect xmlns:a="http://schemas.openxmlformats.org/drawingml/2006/main" l="0" t="7813" r="0" b="7813"/>
           <a:stretch xmlns:a="http://schemas.openxmlformats.org/drawingml/2006/main">
             <a:fillRect l="0" t="0" r="0" b="0"/>
@@ -9190,7 +9190,7 @@
           <p:cNvPr id="2" name="">
             <a:extLst xmlns:a="http://schemas.openxmlformats.org/drawingml/2006/main">
               <a:ext uri="{FF2B5EF4-FFF2-40B4-BE49-F238E27FC236}">
-                <a16:creationId xmlns:a16="http://schemas.microsoft.com/office/drawing/2014/main" id="{98E63564-E449-4831-81AA-7E4CAC8A2D9D}"/>
+                <a16:creationId xmlns:a16="http://schemas.microsoft.com/office/drawing/2014/main" id="{D7D761D5-96B0-40F7-9F54-E0C463310E87}"/>
               </a:ext>
             </a:extLst>
           </p:cNvPr>
@@ -9227,7 +9227,7 @@
           <p:cNvPr id="3" name="">
             <a:extLst xmlns:a="http://schemas.openxmlformats.org/drawingml/2006/main">
               <a:ext uri="{FF2B5EF4-FFF2-40B4-BE49-F238E27FC236}">
-                <a16:creationId xmlns:a16="http://schemas.microsoft.com/office/drawing/2014/main" id="{FEC06D42-77C5-422D-823C-E6A8F1CCBB5D}"/>
+                <a16:creationId xmlns:a16="http://schemas.microsoft.com/office/drawing/2014/main" id="{CE9D656D-55B4-4761-8B4F-2C00EBDE5D3A}"/>
               </a:ext>
             </a:extLst>
           </p:cNvPr>
@@ -9264,7 +9264,7 @@
           <p:cNvPr id="4" name="">
             <a:extLst xmlns:a="http://schemas.openxmlformats.org/drawingml/2006/main">
               <a:ext uri="{FF2B5EF4-FFF2-40B4-BE49-F238E27FC236}">
-                <a16:creationId xmlns:a16="http://schemas.microsoft.com/office/drawing/2014/main" id="{A5F9FCE2-9EA7-40E5-9654-6B79A4FD8DA9}"/>
+                <a16:creationId xmlns:a16="http://schemas.microsoft.com/office/drawing/2014/main" id="{38DF02A0-7FFB-42DA-863F-28166BBAE0FF}"/>
               </a:ext>
             </a:extLst>
           </p:cNvPr>
@@ -9328,7 +9328,7 @@
           <p:cNvPr id="5" name="">
             <a:extLst xmlns:a="http://schemas.openxmlformats.org/drawingml/2006/main">
               <a:ext uri="{FF2B5EF4-FFF2-40B4-BE49-F238E27FC236}">
-                <a16:creationId xmlns:a16="http://schemas.microsoft.com/office/drawing/2014/main" id="{D822ADA8-6D21-417B-B270-B1DDFEEDBF47}"/>
+                <a16:creationId xmlns:a16="http://schemas.microsoft.com/office/drawing/2014/main" id="{6B386778-1CD4-4B63-A6E7-3F489EC705F8}"/>
               </a:ext>
             </a:extLst>
           </p:cNvPr>
@@ -9392,7 +9392,7 @@
           <p:cNvPr id="6" name="">
             <a:extLst xmlns:a="http://schemas.openxmlformats.org/drawingml/2006/main">
               <a:ext uri="{FF2B5EF4-FFF2-40B4-BE49-F238E27FC236}">
-                <a16:creationId xmlns:a16="http://schemas.microsoft.com/office/drawing/2014/main" id="{161ADCB0-15A9-45D8-B9FC-6D236AE6A65D}"/>
+                <a16:creationId xmlns:a16="http://schemas.microsoft.com/office/drawing/2014/main" id="{D74D18A9-0FC5-4391-A2E6-E21EE2AC6EDE}"/>
               </a:ext>
             </a:extLst>
           </p:cNvPr>
@@ -9456,7 +9456,7 @@
           <p:cNvPr id="7" name="">
             <a:extLst xmlns:a="http://schemas.openxmlformats.org/drawingml/2006/main">
               <a:ext uri="{FF2B5EF4-FFF2-40B4-BE49-F238E27FC236}">
-                <a16:creationId xmlns:a16="http://schemas.microsoft.com/office/drawing/2014/main" id="{EA73184B-A720-47B5-9513-FD5E3671EBA8}"/>
+                <a16:creationId xmlns:a16="http://schemas.microsoft.com/office/drawing/2014/main" id="{89DB364F-63A1-445B-B06B-10940521B1A6}"/>
               </a:ext>
             </a:extLst>
           </p:cNvPr>
@@ -9491,7 +9491,7 @@
           <p:cNvPr id="8" name="">
             <a:extLst xmlns:a="http://schemas.openxmlformats.org/drawingml/2006/main">
               <a:ext uri="{FF2B5EF4-FFF2-40B4-BE49-F238E27FC236}">
-                <a16:creationId xmlns:a16="http://schemas.microsoft.com/office/drawing/2014/main" id="{E1431BDE-7ECB-4B50-B9E9-830B185668A1}"/>
+                <a16:creationId xmlns:a16="http://schemas.microsoft.com/office/drawing/2014/main" id="{58714E44-AF60-42CA-8C94-2A03CD600507}"/>
               </a:ext>
             </a:extLst>
           </p:cNvPr>
@@ -9555,7 +9555,7 @@
           <p:cNvPr id="9" name="">
             <a:extLst xmlns:a="http://schemas.openxmlformats.org/drawingml/2006/main">
               <a:ext uri="{FF2B5EF4-FFF2-40B4-BE49-F238E27FC236}">
-                <a16:creationId xmlns:a16="http://schemas.microsoft.com/office/drawing/2014/main" id="{D1DD7BCE-B6EA-4AB7-95C2-A8A0B5C44360}"/>
+                <a16:creationId xmlns:a16="http://schemas.microsoft.com/office/drawing/2014/main" id="{9451E9DC-14D4-4C10-AFC8-C740E82236A2}"/>
               </a:ext>
             </a:extLst>
           </p:cNvPr>
@@ -9619,7 +9619,7 @@
           <p:cNvPr id="10" name="">
             <a:extLst xmlns:a="http://schemas.openxmlformats.org/drawingml/2006/main">
               <a:ext uri="{FF2B5EF4-FFF2-40B4-BE49-F238E27FC236}">
-                <a16:creationId xmlns:a16="http://schemas.microsoft.com/office/drawing/2014/main" id="{C7652351-E65E-4FCA-9A20-163EE9B47122}"/>
+                <a16:creationId xmlns:a16="http://schemas.microsoft.com/office/drawing/2014/main" id="{E1474C25-9761-4C68-8F89-51B08406C719}"/>
               </a:ext>
             </a:extLst>
           </p:cNvPr>
@@ -9652,7 +9652,7 @@
           <p:cNvPr id="11" name="">
             <a:extLst xmlns:a="http://schemas.openxmlformats.org/drawingml/2006/main">
               <a:ext uri="{FF2B5EF4-FFF2-40B4-BE49-F238E27FC236}">
-                <a16:creationId xmlns:a16="http://schemas.microsoft.com/office/drawing/2014/main" id="{E92F4F79-BD4D-42BA-A6CB-2C6F5A128097}"/>
+                <a16:creationId xmlns:a16="http://schemas.microsoft.com/office/drawing/2014/main" id="{E55911F8-C6ED-4C3E-8828-F2ACDE82B52F}"/>
               </a:ext>
             </a:extLst>
           </p:cNvPr>
@@ -9687,7 +9687,7 @@
           <p:cNvPr id="12" name="">
             <a:extLst xmlns:a="http://schemas.openxmlformats.org/drawingml/2006/main">
               <a:ext uri="{FF2B5EF4-FFF2-40B4-BE49-F238E27FC236}">
-                <a16:creationId xmlns:a16="http://schemas.microsoft.com/office/drawing/2014/main" id="{2131DFC7-E1D9-4CEF-83FA-F8B4184116DD}"/>
+                <a16:creationId xmlns:a16="http://schemas.microsoft.com/office/drawing/2014/main" id="{5A978A52-F066-4A61-AA3F-4F094C8A08D4}"/>
               </a:ext>
             </a:extLst>
           </p:cNvPr>
@@ -9751,7 +9751,7 @@
           <p:cNvPr id="13" name="">
             <a:extLst xmlns:a="http://schemas.openxmlformats.org/drawingml/2006/main">
               <a:ext uri="{FF2B5EF4-FFF2-40B4-BE49-F238E27FC236}">
-                <a16:creationId xmlns:a16="http://schemas.microsoft.com/office/drawing/2014/main" id="{B2D0922B-CCC7-4D9A-9265-93A4F00BC6FC}"/>
+                <a16:creationId xmlns:a16="http://schemas.microsoft.com/office/drawing/2014/main" id="{F74074C3-569B-4418-AEFE-581482DD8869}"/>
               </a:ext>
             </a:extLst>
           </p:cNvPr>
@@ -9815,7 +9815,7 @@
           <p:cNvPr id="14" name="">
             <a:extLst xmlns:a="http://schemas.openxmlformats.org/drawingml/2006/main">
               <a:ext uri="{FF2B5EF4-FFF2-40B4-BE49-F238E27FC236}">
-                <a16:creationId xmlns:a16="http://schemas.microsoft.com/office/drawing/2014/main" id="{ECCEBF7B-972A-420B-AD51-2F6C38B2C965}"/>
+                <a16:creationId xmlns:a16="http://schemas.microsoft.com/office/drawing/2014/main" id="{5C796862-CB2E-4D67-AEBC-4DE1BF2BFB4E}"/>
               </a:ext>
             </a:extLst>
           </p:cNvPr>
@@ -9848,7 +9848,7 @@
           <p:cNvPr id="15" name="">
             <a:extLst xmlns:a="http://schemas.openxmlformats.org/drawingml/2006/main">
               <a:ext uri="{FF2B5EF4-FFF2-40B4-BE49-F238E27FC236}">
-                <a16:creationId xmlns:a16="http://schemas.microsoft.com/office/drawing/2014/main" id="{6F204044-8E15-4358-ACF9-2E1D327E82EC}"/>
+                <a16:creationId xmlns:a16="http://schemas.microsoft.com/office/drawing/2014/main" id="{B55786EB-5359-40C7-BEC4-56E3A10FD63E}"/>
               </a:ext>
             </a:extLst>
           </p:cNvPr>
@@ -9883,7 +9883,7 @@
           <p:cNvPr id="16" name="">
             <a:extLst xmlns:a="http://schemas.openxmlformats.org/drawingml/2006/main">
               <a:ext uri="{FF2B5EF4-FFF2-40B4-BE49-F238E27FC236}">
-                <a16:creationId xmlns:a16="http://schemas.microsoft.com/office/drawing/2014/main" id="{C02A8F9E-EE54-454B-96E8-02CDC941D6DC}"/>
+                <a16:creationId xmlns:a16="http://schemas.microsoft.com/office/drawing/2014/main" id="{0B146366-A7DD-4016-994E-47D8FAF61E61}"/>
               </a:ext>
             </a:extLst>
           </p:cNvPr>
@@ -9947,7 +9947,7 @@
           <p:cNvPr id="17" name="">
             <a:extLst xmlns:a="http://schemas.openxmlformats.org/drawingml/2006/main">
               <a:ext uri="{FF2B5EF4-FFF2-40B4-BE49-F238E27FC236}">
-                <a16:creationId xmlns:a16="http://schemas.microsoft.com/office/drawing/2014/main" id="{49F6DC70-BB39-4066-9F3B-21183879CD58}"/>
+                <a16:creationId xmlns:a16="http://schemas.microsoft.com/office/drawing/2014/main" id="{258BBF93-A94D-4F7C-8CA2-4C25A5841160}"/>
               </a:ext>
             </a:extLst>
           </p:cNvPr>
@@ -10011,7 +10011,7 @@
           <p:cNvPr id="18" name="">
             <a:extLst xmlns:a="http://schemas.openxmlformats.org/drawingml/2006/main">
               <a:ext uri="{FF2B5EF4-FFF2-40B4-BE49-F238E27FC236}">
-                <a16:creationId xmlns:a16="http://schemas.microsoft.com/office/drawing/2014/main" id="{7613135C-0926-4091-BC21-0848262909E8}"/>
+                <a16:creationId xmlns:a16="http://schemas.microsoft.com/office/drawing/2014/main" id="{43A483A5-2F75-450A-B9AE-B3ECDCD36286}"/>
               </a:ext>
             </a:extLst>
           </p:cNvPr>
@@ -10044,7 +10044,7 @@
           <p:cNvPr id="19" name="">
             <a:extLst xmlns:a="http://schemas.openxmlformats.org/drawingml/2006/main">
               <a:ext uri="{FF2B5EF4-FFF2-40B4-BE49-F238E27FC236}">
-                <a16:creationId xmlns:a16="http://schemas.microsoft.com/office/drawing/2014/main" id="{3D559DFE-676E-41B8-BA9A-46378EB98947}"/>
+                <a16:creationId xmlns:a16="http://schemas.microsoft.com/office/drawing/2014/main" id="{093AF38B-C84F-45BC-BC94-12F4A1C4EE0B}"/>
               </a:ext>
             </a:extLst>
           </p:cNvPr>
@@ -10079,7 +10079,7 @@
           <p:cNvPr id="20" name="">
             <a:extLst xmlns:a="http://schemas.openxmlformats.org/drawingml/2006/main">
               <a:ext uri="{FF2B5EF4-FFF2-40B4-BE49-F238E27FC236}">
-                <a16:creationId xmlns:a16="http://schemas.microsoft.com/office/drawing/2014/main" id="{7C8609AC-70AF-4135-8815-38AA8E2BF1A0}"/>
+                <a16:creationId xmlns:a16="http://schemas.microsoft.com/office/drawing/2014/main" id="{41044449-1EDF-45D3-85BF-1CBC8CB2FB96}"/>
               </a:ext>
             </a:extLst>
           </p:cNvPr>
@@ -10143,7 +10143,7 @@
           <p:cNvPr id="21" name="">
             <a:extLst xmlns:a="http://schemas.openxmlformats.org/drawingml/2006/main">
               <a:ext uri="{FF2B5EF4-FFF2-40B4-BE49-F238E27FC236}">
-                <a16:creationId xmlns:a16="http://schemas.microsoft.com/office/drawing/2014/main" id="{6DCA58F5-B47C-4EE2-A498-FB9D7B347211}"/>
+                <a16:creationId xmlns:a16="http://schemas.microsoft.com/office/drawing/2014/main" id="{58464BF7-5C0F-4A0E-8D34-6168CB1088FE}"/>
               </a:ext>
             </a:extLst>
           </p:cNvPr>
@@ -10207,7 +10207,7 @@
           <p:cNvPr id="22" name="">
             <a:extLst xmlns:a="http://schemas.openxmlformats.org/drawingml/2006/main">
               <a:ext uri="{FF2B5EF4-FFF2-40B4-BE49-F238E27FC236}">
-                <a16:creationId xmlns:a16="http://schemas.microsoft.com/office/drawing/2014/main" id="{DA7EE19C-641F-4130-A914-793ABC8B5308}"/>
+                <a16:creationId xmlns:a16="http://schemas.microsoft.com/office/drawing/2014/main" id="{ED876AF8-14F3-4E2D-A7AA-81F08F10E34B}"/>
               </a:ext>
             </a:extLst>
           </p:cNvPr>
@@ -10271,7 +10271,7 @@
           <p:cNvPr id="23" name="">
             <a:extLst xmlns:a="http://schemas.openxmlformats.org/drawingml/2006/main">
               <a:ext uri="{FF2B5EF4-FFF2-40B4-BE49-F238E27FC236}">
-                <a16:creationId xmlns:a16="http://schemas.microsoft.com/office/drawing/2014/main" id="{805F87D9-B660-4D46-80C8-4ECB8F558E97}"/>
+                <a16:creationId xmlns:a16="http://schemas.microsoft.com/office/drawing/2014/main" id="{A5DFFF0C-35DA-4219-9B93-7821BD001FB6}"/>
               </a:ext>
             </a:extLst>
           </p:cNvPr>
@@ -10335,7 +10335,7 @@
           <p:cNvPr id="24" name="">
             <a:extLst xmlns:a="http://schemas.openxmlformats.org/drawingml/2006/main">
               <a:ext uri="{FF2B5EF4-FFF2-40B4-BE49-F238E27FC236}">
-                <a16:creationId xmlns:a16="http://schemas.microsoft.com/office/drawing/2014/main" id="{833B7851-9F83-4FD8-92EA-C18D4341FF01}"/>
+                <a16:creationId xmlns:a16="http://schemas.microsoft.com/office/drawing/2014/main" id="{538D5760-495D-454B-8A83-088731CBCE7A}"/>
               </a:ext>
             </a:extLst>
           </p:cNvPr>
@@ -10368,7 +10368,7 @@
           <p:cNvPr id="25" name="">
             <a:extLst xmlns:a="http://schemas.openxmlformats.org/drawingml/2006/main">
               <a:ext uri="{FF2B5EF4-FFF2-40B4-BE49-F238E27FC236}">
-                <a16:creationId xmlns:a16="http://schemas.microsoft.com/office/drawing/2014/main" id="{9DF5BCE8-F2AF-483B-8E90-9F58B01C46D9}"/>
+                <a16:creationId xmlns:a16="http://schemas.microsoft.com/office/drawing/2014/main" id="{B31B305C-818A-4757-AE39-0A92D3B020A8}"/>
               </a:ext>
             </a:extLst>
           </p:cNvPr>
@@ -10432,7 +10432,7 @@
           <p:cNvPr id="26" name="">
             <a:extLst xmlns:a="http://schemas.openxmlformats.org/drawingml/2006/main">
               <a:ext uri="{FF2B5EF4-FFF2-40B4-BE49-F238E27FC236}">
-                <a16:creationId xmlns:a16="http://schemas.microsoft.com/office/drawing/2014/main" id="{BD12AAD5-C843-48CA-865A-3D854D044612}"/>
+                <a16:creationId xmlns:a16="http://schemas.microsoft.com/office/drawing/2014/main" id="{F6BB4931-6187-4AE6-965B-03B9D2B4C04C}"/>
               </a:ext>
             </a:extLst>
           </p:cNvPr>
@@ -10494,7 +10494,7 @@
     </p:spTree>
     <p:extLst>
       <p:ext uri="{BB962C8B-B14F-4D97-AF65-F5344CB8AC3E}">
-        <p14:creationId xmlns:p14="http://schemas.microsoft.com/office/powerpoint/2010/main" val="1815777584"/>
+        <p14:creationId xmlns:p14="http://schemas.microsoft.com/office/powerpoint/2010/main" val="498931863"/>
       </p:ext>
     </p:extLst>
   </p:cSld>
@@ -10522,7 +10522,7 @@
           <p:nvPr/>
         </p:nvPicPr>
         <p:blipFill>
-          <a:blip xmlns:r="http://schemas.openxmlformats.org/officeDocument/2006/relationships" xmlns:a="http://schemas.openxmlformats.org/drawingml/2006/main" r:embed="R3f9ce175e2b941a8"/>
+          <a:blip xmlns:r="http://schemas.openxmlformats.org/officeDocument/2006/relationships" xmlns:a="http://schemas.openxmlformats.org/drawingml/2006/main" r:embed="R38e1850db5c94e8c"/>
           <a:srcRect xmlns:a="http://schemas.openxmlformats.org/drawingml/2006/main" l="0" t="7813" r="0" b="7813"/>
           <a:stretch xmlns:a="http://schemas.openxmlformats.org/drawingml/2006/main">
             <a:fillRect l="0" t="0" r="0" b="0"/>
@@ -10543,7 +10543,7 @@
           <p:cNvPr id="2" name="">
             <a:extLst xmlns:a="http://schemas.openxmlformats.org/drawingml/2006/main">
               <a:ext uri="{FF2B5EF4-FFF2-40B4-BE49-F238E27FC236}">
-                <a16:creationId xmlns:a16="http://schemas.microsoft.com/office/drawing/2014/main" id="{167C59A9-1E2A-47A3-8B3F-85EB236D488F}"/>
+                <a16:creationId xmlns:a16="http://schemas.microsoft.com/office/drawing/2014/main" id="{FF7B0DE7-F4B9-4762-BA53-50B51CD90F51}"/>
               </a:ext>
             </a:extLst>
           </p:cNvPr>
@@ -10580,7 +10580,7 @@
           <p:cNvPr id="3" name="">
             <a:extLst xmlns:a="http://schemas.openxmlformats.org/drawingml/2006/main">
               <a:ext uri="{FF2B5EF4-FFF2-40B4-BE49-F238E27FC236}">
-                <a16:creationId xmlns:a16="http://schemas.microsoft.com/office/drawing/2014/main" id="{5E1B8AED-ACDE-4219-9F4B-0558AE426EAF}"/>
+                <a16:creationId xmlns:a16="http://schemas.microsoft.com/office/drawing/2014/main" id="{82295D23-69B4-4A88-A1FB-9022F790EE6F}"/>
               </a:ext>
             </a:extLst>
           </p:cNvPr>
@@ -10617,7 +10617,7 @@
           <p:cNvPr id="4" name="">
             <a:extLst xmlns:a="http://schemas.openxmlformats.org/drawingml/2006/main">
               <a:ext uri="{FF2B5EF4-FFF2-40B4-BE49-F238E27FC236}">
-                <a16:creationId xmlns:a16="http://schemas.microsoft.com/office/drawing/2014/main" id="{AC7C340F-04BB-49CF-9C28-EC9B44AAB088}"/>
+                <a16:creationId xmlns:a16="http://schemas.microsoft.com/office/drawing/2014/main" id="{6ABE126E-BCB3-4BCB-8CB1-3D9313005DEE}"/>
               </a:ext>
             </a:extLst>
           </p:cNvPr>
@@ -10681,7 +10681,7 @@
           <p:cNvPr id="5" name="">
             <a:extLst xmlns:a="http://schemas.openxmlformats.org/drawingml/2006/main">
               <a:ext uri="{FF2B5EF4-FFF2-40B4-BE49-F238E27FC236}">
-                <a16:creationId xmlns:a16="http://schemas.microsoft.com/office/drawing/2014/main" id="{C99A09AA-78B3-474E-AE88-DADEA2F92E93}"/>
+                <a16:creationId xmlns:a16="http://schemas.microsoft.com/office/drawing/2014/main" id="{3B542A1A-20DD-4D78-B59C-240CF612542F}"/>
               </a:ext>
             </a:extLst>
           </p:cNvPr>
@@ -10745,7 +10745,7 @@
           <p:cNvPr id="6" name="">
             <a:extLst xmlns:a="http://schemas.openxmlformats.org/drawingml/2006/main">
               <a:ext uri="{FF2B5EF4-FFF2-40B4-BE49-F238E27FC236}">
-                <a16:creationId xmlns:a16="http://schemas.microsoft.com/office/drawing/2014/main" id="{DFDC6655-9300-4213-B3EC-1163756CCED5}"/>
+                <a16:creationId xmlns:a16="http://schemas.microsoft.com/office/drawing/2014/main" id="{1A921694-F518-4E08-86DB-CD806533DF5C}"/>
               </a:ext>
             </a:extLst>
           </p:cNvPr>
@@ -10809,7 +10809,7 @@
           <p:cNvPr id="7" name="">
             <a:extLst xmlns:a="http://schemas.openxmlformats.org/drawingml/2006/main">
               <a:ext uri="{FF2B5EF4-FFF2-40B4-BE49-F238E27FC236}">
-                <a16:creationId xmlns:a16="http://schemas.microsoft.com/office/drawing/2014/main" id="{A185A337-D89E-43FB-BEF7-26E7FBFDDEBE}"/>
+                <a16:creationId xmlns:a16="http://schemas.microsoft.com/office/drawing/2014/main" id="{9FA16BBE-96AC-40AA-934B-074C14931380}"/>
               </a:ext>
             </a:extLst>
           </p:cNvPr>
@@ -10844,7 +10844,7 @@
           <p:cNvPr id="8" name="">
             <a:extLst xmlns:a="http://schemas.openxmlformats.org/drawingml/2006/main">
               <a:ext uri="{FF2B5EF4-FFF2-40B4-BE49-F238E27FC236}">
-                <a16:creationId xmlns:a16="http://schemas.microsoft.com/office/drawing/2014/main" id="{CC041387-FBF5-4BDA-BCDE-AF3C1C0751EA}"/>
+                <a16:creationId xmlns:a16="http://schemas.microsoft.com/office/drawing/2014/main" id="{33D3943A-23BF-4A6B-A507-9105F521A982}"/>
               </a:ext>
             </a:extLst>
           </p:cNvPr>
@@ -10908,7 +10908,7 @@
           <p:cNvPr id="9" name="">
             <a:extLst xmlns:a="http://schemas.openxmlformats.org/drawingml/2006/main">
               <a:ext uri="{FF2B5EF4-FFF2-40B4-BE49-F238E27FC236}">
-                <a16:creationId xmlns:a16="http://schemas.microsoft.com/office/drawing/2014/main" id="{F9ACB80A-0D96-494F-817E-613F8811D015}"/>
+                <a16:creationId xmlns:a16="http://schemas.microsoft.com/office/drawing/2014/main" id="{5A53D36E-49B0-488E-8122-51B7755D78B7}"/>
               </a:ext>
             </a:extLst>
           </p:cNvPr>
@@ -10943,7 +10943,7 @@
           <p:cNvPr id="10" name="">
             <a:extLst xmlns:a="http://schemas.openxmlformats.org/drawingml/2006/main">
               <a:ext uri="{FF2B5EF4-FFF2-40B4-BE49-F238E27FC236}">
-                <a16:creationId xmlns:a16="http://schemas.microsoft.com/office/drawing/2014/main" id="{2608FAAA-A8C0-4FA3-9563-1016F6187293}"/>
+                <a16:creationId xmlns:a16="http://schemas.microsoft.com/office/drawing/2014/main" id="{1496753C-BCCA-4D66-A696-3471CE05888F}"/>
               </a:ext>
             </a:extLst>
           </p:cNvPr>
@@ -11007,7 +11007,7 @@
           <p:cNvPr id="11" name="">
             <a:extLst xmlns:a="http://schemas.openxmlformats.org/drawingml/2006/main">
               <a:ext uri="{FF2B5EF4-FFF2-40B4-BE49-F238E27FC236}">
-                <a16:creationId xmlns:a16="http://schemas.microsoft.com/office/drawing/2014/main" id="{7A407996-D344-4CC6-838B-9D58132679B8}"/>
+                <a16:creationId xmlns:a16="http://schemas.microsoft.com/office/drawing/2014/main" id="{E69B7CD4-61A5-4D11-851D-101738C33FE6}"/>
               </a:ext>
             </a:extLst>
           </p:cNvPr>
@@ -11042,7 +11042,7 @@
           <p:cNvPr id="12" name="">
             <a:extLst xmlns:a="http://schemas.openxmlformats.org/drawingml/2006/main">
               <a:ext uri="{FF2B5EF4-FFF2-40B4-BE49-F238E27FC236}">
-                <a16:creationId xmlns:a16="http://schemas.microsoft.com/office/drawing/2014/main" id="{C1D27BA8-B7F6-4818-9646-90D26E36A244}"/>
+                <a16:creationId xmlns:a16="http://schemas.microsoft.com/office/drawing/2014/main" id="{3199FCB1-8C97-4878-9283-77F965B8709D}"/>
               </a:ext>
             </a:extLst>
           </p:cNvPr>
@@ -11106,7 +11106,7 @@
           <p:cNvPr id="13" name="">
             <a:extLst xmlns:a="http://schemas.openxmlformats.org/drawingml/2006/main">
               <a:ext uri="{FF2B5EF4-FFF2-40B4-BE49-F238E27FC236}">
-                <a16:creationId xmlns:a16="http://schemas.microsoft.com/office/drawing/2014/main" id="{81DC14E4-2374-4619-92D7-9441E2034396}"/>
+                <a16:creationId xmlns:a16="http://schemas.microsoft.com/office/drawing/2014/main" id="{4D870C33-0A0A-4010-BED8-464C348B2D9E}"/>
               </a:ext>
             </a:extLst>
           </p:cNvPr>
@@ -11141,7 +11141,7 @@
           <p:cNvPr id="14" name="">
             <a:extLst xmlns:a="http://schemas.openxmlformats.org/drawingml/2006/main">
               <a:ext uri="{FF2B5EF4-FFF2-40B4-BE49-F238E27FC236}">
-                <a16:creationId xmlns:a16="http://schemas.microsoft.com/office/drawing/2014/main" id="{EB8F342D-2C93-4D72-ADCB-E885D85A2E1E}"/>
+                <a16:creationId xmlns:a16="http://schemas.microsoft.com/office/drawing/2014/main" id="{17C758BF-2427-4E72-97AB-9DBCC9AE2226}"/>
               </a:ext>
             </a:extLst>
           </p:cNvPr>
@@ -11205,7 +11205,7 @@
           <p:cNvPr id="15" name="">
             <a:extLst xmlns:a="http://schemas.openxmlformats.org/drawingml/2006/main">
               <a:ext uri="{FF2B5EF4-FFF2-40B4-BE49-F238E27FC236}">
-                <a16:creationId xmlns:a16="http://schemas.microsoft.com/office/drawing/2014/main" id="{4F334039-B3FF-4AAB-89EC-51B5B7F16352}"/>
+                <a16:creationId xmlns:a16="http://schemas.microsoft.com/office/drawing/2014/main" id="{631C586F-AF99-4031-AAA7-4ADE248C87F3}"/>
               </a:ext>
             </a:extLst>
           </p:cNvPr>
@@ -11240,7 +11240,7 @@
           <p:cNvPr id="16" name="">
             <a:extLst xmlns:a="http://schemas.openxmlformats.org/drawingml/2006/main">
               <a:ext uri="{FF2B5EF4-FFF2-40B4-BE49-F238E27FC236}">
-                <a16:creationId xmlns:a16="http://schemas.microsoft.com/office/drawing/2014/main" id="{C6D373F8-CEBB-46C8-84ED-192103B7C574}"/>
+                <a16:creationId xmlns:a16="http://schemas.microsoft.com/office/drawing/2014/main" id="{23D86E17-3D9F-44D5-8749-4A430A540B9E}"/>
               </a:ext>
             </a:extLst>
           </p:cNvPr>
@@ -11304,7 +11304,7 @@
           <p:cNvPr id="17" name="">
             <a:extLst xmlns:a="http://schemas.openxmlformats.org/drawingml/2006/main">
               <a:ext uri="{FF2B5EF4-FFF2-40B4-BE49-F238E27FC236}">
-                <a16:creationId xmlns:a16="http://schemas.microsoft.com/office/drawing/2014/main" id="{24BA41CA-1C13-4042-8DDB-D6C7410E9D4D}"/>
+                <a16:creationId xmlns:a16="http://schemas.microsoft.com/office/drawing/2014/main" id="{CC2A37E9-521F-4ED7-A1B5-72B8E0F14D35}"/>
               </a:ext>
             </a:extLst>
           </p:cNvPr>
@@ -11339,7 +11339,7 @@
           <p:cNvPr id="18" name="">
             <a:extLst xmlns:a="http://schemas.openxmlformats.org/drawingml/2006/main">
               <a:ext uri="{FF2B5EF4-FFF2-40B4-BE49-F238E27FC236}">
-                <a16:creationId xmlns:a16="http://schemas.microsoft.com/office/drawing/2014/main" id="{99D67728-384E-4C2A-836A-0FC16111BF9B}"/>
+                <a16:creationId xmlns:a16="http://schemas.microsoft.com/office/drawing/2014/main" id="{198A926F-AECA-4AC2-8376-AC54EB2659C5}"/>
               </a:ext>
             </a:extLst>
           </p:cNvPr>
@@ -11403,7 +11403,7 @@
           <p:cNvPr id="19" name="">
             <a:extLst xmlns:a="http://schemas.openxmlformats.org/drawingml/2006/main">
               <a:ext uri="{FF2B5EF4-FFF2-40B4-BE49-F238E27FC236}">
-                <a16:creationId xmlns:a16="http://schemas.microsoft.com/office/drawing/2014/main" id="{CEC376F8-20B8-4CA5-8EF9-56586A8CBD88}"/>
+                <a16:creationId xmlns:a16="http://schemas.microsoft.com/office/drawing/2014/main" id="{F8D41AEB-456F-4588-9DF5-C9DA40045C67}"/>
               </a:ext>
             </a:extLst>
           </p:cNvPr>
@@ -11467,7 +11467,7 @@
           <p:cNvPr id="20" name="">
             <a:extLst xmlns:a="http://schemas.openxmlformats.org/drawingml/2006/main">
               <a:ext uri="{FF2B5EF4-FFF2-40B4-BE49-F238E27FC236}">
-                <a16:creationId xmlns:a16="http://schemas.microsoft.com/office/drawing/2014/main" id="{1F3BCEC9-673E-4F25-ADAA-45D910F49899}"/>
+                <a16:creationId xmlns:a16="http://schemas.microsoft.com/office/drawing/2014/main" id="{91E52272-C833-47F3-8093-B27DCC63F1D3}"/>
               </a:ext>
             </a:extLst>
           </p:cNvPr>
@@ -11500,7 +11500,7 @@
           <p:cNvPr id="21" name="">
             <a:extLst xmlns:a="http://schemas.openxmlformats.org/drawingml/2006/main">
               <a:ext uri="{FF2B5EF4-FFF2-40B4-BE49-F238E27FC236}">
-                <a16:creationId xmlns:a16="http://schemas.microsoft.com/office/drawing/2014/main" id="{1A18D53E-6C35-43C3-922C-BE8DFA87C837}"/>
+                <a16:creationId xmlns:a16="http://schemas.microsoft.com/office/drawing/2014/main" id="{82012E76-848F-4ACA-884E-D07431839FBE}"/>
               </a:ext>
             </a:extLst>
           </p:cNvPr>
@@ -11564,7 +11564,7 @@
           <p:cNvPr id="22" name="">
             <a:extLst xmlns:a="http://schemas.openxmlformats.org/drawingml/2006/main">
               <a:ext uri="{FF2B5EF4-FFF2-40B4-BE49-F238E27FC236}">
-                <a16:creationId xmlns:a16="http://schemas.microsoft.com/office/drawing/2014/main" id="{D3DF8FBD-102A-4910-A1E0-C759D1B685E0}"/>
+                <a16:creationId xmlns:a16="http://schemas.microsoft.com/office/drawing/2014/main" id="{50E3A625-149F-4176-9616-2E5E59DFED5B}"/>
               </a:ext>
             </a:extLst>
           </p:cNvPr>
@@ -11626,7 +11626,7 @@
     </p:spTree>
     <p:extLst>
       <p:ext uri="{BB962C8B-B14F-4D97-AF65-F5344CB8AC3E}">
-        <p14:creationId xmlns:p14="http://schemas.microsoft.com/office/powerpoint/2010/main" val="694476317"/>
+        <p14:creationId xmlns:p14="http://schemas.microsoft.com/office/powerpoint/2010/main" val="129538010"/>
       </p:ext>
     </p:extLst>
   </p:cSld>
@@ -11654,7 +11654,7 @@
           <p:nvPr/>
         </p:nvPicPr>
         <p:blipFill>
-          <a:blip xmlns:r="http://schemas.openxmlformats.org/officeDocument/2006/relationships" xmlns:a="http://schemas.openxmlformats.org/drawingml/2006/main" r:embed="R2dd4115d6ccf44aa"/>
+          <a:blip xmlns:r="http://schemas.openxmlformats.org/officeDocument/2006/relationships" xmlns:a="http://schemas.openxmlformats.org/drawingml/2006/main" r:embed="R551e57d1c50a4c7e"/>
           <a:srcRect xmlns:a="http://schemas.openxmlformats.org/drawingml/2006/main" l="0" t="27" r="0" b="27"/>
           <a:stretch xmlns:a="http://schemas.openxmlformats.org/drawingml/2006/main">
             <a:fillRect l="0" t="0" r="0" b="0"/>
@@ -11675,7 +11675,7 @@
           <p:cNvPr id="2" name="">
             <a:extLst xmlns:a="http://schemas.openxmlformats.org/drawingml/2006/main">
               <a:ext uri="{FF2B5EF4-FFF2-40B4-BE49-F238E27FC236}">
-                <a16:creationId xmlns:a16="http://schemas.microsoft.com/office/drawing/2014/main" id="{C2EDE407-3DC0-49C3-8E04-90C3B72713D0}"/>
+                <a16:creationId xmlns:a16="http://schemas.microsoft.com/office/drawing/2014/main" id="{42AFA8D2-D6E2-4A68-B810-CD4537803FA8}"/>
               </a:ext>
             </a:extLst>
           </p:cNvPr>
@@ -11712,7 +11712,7 @@
           <p:cNvPr id="3" name="">
             <a:extLst xmlns:a="http://schemas.openxmlformats.org/drawingml/2006/main">
               <a:ext uri="{FF2B5EF4-FFF2-40B4-BE49-F238E27FC236}">
-                <a16:creationId xmlns:a16="http://schemas.microsoft.com/office/drawing/2014/main" id="{CD0446AF-21AD-4E2E-9D90-2FA4D0556D1B}"/>
+                <a16:creationId xmlns:a16="http://schemas.microsoft.com/office/drawing/2014/main" id="{6ADB4B6D-F382-426B-84EE-B7676F2EF4EA}"/>
               </a:ext>
             </a:extLst>
           </p:cNvPr>
@@ -11749,7 +11749,7 @@
           <p:cNvPr id="4" name="">
             <a:extLst xmlns:a="http://schemas.openxmlformats.org/drawingml/2006/main">
               <a:ext uri="{FF2B5EF4-FFF2-40B4-BE49-F238E27FC236}">
-                <a16:creationId xmlns:a16="http://schemas.microsoft.com/office/drawing/2014/main" id="{840CB58B-9FCB-46D6-BDEF-660309949231}"/>
+                <a16:creationId xmlns:a16="http://schemas.microsoft.com/office/drawing/2014/main" id="{9A67C41E-79CE-4670-BDA1-0DA880651389}"/>
               </a:ext>
             </a:extLst>
           </p:cNvPr>
@@ -11813,7 +11813,7 @@
           <p:cNvPr id="5" name="">
             <a:extLst xmlns:a="http://schemas.openxmlformats.org/drawingml/2006/main">
               <a:ext uri="{FF2B5EF4-FFF2-40B4-BE49-F238E27FC236}">
-                <a16:creationId xmlns:a16="http://schemas.microsoft.com/office/drawing/2014/main" id="{0352C0BA-C5CE-4D08-87C3-5896851E019A}"/>
+                <a16:creationId xmlns:a16="http://schemas.microsoft.com/office/drawing/2014/main" id="{7F7F8BE7-5F37-4810-930A-A5FF25C7B3F6}"/>
               </a:ext>
             </a:extLst>
           </p:cNvPr>
@@ -11877,7 +11877,7 @@
           <p:cNvPr id="6" name="">
             <a:extLst xmlns:a="http://schemas.openxmlformats.org/drawingml/2006/main">
               <a:ext uri="{FF2B5EF4-FFF2-40B4-BE49-F238E27FC236}">
-                <a16:creationId xmlns:a16="http://schemas.microsoft.com/office/drawing/2014/main" id="{7745EDE8-B6BF-4FBA-ADA1-73C66FFFAF4C}"/>
+                <a16:creationId xmlns:a16="http://schemas.microsoft.com/office/drawing/2014/main" id="{EF088C78-D22B-4DF3-8ED7-A842353EA9BB}"/>
               </a:ext>
             </a:extLst>
           </p:cNvPr>
@@ -11941,7 +11941,7 @@
           <p:cNvPr id="7" name="">
             <a:extLst xmlns:a="http://schemas.openxmlformats.org/drawingml/2006/main">
               <a:ext uri="{FF2B5EF4-FFF2-40B4-BE49-F238E27FC236}">
-                <a16:creationId xmlns:a16="http://schemas.microsoft.com/office/drawing/2014/main" id="{B23FFCF6-36AB-435D-9EF4-1B26658DCBE5}"/>
+                <a16:creationId xmlns:a16="http://schemas.microsoft.com/office/drawing/2014/main" id="{57E42EEC-1150-4A2F-9173-75AE005A7543}"/>
               </a:ext>
             </a:extLst>
           </p:cNvPr>
@@ -11976,7 +11976,7 @@
           <p:cNvPr id="8" name="">
             <a:extLst xmlns:a="http://schemas.openxmlformats.org/drawingml/2006/main">
               <a:ext uri="{FF2B5EF4-FFF2-40B4-BE49-F238E27FC236}">
-                <a16:creationId xmlns:a16="http://schemas.microsoft.com/office/drawing/2014/main" id="{7D3797EF-0D24-4EA8-BFD6-B6D602924498}"/>
+                <a16:creationId xmlns:a16="http://schemas.microsoft.com/office/drawing/2014/main" id="{2A600C25-A151-493B-A017-C80E6E4CD0B8}"/>
               </a:ext>
             </a:extLst>
           </p:cNvPr>
@@ -12040,7 +12040,7 @@
           <p:cNvPr id="9" name="">
             <a:extLst xmlns:a="http://schemas.openxmlformats.org/drawingml/2006/main">
               <a:ext uri="{FF2B5EF4-FFF2-40B4-BE49-F238E27FC236}">
-                <a16:creationId xmlns:a16="http://schemas.microsoft.com/office/drawing/2014/main" id="{886284E7-06CF-4A36-A2AE-B00B510F3430}"/>
+                <a16:creationId xmlns:a16="http://schemas.microsoft.com/office/drawing/2014/main" id="{D1AAA8F9-019B-4CB8-A7B1-45B2856C4627}"/>
               </a:ext>
             </a:extLst>
           </p:cNvPr>
@@ -12104,7 +12104,7 @@
           <p:cNvPr id="10" name="">
             <a:extLst xmlns:a="http://schemas.openxmlformats.org/drawingml/2006/main">
               <a:ext uri="{FF2B5EF4-FFF2-40B4-BE49-F238E27FC236}">
-                <a16:creationId xmlns:a16="http://schemas.microsoft.com/office/drawing/2014/main" id="{9668F286-B757-4B79-A733-914DF6D87E3D}"/>
+                <a16:creationId xmlns:a16="http://schemas.microsoft.com/office/drawing/2014/main" id="{7017A5E9-0902-4D7F-BEAF-66BAB36D4230}"/>
               </a:ext>
             </a:extLst>
           </p:cNvPr>
@@ -12137,7 +12137,7 @@
           <p:cNvPr id="11" name="">
             <a:extLst xmlns:a="http://schemas.openxmlformats.org/drawingml/2006/main">
               <a:ext uri="{FF2B5EF4-FFF2-40B4-BE49-F238E27FC236}">
-                <a16:creationId xmlns:a16="http://schemas.microsoft.com/office/drawing/2014/main" id="{560B1C19-98C3-4E6C-B312-B8C1163A2690}"/>
+                <a16:creationId xmlns:a16="http://schemas.microsoft.com/office/drawing/2014/main" id="{0E3D0463-422A-46EE-9359-C3F2B3BE92E7}"/>
               </a:ext>
             </a:extLst>
           </p:cNvPr>
@@ -12172,7 +12172,7 @@
           <p:cNvPr id="12" name="">
             <a:extLst xmlns:a="http://schemas.openxmlformats.org/drawingml/2006/main">
               <a:ext uri="{FF2B5EF4-FFF2-40B4-BE49-F238E27FC236}">
-                <a16:creationId xmlns:a16="http://schemas.microsoft.com/office/drawing/2014/main" id="{B045FC58-F6C8-41E1-832D-046079B7459A}"/>
+                <a16:creationId xmlns:a16="http://schemas.microsoft.com/office/drawing/2014/main" id="{2A59D649-EE62-4DE8-BAD4-7C209F63EB1A}"/>
               </a:ext>
             </a:extLst>
           </p:cNvPr>
@@ -12236,7 +12236,7 @@
           <p:cNvPr id="13" name="">
             <a:extLst xmlns:a="http://schemas.openxmlformats.org/drawingml/2006/main">
               <a:ext uri="{FF2B5EF4-FFF2-40B4-BE49-F238E27FC236}">
-                <a16:creationId xmlns:a16="http://schemas.microsoft.com/office/drawing/2014/main" id="{C4292A92-4741-4158-AD67-639F6024F26A}"/>
+                <a16:creationId xmlns:a16="http://schemas.microsoft.com/office/drawing/2014/main" id="{1CA67CB3-E7D4-47A7-86DC-2CF84191A9DA}"/>
               </a:ext>
             </a:extLst>
           </p:cNvPr>
@@ -12300,7 +12300,7 @@
           <p:cNvPr id="14" name="">
             <a:extLst xmlns:a="http://schemas.openxmlformats.org/drawingml/2006/main">
               <a:ext uri="{FF2B5EF4-FFF2-40B4-BE49-F238E27FC236}">
-                <a16:creationId xmlns:a16="http://schemas.microsoft.com/office/drawing/2014/main" id="{ED7EEDE4-F221-42E1-84CF-232BFB9033C0}"/>
+                <a16:creationId xmlns:a16="http://schemas.microsoft.com/office/drawing/2014/main" id="{B095AF84-46E0-4364-B8BB-67E283BB0BB0}"/>
               </a:ext>
             </a:extLst>
           </p:cNvPr>
@@ -12333,7 +12333,7 @@
           <p:cNvPr id="15" name="">
             <a:extLst xmlns:a="http://schemas.openxmlformats.org/drawingml/2006/main">
               <a:ext uri="{FF2B5EF4-FFF2-40B4-BE49-F238E27FC236}">
-                <a16:creationId xmlns:a16="http://schemas.microsoft.com/office/drawing/2014/main" id="{4E68E978-3A0E-426C-8802-5AB58B979432}"/>
+                <a16:creationId xmlns:a16="http://schemas.microsoft.com/office/drawing/2014/main" id="{05F20B4E-CFF4-4815-96FB-F6EF3E00B685}"/>
               </a:ext>
             </a:extLst>
           </p:cNvPr>
@@ -12368,7 +12368,7 @@
           <p:cNvPr id="16" name="">
             <a:extLst xmlns:a="http://schemas.openxmlformats.org/drawingml/2006/main">
               <a:ext uri="{FF2B5EF4-FFF2-40B4-BE49-F238E27FC236}">
-                <a16:creationId xmlns:a16="http://schemas.microsoft.com/office/drawing/2014/main" id="{7C1B33E9-8D5A-4420-BA71-5399C108E7D6}"/>
+                <a16:creationId xmlns:a16="http://schemas.microsoft.com/office/drawing/2014/main" id="{A586F5CF-45D4-4BF0-A100-E56ECA6E5615}"/>
               </a:ext>
             </a:extLst>
           </p:cNvPr>
@@ -12432,7 +12432,7 @@
           <p:cNvPr id="17" name="">
             <a:extLst xmlns:a="http://schemas.openxmlformats.org/drawingml/2006/main">
               <a:ext uri="{FF2B5EF4-FFF2-40B4-BE49-F238E27FC236}">
-                <a16:creationId xmlns:a16="http://schemas.microsoft.com/office/drawing/2014/main" id="{DB860E2C-C609-4438-AFB0-D9EFCB4FBA72}"/>
+                <a16:creationId xmlns:a16="http://schemas.microsoft.com/office/drawing/2014/main" id="{35864B76-C7E4-4816-B1F5-85431E70CE96}"/>
               </a:ext>
             </a:extLst>
           </p:cNvPr>
@@ -12496,7 +12496,7 @@
           <p:cNvPr id="18" name="">
             <a:extLst xmlns:a="http://schemas.openxmlformats.org/drawingml/2006/main">
               <a:ext uri="{FF2B5EF4-FFF2-40B4-BE49-F238E27FC236}">
-                <a16:creationId xmlns:a16="http://schemas.microsoft.com/office/drawing/2014/main" id="{4DE48579-09CA-4C1D-BEE3-760C209F927F}"/>
+                <a16:creationId xmlns:a16="http://schemas.microsoft.com/office/drawing/2014/main" id="{8A611443-0BAA-49E5-B8E8-6C2F24ADFA5A}"/>
               </a:ext>
             </a:extLst>
           </p:cNvPr>
@@ -12529,7 +12529,7 @@
           <p:cNvPr id="19" name="">
             <a:extLst xmlns:a="http://schemas.openxmlformats.org/drawingml/2006/main">
               <a:ext uri="{FF2B5EF4-FFF2-40B4-BE49-F238E27FC236}">
-                <a16:creationId xmlns:a16="http://schemas.microsoft.com/office/drawing/2014/main" id="{CF896C1C-BADB-493F-ACEB-78F505CDEDF6}"/>
+                <a16:creationId xmlns:a16="http://schemas.microsoft.com/office/drawing/2014/main" id="{3DC96914-CDAD-4981-9543-39AE61BC4921}"/>
               </a:ext>
             </a:extLst>
           </p:cNvPr>
@@ -12564,7 +12564,7 @@
           <p:cNvPr id="20" name="">
             <a:extLst xmlns:a="http://schemas.openxmlformats.org/drawingml/2006/main">
               <a:ext uri="{FF2B5EF4-FFF2-40B4-BE49-F238E27FC236}">
-                <a16:creationId xmlns:a16="http://schemas.microsoft.com/office/drawing/2014/main" id="{9A221AC9-9BC5-4F1D-9E8E-5C09E2AA67E7}"/>
+                <a16:creationId xmlns:a16="http://schemas.microsoft.com/office/drawing/2014/main" id="{0D62AAA2-C87D-4B43-B9F7-6F4C6D14680E}"/>
               </a:ext>
             </a:extLst>
           </p:cNvPr>
@@ -12628,7 +12628,7 @@
           <p:cNvPr id="21" name="">
             <a:extLst xmlns:a="http://schemas.openxmlformats.org/drawingml/2006/main">
               <a:ext uri="{FF2B5EF4-FFF2-40B4-BE49-F238E27FC236}">
-                <a16:creationId xmlns:a16="http://schemas.microsoft.com/office/drawing/2014/main" id="{6B4D1EBE-5352-402A-BC53-B4759C9B30C8}"/>
+                <a16:creationId xmlns:a16="http://schemas.microsoft.com/office/drawing/2014/main" id="{A9019DA5-26A4-4BF4-8F06-EF6415B334C4}"/>
               </a:ext>
             </a:extLst>
           </p:cNvPr>
@@ -12692,7 +12692,7 @@
           <p:cNvPr id="22" name="">
             <a:extLst xmlns:a="http://schemas.openxmlformats.org/drawingml/2006/main">
               <a:ext uri="{FF2B5EF4-FFF2-40B4-BE49-F238E27FC236}">
-                <a16:creationId xmlns:a16="http://schemas.microsoft.com/office/drawing/2014/main" id="{016CD4A5-9212-434D-94E7-F44655BE665F}"/>
+                <a16:creationId xmlns:a16="http://schemas.microsoft.com/office/drawing/2014/main" id="{13046696-B311-4130-938A-C2DC0DF4F156}"/>
               </a:ext>
             </a:extLst>
           </p:cNvPr>
@@ -12756,7 +12756,7 @@
           <p:cNvPr id="23" name="">
             <a:extLst xmlns:a="http://schemas.openxmlformats.org/drawingml/2006/main">
               <a:ext uri="{FF2B5EF4-FFF2-40B4-BE49-F238E27FC236}">
-                <a16:creationId xmlns:a16="http://schemas.microsoft.com/office/drawing/2014/main" id="{A4DCC1E7-9883-4112-95A2-4C1D99B7AE87}"/>
+                <a16:creationId xmlns:a16="http://schemas.microsoft.com/office/drawing/2014/main" id="{6ED5BAAE-8E1B-4E87-B2A1-8ABCC6853204}"/>
               </a:ext>
             </a:extLst>
           </p:cNvPr>
@@ -12820,7 +12820,7 @@
           <p:cNvPr id="24" name="">
             <a:extLst xmlns:a="http://schemas.openxmlformats.org/drawingml/2006/main">
               <a:ext uri="{FF2B5EF4-FFF2-40B4-BE49-F238E27FC236}">
-                <a16:creationId xmlns:a16="http://schemas.microsoft.com/office/drawing/2014/main" id="{A813CA3E-F7C6-40F2-BF64-D765745FD55A}"/>
+                <a16:creationId xmlns:a16="http://schemas.microsoft.com/office/drawing/2014/main" id="{78CFEA57-481F-4256-BF64-57F15119AD67}"/>
               </a:ext>
             </a:extLst>
           </p:cNvPr>
@@ -12853,7 +12853,7 @@
           <p:cNvPr id="25" name="">
             <a:extLst xmlns:a="http://schemas.openxmlformats.org/drawingml/2006/main">
               <a:ext uri="{FF2B5EF4-FFF2-40B4-BE49-F238E27FC236}">
-                <a16:creationId xmlns:a16="http://schemas.microsoft.com/office/drawing/2014/main" id="{A501FFE1-BE1C-4233-B0E5-C06B68F08978}"/>
+                <a16:creationId xmlns:a16="http://schemas.microsoft.com/office/drawing/2014/main" id="{AD8017A8-5801-475E-96F8-BA73D035DF20}"/>
               </a:ext>
             </a:extLst>
           </p:cNvPr>
@@ -12917,7 +12917,7 @@
           <p:cNvPr id="26" name="">
             <a:extLst xmlns:a="http://schemas.openxmlformats.org/drawingml/2006/main">
               <a:ext uri="{FF2B5EF4-FFF2-40B4-BE49-F238E27FC236}">
-                <a16:creationId xmlns:a16="http://schemas.microsoft.com/office/drawing/2014/main" id="{1A93FC29-6C75-45E8-94D7-684EBC27C988}"/>
+                <a16:creationId xmlns:a16="http://schemas.microsoft.com/office/drawing/2014/main" id="{5913B0F9-B497-4467-87F4-2D277E49C1B1}"/>
               </a:ext>
             </a:extLst>
           </p:cNvPr>
@@ -12979,7 +12979,7 @@
     </p:spTree>
     <p:extLst>
       <p:ext uri="{BB962C8B-B14F-4D97-AF65-F5344CB8AC3E}">
-        <p14:creationId xmlns:p14="http://schemas.microsoft.com/office/powerpoint/2010/main" val="1124928524"/>
+        <p14:creationId xmlns:p14="http://schemas.microsoft.com/office/powerpoint/2010/main" val="124330810"/>
       </p:ext>
     </p:extLst>
   </p:cSld>
@@ -13007,7 +13007,7 @@
           <p:nvPr/>
         </p:nvPicPr>
         <p:blipFill>
-          <a:blip xmlns:r="http://schemas.openxmlformats.org/officeDocument/2006/relationships" xmlns:a="http://schemas.openxmlformats.org/drawingml/2006/main" r:embed="R52c543a7b85d40cb"/>
+          <a:blip xmlns:r="http://schemas.openxmlformats.org/officeDocument/2006/relationships" xmlns:a="http://schemas.openxmlformats.org/drawingml/2006/main" r:embed="R3acbc26fa3d44f85"/>
           <a:srcRect xmlns:a="http://schemas.openxmlformats.org/drawingml/2006/main" l="0" t="27" r="0" b="27"/>
           <a:stretch xmlns:a="http://schemas.openxmlformats.org/drawingml/2006/main">
             <a:fillRect l="0" t="0" r="0" b="0"/>
@@ -13028,7 +13028,7 @@
           <p:cNvPr id="2" name="">
             <a:extLst xmlns:a="http://schemas.openxmlformats.org/drawingml/2006/main">
               <a:ext uri="{FF2B5EF4-FFF2-40B4-BE49-F238E27FC236}">
-                <a16:creationId xmlns:a16="http://schemas.microsoft.com/office/drawing/2014/main" id="{27C93472-9918-4F73-9E0A-A43B055B0618}"/>
+                <a16:creationId xmlns:a16="http://schemas.microsoft.com/office/drawing/2014/main" id="{B191E257-6FFA-4D6D-AB41-BD8E092A045F}"/>
               </a:ext>
             </a:extLst>
           </p:cNvPr>
@@ -13065,7 +13065,7 @@
           <p:cNvPr id="3" name="">
             <a:extLst xmlns:a="http://schemas.openxmlformats.org/drawingml/2006/main">
               <a:ext uri="{FF2B5EF4-FFF2-40B4-BE49-F238E27FC236}">
-                <a16:creationId xmlns:a16="http://schemas.microsoft.com/office/drawing/2014/main" id="{132DA335-000E-4C6F-9D3D-7A94A822CEDE}"/>
+                <a16:creationId xmlns:a16="http://schemas.microsoft.com/office/drawing/2014/main" id="{F4C0F571-83E4-47FD-96A6-56F19D05F2C6}"/>
               </a:ext>
             </a:extLst>
           </p:cNvPr>
@@ -13102,7 +13102,7 @@
           <p:cNvPr id="4" name="">
             <a:extLst xmlns:a="http://schemas.openxmlformats.org/drawingml/2006/main">
               <a:ext uri="{FF2B5EF4-FFF2-40B4-BE49-F238E27FC236}">
-                <a16:creationId xmlns:a16="http://schemas.microsoft.com/office/drawing/2014/main" id="{80BE558D-E3DD-486C-B06F-95A544589B0E}"/>
+                <a16:creationId xmlns:a16="http://schemas.microsoft.com/office/drawing/2014/main" id="{2E72279A-EB53-4D78-A83D-005AE39A2ECC}"/>
               </a:ext>
             </a:extLst>
           </p:cNvPr>
@@ -13166,7 +13166,7 @@
           <p:cNvPr id="5" name="">
             <a:extLst xmlns:a="http://schemas.openxmlformats.org/drawingml/2006/main">
               <a:ext uri="{FF2B5EF4-FFF2-40B4-BE49-F238E27FC236}">
-                <a16:creationId xmlns:a16="http://schemas.microsoft.com/office/drawing/2014/main" id="{13CC7172-2216-49CD-A63F-17D921C7C120}"/>
+                <a16:creationId xmlns:a16="http://schemas.microsoft.com/office/drawing/2014/main" id="{F394B4E1-D50D-4DFE-B1CA-06A6EDEB8FBB}"/>
               </a:ext>
             </a:extLst>
           </p:cNvPr>
@@ -13230,7 +13230,7 @@
           <p:cNvPr id="6" name="">
             <a:extLst xmlns:a="http://schemas.openxmlformats.org/drawingml/2006/main">
               <a:ext uri="{FF2B5EF4-FFF2-40B4-BE49-F238E27FC236}">
-                <a16:creationId xmlns:a16="http://schemas.microsoft.com/office/drawing/2014/main" id="{4FEB91B4-4EA9-4CF0-8EA5-A7A139191FC3}"/>
+                <a16:creationId xmlns:a16="http://schemas.microsoft.com/office/drawing/2014/main" id="{C86408F7-CE51-4869-954C-79986FC61E61}"/>
               </a:ext>
             </a:extLst>
           </p:cNvPr>
@@ -13294,7 +13294,7 @@
           <p:cNvPr id="7" name="">
             <a:extLst xmlns:a="http://schemas.openxmlformats.org/drawingml/2006/main">
               <a:ext uri="{FF2B5EF4-FFF2-40B4-BE49-F238E27FC236}">
-                <a16:creationId xmlns:a16="http://schemas.microsoft.com/office/drawing/2014/main" id="{F96F9D80-73D4-4400-8B0B-21E8FA27708B}"/>
+                <a16:creationId xmlns:a16="http://schemas.microsoft.com/office/drawing/2014/main" id="{823C0E17-73FA-4023-8664-3CCD350E7EE3}"/>
               </a:ext>
             </a:extLst>
           </p:cNvPr>
@@ -13329,7 +13329,7 @@
           <p:cNvPr id="8" name="">
             <a:extLst xmlns:a="http://schemas.openxmlformats.org/drawingml/2006/main">
               <a:ext uri="{FF2B5EF4-FFF2-40B4-BE49-F238E27FC236}">
-                <a16:creationId xmlns:a16="http://schemas.microsoft.com/office/drawing/2014/main" id="{833FD78D-DDD2-4CF1-A1C5-21B5BB0A3CD0}"/>
+                <a16:creationId xmlns:a16="http://schemas.microsoft.com/office/drawing/2014/main" id="{795ACA07-756B-44F3-8A6A-77065C424DC0}"/>
               </a:ext>
             </a:extLst>
           </p:cNvPr>
@@ -13416,7 +13416,7 @@
           <p:cNvPr id="9" name="">
             <a:extLst xmlns:a="http://schemas.openxmlformats.org/drawingml/2006/main">
               <a:ext uri="{FF2B5EF4-FFF2-40B4-BE49-F238E27FC236}">
-                <a16:creationId xmlns:a16="http://schemas.microsoft.com/office/drawing/2014/main" id="{20B38D06-1918-4637-9C95-C63F6366E255}"/>
+                <a16:creationId xmlns:a16="http://schemas.microsoft.com/office/drawing/2014/main" id="{33E7CB2D-FBF1-4AA9-999B-3297459EEC39}"/>
               </a:ext>
             </a:extLst>
           </p:cNvPr>
@@ -13480,7 +13480,7 @@
           <p:cNvPr id="10" name="">
             <a:extLst xmlns:a="http://schemas.openxmlformats.org/drawingml/2006/main">
               <a:ext uri="{FF2B5EF4-FFF2-40B4-BE49-F238E27FC236}">
-                <a16:creationId xmlns:a16="http://schemas.microsoft.com/office/drawing/2014/main" id="{EC65C832-929F-43CA-9C73-E940435D5283}"/>
+                <a16:creationId xmlns:a16="http://schemas.microsoft.com/office/drawing/2014/main" id="{3EF8E5C7-BEE2-45A3-9CE1-4D9503BE4175}"/>
               </a:ext>
             </a:extLst>
           </p:cNvPr>
@@ -13515,7 +13515,7 @@
           <p:cNvPr id="11" name="">
             <a:extLst xmlns:a="http://schemas.openxmlformats.org/drawingml/2006/main">
               <a:ext uri="{FF2B5EF4-FFF2-40B4-BE49-F238E27FC236}">
-                <a16:creationId xmlns:a16="http://schemas.microsoft.com/office/drawing/2014/main" id="{E0E7C5D7-E540-4C21-88C0-614DC52FE56A}"/>
+                <a16:creationId xmlns:a16="http://schemas.microsoft.com/office/drawing/2014/main" id="{B65BC611-D8C9-44A4-A2B2-CEC5BA2A65FB}"/>
               </a:ext>
             </a:extLst>
           </p:cNvPr>
@@ -13579,7 +13579,7 @@
           <p:cNvPr id="12" name="">
             <a:extLst xmlns:a="http://schemas.openxmlformats.org/drawingml/2006/main">
               <a:ext uri="{FF2B5EF4-FFF2-40B4-BE49-F238E27FC236}">
-                <a16:creationId xmlns:a16="http://schemas.microsoft.com/office/drawing/2014/main" id="{4F80E9BE-DA3E-4C20-A157-26B3E3D741F9}"/>
+                <a16:creationId xmlns:a16="http://schemas.microsoft.com/office/drawing/2014/main" id="{665783FE-2D47-4E92-B3A8-A1212AFCBDB8}"/>
               </a:ext>
             </a:extLst>
           </p:cNvPr>
@@ -13612,7 +13612,7 @@
           <p:cNvPr id="13" name="">
             <a:extLst xmlns:a="http://schemas.openxmlformats.org/drawingml/2006/main">
               <a:ext uri="{FF2B5EF4-FFF2-40B4-BE49-F238E27FC236}">
-                <a16:creationId xmlns:a16="http://schemas.microsoft.com/office/drawing/2014/main" id="{1CD41D80-AE52-4AAE-8454-86DE882A1FAF}"/>
+                <a16:creationId xmlns:a16="http://schemas.microsoft.com/office/drawing/2014/main" id="{914D23DB-7D31-4F37-894B-E5CF0BFD87A1}"/>
               </a:ext>
             </a:extLst>
           </p:cNvPr>
@@ -13647,7 +13647,7 @@
           <p:cNvPr id="14" name="">
             <a:extLst xmlns:a="http://schemas.openxmlformats.org/drawingml/2006/main">
               <a:ext uri="{FF2B5EF4-FFF2-40B4-BE49-F238E27FC236}">
-                <a16:creationId xmlns:a16="http://schemas.microsoft.com/office/drawing/2014/main" id="{F5D1E4D6-387C-4259-B2E8-FE3622780386}"/>
+                <a16:creationId xmlns:a16="http://schemas.microsoft.com/office/drawing/2014/main" id="{1511037E-7523-48AC-910F-F5A8927958F8}"/>
               </a:ext>
             </a:extLst>
           </p:cNvPr>
@@ -13711,7 +13711,7 @@
           <p:cNvPr id="15" name="">
             <a:extLst xmlns:a="http://schemas.openxmlformats.org/drawingml/2006/main">
               <a:ext uri="{FF2B5EF4-FFF2-40B4-BE49-F238E27FC236}">
-                <a16:creationId xmlns:a16="http://schemas.microsoft.com/office/drawing/2014/main" id="{7F263634-54D2-4D6C-A898-02E18E774380}"/>
+                <a16:creationId xmlns:a16="http://schemas.microsoft.com/office/drawing/2014/main" id="{E75B4FA0-81F0-4F41-A2EF-76AB081494BA}"/>
               </a:ext>
             </a:extLst>
           </p:cNvPr>
@@ -13744,7 +13744,7 @@
           <p:cNvPr id="16" name="">
             <a:extLst xmlns:a="http://schemas.openxmlformats.org/drawingml/2006/main">
               <a:ext uri="{FF2B5EF4-FFF2-40B4-BE49-F238E27FC236}">
-                <a16:creationId xmlns:a16="http://schemas.microsoft.com/office/drawing/2014/main" id="{A1078422-CE92-4C84-A088-84FC6B372EB1}"/>
+                <a16:creationId xmlns:a16="http://schemas.microsoft.com/office/drawing/2014/main" id="{B56ED87F-7B25-49BF-A73A-277FD15E73E2}"/>
               </a:ext>
             </a:extLst>
           </p:cNvPr>
@@ -13779,7 +13779,7 @@
           <p:cNvPr id="17" name="">
             <a:extLst xmlns:a="http://schemas.openxmlformats.org/drawingml/2006/main">
               <a:ext uri="{FF2B5EF4-FFF2-40B4-BE49-F238E27FC236}">
-                <a16:creationId xmlns:a16="http://schemas.microsoft.com/office/drawing/2014/main" id="{CC14248B-4D41-4DEC-A1E3-CEECCDEB9C41}"/>
+                <a16:creationId xmlns:a16="http://schemas.microsoft.com/office/drawing/2014/main" id="{A00B209D-8149-4F25-BB23-32E139B212E6}"/>
               </a:ext>
             </a:extLst>
           </p:cNvPr>
@@ -13843,7 +13843,7 @@
           <p:cNvPr id="18" name="">
             <a:extLst xmlns:a="http://schemas.openxmlformats.org/drawingml/2006/main">
               <a:ext uri="{FF2B5EF4-FFF2-40B4-BE49-F238E27FC236}">
-                <a16:creationId xmlns:a16="http://schemas.microsoft.com/office/drawing/2014/main" id="{B943C426-3936-46ED-8DFA-55E9B80FAD2B}"/>
+                <a16:creationId xmlns:a16="http://schemas.microsoft.com/office/drawing/2014/main" id="{C7D30ABE-9236-410B-80A1-986CE5DD1F3E}"/>
               </a:ext>
             </a:extLst>
           </p:cNvPr>
@@ -13876,7 +13876,7 @@
           <p:cNvPr id="19" name="">
             <a:extLst xmlns:a="http://schemas.openxmlformats.org/drawingml/2006/main">
               <a:ext uri="{FF2B5EF4-FFF2-40B4-BE49-F238E27FC236}">
-                <a16:creationId xmlns:a16="http://schemas.microsoft.com/office/drawing/2014/main" id="{425A66B8-E35A-4374-8C6C-4B149475253B}"/>
+                <a16:creationId xmlns:a16="http://schemas.microsoft.com/office/drawing/2014/main" id="{707E23C0-8F8B-416A-814C-D9FC15AA1AB5}"/>
               </a:ext>
             </a:extLst>
           </p:cNvPr>
@@ -13911,7 +13911,7 @@
           <p:cNvPr id="20" name="">
             <a:extLst xmlns:a="http://schemas.openxmlformats.org/drawingml/2006/main">
               <a:ext uri="{FF2B5EF4-FFF2-40B4-BE49-F238E27FC236}">
-                <a16:creationId xmlns:a16="http://schemas.microsoft.com/office/drawing/2014/main" id="{4BC87C2F-F195-4292-A4BB-FF48CF0445E1}"/>
+                <a16:creationId xmlns:a16="http://schemas.microsoft.com/office/drawing/2014/main" id="{8087A66F-412D-4AF4-AEE4-1D19CF0A7310}"/>
               </a:ext>
             </a:extLst>
           </p:cNvPr>
@@ -13975,7 +13975,7 @@
           <p:cNvPr id="21" name="">
             <a:extLst xmlns:a="http://schemas.openxmlformats.org/drawingml/2006/main">
               <a:ext uri="{FF2B5EF4-FFF2-40B4-BE49-F238E27FC236}">
-                <a16:creationId xmlns:a16="http://schemas.microsoft.com/office/drawing/2014/main" id="{6F00C404-6FB6-4E05-8B6F-3AF8A5E79549}"/>
+                <a16:creationId xmlns:a16="http://schemas.microsoft.com/office/drawing/2014/main" id="{54B1D0C8-4F6F-4024-B9AF-CD84258E4CC1}"/>
               </a:ext>
             </a:extLst>
           </p:cNvPr>
@@ -14008,7 +14008,7 @@
           <p:cNvPr id="22" name="">
             <a:extLst xmlns:a="http://schemas.openxmlformats.org/drawingml/2006/main">
               <a:ext uri="{FF2B5EF4-FFF2-40B4-BE49-F238E27FC236}">
-                <a16:creationId xmlns:a16="http://schemas.microsoft.com/office/drawing/2014/main" id="{A02BD343-7D26-41AD-9BBA-8B9A7EE55EB6}"/>
+                <a16:creationId xmlns:a16="http://schemas.microsoft.com/office/drawing/2014/main" id="{191A3B4B-48D5-41CA-8590-C6BAFD7D9242}"/>
               </a:ext>
             </a:extLst>
           </p:cNvPr>
@@ -14043,7 +14043,7 @@
           <p:cNvPr id="23" name="">
             <a:extLst xmlns:a="http://schemas.openxmlformats.org/drawingml/2006/main">
               <a:ext uri="{FF2B5EF4-FFF2-40B4-BE49-F238E27FC236}">
-                <a16:creationId xmlns:a16="http://schemas.microsoft.com/office/drawing/2014/main" id="{7EEF4E7C-385D-40C1-AEBF-3776088BBB33}"/>
+                <a16:creationId xmlns:a16="http://schemas.microsoft.com/office/drawing/2014/main" id="{9935CDE9-2F3E-4F62-9A66-50851E0611DE}"/>
               </a:ext>
             </a:extLst>
           </p:cNvPr>
@@ -14107,7 +14107,7 @@
           <p:cNvPr id="24" name="">
             <a:extLst xmlns:a="http://schemas.openxmlformats.org/drawingml/2006/main">
               <a:ext uri="{FF2B5EF4-FFF2-40B4-BE49-F238E27FC236}">
-                <a16:creationId xmlns:a16="http://schemas.microsoft.com/office/drawing/2014/main" id="{A719D576-98DF-4891-9DEE-7875436D4707}"/>
+                <a16:creationId xmlns:a16="http://schemas.microsoft.com/office/drawing/2014/main" id="{7EC27637-D5E3-42B5-AF26-4B2CE7AD84F5}"/>
               </a:ext>
             </a:extLst>
           </p:cNvPr>
@@ -14140,7 +14140,7 @@
           <p:cNvPr id="25" name="">
             <a:extLst xmlns:a="http://schemas.openxmlformats.org/drawingml/2006/main">
               <a:ext uri="{FF2B5EF4-FFF2-40B4-BE49-F238E27FC236}">
-                <a16:creationId xmlns:a16="http://schemas.microsoft.com/office/drawing/2014/main" id="{69DBC8FF-2890-4DD4-84F3-F685CFF91D62}"/>
+                <a16:creationId xmlns:a16="http://schemas.microsoft.com/office/drawing/2014/main" id="{A9AE8F3B-DCF8-4523-9A9F-32CBBD954E02}"/>
               </a:ext>
             </a:extLst>
           </p:cNvPr>
@@ -14173,7 +14173,7 @@
           <p:cNvPr id="26" name="">
             <a:extLst xmlns:a="http://schemas.openxmlformats.org/drawingml/2006/main">
               <a:ext uri="{FF2B5EF4-FFF2-40B4-BE49-F238E27FC236}">
-                <a16:creationId xmlns:a16="http://schemas.microsoft.com/office/drawing/2014/main" id="{1BE9F497-CDB1-4B34-B8DC-DF9164DB0079}"/>
+                <a16:creationId xmlns:a16="http://schemas.microsoft.com/office/drawing/2014/main" id="{E64838F2-AA76-4F8A-A0B8-37CCDB039160}"/>
               </a:ext>
             </a:extLst>
           </p:cNvPr>
@@ -14237,7 +14237,7 @@
           <p:cNvPr id="27" name="">
             <a:extLst xmlns:a="http://schemas.openxmlformats.org/drawingml/2006/main">
               <a:ext uri="{FF2B5EF4-FFF2-40B4-BE49-F238E27FC236}">
-                <a16:creationId xmlns:a16="http://schemas.microsoft.com/office/drawing/2014/main" id="{A021A331-7E9C-4022-83C0-96B6C3D68734}"/>
+                <a16:creationId xmlns:a16="http://schemas.microsoft.com/office/drawing/2014/main" id="{4D0EA09A-5406-4488-B02A-F590A8720CCA}"/>
               </a:ext>
             </a:extLst>
           </p:cNvPr>
@@ -14270,7 +14270,7 @@
           <p:cNvPr id="28" name="">
             <a:extLst xmlns:a="http://schemas.openxmlformats.org/drawingml/2006/main">
               <a:ext uri="{FF2B5EF4-FFF2-40B4-BE49-F238E27FC236}">
-                <a16:creationId xmlns:a16="http://schemas.microsoft.com/office/drawing/2014/main" id="{F542551E-8A3F-4207-A88D-596221A1A169}"/>
+                <a16:creationId xmlns:a16="http://schemas.microsoft.com/office/drawing/2014/main" id="{EA4F2A5E-394E-4EEF-94B6-7B00873F6C13}"/>
               </a:ext>
             </a:extLst>
           </p:cNvPr>
@@ -14334,7 +14334,7 @@
           <p:cNvPr id="29" name="">
             <a:extLst xmlns:a="http://schemas.openxmlformats.org/drawingml/2006/main">
               <a:ext uri="{FF2B5EF4-FFF2-40B4-BE49-F238E27FC236}">
-                <a16:creationId xmlns:a16="http://schemas.microsoft.com/office/drawing/2014/main" id="{1C07B0FA-5D05-4D25-9D0C-CDE5B2FE399D}"/>
+                <a16:creationId xmlns:a16="http://schemas.microsoft.com/office/drawing/2014/main" id="{758BE034-C3E8-46FD-B8F4-D70F2A67CF01}"/>
               </a:ext>
             </a:extLst>
           </p:cNvPr>
@@ -14396,7 +14396,7 @@
     </p:spTree>
     <p:extLst>
       <p:ext uri="{BB962C8B-B14F-4D97-AF65-F5344CB8AC3E}">
-        <p14:creationId xmlns:p14="http://schemas.microsoft.com/office/powerpoint/2010/main" val="1038212782"/>
+        <p14:creationId xmlns:p14="http://schemas.microsoft.com/office/powerpoint/2010/main" val="1809882581"/>
       </p:ext>
     </p:extLst>
   </p:cSld>
@@ -14424,7 +14424,7 @@
           <p:nvPr/>
         </p:nvPicPr>
         <p:blipFill>
-          <a:blip xmlns:r="http://schemas.openxmlformats.org/officeDocument/2006/relationships" xmlns:a="http://schemas.openxmlformats.org/drawingml/2006/main" r:embed="R35d4d6e2b2a94359"/>
+          <a:blip xmlns:r="http://schemas.openxmlformats.org/officeDocument/2006/relationships" xmlns:a="http://schemas.openxmlformats.org/drawingml/2006/main" r:embed="R941153c93886422e"/>
           <a:srcRect xmlns:a="http://schemas.openxmlformats.org/drawingml/2006/main" l="0" t="27" r="0" b="27"/>
           <a:stretch xmlns:a="http://schemas.openxmlformats.org/drawingml/2006/main">
             <a:fillRect l="0" t="0" r="0" b="0"/>
@@ -14445,7 +14445,7 @@
           <p:cNvPr id="2" name="">
             <a:extLst xmlns:a="http://schemas.openxmlformats.org/drawingml/2006/main">
               <a:ext uri="{FF2B5EF4-FFF2-40B4-BE49-F238E27FC236}">
-                <a16:creationId xmlns:a16="http://schemas.microsoft.com/office/drawing/2014/main" id="{39C8DC50-2556-428A-B56C-B49B7FFA37F5}"/>
+                <a16:creationId xmlns:a16="http://schemas.microsoft.com/office/drawing/2014/main" id="{1923111A-7D59-482D-80DD-7EBCB87DBD0A}"/>
               </a:ext>
             </a:extLst>
           </p:cNvPr>
@@ -14482,7 +14482,7 @@
           <p:cNvPr id="3" name="">
             <a:extLst xmlns:a="http://schemas.openxmlformats.org/drawingml/2006/main">
               <a:ext uri="{FF2B5EF4-FFF2-40B4-BE49-F238E27FC236}">
-                <a16:creationId xmlns:a16="http://schemas.microsoft.com/office/drawing/2014/main" id="{F52D76E4-7CCE-4B6A-9796-9E1D4F8B3C4B}"/>
+                <a16:creationId xmlns:a16="http://schemas.microsoft.com/office/drawing/2014/main" id="{735FD1F7-DA3A-4EF3-9DCE-3986C77A44C0}"/>
               </a:ext>
             </a:extLst>
           </p:cNvPr>
@@ -14519,7 +14519,7 @@
           <p:cNvPr id="4" name="">
             <a:extLst xmlns:a="http://schemas.openxmlformats.org/drawingml/2006/main">
               <a:ext uri="{FF2B5EF4-FFF2-40B4-BE49-F238E27FC236}">
-                <a16:creationId xmlns:a16="http://schemas.microsoft.com/office/drawing/2014/main" id="{A8B38D47-CBA5-4871-8D37-C5202404751E}"/>
+                <a16:creationId xmlns:a16="http://schemas.microsoft.com/office/drawing/2014/main" id="{C177F4EA-F91F-4C94-B004-D2A15117272C}"/>
               </a:ext>
             </a:extLst>
           </p:cNvPr>
@@ -14583,7 +14583,7 @@
           <p:cNvPr id="5" name="">
             <a:extLst xmlns:a="http://schemas.openxmlformats.org/drawingml/2006/main">
               <a:ext uri="{FF2B5EF4-FFF2-40B4-BE49-F238E27FC236}">
-                <a16:creationId xmlns:a16="http://schemas.microsoft.com/office/drawing/2014/main" id="{2BD4CAB6-A97A-44E5-ACBD-4A8B5F91B2EF}"/>
+                <a16:creationId xmlns:a16="http://schemas.microsoft.com/office/drawing/2014/main" id="{FC2EFD22-BAD6-494A-8DF1-7184E88F8E85}"/>
               </a:ext>
             </a:extLst>
           </p:cNvPr>
@@ -14647,7 +14647,7 @@
           <p:cNvPr id="6" name="">
             <a:extLst xmlns:a="http://schemas.openxmlformats.org/drawingml/2006/main">
               <a:ext uri="{FF2B5EF4-FFF2-40B4-BE49-F238E27FC236}">
-                <a16:creationId xmlns:a16="http://schemas.microsoft.com/office/drawing/2014/main" id="{EFD1A1EF-E5F7-473B-AC2C-EE64AD023719}"/>
+                <a16:creationId xmlns:a16="http://schemas.microsoft.com/office/drawing/2014/main" id="{C37F711D-20F4-4E6B-8B21-F971AEA4DBB3}"/>
               </a:ext>
             </a:extLst>
           </p:cNvPr>
@@ -14711,7 +14711,7 @@
           <p:cNvPr id="7" name="">
             <a:extLst xmlns:a="http://schemas.openxmlformats.org/drawingml/2006/main">
               <a:ext uri="{FF2B5EF4-FFF2-40B4-BE49-F238E27FC236}">
-                <a16:creationId xmlns:a16="http://schemas.microsoft.com/office/drawing/2014/main" id="{8ECE5CFE-3D76-4082-ABD3-0E1859080513}"/>
+                <a16:creationId xmlns:a16="http://schemas.microsoft.com/office/drawing/2014/main" id="{B14D1B34-03DF-4E7C-99E2-C809C54B31FE}"/>
               </a:ext>
             </a:extLst>
           </p:cNvPr>
@@ -14746,7 +14746,7 @@
           <p:cNvPr id="8" name="">
             <a:extLst xmlns:a="http://schemas.openxmlformats.org/drawingml/2006/main">
               <a:ext uri="{FF2B5EF4-FFF2-40B4-BE49-F238E27FC236}">
-                <a16:creationId xmlns:a16="http://schemas.microsoft.com/office/drawing/2014/main" id="{494D1AE4-D1CB-48DD-8E83-09F1C29ED173}"/>
+                <a16:creationId xmlns:a16="http://schemas.microsoft.com/office/drawing/2014/main" id="{70848AE4-B8BC-4279-B62E-8725A5338697}"/>
               </a:ext>
             </a:extLst>
           </p:cNvPr>
@@ -14810,7 +14810,7 @@
           <p:cNvPr id="9" name="">
             <a:extLst xmlns:a="http://schemas.openxmlformats.org/drawingml/2006/main">
               <a:ext uri="{FF2B5EF4-FFF2-40B4-BE49-F238E27FC236}">
-                <a16:creationId xmlns:a16="http://schemas.microsoft.com/office/drawing/2014/main" id="{FC8E3A5C-1461-46B3-9115-74D3CF15C36C}"/>
+                <a16:creationId xmlns:a16="http://schemas.microsoft.com/office/drawing/2014/main" id="{A7F13AF3-63A6-4F9C-99B8-1AE9F7FF5B0B}"/>
               </a:ext>
             </a:extLst>
           </p:cNvPr>
@@ -14874,7 +14874,7 @@
           <p:cNvPr id="10" name="">
             <a:extLst xmlns:a="http://schemas.openxmlformats.org/drawingml/2006/main">
               <a:ext uri="{FF2B5EF4-FFF2-40B4-BE49-F238E27FC236}">
-                <a16:creationId xmlns:a16="http://schemas.microsoft.com/office/drawing/2014/main" id="{DCE5FFB2-231C-46D3-9ABA-5F4A5DD6C675}"/>
+                <a16:creationId xmlns:a16="http://schemas.microsoft.com/office/drawing/2014/main" id="{8F43AAC2-D6F3-4F56-8B6F-74CED92F81EA}"/>
               </a:ext>
             </a:extLst>
           </p:cNvPr>
@@ -14907,7 +14907,7 @@
           <p:cNvPr id="11" name="">
             <a:extLst xmlns:a="http://schemas.openxmlformats.org/drawingml/2006/main">
               <a:ext uri="{FF2B5EF4-FFF2-40B4-BE49-F238E27FC236}">
-                <a16:creationId xmlns:a16="http://schemas.microsoft.com/office/drawing/2014/main" id="{2176368A-BD16-4935-9ABE-1C17CD95B4CD}"/>
+                <a16:creationId xmlns:a16="http://schemas.microsoft.com/office/drawing/2014/main" id="{30F50066-F726-4EC0-9C73-9037B330A39C}"/>
               </a:ext>
             </a:extLst>
           </p:cNvPr>
@@ -14942,7 +14942,7 @@
           <p:cNvPr id="12" name="">
             <a:extLst xmlns:a="http://schemas.openxmlformats.org/drawingml/2006/main">
               <a:ext uri="{FF2B5EF4-FFF2-40B4-BE49-F238E27FC236}">
-                <a16:creationId xmlns:a16="http://schemas.microsoft.com/office/drawing/2014/main" id="{D80E31E7-36D9-4C84-B5B1-BC3B3A19620D}"/>
+                <a16:creationId xmlns:a16="http://schemas.microsoft.com/office/drawing/2014/main" id="{397924E5-E369-4B23-B672-32FA0C6FB5E3}"/>
               </a:ext>
             </a:extLst>
           </p:cNvPr>
@@ -15006,7 +15006,7 @@
           <p:cNvPr id="13" name="">
             <a:extLst xmlns:a="http://schemas.openxmlformats.org/drawingml/2006/main">
               <a:ext uri="{FF2B5EF4-FFF2-40B4-BE49-F238E27FC236}">
-                <a16:creationId xmlns:a16="http://schemas.microsoft.com/office/drawing/2014/main" id="{D6049E0A-8B4A-472C-AB81-8CDE88E9E936}"/>
+                <a16:creationId xmlns:a16="http://schemas.microsoft.com/office/drawing/2014/main" id="{AF72EECE-DB03-4C55-B521-042AB79D4240}"/>
               </a:ext>
             </a:extLst>
           </p:cNvPr>
@@ -15070,7 +15070,7 @@
           <p:cNvPr id="14" name="">
             <a:extLst xmlns:a="http://schemas.openxmlformats.org/drawingml/2006/main">
               <a:ext uri="{FF2B5EF4-FFF2-40B4-BE49-F238E27FC236}">
-                <a16:creationId xmlns:a16="http://schemas.microsoft.com/office/drawing/2014/main" id="{0590825A-AB2E-43C3-83BC-14906B89A9DB}"/>
+                <a16:creationId xmlns:a16="http://schemas.microsoft.com/office/drawing/2014/main" id="{F0BEB162-2EF5-4099-9CEA-CCBEBC299AE4}"/>
               </a:ext>
             </a:extLst>
           </p:cNvPr>
@@ -15103,7 +15103,7 @@
           <p:cNvPr id="15" name="">
             <a:extLst xmlns:a="http://schemas.openxmlformats.org/drawingml/2006/main">
               <a:ext uri="{FF2B5EF4-FFF2-40B4-BE49-F238E27FC236}">
-                <a16:creationId xmlns:a16="http://schemas.microsoft.com/office/drawing/2014/main" id="{AF77B43E-AF26-4306-95B4-A052784E1EDF}"/>
+                <a16:creationId xmlns:a16="http://schemas.microsoft.com/office/drawing/2014/main" id="{44C4BA5D-5DC7-4E2B-BD8B-41D96AED68E0}"/>
               </a:ext>
             </a:extLst>
           </p:cNvPr>
@@ -15138,7 +15138,7 @@
           <p:cNvPr id="16" name="">
             <a:extLst xmlns:a="http://schemas.openxmlformats.org/drawingml/2006/main">
               <a:ext uri="{FF2B5EF4-FFF2-40B4-BE49-F238E27FC236}">
-                <a16:creationId xmlns:a16="http://schemas.microsoft.com/office/drawing/2014/main" id="{92B6C479-DB8A-4BFD-A3B8-402BA688AB57}"/>
+                <a16:creationId xmlns:a16="http://schemas.microsoft.com/office/drawing/2014/main" id="{930A8EE7-628C-4B6E-96A2-E102682FF925}"/>
               </a:ext>
             </a:extLst>
           </p:cNvPr>
@@ -15202,7 +15202,7 @@
           <p:cNvPr id="17" name="">
             <a:extLst xmlns:a="http://schemas.openxmlformats.org/drawingml/2006/main">
               <a:ext uri="{FF2B5EF4-FFF2-40B4-BE49-F238E27FC236}">
-                <a16:creationId xmlns:a16="http://schemas.microsoft.com/office/drawing/2014/main" id="{7F82979A-5A6B-4B6B-BC90-64CE371AE944}"/>
+                <a16:creationId xmlns:a16="http://schemas.microsoft.com/office/drawing/2014/main" id="{1BD10E73-D0F2-4821-AF73-96FEC8CFA6DE}"/>
               </a:ext>
             </a:extLst>
           </p:cNvPr>
@@ -15266,7 +15266,7 @@
           <p:cNvPr id="18" name="">
             <a:extLst xmlns:a="http://schemas.openxmlformats.org/drawingml/2006/main">
               <a:ext uri="{FF2B5EF4-FFF2-40B4-BE49-F238E27FC236}">
-                <a16:creationId xmlns:a16="http://schemas.microsoft.com/office/drawing/2014/main" id="{9AEF7A60-51D2-4479-BC1A-CC02819C52F8}"/>
+                <a16:creationId xmlns:a16="http://schemas.microsoft.com/office/drawing/2014/main" id="{A32C68A5-B246-4CED-9860-0FF35D908463}"/>
               </a:ext>
             </a:extLst>
           </p:cNvPr>
@@ -15299,7 +15299,7 @@
           <p:cNvPr id="19" name="">
             <a:extLst xmlns:a="http://schemas.openxmlformats.org/drawingml/2006/main">
               <a:ext uri="{FF2B5EF4-FFF2-40B4-BE49-F238E27FC236}">
-                <a16:creationId xmlns:a16="http://schemas.microsoft.com/office/drawing/2014/main" id="{427F0FB8-CC5A-4A88-808D-FE4C5344763F}"/>
+                <a16:creationId xmlns:a16="http://schemas.microsoft.com/office/drawing/2014/main" id="{93F56CFC-EECE-47AE-925E-AF12B8D61251}"/>
               </a:ext>
             </a:extLst>
           </p:cNvPr>
@@ -15334,7 +15334,7 @@
           <p:cNvPr id="20" name="">
             <a:extLst xmlns:a="http://schemas.openxmlformats.org/drawingml/2006/main">
               <a:ext uri="{FF2B5EF4-FFF2-40B4-BE49-F238E27FC236}">
-                <a16:creationId xmlns:a16="http://schemas.microsoft.com/office/drawing/2014/main" id="{4F14D310-1221-4A84-95F7-D0E45C1FF732}"/>
+                <a16:creationId xmlns:a16="http://schemas.microsoft.com/office/drawing/2014/main" id="{30182055-E1DD-4769-927B-B278C63229B3}"/>
               </a:ext>
             </a:extLst>
           </p:cNvPr>
@@ -15398,7 +15398,7 @@
           <p:cNvPr id="21" name="">
             <a:extLst xmlns:a="http://schemas.openxmlformats.org/drawingml/2006/main">
               <a:ext uri="{FF2B5EF4-FFF2-40B4-BE49-F238E27FC236}">
-                <a16:creationId xmlns:a16="http://schemas.microsoft.com/office/drawing/2014/main" id="{4A8A1339-1AAF-4A95-B890-45E40ECBF3BD}"/>
+                <a16:creationId xmlns:a16="http://schemas.microsoft.com/office/drawing/2014/main" id="{C3F61256-E34E-42D4-9CFA-A7A3E8AFE946}"/>
               </a:ext>
             </a:extLst>
           </p:cNvPr>
@@ -15462,7 +15462,7 @@
           <p:cNvPr id="22" name="">
             <a:extLst xmlns:a="http://schemas.openxmlformats.org/drawingml/2006/main">
               <a:ext uri="{FF2B5EF4-FFF2-40B4-BE49-F238E27FC236}">
-                <a16:creationId xmlns:a16="http://schemas.microsoft.com/office/drawing/2014/main" id="{16AF67F2-95C7-43C6-83A4-8195EEFBD93B}"/>
+                <a16:creationId xmlns:a16="http://schemas.microsoft.com/office/drawing/2014/main" id="{E7A4B904-10E3-40CD-9EDE-46A393E1DE81}"/>
               </a:ext>
             </a:extLst>
           </p:cNvPr>
@@ -15526,7 +15526,7 @@
           <p:cNvPr id="23" name="">
             <a:extLst xmlns:a="http://schemas.openxmlformats.org/drawingml/2006/main">
               <a:ext uri="{FF2B5EF4-FFF2-40B4-BE49-F238E27FC236}">
-                <a16:creationId xmlns:a16="http://schemas.microsoft.com/office/drawing/2014/main" id="{19A4C9F7-136B-4378-BD1D-50D7A776C43E}"/>
+                <a16:creationId xmlns:a16="http://schemas.microsoft.com/office/drawing/2014/main" id="{4AF7CEE3-4532-4F80-A484-103ADD609325}"/>
               </a:ext>
             </a:extLst>
           </p:cNvPr>
@@ -15590,7 +15590,7 @@
           <p:cNvPr id="24" name="">
             <a:extLst xmlns:a="http://schemas.openxmlformats.org/drawingml/2006/main">
               <a:ext uri="{FF2B5EF4-FFF2-40B4-BE49-F238E27FC236}">
-                <a16:creationId xmlns:a16="http://schemas.microsoft.com/office/drawing/2014/main" id="{FD5A0027-8717-439C-B02E-11D1B4D3829C}"/>
+                <a16:creationId xmlns:a16="http://schemas.microsoft.com/office/drawing/2014/main" id="{A386FE43-A1DD-4E21-91E9-1FB989C2100B}"/>
               </a:ext>
             </a:extLst>
           </p:cNvPr>
@@ -15623,7 +15623,7 @@
           <p:cNvPr id="25" name="">
             <a:extLst xmlns:a="http://schemas.openxmlformats.org/drawingml/2006/main">
               <a:ext uri="{FF2B5EF4-FFF2-40B4-BE49-F238E27FC236}">
-                <a16:creationId xmlns:a16="http://schemas.microsoft.com/office/drawing/2014/main" id="{6623C3D7-34E4-4A0B-8729-EB655A3C0ABC}"/>
+                <a16:creationId xmlns:a16="http://schemas.microsoft.com/office/drawing/2014/main" id="{9CE32DBB-A0A8-4AF0-A462-C5EB997E7BF2}"/>
               </a:ext>
             </a:extLst>
           </p:cNvPr>
@@ -15687,7 +15687,7 @@
           <p:cNvPr id="26" name="">
             <a:extLst xmlns:a="http://schemas.openxmlformats.org/drawingml/2006/main">
               <a:ext uri="{FF2B5EF4-FFF2-40B4-BE49-F238E27FC236}">
-                <a16:creationId xmlns:a16="http://schemas.microsoft.com/office/drawing/2014/main" id="{BF681422-890D-4425-AFD4-0A282263C2E0}"/>
+                <a16:creationId xmlns:a16="http://schemas.microsoft.com/office/drawing/2014/main" id="{4F8BD8DA-C04E-4D37-B383-794178DB404C}"/>
               </a:ext>
             </a:extLst>
           </p:cNvPr>
@@ -15749,7 +15749,7 @@
     </p:spTree>
     <p:extLst>
       <p:ext uri="{BB962C8B-B14F-4D97-AF65-F5344CB8AC3E}">
-        <p14:creationId xmlns:p14="http://schemas.microsoft.com/office/powerpoint/2010/main" val="564295870"/>
+        <p14:creationId xmlns:p14="http://schemas.microsoft.com/office/powerpoint/2010/main" val="771325826"/>
       </p:ext>
     </p:extLst>
   </p:cSld>
@@ -15777,7 +15777,7 @@
           <p:nvPr/>
         </p:nvPicPr>
         <p:blipFill>
-          <a:blip xmlns:r="http://schemas.openxmlformats.org/officeDocument/2006/relationships" xmlns:a="http://schemas.openxmlformats.org/drawingml/2006/main" r:embed="Rd9e60495fbcb4b7d"/>
+          <a:blip xmlns:r="http://schemas.openxmlformats.org/officeDocument/2006/relationships" xmlns:a="http://schemas.openxmlformats.org/drawingml/2006/main" r:embed="Reb602b7b2e4348c5"/>
           <a:srcRect xmlns:a="http://schemas.openxmlformats.org/drawingml/2006/main" l="0" t="7813" r="0" b="7813"/>
           <a:stretch xmlns:a="http://schemas.openxmlformats.org/drawingml/2006/main">
             <a:fillRect l="0" t="0" r="0" b="0"/>
@@ -15798,7 +15798,7 @@
           <p:cNvPr id="2" name="">
             <a:extLst xmlns:a="http://schemas.openxmlformats.org/drawingml/2006/main">
               <a:ext uri="{FF2B5EF4-FFF2-40B4-BE49-F238E27FC236}">
-                <a16:creationId xmlns:a16="http://schemas.microsoft.com/office/drawing/2014/main" id="{2CB42836-2DFB-4110-81D1-0C57E9895500}"/>
+                <a16:creationId xmlns:a16="http://schemas.microsoft.com/office/drawing/2014/main" id="{2EAA557A-3C46-44EF-98AD-CC4F9D24695E}"/>
               </a:ext>
             </a:extLst>
           </p:cNvPr>
@@ -15835,7 +15835,7 @@
           <p:cNvPr id="3" name="">
             <a:extLst xmlns:a="http://schemas.openxmlformats.org/drawingml/2006/main">
               <a:ext uri="{FF2B5EF4-FFF2-40B4-BE49-F238E27FC236}">
-                <a16:creationId xmlns:a16="http://schemas.microsoft.com/office/drawing/2014/main" id="{2FC168AD-9FDD-4DAD-99E9-CF0BF52B433B}"/>
+                <a16:creationId xmlns:a16="http://schemas.microsoft.com/office/drawing/2014/main" id="{39C6ED92-7A97-4606-9C9D-549C6CB0BCDA}"/>
               </a:ext>
             </a:extLst>
           </p:cNvPr>
@@ -15872,7 +15872,7 @@
           <p:cNvPr id="4" name="">
             <a:extLst xmlns:a="http://schemas.openxmlformats.org/drawingml/2006/main">
               <a:ext uri="{FF2B5EF4-FFF2-40B4-BE49-F238E27FC236}">
-                <a16:creationId xmlns:a16="http://schemas.microsoft.com/office/drawing/2014/main" id="{F476F907-458C-46EB-B424-5A731B098CD8}"/>
+                <a16:creationId xmlns:a16="http://schemas.microsoft.com/office/drawing/2014/main" id="{C301B143-7442-43B1-9F7E-1262B9E0B518}"/>
               </a:ext>
             </a:extLst>
           </p:cNvPr>
@@ -15936,7 +15936,7 @@
           <p:cNvPr id="5" name="">
             <a:extLst xmlns:a="http://schemas.openxmlformats.org/drawingml/2006/main">
               <a:ext uri="{FF2B5EF4-FFF2-40B4-BE49-F238E27FC236}">
-                <a16:creationId xmlns:a16="http://schemas.microsoft.com/office/drawing/2014/main" id="{DE081465-198D-4B3C-8970-295A07815BA8}"/>
+                <a16:creationId xmlns:a16="http://schemas.microsoft.com/office/drawing/2014/main" id="{2E19816B-9820-466A-83FF-6575A48D3638}"/>
               </a:ext>
             </a:extLst>
           </p:cNvPr>
@@ -16000,7 +16000,7 @@
           <p:cNvPr id="6" name="">
             <a:extLst xmlns:a="http://schemas.openxmlformats.org/drawingml/2006/main">
               <a:ext uri="{FF2B5EF4-FFF2-40B4-BE49-F238E27FC236}">
-                <a16:creationId xmlns:a16="http://schemas.microsoft.com/office/drawing/2014/main" id="{212134BA-E5B4-47C4-97A1-81F2A3192F1F}"/>
+                <a16:creationId xmlns:a16="http://schemas.microsoft.com/office/drawing/2014/main" id="{E60C0E5E-A543-4763-8A91-90A52C0A01CE}"/>
               </a:ext>
             </a:extLst>
           </p:cNvPr>
@@ -16064,7 +16064,7 @@
           <p:cNvPr id="7" name="">
             <a:extLst xmlns:a="http://schemas.openxmlformats.org/drawingml/2006/main">
               <a:ext uri="{FF2B5EF4-FFF2-40B4-BE49-F238E27FC236}">
-                <a16:creationId xmlns:a16="http://schemas.microsoft.com/office/drawing/2014/main" id="{2CF87F8C-0C90-4ED8-84E6-B06FC6AD0FE7}"/>
+                <a16:creationId xmlns:a16="http://schemas.microsoft.com/office/drawing/2014/main" id="{902F976B-96A3-43BC-9AF7-4E7953396262}"/>
               </a:ext>
             </a:extLst>
           </p:cNvPr>
@@ -16099,7 +16099,7 @@
           <p:cNvPr id="8" name="">
             <a:extLst xmlns:a="http://schemas.openxmlformats.org/drawingml/2006/main">
               <a:ext uri="{FF2B5EF4-FFF2-40B4-BE49-F238E27FC236}">
-                <a16:creationId xmlns:a16="http://schemas.microsoft.com/office/drawing/2014/main" id="{3D0FD46C-6157-486A-96B3-B1045EEA4ED4}"/>
+                <a16:creationId xmlns:a16="http://schemas.microsoft.com/office/drawing/2014/main" id="{A7D4B136-EC59-40A0-88A8-BCA24DC3C248}"/>
               </a:ext>
             </a:extLst>
           </p:cNvPr>
@@ -16163,7 +16163,7 @@
           <p:cNvPr id="9" name="">
             <a:extLst xmlns:a="http://schemas.openxmlformats.org/drawingml/2006/main">
               <a:ext uri="{FF2B5EF4-FFF2-40B4-BE49-F238E27FC236}">
-                <a16:creationId xmlns:a16="http://schemas.microsoft.com/office/drawing/2014/main" id="{562273D0-49D3-436B-B607-E7B1C473DAF8}"/>
+                <a16:creationId xmlns:a16="http://schemas.microsoft.com/office/drawing/2014/main" id="{34851F68-C710-42E7-A4CA-0413E26075CB}"/>
               </a:ext>
             </a:extLst>
           </p:cNvPr>
@@ -16227,7 +16227,7 @@
           <p:cNvPr id="10" name="">
             <a:extLst xmlns:a="http://schemas.openxmlformats.org/drawingml/2006/main">
               <a:ext uri="{FF2B5EF4-FFF2-40B4-BE49-F238E27FC236}">
-                <a16:creationId xmlns:a16="http://schemas.microsoft.com/office/drawing/2014/main" id="{7F62A147-31A1-45C5-9EF4-8B552212945D}"/>
+                <a16:creationId xmlns:a16="http://schemas.microsoft.com/office/drawing/2014/main" id="{FF567265-D93F-44DC-9401-C92DD3433958}"/>
               </a:ext>
             </a:extLst>
           </p:cNvPr>
@@ -16262,7 +16262,7 @@
           <p:cNvPr id="11" name="">
             <a:extLst xmlns:a="http://schemas.openxmlformats.org/drawingml/2006/main">
               <a:ext uri="{FF2B5EF4-FFF2-40B4-BE49-F238E27FC236}">
-                <a16:creationId xmlns:a16="http://schemas.microsoft.com/office/drawing/2014/main" id="{B607CA6F-C7C7-45C9-B17D-C2790AF52AB4}"/>
+                <a16:creationId xmlns:a16="http://schemas.microsoft.com/office/drawing/2014/main" id="{9B6EC848-42C1-4A56-8C13-2D6D4CB9C5D4}"/>
               </a:ext>
             </a:extLst>
           </p:cNvPr>
@@ -16326,7 +16326,7 @@
           <p:cNvPr id="12" name="">
             <a:extLst xmlns:a="http://schemas.openxmlformats.org/drawingml/2006/main">
               <a:ext uri="{FF2B5EF4-FFF2-40B4-BE49-F238E27FC236}">
-                <a16:creationId xmlns:a16="http://schemas.microsoft.com/office/drawing/2014/main" id="{8112CC5F-614A-454B-A4CF-0039F13DF284}"/>
+                <a16:creationId xmlns:a16="http://schemas.microsoft.com/office/drawing/2014/main" id="{9122130F-242B-43C6-B641-ABAAC86A4123}"/>
               </a:ext>
             </a:extLst>
           </p:cNvPr>
@@ -16390,7 +16390,7 @@
           <p:cNvPr id="13" name="">
             <a:extLst xmlns:a="http://schemas.openxmlformats.org/drawingml/2006/main">
               <a:ext uri="{FF2B5EF4-FFF2-40B4-BE49-F238E27FC236}">
-                <a16:creationId xmlns:a16="http://schemas.microsoft.com/office/drawing/2014/main" id="{BA1FA3EF-3422-4FD2-9833-0F9CF40AA639}"/>
+                <a16:creationId xmlns:a16="http://schemas.microsoft.com/office/drawing/2014/main" id="{065DE130-EF41-41E7-8472-D40852053AFB}"/>
               </a:ext>
             </a:extLst>
           </p:cNvPr>
@@ -16425,7 +16425,7 @@
           <p:cNvPr id="14" name="">
             <a:extLst xmlns:a="http://schemas.openxmlformats.org/drawingml/2006/main">
               <a:ext uri="{FF2B5EF4-FFF2-40B4-BE49-F238E27FC236}">
-                <a16:creationId xmlns:a16="http://schemas.microsoft.com/office/drawing/2014/main" id="{DC64A3E1-788C-439E-BB16-92F2AA5ADACC}"/>
+                <a16:creationId xmlns:a16="http://schemas.microsoft.com/office/drawing/2014/main" id="{24A5A9EF-C9D7-4FF8-9F8B-D90FDEEA8137}"/>
               </a:ext>
             </a:extLst>
           </p:cNvPr>
@@ -16489,7 +16489,7 @@
           <p:cNvPr id="15" name="">
             <a:extLst xmlns:a="http://schemas.openxmlformats.org/drawingml/2006/main">
               <a:ext uri="{FF2B5EF4-FFF2-40B4-BE49-F238E27FC236}">
-                <a16:creationId xmlns:a16="http://schemas.microsoft.com/office/drawing/2014/main" id="{B20003B3-C205-4EFA-8752-6EEAAC4BCB91}"/>
+                <a16:creationId xmlns:a16="http://schemas.microsoft.com/office/drawing/2014/main" id="{3B1EBA2A-5CC8-4EED-9695-DBE4B1556528}"/>
               </a:ext>
             </a:extLst>
           </p:cNvPr>
@@ -16553,7 +16553,7 @@
           <p:cNvPr id="16" name="">
             <a:extLst xmlns:a="http://schemas.openxmlformats.org/drawingml/2006/main">
               <a:ext uri="{FF2B5EF4-FFF2-40B4-BE49-F238E27FC236}">
-                <a16:creationId xmlns:a16="http://schemas.microsoft.com/office/drawing/2014/main" id="{7454DADF-FC04-453D-BC12-200554A95BB2}"/>
+                <a16:creationId xmlns:a16="http://schemas.microsoft.com/office/drawing/2014/main" id="{84642340-CAB9-48A1-B18F-F39C3F32B9F1}"/>
               </a:ext>
             </a:extLst>
           </p:cNvPr>
@@ -16588,7 +16588,7 @@
           <p:cNvPr id="17" name="">
             <a:extLst xmlns:a="http://schemas.openxmlformats.org/drawingml/2006/main">
               <a:ext uri="{FF2B5EF4-FFF2-40B4-BE49-F238E27FC236}">
-                <a16:creationId xmlns:a16="http://schemas.microsoft.com/office/drawing/2014/main" id="{98FB7F72-F2CB-4E69-8BCC-31DEF8A8FE4C}"/>
+                <a16:creationId xmlns:a16="http://schemas.microsoft.com/office/drawing/2014/main" id="{A9C579FC-7968-481C-90A7-9D50187D7E78}"/>
               </a:ext>
             </a:extLst>
           </p:cNvPr>
@@ -16652,7 +16652,7 @@
           <p:cNvPr id="18" name="">
             <a:extLst xmlns:a="http://schemas.openxmlformats.org/drawingml/2006/main">
               <a:ext uri="{FF2B5EF4-FFF2-40B4-BE49-F238E27FC236}">
-                <a16:creationId xmlns:a16="http://schemas.microsoft.com/office/drawing/2014/main" id="{58A2DB8D-5A4F-4E5E-8CF9-D8D7388FA7CF}"/>
+                <a16:creationId xmlns:a16="http://schemas.microsoft.com/office/drawing/2014/main" id="{190B42AB-1DDE-4179-9150-F436890AB741}"/>
               </a:ext>
             </a:extLst>
           </p:cNvPr>
@@ -16716,7 +16716,7 @@
           <p:cNvPr id="19" name="">
             <a:extLst xmlns:a="http://schemas.openxmlformats.org/drawingml/2006/main">
               <a:ext uri="{FF2B5EF4-FFF2-40B4-BE49-F238E27FC236}">
-                <a16:creationId xmlns:a16="http://schemas.microsoft.com/office/drawing/2014/main" id="{1FCF55FD-04E1-441D-BEB9-81C5784A089A}"/>
+                <a16:creationId xmlns:a16="http://schemas.microsoft.com/office/drawing/2014/main" id="{C152FF83-3C54-431D-B4A3-5B6E724485C7}"/>
               </a:ext>
             </a:extLst>
           </p:cNvPr>
@@ -16751,7 +16751,7 @@
           <p:cNvPr id="20" name="">
             <a:extLst xmlns:a="http://schemas.openxmlformats.org/drawingml/2006/main">
               <a:ext uri="{FF2B5EF4-FFF2-40B4-BE49-F238E27FC236}">
-                <a16:creationId xmlns:a16="http://schemas.microsoft.com/office/drawing/2014/main" id="{9B166E74-7BE4-42D0-804E-2CB35B77A5EF}"/>
+                <a16:creationId xmlns:a16="http://schemas.microsoft.com/office/drawing/2014/main" id="{8B1A2C65-4CA3-4BC4-B605-05D7ECF04894}"/>
               </a:ext>
             </a:extLst>
           </p:cNvPr>
@@ -16815,7 +16815,7 @@
           <p:cNvPr id="21" name="">
             <a:extLst xmlns:a="http://schemas.openxmlformats.org/drawingml/2006/main">
               <a:ext uri="{FF2B5EF4-FFF2-40B4-BE49-F238E27FC236}">
-                <a16:creationId xmlns:a16="http://schemas.microsoft.com/office/drawing/2014/main" id="{90FEA1BC-D6CD-4C96-B95A-42A7EB7BC7EF}"/>
+                <a16:creationId xmlns:a16="http://schemas.microsoft.com/office/drawing/2014/main" id="{B094F70A-C3C0-4DB3-A1C2-35DDA40B5DC0}"/>
               </a:ext>
             </a:extLst>
           </p:cNvPr>
@@ -16879,7 +16879,7 @@
           <p:cNvPr id="22" name="">
             <a:extLst xmlns:a="http://schemas.openxmlformats.org/drawingml/2006/main">
               <a:ext uri="{FF2B5EF4-FFF2-40B4-BE49-F238E27FC236}">
-                <a16:creationId xmlns:a16="http://schemas.microsoft.com/office/drawing/2014/main" id="{083560F1-BE2A-42F7-8B34-1387E9EAC015}"/>
+                <a16:creationId xmlns:a16="http://schemas.microsoft.com/office/drawing/2014/main" id="{66F8C6B1-CE8C-4169-9DA7-74B8FE27B295}"/>
               </a:ext>
             </a:extLst>
           </p:cNvPr>
@@ -16912,7 +16912,7 @@
           <p:cNvPr id="23" name="">
             <a:extLst xmlns:a="http://schemas.openxmlformats.org/drawingml/2006/main">
               <a:ext uri="{FF2B5EF4-FFF2-40B4-BE49-F238E27FC236}">
-                <a16:creationId xmlns:a16="http://schemas.microsoft.com/office/drawing/2014/main" id="{DD88C060-61FD-4C3F-B54E-319FCA735A1C}"/>
+                <a16:creationId xmlns:a16="http://schemas.microsoft.com/office/drawing/2014/main" id="{552387F2-79F4-49E0-AF12-801DEB30937C}"/>
               </a:ext>
             </a:extLst>
           </p:cNvPr>
@@ -16947,7 +16947,7 @@
           <p:cNvPr id="24" name="">
             <a:extLst xmlns:a="http://schemas.openxmlformats.org/drawingml/2006/main">
               <a:ext uri="{FF2B5EF4-FFF2-40B4-BE49-F238E27FC236}">
-                <a16:creationId xmlns:a16="http://schemas.microsoft.com/office/drawing/2014/main" id="{068C7D1C-D18B-4662-8386-4DF2A4361789}"/>
+                <a16:creationId xmlns:a16="http://schemas.microsoft.com/office/drawing/2014/main" id="{EC3F67D4-7768-4548-B1CD-E2CB24D46263}"/>
               </a:ext>
             </a:extLst>
           </p:cNvPr>
@@ -17011,7 +17011,7 @@
           <p:cNvPr id="25" name="">
             <a:extLst xmlns:a="http://schemas.openxmlformats.org/drawingml/2006/main">
               <a:ext uri="{FF2B5EF4-FFF2-40B4-BE49-F238E27FC236}">
-                <a16:creationId xmlns:a16="http://schemas.microsoft.com/office/drawing/2014/main" id="{3B217E73-8DB5-48C8-88C1-06707D968D8A}"/>
+                <a16:creationId xmlns:a16="http://schemas.microsoft.com/office/drawing/2014/main" id="{1202AEEF-F8D1-4EDA-A2EF-86B3BA016855}"/>
               </a:ext>
             </a:extLst>
           </p:cNvPr>
@@ -17075,7 +17075,7 @@
           <p:cNvPr id="26" name="">
             <a:extLst xmlns:a="http://schemas.openxmlformats.org/drawingml/2006/main">
               <a:ext uri="{FF2B5EF4-FFF2-40B4-BE49-F238E27FC236}">
-                <a16:creationId xmlns:a16="http://schemas.microsoft.com/office/drawing/2014/main" id="{6B331B08-159F-4A87-9F00-FBC25EA1C8F8}"/>
+                <a16:creationId xmlns:a16="http://schemas.microsoft.com/office/drawing/2014/main" id="{536F1656-BA52-4B03-BBF8-D1049AA0662A}"/>
               </a:ext>
             </a:extLst>
           </p:cNvPr>
@@ -17108,7 +17108,7 @@
           <p:cNvPr id="27" name="">
             <a:extLst xmlns:a="http://schemas.openxmlformats.org/drawingml/2006/main">
               <a:ext uri="{FF2B5EF4-FFF2-40B4-BE49-F238E27FC236}">
-                <a16:creationId xmlns:a16="http://schemas.microsoft.com/office/drawing/2014/main" id="{F1E06610-B75F-4EA4-ACF3-D5A7E8DDDC6E}"/>
+                <a16:creationId xmlns:a16="http://schemas.microsoft.com/office/drawing/2014/main" id="{61B1DDF8-4AB7-4953-97DA-1FA9B0C57497}"/>
               </a:ext>
             </a:extLst>
           </p:cNvPr>
@@ -17143,7 +17143,7 @@
           <p:cNvPr id="28" name="">
             <a:extLst xmlns:a="http://schemas.openxmlformats.org/drawingml/2006/main">
               <a:ext uri="{FF2B5EF4-FFF2-40B4-BE49-F238E27FC236}">
-                <a16:creationId xmlns:a16="http://schemas.microsoft.com/office/drawing/2014/main" id="{A0234F08-E67D-4CA8-A8AA-DBCE4DB5E59C}"/>
+                <a16:creationId xmlns:a16="http://schemas.microsoft.com/office/drawing/2014/main" id="{450B2F4D-3C52-4AA3-B990-64E0C9E4D58B}"/>
               </a:ext>
             </a:extLst>
           </p:cNvPr>
@@ -17207,7 +17207,7 @@
           <p:cNvPr id="29" name="">
             <a:extLst xmlns:a="http://schemas.openxmlformats.org/drawingml/2006/main">
               <a:ext uri="{FF2B5EF4-FFF2-40B4-BE49-F238E27FC236}">
-                <a16:creationId xmlns:a16="http://schemas.microsoft.com/office/drawing/2014/main" id="{36844F5B-2542-4F3B-9757-42E277FD2BFF}"/>
+                <a16:creationId xmlns:a16="http://schemas.microsoft.com/office/drawing/2014/main" id="{AB9C86C2-9989-4D0F-803C-01531C488D7C}"/>
               </a:ext>
             </a:extLst>
           </p:cNvPr>
@@ -17271,7 +17271,7 @@
           <p:cNvPr id="30" name="">
             <a:extLst xmlns:a="http://schemas.openxmlformats.org/drawingml/2006/main">
               <a:ext uri="{FF2B5EF4-FFF2-40B4-BE49-F238E27FC236}">
-                <a16:creationId xmlns:a16="http://schemas.microsoft.com/office/drawing/2014/main" id="{A193B71F-C871-47A0-99FD-82E596B58D08}"/>
+                <a16:creationId xmlns:a16="http://schemas.microsoft.com/office/drawing/2014/main" id="{D0438CA8-CE92-4347-ADF0-EA703F5A5BD7}"/>
               </a:ext>
             </a:extLst>
           </p:cNvPr>
@@ -17304,7 +17304,7 @@
           <p:cNvPr id="31" name="">
             <a:extLst xmlns:a="http://schemas.openxmlformats.org/drawingml/2006/main">
               <a:ext uri="{FF2B5EF4-FFF2-40B4-BE49-F238E27FC236}">
-                <a16:creationId xmlns:a16="http://schemas.microsoft.com/office/drawing/2014/main" id="{59C0307D-2F0F-4134-939B-131530C33F58}"/>
+                <a16:creationId xmlns:a16="http://schemas.microsoft.com/office/drawing/2014/main" id="{5F6A9E6C-C11A-4023-9D56-BB9C7CAF8F64}"/>
               </a:ext>
             </a:extLst>
           </p:cNvPr>
@@ -17339,7 +17339,7 @@
           <p:cNvPr id="32" name="">
             <a:extLst xmlns:a="http://schemas.openxmlformats.org/drawingml/2006/main">
               <a:ext uri="{FF2B5EF4-FFF2-40B4-BE49-F238E27FC236}">
-                <a16:creationId xmlns:a16="http://schemas.microsoft.com/office/drawing/2014/main" id="{267699EB-1ECE-441A-9669-30069EE06317}"/>
+                <a16:creationId xmlns:a16="http://schemas.microsoft.com/office/drawing/2014/main" id="{C4E8D132-B55E-4500-8B2D-CAB09A9B5E8C}"/>
               </a:ext>
             </a:extLst>
           </p:cNvPr>
@@ -17403,7 +17403,7 @@
           <p:cNvPr id="33" name="">
             <a:extLst xmlns:a="http://schemas.openxmlformats.org/drawingml/2006/main">
               <a:ext uri="{FF2B5EF4-FFF2-40B4-BE49-F238E27FC236}">
-                <a16:creationId xmlns:a16="http://schemas.microsoft.com/office/drawing/2014/main" id="{880B6C96-D10E-4835-ADC6-B555D4EA25CE}"/>
+                <a16:creationId xmlns:a16="http://schemas.microsoft.com/office/drawing/2014/main" id="{64053FF1-91E9-48C0-90C8-E6F56384D558}"/>
               </a:ext>
             </a:extLst>
           </p:cNvPr>
@@ -17467,7 +17467,7 @@
           <p:cNvPr id="34" name="">
             <a:extLst xmlns:a="http://schemas.openxmlformats.org/drawingml/2006/main">
               <a:ext uri="{FF2B5EF4-FFF2-40B4-BE49-F238E27FC236}">
-                <a16:creationId xmlns:a16="http://schemas.microsoft.com/office/drawing/2014/main" id="{6FE80DE1-E491-4F79-BDBE-3D599B0D4C30}"/>
+                <a16:creationId xmlns:a16="http://schemas.microsoft.com/office/drawing/2014/main" id="{0CA3C7E3-581C-4B03-BBE6-1868E760C554}"/>
               </a:ext>
             </a:extLst>
           </p:cNvPr>
@@ -17531,7 +17531,7 @@
           <p:cNvPr id="35" name="">
             <a:extLst xmlns:a="http://schemas.openxmlformats.org/drawingml/2006/main">
               <a:ext uri="{FF2B5EF4-FFF2-40B4-BE49-F238E27FC236}">
-                <a16:creationId xmlns:a16="http://schemas.microsoft.com/office/drawing/2014/main" id="{2676007D-CA3D-4051-A0A9-2A740A8A10F8}"/>
+                <a16:creationId xmlns:a16="http://schemas.microsoft.com/office/drawing/2014/main" id="{69272C6C-FC09-4476-8D87-9626050E3630}"/>
               </a:ext>
             </a:extLst>
           </p:cNvPr>
@@ -17564,7 +17564,7 @@
           <p:cNvPr id="36" name="">
             <a:extLst xmlns:a="http://schemas.openxmlformats.org/drawingml/2006/main">
               <a:ext uri="{FF2B5EF4-FFF2-40B4-BE49-F238E27FC236}">
-                <a16:creationId xmlns:a16="http://schemas.microsoft.com/office/drawing/2014/main" id="{15140188-2742-49F9-ABC2-D3B88C1FF0C0}"/>
+                <a16:creationId xmlns:a16="http://schemas.microsoft.com/office/drawing/2014/main" id="{5CAF0759-7BD0-47DC-86A1-38C33FBFD44D}"/>
               </a:ext>
             </a:extLst>
           </p:cNvPr>
@@ -17628,7 +17628,7 @@
           <p:cNvPr id="37" name="">
             <a:extLst xmlns:a="http://schemas.openxmlformats.org/drawingml/2006/main">
               <a:ext uri="{FF2B5EF4-FFF2-40B4-BE49-F238E27FC236}">
-                <a16:creationId xmlns:a16="http://schemas.microsoft.com/office/drawing/2014/main" id="{78D6FD2A-FE8B-419F-B360-F1EEC10B5C20}"/>
+                <a16:creationId xmlns:a16="http://schemas.microsoft.com/office/drawing/2014/main" id="{3E895CEE-EF1C-46E0-AD6D-99B7BB0AC1EA}"/>
               </a:ext>
             </a:extLst>
           </p:cNvPr>
@@ -17690,7 +17690,7 @@
     </p:spTree>
     <p:extLst>
       <p:ext uri="{BB962C8B-B14F-4D97-AF65-F5344CB8AC3E}">
-        <p14:creationId xmlns:p14="http://schemas.microsoft.com/office/powerpoint/2010/main" val="1935402461"/>
+        <p14:creationId xmlns:p14="http://schemas.microsoft.com/office/powerpoint/2010/main" val="1139254283"/>
       </p:ext>
     </p:extLst>
   </p:cSld>
